--- a/output/Bonus_Plan_FINAL.pptx
+++ b/output/Bonus_Plan_FINAL.pptx
@@ -4054,7 +4054,7 @@
                           </a:solidFill>
                           <a:latin typeface="Calibri"/>
                         </a:rPr>
-                        <a:t>$729</a:t>
+                        <a:t>$825</a:t>
                       </a:r>
                     </a:p>
                   </a:txBody>
@@ -4194,7 +4194,7 @@
                           </a:solidFill>
                           <a:latin typeface="Calibri"/>
                         </a:rPr>
-                        <a:t>$842</a:t>
+                        <a:t>$938</a:t>
                       </a:r>
                     </a:p>
                   </a:txBody>
@@ -5220,7 +5220,7 @@
                 </a:solidFill>
                 <a:latin typeface="Calibri"/>
               </a:rPr>
-              <a:t>  NB +$0/pol x 43% = $0</a:t>
+              <a:t>  NB +$2/pol x 43% = $33</a:t>
             </a:r>
           </a:p>
         </p:txBody>
@@ -5258,7 +5258,7 @@
                 </a:solidFill>
                 <a:latin typeface="Calibri"/>
               </a:rPr>
-              <a:t>  REN +$3/pol x 14% = $3</a:t>
+              <a:t>  REN +$5/pol x 14% = $5</a:t>
             </a:r>
           </a:p>
         </p:txBody>
@@ -5296,7 +5296,7 @@
                 </a:solidFill>
                 <a:latin typeface="Calibri"/>
               </a:rPr>
-              <a:t>  RWR +$0/pol x 44% = $0</a:t>
+              <a:t>  RWR +$2/pol x 44% = $61</a:t>
             </a:r>
           </a:p>
         </p:txBody>
@@ -5372,7 +5372,7 @@
                 </a:solidFill>
                 <a:latin typeface="Calibri"/>
               </a:rPr>
-              <a:t>TARGET TOTAL = $729</a:t>
+              <a:t>TARGET TOTAL = $825</a:t>
             </a:r>
           </a:p>
         </p:txBody>
@@ -5562,7 +5562,7 @@
                 </a:solidFill>
                 <a:latin typeface="Calibri"/>
               </a:rPr>
-              <a:t>PAID = $729</a:t>
+              <a:t>PAID = $825</a:t>
             </a:r>
           </a:p>
         </p:txBody>
@@ -6068,7 +6068,7 @@
                 </a:solidFill>
                 <a:latin typeface="Calibri"/>
               </a:rPr>
-              <a:t>  NB +$0/pol x 43% = $0</a:t>
+              <a:t>  NB +$2/pol x 43% = $33</a:t>
             </a:r>
           </a:p>
         </p:txBody>
@@ -6106,7 +6106,7 @@
                 </a:solidFill>
                 <a:latin typeface="Calibri"/>
               </a:rPr>
-              <a:t>  REN +$0/pol x 40% = $0</a:t>
+              <a:t>  REN +$2/pol x 40% = $33</a:t>
             </a:r>
           </a:p>
         </p:txBody>
@@ -6144,7 +6144,7 @@
                 </a:solidFill>
                 <a:latin typeface="Calibri"/>
               </a:rPr>
-              <a:t>  RWR +$0/pol x 43% = $0</a:t>
+              <a:t>  RWR +$2/pol x 43% = $30</a:t>
             </a:r>
           </a:p>
         </p:txBody>
@@ -6220,7 +6220,7 @@
                 </a:solidFill>
                 <a:latin typeface="Calibri"/>
               </a:rPr>
-              <a:t>TARGET TOTAL = $842</a:t>
+              <a:t>TARGET TOTAL = $938</a:t>
             </a:r>
           </a:p>
         </p:txBody>
@@ -6410,7 +6410,7 @@
                 </a:solidFill>
                 <a:latin typeface="Calibri"/>
               </a:rPr>
-              <a:t>PAID = $842</a:t>
+              <a:t>PAID = $938</a:t>
             </a:r>
           </a:p>
         </p:txBody>
@@ -6916,7 +6916,7 @@
                 </a:solidFill>
                 <a:latin typeface="Calibri"/>
               </a:rPr>
-              <a:t>  NB +$0/pol x 43% = $0</a:t>
+              <a:t>  NB +$2/pol x 43% = $33</a:t>
             </a:r>
           </a:p>
         </p:txBody>
@@ -6954,7 +6954,7 @@
                 </a:solidFill>
                 <a:latin typeface="Calibri"/>
               </a:rPr>
-              <a:t>  REN +$0/pol x 44% = $0</a:t>
+              <a:t>  REN +$2/pol x 44% = $61</a:t>
             </a:r>
           </a:p>
         </p:txBody>
@@ -6992,7 +6992,7 @@
                 </a:solidFill>
                 <a:latin typeface="Calibri"/>
               </a:rPr>
-              <a:t>  RWR +$3/pol x 14% = $3</a:t>
+              <a:t>  RWR +$5/pol x 14% = $5</a:t>
             </a:r>
           </a:p>
         </p:txBody>
@@ -7068,7 +7068,7 @@
                 </a:solidFill>
                 <a:latin typeface="Calibri"/>
               </a:rPr>
-              <a:t>TARGET TOTAL = $922</a:t>
+              <a:t>TARGET TOTAL = $1018</a:t>
             </a:r>
           </a:p>
         </p:txBody>
@@ -7258,7 +7258,7 @@
                 </a:solidFill>
                 <a:latin typeface="Calibri"/>
               </a:rPr>
-              <a:t>PAID = $922</a:t>
+              <a:t>PAID = $1018</a:t>
             </a:r>
           </a:p>
         </p:txBody>
@@ -8089,7 +8089,7 @@
                           </a:solidFill>
                           <a:latin typeface="Calibri"/>
                         </a:rPr>
-                        <a:t>$261</a:t>
+                        <a:t>$263</a:t>
                       </a:r>
                     </a:p>
                   </a:txBody>
@@ -8344,7 +8344,7 @@
                           </a:solidFill>
                           <a:latin typeface="Calibri"/>
                         </a:rPr>
-                        <a:t>$253</a:t>
+                        <a:t>$255</a:t>
                       </a:r>
                     </a:p>
                   </a:txBody>
@@ -8599,7 +8599,7 @@
                           </a:solidFill>
                           <a:latin typeface="Calibri"/>
                         </a:rPr>
-                        <a:t>$507</a:t>
+                        <a:t>$525</a:t>
                       </a:r>
                     </a:p>
                   </a:txBody>
@@ -8854,7 +8854,7 @@
                           </a:solidFill>
                           <a:latin typeface="Calibri"/>
                         </a:rPr>
-                        <a:t>$280</a:t>
+                        <a:t>$286</a:t>
                       </a:r>
                     </a:p>
                   </a:txBody>
@@ -9109,7 +9109,7 @@
                           </a:solidFill>
                           <a:latin typeface="Calibri"/>
                         </a:rPr>
-                        <a:t>$1301</a:t>
+                        <a:t>$1329</a:t>
                       </a:r>
                     </a:p>
                   </a:txBody>
@@ -9692,7 +9692,7 @@
                           </a:solidFill>
                           <a:latin typeface="Calibri"/>
                         </a:rPr>
-                        <a:t>$327</a:t>
+                        <a:t>$339</a:t>
                       </a:r>
                     </a:p>
                   </a:txBody>
@@ -9947,7 +9947,7 @@
                           </a:solidFill>
                           <a:latin typeface="Calibri"/>
                         </a:rPr>
-                        <a:t>$327</a:t>
+                        <a:t>$334</a:t>
                       </a:r>
                     </a:p>
                   </a:txBody>
@@ -10202,7 +10202,7 @@
                           </a:solidFill>
                           <a:latin typeface="Calibri"/>
                         </a:rPr>
-                        <a:t>$550</a:t>
+                        <a:t>$572</a:t>
                       </a:r>
                     </a:p>
                   </a:txBody>
@@ -10457,7 +10457,7 @@
                           </a:solidFill>
                           <a:latin typeface="Calibri"/>
                         </a:rPr>
-                        <a:t>$316</a:t>
+                        <a:t>$326</a:t>
                       </a:r>
                     </a:p>
                   </a:txBody>
@@ -10712,7 +10712,7 @@
                           </a:solidFill>
                           <a:latin typeface="Calibri"/>
                         </a:rPr>
-                        <a:t>$1519</a:t>
+                        <a:t>$1571</a:t>
                       </a:r>
                     </a:p>
                   </a:txBody>
@@ -11295,7 +11295,7 @@
                           </a:solidFill>
                           <a:latin typeface="Calibri"/>
                         </a:rPr>
-                        <a:t>$327</a:t>
+                        <a:t>$346</a:t>
                       </a:r>
                     </a:p>
                   </a:txBody>
@@ -11805,7 +11805,7 @@
                           </a:solidFill>
                           <a:latin typeface="Calibri"/>
                         </a:rPr>
-                        <a:t>$548</a:t>
+                        <a:t>$566</a:t>
                       </a:r>
                     </a:p>
                   </a:txBody>
@@ -12060,7 +12060,7 @@
                           </a:solidFill>
                           <a:latin typeface="Calibri"/>
                         </a:rPr>
-                        <a:t>$292</a:t>
+                        <a:t>$303</a:t>
                       </a:r>
                     </a:p>
                   </a:txBody>
@@ -12315,7 +12315,7 @@
                           </a:solidFill>
                           <a:latin typeface="Calibri"/>
                         </a:rPr>
-                        <a:t>$1506</a:t>
+                        <a:t>$1554</a:t>
                       </a:r>
                     </a:p>
                   </a:txBody>
@@ -12363,7 +12363,7 @@
                 </a:solidFill>
                 <a:latin typeface="Calibri"/>
               </a:rPr>
-              <a:t>Today's current plan pays $1,300. Plan B WITH MIN: REAL $1,301 | SWAP $1,519 | FLIP $1,506.</a:t>
+              <a:t>Today's current plan pays $1,300. Plan B WITH MIN: REAL $1,329 | SWAP $1,571 | FLIP $1,554.</a:t>
             </a:r>
           </a:p>
         </p:txBody>
@@ -13194,7 +13194,7 @@
                           </a:solidFill>
                           <a:latin typeface="Calibri"/>
                         </a:rPr>
-                        <a:t>$276</a:t>
+                        <a:t>$285</a:t>
                       </a:r>
                     </a:p>
                   </a:txBody>
@@ -13449,7 +13449,7 @@
                           </a:solidFill>
                           <a:latin typeface="Calibri"/>
                         </a:rPr>
-                        <a:t>$279</a:t>
+                        <a:t>$282</a:t>
                       </a:r>
                     </a:p>
                   </a:txBody>
@@ -13704,7 +13704,7 @@
                           </a:solidFill>
                           <a:latin typeface="Calibri"/>
                         </a:rPr>
-                        <a:t>$729</a:t>
+                        <a:t>$825</a:t>
                       </a:r>
                     </a:p>
                   </a:txBody>
@@ -13959,7 +13959,7 @@
                           </a:solidFill>
                           <a:latin typeface="Calibri"/>
                         </a:rPr>
-                        <a:t>$650</a:t>
+                        <a:t>$732</a:t>
                       </a:r>
                     </a:p>
                   </a:txBody>
@@ -14214,7 +14214,7 @@
                           </a:solidFill>
                           <a:latin typeface="Calibri"/>
                         </a:rPr>
-                        <a:t>$1933</a:t>
+                        <a:t>$2124</a:t>
                       </a:r>
                     </a:p>
                   </a:txBody>
@@ -14797,7 +14797,7 @@
                           </a:solidFill>
                           <a:latin typeface="Calibri"/>
                         </a:rPr>
-                        <a:t>$435</a:t>
+                        <a:t>$462</a:t>
                       </a:r>
                     </a:p>
                   </a:txBody>
@@ -15052,7 +15052,7 @@
                           </a:solidFill>
                           <a:latin typeface="Calibri"/>
                         </a:rPr>
-                        <a:t>$447</a:t>
+                        <a:t>$465</a:t>
                       </a:r>
                     </a:p>
                   </a:txBody>
@@ -15307,7 +15307,7 @@
                           </a:solidFill>
                           <a:latin typeface="Calibri"/>
                         </a:rPr>
-                        <a:t>$842</a:t>
+                        <a:t>$938</a:t>
                       </a:r>
                     </a:p>
                   </a:txBody>
@@ -15562,7 +15562,7 @@
                           </a:solidFill>
                           <a:latin typeface="Calibri"/>
                         </a:rPr>
-                        <a:t>$735</a:t>
+                        <a:t>$824</a:t>
                       </a:r>
                     </a:p>
                   </a:txBody>
@@ -15817,7 +15817,7 @@
                           </a:solidFill>
                           <a:latin typeface="Calibri"/>
                         </a:rPr>
-                        <a:t>$2459</a:t>
+                        <a:t>$2689</a:t>
                       </a:r>
                     </a:p>
                   </a:txBody>
@@ -16400,7 +16400,7 @@
                           </a:solidFill>
                           <a:latin typeface="Calibri"/>
                         </a:rPr>
-                        <a:t>$513</a:t>
+                        <a:t>$533</a:t>
                       </a:r>
                     </a:p>
                   </a:txBody>
@@ -16655,7 +16655,7 @@
                           </a:solidFill>
                           <a:latin typeface="Calibri"/>
                         </a:rPr>
-                        <a:t>$561</a:t>
+                        <a:t>$590</a:t>
                       </a:r>
                     </a:p>
                   </a:txBody>
@@ -16910,7 +16910,7 @@
                           </a:solidFill>
                           <a:latin typeface="Calibri"/>
                         </a:rPr>
-                        <a:t>$922</a:t>
+                        <a:t>$1018</a:t>
                       </a:r>
                     </a:p>
                   </a:txBody>
@@ -17165,7 +17165,7 @@
                           </a:solidFill>
                           <a:latin typeface="Calibri"/>
                         </a:rPr>
-                        <a:t>$770</a:t>
+                        <a:t>$852</a:t>
                       </a:r>
                     </a:p>
                   </a:txBody>
@@ -17420,7 +17420,7 @@
                           </a:solidFill>
                           <a:latin typeface="Calibri"/>
                         </a:rPr>
-                        <a:t>$2766</a:t>
+                        <a:t>$2993</a:t>
                       </a:r>
                     </a:p>
                   </a:txBody>
@@ -17468,7 +17468,7 @@
                 </a:solidFill>
                 <a:latin typeface="Calibri"/>
               </a:rPr>
-              <a:t>Today's current plan pays $3,140. Plan B WITH MIN: REAL $1,933 | SWAP $2,459 | FLIP $2,766.</a:t>
+              <a:t>Today's current plan pays $3,140. Plan B WITH MIN: REAL $2,124 | SWAP $2,689 | FLIP $2,993.</a:t>
             </a:r>
           </a:p>
         </p:txBody>
@@ -19902,7 +19902,7 @@
                           </a:solidFill>
                           <a:latin typeface="Calibri"/>
                         </a:rPr>
-                        <a:t>$369</a:t>
+                        <a:t>$379</a:t>
                       </a:r>
                     </a:p>
                   </a:txBody>
@@ -20412,7 +20412,7 @@
                           </a:solidFill>
                           <a:latin typeface="Calibri"/>
                         </a:rPr>
-                        <a:t>$325</a:t>
+                        <a:t>$333</a:t>
                       </a:r>
                     </a:p>
                   </a:txBody>
@@ -20667,7 +20667,7 @@
                           </a:solidFill>
                           <a:latin typeface="Calibri"/>
                         </a:rPr>
-                        <a:t>$333</a:t>
+                        <a:t>$339</a:t>
                       </a:r>
                     </a:p>
                   </a:txBody>
@@ -20922,7 +20922,7 @@
                           </a:solidFill>
                           <a:latin typeface="Calibri"/>
                         </a:rPr>
-                        <a:t>$1366</a:t>
+                        <a:t>$1390</a:t>
                       </a:r>
                     </a:p>
                   </a:txBody>
@@ -21505,7 +21505,7 @@
                           </a:solidFill>
                           <a:latin typeface="Calibri"/>
                         </a:rPr>
-                        <a:t>$513</a:t>
+                        <a:t>$532</a:t>
                       </a:r>
                     </a:p>
                   </a:txBody>
@@ -22015,7 +22015,7 @@
                           </a:solidFill>
                           <a:latin typeface="Calibri"/>
                         </a:rPr>
-                        <a:t>$417</a:t>
+                        <a:t>$433</a:t>
                       </a:r>
                     </a:p>
                   </a:txBody>
@@ -22270,7 +22270,7 @@
                           </a:solidFill>
                           <a:latin typeface="Calibri"/>
                         </a:rPr>
-                        <a:t>$373</a:t>
+                        <a:t>$385</a:t>
                       </a:r>
                     </a:p>
                   </a:txBody>
@@ -22525,7 +22525,7 @@
                           </a:solidFill>
                           <a:latin typeface="Calibri"/>
                         </a:rPr>
-                        <a:t>$1750</a:t>
+                        <a:t>$1797</a:t>
                       </a:r>
                     </a:p>
                   </a:txBody>
@@ -22573,7 +22573,7 @@
                 </a:solidFill>
                 <a:latin typeface="Calibri"/>
               </a:rPr>
-              <a:t>Today's current plan pays $2,370. Plan B WITH MIN: REAL $908 | SWAP $1,366 | FLIP $1,750.</a:t>
+              <a:t>Today's current plan pays $2,370. Plan B WITH MIN: REAL $908 | SWAP $1,390 | FLIP $1,797.</a:t>
             </a:r>
           </a:p>
         </p:txBody>
@@ -23404,7 +23404,7 @@
                           </a:solidFill>
                           <a:latin typeface="Calibri"/>
                         </a:rPr>
-                        <a:t>$231</a:t>
+                        <a:t>$232</a:t>
                       </a:r>
                     </a:p>
                   </a:txBody>
@@ -24424,7 +24424,7 @@
                           </a:solidFill>
                           <a:latin typeface="Calibri"/>
                         </a:rPr>
-                        <a:t>$919</a:t>
+                        <a:t>$921</a:t>
                       </a:r>
                     </a:p>
                   </a:txBody>
@@ -25007,7 +25007,7 @@
                           </a:solidFill>
                           <a:latin typeface="Calibri"/>
                         </a:rPr>
-                        <a:t>$301</a:t>
+                        <a:t>$312</a:t>
                       </a:r>
                     </a:p>
                   </a:txBody>
@@ -25262,7 +25262,7 @@
                           </a:solidFill>
                           <a:latin typeface="Calibri"/>
                         </a:rPr>
-                        <a:t>$328</a:t>
+                        <a:t>$345</a:t>
                       </a:r>
                     </a:p>
                   </a:txBody>
@@ -25517,7 +25517,7 @@
                           </a:solidFill>
                           <a:latin typeface="Calibri"/>
                         </a:rPr>
-                        <a:t>$285</a:t>
+                        <a:t>$290</a:t>
                       </a:r>
                     </a:p>
                   </a:txBody>
@@ -25772,7 +25772,7 @@
                           </a:solidFill>
                           <a:latin typeface="Calibri"/>
                         </a:rPr>
-                        <a:t>$300</a:t>
+                        <a:t>$310</a:t>
                       </a:r>
                     </a:p>
                   </a:txBody>
@@ -26027,7 +26027,7 @@
                           </a:solidFill>
                           <a:latin typeface="Calibri"/>
                         </a:rPr>
-                        <a:t>$1214</a:t>
+                        <a:t>$1257</a:t>
                       </a:r>
                     </a:p>
                   </a:txBody>
@@ -26610,7 +26610,7 @@
                           </a:solidFill>
                           <a:latin typeface="Calibri"/>
                         </a:rPr>
-                        <a:t>$365</a:t>
+                        <a:t>$386</a:t>
                       </a:r>
                     </a:p>
                   </a:txBody>
@@ -26865,7 +26865,7 @@
                           </a:solidFill>
                           <a:latin typeface="Calibri"/>
                         </a:rPr>
-                        <a:t>$414</a:t>
+                        <a:t>$444</a:t>
                       </a:r>
                     </a:p>
                   </a:txBody>
@@ -27120,7 +27120,7 @@
                           </a:solidFill>
                           <a:latin typeface="Calibri"/>
                         </a:rPr>
-                        <a:t>$341</a:t>
+                        <a:t>$353</a:t>
                       </a:r>
                     </a:p>
                   </a:txBody>
@@ -27375,7 +27375,7 @@
                           </a:solidFill>
                           <a:latin typeface="Calibri"/>
                         </a:rPr>
-                        <a:t>$363</a:t>
+                        <a:t>$383</a:t>
                       </a:r>
                     </a:p>
                   </a:txBody>
@@ -27630,7 +27630,7 @@
                           </a:solidFill>
                           <a:latin typeface="Calibri"/>
                         </a:rPr>
-                        <a:t>$1482</a:t>
+                        <a:t>$1566</a:t>
                       </a:r>
                     </a:p>
                   </a:txBody>
@@ -27678,7 +27678,7 @@
                 </a:solidFill>
                 <a:latin typeface="Calibri"/>
               </a:rPr>
-              <a:t>Today's current plan pays $2,070. Plan B WITH MIN: REAL $919 | SWAP $1,214 | FLIP $1,482.</a:t>
+              <a:t>Today's current plan pays $2,070. Plan B WITH MIN: REAL $921 | SWAP $1,257 | FLIP $1,566.</a:t>
             </a:r>
           </a:p>
         </p:txBody>
@@ -28509,7 +28509,7 @@
                           </a:solidFill>
                           <a:latin typeface="Calibri"/>
                         </a:rPr>
-                        <a:t>$241</a:t>
+                        <a:t>$242</a:t>
                       </a:r>
                     </a:p>
                   </a:txBody>
@@ -28764,7 +28764,7 @@
                           </a:solidFill>
                           <a:latin typeface="Calibri"/>
                         </a:rPr>
-                        <a:t>$260</a:t>
+                        <a:t>$267</a:t>
                       </a:r>
                     </a:p>
                   </a:txBody>
@@ -29019,7 +29019,7 @@
                           </a:solidFill>
                           <a:latin typeface="Calibri"/>
                         </a:rPr>
-                        <a:t>$251</a:t>
+                        <a:t>$255</a:t>
                       </a:r>
                     </a:p>
                   </a:txBody>
@@ -29274,7 +29274,7 @@
                           </a:solidFill>
                           <a:latin typeface="Calibri"/>
                         </a:rPr>
-                        <a:t>$246</a:t>
+                        <a:t>$248</a:t>
                       </a:r>
                     </a:p>
                   </a:txBody>
@@ -29529,7 +29529,7 @@
                           </a:solidFill>
                           <a:latin typeface="Calibri"/>
                         </a:rPr>
-                        <a:t>$998</a:t>
+                        <a:t>$1012</a:t>
                       </a:r>
                     </a:p>
                   </a:txBody>
@@ -30112,7 +30112,7 @@
                           </a:solidFill>
                           <a:latin typeface="Calibri"/>
                         </a:rPr>
-                        <a:t>$297</a:t>
+                        <a:t>$302</a:t>
                       </a:r>
                     </a:p>
                   </a:txBody>
@@ -30367,7 +30367,7 @@
                           </a:solidFill>
                           <a:latin typeface="Calibri"/>
                         </a:rPr>
-                        <a:t>$340</a:t>
+                        <a:t>$359</a:t>
                       </a:r>
                     </a:p>
                   </a:txBody>
@@ -30622,7 +30622,7 @@
                           </a:solidFill>
                           <a:latin typeface="Calibri"/>
                         </a:rPr>
-                        <a:t>$289</a:t>
+                        <a:t>$296</a:t>
                       </a:r>
                     </a:p>
                   </a:txBody>
@@ -30877,7 +30877,7 @@
                           </a:solidFill>
                           <a:latin typeface="Calibri"/>
                         </a:rPr>
-                        <a:t>$342</a:t>
+                        <a:t>$364</a:t>
                       </a:r>
                     </a:p>
                   </a:txBody>
@@ -31132,7 +31132,7 @@
                           </a:solidFill>
                           <a:latin typeface="Calibri"/>
                         </a:rPr>
-                        <a:t>$1267</a:t>
+                        <a:t>$1321</a:t>
                       </a:r>
                     </a:p>
                   </a:txBody>
@@ -31715,7 +31715,7 @@
                           </a:solidFill>
                           <a:latin typeface="Calibri"/>
                         </a:rPr>
-                        <a:t>$337</a:t>
+                        <a:t>$346</a:t>
                       </a:r>
                     </a:p>
                   </a:txBody>
@@ -31970,7 +31970,7 @@
                           </a:solidFill>
                           <a:latin typeface="Calibri"/>
                         </a:rPr>
-                        <a:t>$321</a:t>
+                        <a:t>$329</a:t>
                       </a:r>
                     </a:p>
                   </a:txBody>
@@ -32225,7 +32225,7 @@
                           </a:solidFill>
                           <a:latin typeface="Calibri"/>
                         </a:rPr>
-                        <a:t>$301</a:t>
+                        <a:t>$310</a:t>
                       </a:r>
                     </a:p>
                   </a:txBody>
@@ -32480,7 +32480,7 @@
                           </a:solidFill>
                           <a:latin typeface="Calibri"/>
                         </a:rPr>
-                        <a:t>$399</a:t>
+                        <a:t>$411</a:t>
                       </a:r>
                     </a:p>
                   </a:txBody>
@@ -32735,7 +32735,7 @@
                           </a:solidFill>
                           <a:latin typeface="Calibri"/>
                         </a:rPr>
-                        <a:t>$1358</a:t>
+                        <a:t>$1397</a:t>
                       </a:r>
                     </a:p>
                   </a:txBody>
@@ -32783,7 +32783,7 @@
                 </a:solidFill>
                 <a:latin typeface="Calibri"/>
               </a:rPr>
-              <a:t>Today's current plan pays $1,400. Plan B WITH MIN: REAL $998 | SWAP $1,267 | FLIP $1,358.</a:t>
+              <a:t>Today's current plan pays $1,400. Plan B WITH MIN: REAL $1,012 | SWAP $1,321 | FLIP $1,397.</a:t>
             </a:r>
           </a:p>
         </p:txBody>
@@ -33614,7 +33614,7 @@
                           </a:solidFill>
                           <a:latin typeface="Calibri"/>
                         </a:rPr>
-                        <a:t>$249</a:t>
+                        <a:t>$252</a:t>
                       </a:r>
                     </a:p>
                   </a:txBody>
@@ -34124,7 +34124,7 @@
                           </a:solidFill>
                           <a:latin typeface="Calibri"/>
                         </a:rPr>
-                        <a:t>$669</a:t>
+                        <a:t>$721</a:t>
                       </a:r>
                     </a:p>
                   </a:txBody>
@@ -34634,7 +34634,7 @@
                           </a:solidFill>
                           <a:latin typeface="Calibri"/>
                         </a:rPr>
-                        <a:t>$1392</a:t>
+                        <a:t>$1447</a:t>
                       </a:r>
                     </a:p>
                   </a:txBody>
@@ -35217,7 +35217,7 @@
                           </a:solidFill>
                           <a:latin typeface="Calibri"/>
                         </a:rPr>
-                        <a:t>$369</a:t>
+                        <a:t>$378</a:t>
                       </a:r>
                     </a:p>
                   </a:txBody>
@@ -35727,7 +35727,7 @@
                           </a:solidFill>
                           <a:latin typeface="Calibri"/>
                         </a:rPr>
-                        <a:t>$711</a:t>
+                        <a:t>$763</a:t>
                       </a:r>
                     </a:p>
                   </a:txBody>
@@ -35982,7 +35982,7 @@
                           </a:solidFill>
                           <a:latin typeface="Calibri"/>
                         </a:rPr>
-                        <a:t>$303</a:t>
+                        <a:t>$310</a:t>
                       </a:r>
                     </a:p>
                   </a:txBody>
@@ -36237,7 +36237,7 @@
                           </a:solidFill>
                           <a:latin typeface="Calibri"/>
                         </a:rPr>
-                        <a:t>$1704</a:t>
+                        <a:t>$1772</a:t>
                       </a:r>
                     </a:p>
                   </a:txBody>
@@ -36820,7 +36820,7 @@
                           </a:solidFill>
                           <a:latin typeface="Calibri"/>
                         </a:rPr>
-                        <a:t>$447</a:t>
+                        <a:t>$462</a:t>
                       </a:r>
                     </a:p>
                   </a:txBody>
@@ -37075,7 +37075,7 @@
                           </a:solidFill>
                           <a:latin typeface="Calibri"/>
                         </a:rPr>
-                        <a:t>$399</a:t>
+                        <a:t>$416</a:t>
                       </a:r>
                     </a:p>
                   </a:txBody>
@@ -37330,7 +37330,7 @@
                           </a:solidFill>
                           <a:latin typeface="Calibri"/>
                         </a:rPr>
-                        <a:t>$753</a:t>
+                        <a:t>$805</a:t>
                       </a:r>
                     </a:p>
                   </a:txBody>
@@ -37585,7 +37585,7 @@
                           </a:solidFill>
                           <a:latin typeface="Calibri"/>
                         </a:rPr>
-                        <a:t>$357</a:t>
+                        <a:t>$382</a:t>
                       </a:r>
                     </a:p>
                   </a:txBody>
@@ -37840,7 +37840,7 @@
                           </a:solidFill>
                           <a:latin typeface="Calibri"/>
                         </a:rPr>
-                        <a:t>$1956</a:t>
+                        <a:t>$2064</a:t>
                       </a:r>
                     </a:p>
                   </a:txBody>
@@ -37888,7 +37888,7 @@
                 </a:solidFill>
                 <a:latin typeface="Calibri"/>
               </a:rPr>
-              <a:t>Today's current plan pays $1,940. Plan B WITH MIN: REAL $1,392 | SWAP $1,704 | FLIP $1,956.</a:t>
+              <a:t>Today's current plan pays $1,940. Plan B WITH MIN: REAL $1,447 | SWAP $1,772 | FLIP $2,064.</a:t>
             </a:r>
           </a:p>
         </p:txBody>
@@ -38447,7 +38447,7 @@
                           </a:solidFill>
                           <a:latin typeface="Calibri"/>
                         </a:rPr>
-                        <a:t>$11,842</a:t>
+                        <a:t>$12,645</a:t>
                       </a:r>
                     </a:p>
                   </a:txBody>
@@ -38470,7 +38470,7 @@
                           </a:solidFill>
                           <a:latin typeface="Calibri"/>
                         </a:rPr>
-                        <a:t>$13,079</a:t>
+                        <a:t>$13,912</a:t>
                       </a:r>
                     </a:p>
                   </a:txBody>
@@ -38493,7 +38493,7 @@
                           </a:solidFill>
                           <a:latin typeface="Calibri"/>
                         </a:rPr>
-                        <a:t>$13,730</a:t>
+                        <a:t>$14,533</a:t>
                       </a:r>
                     </a:p>
                   </a:txBody>
@@ -38564,7 +38564,7 @@
                           </a:solidFill>
                           <a:latin typeface="Calibri"/>
                         </a:rPr>
-                        <a:t>$7,452</a:t>
+                        <a:t>$7,742</a:t>
                       </a:r>
                     </a:p>
                   </a:txBody>
@@ -38587,7 +38587,7 @@
                           </a:solidFill>
                           <a:latin typeface="Calibri"/>
                         </a:rPr>
-                        <a:t>$9,530</a:t>
+                        <a:t>$10,000</a:t>
                       </a:r>
                     </a:p>
                   </a:txBody>
@@ -38610,7 +38610,7 @@
                           </a:solidFill>
                           <a:latin typeface="Calibri"/>
                         </a:rPr>
-                        <a:t>$10,818</a:t>
+                        <a:t>$11,370</a:t>
                       </a:r>
                     </a:p>
                   </a:txBody>
@@ -38681,7 +38681,7 @@
                           </a:solidFill>
                           <a:latin typeface="Calibri"/>
                         </a:rPr>
-                        <a:t>$11,842</a:t>
+                        <a:t>$12,645</a:t>
                       </a:r>
                     </a:p>
                   </a:txBody>
@@ -38704,7 +38704,7 @@
                           </a:solidFill>
                           <a:latin typeface="Calibri"/>
                         </a:rPr>
-                        <a:t>$13,079</a:t>
+                        <a:t>$13,912</a:t>
                       </a:r>
                     </a:p>
                   </a:txBody>
@@ -38727,7 +38727,7 @@
                           </a:solidFill>
                           <a:latin typeface="Calibri"/>
                         </a:rPr>
-                        <a:t>$13,730</a:t>
+                        <a:t>$14,533</a:t>
                       </a:r>
                     </a:p>
                   </a:txBody>
@@ -38798,7 +38798,7 @@
                           </a:solidFill>
                           <a:latin typeface="Calibri"/>
                         </a:rPr>
-                        <a:t>$7,452</a:t>
+                        <a:t>$7,742</a:t>
                       </a:r>
                     </a:p>
                   </a:txBody>
@@ -38821,7 +38821,7 @@
                           </a:solidFill>
                           <a:latin typeface="Calibri"/>
                         </a:rPr>
-                        <a:t>$9,530</a:t>
+                        <a:t>$10,000</a:t>
                       </a:r>
                     </a:p>
                   </a:txBody>
@@ -38844,7 +38844,7 @@
                           </a:solidFill>
                           <a:latin typeface="Calibri"/>
                         </a:rPr>
-                        <a:t>$10,818</a:t>
+                        <a:t>$11,370</a:t>
                       </a:r>
                     </a:p>
                   </a:txBody>
@@ -38973,7 +38973,7 @@
                 </a:solidFill>
                 <a:latin typeface="Calibri"/>
               </a:rPr>
-              <a:t>• Plan B WITH MIN under 100% FLIP = $10,818. Compare to today's current $12,220: agents earn the SAME for doing the RIGHT behavior.</a:t>
+              <a:t>• Plan B WITH MIN under 100% FLIP = $11,370. Compare to today's current $12,220: agents earn the SAME for doing the RIGHT behavior.</a:t>
             </a:r>
           </a:p>
           <a:p>
@@ -38989,7 +38989,7 @@
                 </a:solidFill>
                 <a:latin typeface="Calibri"/>
               </a:rPr>
-              <a:t>• Plan B no-min under FLIP = $13,730, which is ABOVE today's pay. Some headroom if ownership wants to be more generous.</a:t>
+              <a:t>• Plan B no-min under FLIP = $14,533, which is ABOVE today's pay. Some headroom if ownership wants to be more generous.</a:t>
             </a:r>
           </a:p>
           <a:p>
@@ -45248,7 +45248,7 @@
         </p:nvGraphicFramePr>
         <p:xfrm>
           <a:off x="6263640" y="1280160"/>
-          <a:ext cx="5669280" cy="1600200"/>
+          <a:ext cx="5669280" cy="1920240"/>
         </p:xfrm>
         <a:graphic>
           <a:graphicData uri="http://schemas.openxmlformats.org/drawingml/2006/table">
@@ -45322,7 +45322,7 @@
                           </a:solidFill>
                           <a:latin typeface="Calibri"/>
                         </a:rPr>
-                        <a:t>Below 25%</a:t>
+                        <a:t>Below 15%</a:t>
                       </a:r>
                     </a:p>
                   </a:txBody>
@@ -45370,7 +45370,7 @@
                           </a:solidFill>
                           <a:latin typeface="Calibri"/>
                         </a:rPr>
-                        <a:t>25% to 49%</a:t>
+                        <a:t>15% to 19%</a:t>
                       </a:r>
                     </a:p>
                   </a:txBody>
@@ -45393,7 +45393,7 @@
                           </a:solidFill>
                           <a:latin typeface="Calibri"/>
                         </a:rPr>
-                        <a:t>+$2</a:t>
+                        <a:t>+$1</a:t>
                       </a:r>
                     </a:p>
                   </a:txBody>
@@ -45418,7 +45418,7 @@
                           </a:solidFill>
                           <a:latin typeface="Calibri"/>
                         </a:rPr>
-                        <a:t>50% to 99%</a:t>
+                        <a:t>20% to 24%</a:t>
                       </a:r>
                     </a:p>
                   </a:txBody>
@@ -45441,7 +45441,7 @@
                           </a:solidFill>
                           <a:latin typeface="Calibri"/>
                         </a:rPr>
-                        <a:t>+$3</a:t>
+                        <a:t>+$2</a:t>
                       </a:r>
                     </a:p>
                   </a:txBody>
@@ -45466,13 +45466,61 @@
                           </a:solidFill>
                           <a:latin typeface="Calibri"/>
                         </a:rPr>
+                        <a:t>25% to 99%</a:t>
+                      </a:r>
+                    </a:p>
+                  </a:txBody>
+                  <a:tcPr>
+                    <a:solidFill>
+                      <a:srgbClr val="F2F2F2"/>
+                    </a:solidFill>
+                  </a:tcPr>
+                </a:tc>
+                <a:tc>
+                  <a:txBody>
+                    <a:bodyPr lIns="45720" rIns="45720" tIns="18288" bIns="18288" wrap="square" anchor="ctr"/>
+                    <a:lstStyle/>
+                    <a:p>
+                      <a:pPr algn="ctr"/>
+                      <a:r>
+                        <a:rPr sz="1100">
+                          <a:solidFill>
+                            <a:srgbClr val="101010"/>
+                          </a:solidFill>
+                          <a:latin typeface="Calibri"/>
+                        </a:rPr>
+                        <a:t>+$5</a:t>
+                      </a:r>
+                    </a:p>
+                  </a:txBody>
+                  <a:tcPr>
+                    <a:solidFill>
+                      <a:srgbClr val="F2F2F2"/>
+                    </a:solidFill>
+                  </a:tcPr>
+                </a:tc>
+              </a:tr>
+              <a:tr h="320040">
+                <a:tc>
+                  <a:txBody>
+                    <a:bodyPr lIns="45720" rIns="45720" tIns="18288" bIns="18288" wrap="square" anchor="ctr"/>
+                    <a:lstStyle/>
+                    <a:p>
+                      <a:pPr algn="ctr"/>
+                      <a:r>
+                        <a:rPr sz="1100">
+                          <a:solidFill>
+                            <a:srgbClr val="101010"/>
+                          </a:solidFill>
+                          <a:latin typeface="Calibri"/>
+                        </a:rPr>
                         <a:t>100% PIF</a:t>
                       </a:r>
                     </a:p>
                   </a:txBody>
                   <a:tcPr>
                     <a:solidFill>
-                      <a:srgbClr val="F2F2F2"/>
+                      <a:srgbClr val="FFFFFF"/>
                     </a:solidFill>
                   </a:tcPr>
                 </a:tc>
@@ -45489,13 +45537,13 @@
                           </a:solidFill>
                           <a:latin typeface="Calibri"/>
                         </a:rPr>
-                        <a:t>+$5</a:t>
-                      </a:r>
-                    </a:p>
-                  </a:txBody>
-                  <a:tcPr>
-                    <a:solidFill>
-                      <a:srgbClr val="F2F2F2"/>
+                        <a:t>+$8</a:t>
+                      </a:r>
+                    </a:p>
+                  </a:txBody>
+                  <a:tcPr>
+                    <a:solidFill>
+                      <a:srgbClr val="FFFFFF"/>
                     </a:solidFill>
                   </a:tcPr>
                 </a:tc>
@@ -47518,7 +47566,7 @@
                           </a:solidFill>
                           <a:latin typeface="Calibri"/>
                         </a:rPr>
-                        <a:t>Multiplier</a:t>
+                        <a:t>Per-policy kicker</a:t>
                       </a:r>
                     </a:p>
                   </a:txBody>
@@ -47564,7 +47612,7 @@
                           </a:solidFill>
                           <a:latin typeface="Calibri"/>
                         </a:rPr>
-                        <a:t>$10 target -&gt; Pays</a:t>
+                        <a:t>$7 NB base -&gt; Pays</a:t>
                       </a:r>
                     </a:p>
                   </a:txBody>
@@ -47612,7 +47660,7 @@
                           </a:solidFill>
                           <a:latin typeface="Calibri"/>
                         </a:rPr>
-                        <a:t>x 1.00 (none)</a:t>
+                        <a:t>$0 (none)</a:t>
                       </a:r>
                     </a:p>
                   </a:txBody>
@@ -47658,7 +47706,7 @@
                           </a:solidFill>
                           <a:latin typeface="Calibri"/>
                         </a:rPr>
-                        <a:t>$10.00</a:t>
+                        <a:t>$7</a:t>
                       </a:r>
                     </a:p>
                   </a:txBody>
@@ -47683,7 +47731,7 @@
                           </a:solidFill>
                           <a:latin typeface="Calibri"/>
                         </a:rPr>
-                        <a:t>15% - 24%</a:t>
+                        <a:t>15% - 19%</a:t>
                       </a:r>
                     </a:p>
                   </a:txBody>
@@ -47706,7 +47754,7 @@
                           </a:solidFill>
                           <a:latin typeface="Calibri"/>
                         </a:rPr>
-                        <a:t>x 1.10 (+10%)</a:t>
+                        <a:t>+$1</a:t>
                       </a:r>
                     </a:p>
                   </a:txBody>
@@ -47729,7 +47777,7 @@
                           </a:solidFill>
                           <a:latin typeface="Calibri"/>
                         </a:rPr>
-                        <a:t>Minimum down. Small kicker.</a:t>
+                        <a:t>Minimum down. Small bump.</a:t>
                       </a:r>
                     </a:p>
                   </a:txBody>
@@ -47752,7 +47800,7 @@
                           </a:solidFill>
                           <a:latin typeface="Calibri"/>
                         </a:rPr>
-                        <a:t>$11.00</a:t>
+                        <a:t>$7 + $1 = $8</a:t>
                       </a:r>
                     </a:p>
                   </a:txBody>
@@ -47777,7 +47825,7 @@
                           </a:solidFill>
                           <a:latin typeface="Calibri"/>
                         </a:rPr>
-                        <a:t>25% - 49%</a:t>
+                        <a:t>20% - 24%</a:t>
                       </a:r>
                     </a:p>
                   </a:txBody>
@@ -47800,7 +47848,7 @@
                           </a:solidFill>
                           <a:latin typeface="Calibri"/>
                         </a:rPr>
-                        <a:t>x 1.15 (+15%)</a:t>
+                        <a:t>+$2</a:t>
                       </a:r>
                     </a:p>
                   </a:txBody>
@@ -47823,7 +47871,7 @@
                           </a:solidFill>
                           <a:latin typeface="Calibri"/>
                         </a:rPr>
-                        <a:t>Standard down. Standard kicker.</a:t>
+                        <a:t>Standard down.</a:t>
                       </a:r>
                     </a:p>
                   </a:txBody>
@@ -47846,7 +47894,7 @@
                           </a:solidFill>
                           <a:latin typeface="Calibri"/>
                         </a:rPr>
-                        <a:t>$11.50</a:t>
+                        <a:t>$7 + $2 = $9</a:t>
                       </a:r>
                     </a:p>
                   </a:txBody>
@@ -47871,7 +47919,7 @@
                           </a:solidFill>
                           <a:latin typeface="Calibri"/>
                         </a:rPr>
-                        <a:t>50% - 99%</a:t>
+                        <a:t>25% - 99%</a:t>
                       </a:r>
                     </a:p>
                   </a:txBody>
@@ -47894,7 +47942,7 @@
                           </a:solidFill>
                           <a:latin typeface="Calibri"/>
                         </a:rPr>
-                        <a:t>x 1.20 (+20%)</a:t>
+                        <a:t>+$5</a:t>
                       </a:r>
                     </a:p>
                   </a:txBody>
@@ -47917,7 +47965,7 @@
                           </a:solidFill>
                           <a:latin typeface="Calibri"/>
                         </a:rPr>
-                        <a:t>High collection. Stronger kicker.</a:t>
+                        <a:t>High collection. Big bump.</a:t>
                       </a:r>
                     </a:p>
                   </a:txBody>
@@ -47940,7 +47988,7 @@
                           </a:solidFill>
                           <a:latin typeface="Calibri"/>
                         </a:rPr>
-                        <a:t>$12.00</a:t>
+                        <a:t>$7 + $5 = $12</a:t>
                       </a:r>
                     </a:p>
                   </a:txBody>
@@ -47965,7 +48013,7 @@
                           </a:solidFill>
                           <a:latin typeface="Calibri"/>
                         </a:rPr>
-                        <a:t>100% (PIF)</a:t>
+                        <a:t>100% PIF</a:t>
                       </a:r>
                     </a:p>
                   </a:txBody>
@@ -47988,7 +48036,7 @@
                           </a:solidFill>
                           <a:latin typeface="Calibri"/>
                         </a:rPr>
-                        <a:t>x 1.25 (+25%)</a:t>
+                        <a:t>+$8</a:t>
                       </a:r>
                     </a:p>
                   </a:txBody>
@@ -48011,7 +48059,7 @@
                           </a:solidFill>
                           <a:latin typeface="Calibri"/>
                         </a:rPr>
-                        <a:t>Paid in full. Top kicker.</a:t>
+                        <a:t>Paid in full. Top - zero chargeback risk.</a:t>
                       </a:r>
                     </a:p>
                   </a:txBody>
@@ -48034,7 +48082,7 @@
                           </a:solidFill>
                           <a:latin typeface="Calibri"/>
                         </a:rPr>
-                        <a:t>$12.50</a:t>
+                        <a:t>$7 + $8 = $15</a:t>
                       </a:r>
                     </a:p>
                   </a:txBody>

--- a/output/Bonus_Plan_FINAL.pptx
+++ b/output/Bonus_Plan_FINAL.pptx
@@ -4054,7 +4054,7 @@
                           </a:solidFill>
                           <a:latin typeface="Calibri"/>
                         </a:rPr>
-                        <a:t>$825</a:t>
+                        <a:t>$630</a:t>
                       </a:r>
                     </a:p>
                   </a:txBody>
@@ -4194,7 +4194,7 @@
                           </a:solidFill>
                           <a:latin typeface="Calibri"/>
                         </a:rPr>
-                        <a:t>$938</a:t>
+                        <a:t>$983</a:t>
                       </a:r>
                     </a:p>
                   </a:txBody>
@@ -4334,7 +4334,7 @@
                           </a:solidFill>
                           <a:latin typeface="Calibri"/>
                         </a:rPr>
-                        <a:t>+$113 (GOOD)</a:t>
+                        <a:t>+$354 (GOOD)</a:t>
                       </a:r>
                     </a:p>
                   </a:txBody>
@@ -5334,7 +5334,7 @@
                 </a:solidFill>
                 <a:latin typeface="Calibri"/>
               </a:rPr>
-              <a:t>Retention (75% x $300) = $225</a:t>
+              <a:t>Retention (REN $6k x 0.5%) = $30</a:t>
             </a:r>
           </a:p>
         </p:txBody>
@@ -5372,7 +5372,7 @@
                 </a:solidFill>
                 <a:latin typeface="Calibri"/>
               </a:rPr>
-              <a:t>TARGET TOTAL = $825</a:t>
+              <a:t>TARGET TOTAL = $630</a:t>
             </a:r>
           </a:p>
         </p:txBody>
@@ -5562,7 +5562,7 @@
                 </a:solidFill>
                 <a:latin typeface="Calibri"/>
               </a:rPr>
-              <a:t>PAID = $825</a:t>
+              <a:t>PAID = $630</a:t>
             </a:r>
           </a:p>
         </p:txBody>
@@ -6182,7 +6182,7 @@
                 </a:solidFill>
                 <a:latin typeface="Calibri"/>
               </a:rPr>
-              <a:t>Retention (75% x $300) = $225</a:t>
+              <a:t>Retention (REN $54k x 0.5%) = $270</a:t>
             </a:r>
           </a:p>
         </p:txBody>
@@ -6220,7 +6220,7 @@
                 </a:solidFill>
                 <a:latin typeface="Calibri"/>
               </a:rPr>
-              <a:t>TARGET TOTAL = $938</a:t>
+              <a:t>TARGET TOTAL = $983</a:t>
             </a:r>
           </a:p>
         </p:txBody>
@@ -6410,7 +6410,7 @@
                 </a:solidFill>
                 <a:latin typeface="Calibri"/>
               </a:rPr>
-              <a:t>PAID = $938</a:t>
+              <a:t>PAID = $983</a:t>
             </a:r>
           </a:p>
         </p:txBody>
@@ -7030,7 +7030,7 @@
                 </a:solidFill>
                 <a:latin typeface="Calibri"/>
               </a:rPr>
-              <a:t>Retention (75% x $300) = $225</a:t>
+              <a:t>Retention (REN $96k x 0.5%) = $481</a:t>
             </a:r>
           </a:p>
         </p:txBody>
@@ -7068,7 +7068,7 @@
                 </a:solidFill>
                 <a:latin typeface="Calibri"/>
               </a:rPr>
-              <a:t>TARGET TOTAL = $1018</a:t>
+              <a:t>TARGET TOTAL = $1274</a:t>
             </a:r>
           </a:p>
         </p:txBody>
@@ -7258,7 +7258,7 @@
                 </a:solidFill>
                 <a:latin typeface="Calibri"/>
               </a:rPr>
-              <a:t>PAID = $1018</a:t>
+              <a:t>PAID = $1274</a:t>
             </a:r>
           </a:p>
         </p:txBody>
@@ -8089,7 +8089,7 @@
                           </a:solidFill>
                           <a:latin typeface="Calibri"/>
                         </a:rPr>
-                        <a:t>$263</a:t>
+                        <a:t>$76</a:t>
                       </a:r>
                     </a:p>
                   </a:txBody>
@@ -8344,7 +8344,7 @@
                           </a:solidFill>
                           <a:latin typeface="Calibri"/>
                         </a:rPr>
-                        <a:t>$255</a:t>
+                        <a:t>$67</a:t>
                       </a:r>
                     </a:p>
                   </a:txBody>
@@ -8599,7 +8599,7 @@
                           </a:solidFill>
                           <a:latin typeface="Calibri"/>
                         </a:rPr>
-                        <a:t>$525</a:t>
+                        <a:t>$320</a:t>
                       </a:r>
                     </a:p>
                   </a:txBody>
@@ -8854,7 +8854,7 @@
                           </a:solidFill>
                           <a:latin typeface="Calibri"/>
                         </a:rPr>
-                        <a:t>$286</a:t>
+                        <a:t>$115</a:t>
                       </a:r>
                     </a:p>
                   </a:txBody>
@@ -9109,7 +9109,7 @@
                           </a:solidFill>
                           <a:latin typeface="Calibri"/>
                         </a:rPr>
-                        <a:t>$1329</a:t>
+                        <a:t>$579</a:t>
                       </a:r>
                     </a:p>
                   </a:txBody>
@@ -9692,7 +9692,7 @@
                           </a:solidFill>
                           <a:latin typeface="Calibri"/>
                         </a:rPr>
-                        <a:t>$339</a:t>
+                        <a:t>$221</a:t>
                       </a:r>
                     </a:p>
                   </a:txBody>
@@ -9947,7 +9947,7 @@
                           </a:solidFill>
                           <a:latin typeface="Calibri"/>
                         </a:rPr>
-                        <a:t>$334</a:t>
+                        <a:t>$223</a:t>
                       </a:r>
                     </a:p>
                   </a:txBody>
@@ -10202,7 +10202,7 @@
                           </a:solidFill>
                           <a:latin typeface="Calibri"/>
                         </a:rPr>
-                        <a:t>$572</a:t>
+                        <a:t>$430</a:t>
                       </a:r>
                     </a:p>
                   </a:txBody>
@@ -10457,7 +10457,7 @@
                           </a:solidFill>
                           <a:latin typeface="Calibri"/>
                         </a:rPr>
-                        <a:t>$326</a:t>
+                        <a:t>$194</a:t>
                       </a:r>
                     </a:p>
                   </a:txBody>
@@ -10712,7 +10712,7 @@
                           </a:solidFill>
                           <a:latin typeface="Calibri"/>
                         </a:rPr>
-                        <a:t>$1571</a:t>
+                        <a:t>$1068</a:t>
                       </a:r>
                     </a:p>
                   </a:txBody>
@@ -11295,7 +11295,7 @@
                           </a:solidFill>
                           <a:latin typeface="Calibri"/>
                         </a:rPr>
-                        <a:t>$346</a:t>
+                        <a:t>$259</a:t>
                       </a:r>
                     </a:p>
                   </a:txBody>
@@ -11550,7 +11550,7 @@
                           </a:solidFill>
                           <a:latin typeface="Calibri"/>
                         </a:rPr>
-                        <a:t>$339</a:t>
+                        <a:t>$267</a:t>
                       </a:r>
                     </a:p>
                   </a:txBody>
@@ -11805,7 +11805,7 @@
                           </a:solidFill>
                           <a:latin typeface="Calibri"/>
                         </a:rPr>
-                        <a:t>$566</a:t>
+                        <a:t>$467</a:t>
                       </a:r>
                     </a:p>
                   </a:txBody>
@@ -12060,7 +12060,7 @@
                           </a:solidFill>
                           <a:latin typeface="Calibri"/>
                         </a:rPr>
-                        <a:t>$303</a:t>
+                        <a:t>$154</a:t>
                       </a:r>
                     </a:p>
                   </a:txBody>
@@ -12315,7 +12315,7 @@
                           </a:solidFill>
                           <a:latin typeface="Calibri"/>
                         </a:rPr>
-                        <a:t>$1554</a:t>
+                        <a:t>$1148</a:t>
                       </a:r>
                     </a:p>
                   </a:txBody>
@@ -12363,7 +12363,7 @@
                 </a:solidFill>
                 <a:latin typeface="Calibri"/>
               </a:rPr>
-              <a:t>Today's current plan pays $1,300. Plan B WITH MIN: REAL $1,329 | SWAP $1,571 | FLIP $1,554.</a:t>
+              <a:t>Today's current plan pays $1,300. Plan B WITH MIN: REAL $579 | SWAP $1,068 | FLIP $1,148.</a:t>
             </a:r>
           </a:p>
         </p:txBody>
@@ -13194,7 +13194,7 @@
                           </a:solidFill>
                           <a:latin typeface="Calibri"/>
                         </a:rPr>
-                        <a:t>$285</a:t>
+                        <a:t>$123</a:t>
                       </a:r>
                     </a:p>
                   </a:txBody>
@@ -13449,7 +13449,7 @@
                           </a:solidFill>
                           <a:latin typeface="Calibri"/>
                         </a:rPr>
-                        <a:t>$282</a:t>
+                        <a:t>$116</a:t>
                       </a:r>
                     </a:p>
                   </a:txBody>
@@ -13704,7 +13704,7 @@
                           </a:solidFill>
                           <a:latin typeface="Calibri"/>
                         </a:rPr>
-                        <a:t>$825</a:t>
+                        <a:t>$630</a:t>
                       </a:r>
                     </a:p>
                   </a:txBody>
@@ -13959,7 +13959,7 @@
                           </a:solidFill>
                           <a:latin typeface="Calibri"/>
                         </a:rPr>
-                        <a:t>$732</a:t>
+                        <a:t>$604</a:t>
                       </a:r>
                     </a:p>
                   </a:txBody>
@@ -14214,7 +14214,7 @@
                           </a:solidFill>
                           <a:latin typeface="Calibri"/>
                         </a:rPr>
-                        <a:t>$2124</a:t>
+                        <a:t>$1473</a:t>
                       </a:r>
                     </a:p>
                   </a:txBody>
@@ -14797,7 +14797,7 @@
                           </a:solidFill>
                           <a:latin typeface="Calibri"/>
                         </a:rPr>
-                        <a:t>$462</a:t>
+                        <a:t>$464</a:t>
                       </a:r>
                     </a:p>
                   </a:txBody>
@@ -15052,7 +15052,7 @@
                           </a:solidFill>
                           <a:latin typeface="Calibri"/>
                         </a:rPr>
-                        <a:t>$465</a:t>
+                        <a:t>$512</a:t>
                       </a:r>
                     </a:p>
                   </a:txBody>
@@ -15307,7 +15307,7 @@
                           </a:solidFill>
                           <a:latin typeface="Calibri"/>
                         </a:rPr>
-                        <a:t>$938</a:t>
+                        <a:t>$983</a:t>
                       </a:r>
                     </a:p>
                   </a:txBody>
@@ -15562,7 +15562,7 @@
                           </a:solidFill>
                           <a:latin typeface="Calibri"/>
                         </a:rPr>
-                        <a:t>$824</a:t>
+                        <a:t>$858</a:t>
                       </a:r>
                     </a:p>
                   </a:txBody>
@@ -15817,7 +15817,7 @@
                           </a:solidFill>
                           <a:latin typeface="Calibri"/>
                         </a:rPr>
-                        <a:t>$2689</a:t>
+                        <a:t>$2817</a:t>
                       </a:r>
                     </a:p>
                   </a:txBody>
@@ -16400,7 +16400,7 @@
                           </a:solidFill>
                           <a:latin typeface="Calibri"/>
                         </a:rPr>
-                        <a:t>$533</a:t>
+                        <a:t>$637</a:t>
                       </a:r>
                     </a:p>
                   </a:txBody>
@@ -16655,7 +16655,7 @@
                           </a:solidFill>
                           <a:latin typeface="Calibri"/>
                         </a:rPr>
-                        <a:t>$590</a:t>
+                        <a:t>$793</a:t>
                       </a:r>
                     </a:p>
                   </a:txBody>
@@ -16910,7 +16910,7 @@
                           </a:solidFill>
                           <a:latin typeface="Calibri"/>
                         </a:rPr>
-                        <a:t>$1018</a:t>
+                        <a:t>$1274</a:t>
                       </a:r>
                     </a:p>
                   </a:txBody>
@@ -17165,7 +17165,7 @@
                           </a:solidFill>
                           <a:latin typeface="Calibri"/>
                         </a:rPr>
-                        <a:t>$852</a:t>
+                        <a:t>$947</a:t>
                       </a:r>
                     </a:p>
                   </a:txBody>
@@ -17420,7 +17420,7 @@
                           </a:solidFill>
                           <a:latin typeface="Calibri"/>
                         </a:rPr>
-                        <a:t>$2993</a:t>
+                        <a:t>$3651</a:t>
                       </a:r>
                     </a:p>
                   </a:txBody>
@@ -17468,7 +17468,7 @@
                 </a:solidFill>
                 <a:latin typeface="Calibri"/>
               </a:rPr>
-              <a:t>Today's current plan pays $3,140. Plan B WITH MIN: REAL $2,124 | SWAP $2,689 | FLIP $2,993.</a:t>
+              <a:t>Today's current plan pays $3,140. Plan B WITH MIN: REAL $1,473 | SWAP $2,817 | FLIP $3,651.</a:t>
             </a:r>
           </a:p>
         </p:txBody>
@@ -18299,7 +18299,7 @@
                           </a:solidFill>
                           <a:latin typeface="Calibri"/>
                         </a:rPr>
-                        <a:t>$225</a:t>
+                        <a:t>$0</a:t>
                       </a:r>
                     </a:p>
                   </a:txBody>
@@ -18554,7 +18554,7 @@
                           </a:solidFill>
                           <a:latin typeface="Calibri"/>
                         </a:rPr>
-                        <a:t>$229</a:t>
+                        <a:t>$9</a:t>
                       </a:r>
                     </a:p>
                   </a:txBody>
@@ -18809,7 +18809,7 @@
                           </a:solidFill>
                           <a:latin typeface="Calibri"/>
                         </a:rPr>
-                        <a:t>$229</a:t>
+                        <a:t>$9</a:t>
                       </a:r>
                     </a:p>
                   </a:txBody>
@@ -19064,7 +19064,7 @@
                           </a:solidFill>
                           <a:latin typeface="Calibri"/>
                         </a:rPr>
-                        <a:t>$225</a:t>
+                        <a:t>$0</a:t>
                       </a:r>
                     </a:p>
                   </a:txBody>
@@ -19319,7 +19319,7 @@
                           </a:solidFill>
                           <a:latin typeface="Calibri"/>
                         </a:rPr>
-                        <a:t>$908</a:t>
+                        <a:t>$19</a:t>
                       </a:r>
                     </a:p>
                   </a:txBody>
@@ -19902,7 +19902,7 @@
                           </a:solidFill>
                           <a:latin typeface="Calibri"/>
                         </a:rPr>
-                        <a:t>$379</a:t>
+                        <a:t>$312</a:t>
                       </a:r>
                     </a:p>
                   </a:txBody>
@@ -20157,7 +20157,7 @@
                           </a:solidFill>
                           <a:latin typeface="Calibri"/>
                         </a:rPr>
-                        <a:t>$339</a:t>
+                        <a:t>$244</a:t>
                       </a:r>
                     </a:p>
                   </a:txBody>
@@ -20412,7 +20412,7 @@
                           </a:solidFill>
                           <a:latin typeface="Calibri"/>
                         </a:rPr>
-                        <a:t>$333</a:t>
+                        <a:t>$255</a:t>
                       </a:r>
                     </a:p>
                   </a:txBody>
@@ -20667,7 +20667,7 @@
                           </a:solidFill>
                           <a:latin typeface="Calibri"/>
                         </a:rPr>
-                        <a:t>$339</a:t>
+                        <a:t>$223</a:t>
                       </a:r>
                     </a:p>
                   </a:txBody>
@@ -20922,7 +20922,7 @@
                           </a:solidFill>
                           <a:latin typeface="Calibri"/>
                         </a:rPr>
-                        <a:t>$1390</a:t>
+                        <a:t>$1034</a:t>
                       </a:r>
                     </a:p>
                   </a:txBody>
@@ -21505,7 +21505,7 @@
                           </a:solidFill>
                           <a:latin typeface="Calibri"/>
                         </a:rPr>
-                        <a:t>$532</a:t>
+                        <a:t>$624</a:t>
                       </a:r>
                     </a:p>
                   </a:txBody>
@@ -21760,7 +21760,7 @@
                           </a:solidFill>
                           <a:latin typeface="Calibri"/>
                         </a:rPr>
-                        <a:t>$447</a:t>
+                        <a:t>$472</a:t>
                       </a:r>
                     </a:p>
                   </a:txBody>
@@ -22015,7 +22015,7 @@
                           </a:solidFill>
                           <a:latin typeface="Calibri"/>
                         </a:rPr>
-                        <a:t>$433</a:t>
+                        <a:t>$492</a:t>
                       </a:r>
                     </a:p>
                   </a:txBody>
@@ -22270,7 +22270,7 @@
                           </a:solidFill>
                           <a:latin typeface="Calibri"/>
                         </a:rPr>
-                        <a:t>$385</a:t>
+                        <a:t>$377</a:t>
                       </a:r>
                     </a:p>
                   </a:txBody>
@@ -22525,7 +22525,7 @@
                           </a:solidFill>
                           <a:latin typeface="Calibri"/>
                         </a:rPr>
-                        <a:t>$1797</a:t>
+                        <a:t>$1965</a:t>
                       </a:r>
                     </a:p>
                   </a:txBody>
@@ -22573,7 +22573,7 @@
                 </a:solidFill>
                 <a:latin typeface="Calibri"/>
               </a:rPr>
-              <a:t>Today's current plan pays $2,370. Plan B WITH MIN: REAL $908 | SWAP $1,390 | FLIP $1,797.</a:t>
+              <a:t>Today's current plan pays $2,370. Plan B WITH MIN: REAL $19 | SWAP $1,034 | FLIP $1,965.</a:t>
             </a:r>
           </a:p>
         </p:txBody>
@@ -23404,7 +23404,7 @@
                           </a:solidFill>
                           <a:latin typeface="Calibri"/>
                         </a:rPr>
-                        <a:t>$232</a:t>
+                        <a:t>$14</a:t>
                       </a:r>
                     </a:p>
                   </a:txBody>
@@ -23659,7 +23659,7 @@
                           </a:solidFill>
                           <a:latin typeface="Calibri"/>
                         </a:rPr>
-                        <a:t>$233</a:t>
+                        <a:t>$19</a:t>
                       </a:r>
                     </a:p>
                   </a:txBody>
@@ -23914,7 +23914,7 @@
                           </a:solidFill>
                           <a:latin typeface="Calibri"/>
                         </a:rPr>
-                        <a:t>$225</a:t>
+                        <a:t>$0</a:t>
                       </a:r>
                     </a:p>
                   </a:txBody>
@@ -24169,7 +24169,7 @@
                           </a:solidFill>
                           <a:latin typeface="Calibri"/>
                         </a:rPr>
-                        <a:t>$230</a:t>
+                        <a:t>$10</a:t>
                       </a:r>
                     </a:p>
                   </a:txBody>
@@ -24424,7 +24424,7 @@
                           </a:solidFill>
                           <a:latin typeface="Calibri"/>
                         </a:rPr>
-                        <a:t>$921</a:t>
+                        <a:t>$43</a:t>
                       </a:r>
                     </a:p>
                   </a:txBody>
@@ -25007,7 +25007,7 @@
                           </a:solidFill>
                           <a:latin typeface="Calibri"/>
                         </a:rPr>
-                        <a:t>$312</a:t>
+                        <a:t>$193</a:t>
                       </a:r>
                     </a:p>
                   </a:txBody>
@@ -25262,7 +25262,7 @@
                           </a:solidFill>
                           <a:latin typeface="Calibri"/>
                         </a:rPr>
-                        <a:t>$345</a:t>
+                        <a:t>$240</a:t>
                       </a:r>
                     </a:p>
                   </a:txBody>
@@ -25517,7 +25517,7 @@
                           </a:solidFill>
                           <a:latin typeface="Calibri"/>
                         </a:rPr>
-                        <a:t>$290</a:t>
+                        <a:t>$124</a:t>
                       </a:r>
                     </a:p>
                   </a:txBody>
@@ -25772,7 +25772,7 @@
                           </a:solidFill>
                           <a:latin typeface="Calibri"/>
                         </a:rPr>
-                        <a:t>$310</a:t>
+                        <a:t>$166</a:t>
                       </a:r>
                     </a:p>
                   </a:txBody>
@@ -26027,7 +26027,7 @@
                           </a:solidFill>
                           <a:latin typeface="Calibri"/>
                         </a:rPr>
-                        <a:t>$1257</a:t>
+                        <a:t>$724</a:t>
                       </a:r>
                     </a:p>
                   </a:txBody>
@@ -26610,7 +26610,7 @@
                           </a:solidFill>
                           <a:latin typeface="Calibri"/>
                         </a:rPr>
-                        <a:t>$386</a:t>
+                        <a:t>$358</a:t>
                       </a:r>
                     </a:p>
                   </a:txBody>
@@ -26865,7 +26865,7 @@
                           </a:solidFill>
                           <a:latin typeface="Calibri"/>
                         </a:rPr>
-                        <a:t>$444</a:t>
+                        <a:t>$438</a:t>
                       </a:r>
                     </a:p>
                   </a:txBody>
@@ -27120,7 +27120,7 @@
                           </a:solidFill>
                           <a:latin typeface="Calibri"/>
                         </a:rPr>
-                        <a:t>$353</a:t>
+                        <a:t>$246</a:t>
                       </a:r>
                     </a:p>
                   </a:txBody>
@@ -27375,7 +27375,7 @@
                           </a:solidFill>
                           <a:latin typeface="Calibri"/>
                         </a:rPr>
-                        <a:t>$383</a:t>
+                        <a:t>$312</a:t>
                       </a:r>
                     </a:p>
                   </a:txBody>
@@ -27630,7 +27630,7 @@
                           </a:solidFill>
                           <a:latin typeface="Calibri"/>
                         </a:rPr>
-                        <a:t>$1566</a:t>
+                        <a:t>$1354</a:t>
                       </a:r>
                     </a:p>
                   </a:txBody>
@@ -27678,7 +27678,7 @@
                 </a:solidFill>
                 <a:latin typeface="Calibri"/>
               </a:rPr>
-              <a:t>Today's current plan pays $2,070. Plan B WITH MIN: REAL $921 | SWAP $1,257 | FLIP $1,566.</a:t>
+              <a:t>Today's current plan pays $2,070. Plan B WITH MIN: REAL $43 | SWAP $724 | FLIP $1,354.</a:t>
             </a:r>
           </a:p>
         </p:txBody>
@@ -28509,7 +28509,7 @@
                           </a:solidFill>
                           <a:latin typeface="Calibri"/>
                         </a:rPr>
-                        <a:t>$242</a:t>
+                        <a:t>$35</a:t>
                       </a:r>
                     </a:p>
                   </a:txBody>
@@ -28764,7 +28764,7 @@
                           </a:solidFill>
                           <a:latin typeface="Calibri"/>
                         </a:rPr>
-                        <a:t>$267</a:t>
+                        <a:t>$80</a:t>
                       </a:r>
                     </a:p>
                   </a:txBody>
@@ -29019,7 +29019,7 @@
                           </a:solidFill>
                           <a:latin typeface="Calibri"/>
                         </a:rPr>
-                        <a:t>$255</a:t>
+                        <a:t>$58</a:t>
                       </a:r>
                     </a:p>
                   </a:txBody>
@@ -29274,7 +29274,7 @@
                           </a:solidFill>
                           <a:latin typeface="Calibri"/>
                         </a:rPr>
-                        <a:t>$248</a:t>
+                        <a:t>$41</a:t>
                       </a:r>
                     </a:p>
                   </a:txBody>
@@ -29529,7 +29529,7 @@
                           </a:solidFill>
                           <a:latin typeface="Calibri"/>
                         </a:rPr>
-                        <a:t>$1012</a:t>
+                        <a:t>$214</a:t>
                       </a:r>
                     </a:p>
                   </a:txBody>
@@ -30112,7 +30112,7 @@
                           </a:solidFill>
                           <a:latin typeface="Calibri"/>
                         </a:rPr>
-                        <a:t>$302</a:t>
+                        <a:t>$178</a:t>
                       </a:r>
                     </a:p>
                   </a:txBody>
@@ -30367,7 +30367,7 @@
                           </a:solidFill>
                           <a:latin typeface="Calibri"/>
                         </a:rPr>
-                        <a:t>$359</a:t>
+                        <a:t>$242</a:t>
                       </a:r>
                     </a:p>
                   </a:txBody>
@@ -30622,7 +30622,7 @@
                           </a:solidFill>
                           <a:latin typeface="Calibri"/>
                         </a:rPr>
-                        <a:t>$296</a:t>
+                        <a:t>$148</a:t>
                       </a:r>
                     </a:p>
                   </a:txBody>
@@ -30877,7 +30877,7 @@
                           </a:solidFill>
                           <a:latin typeface="Calibri"/>
                         </a:rPr>
-                        <a:t>$364</a:t>
+                        <a:t>$257</a:t>
                       </a:r>
                     </a:p>
                   </a:txBody>
@@ -31132,7 +31132,7 @@
                           </a:solidFill>
                           <a:latin typeface="Calibri"/>
                         </a:rPr>
-                        <a:t>$1321</a:t>
+                        <a:t>$825</a:t>
                       </a:r>
                     </a:p>
                   </a:txBody>
@@ -31715,7 +31715,7 @@
                           </a:solidFill>
                           <a:latin typeface="Calibri"/>
                         </a:rPr>
-                        <a:t>$346</a:t>
+                        <a:t>$286</a:t>
                       </a:r>
                     </a:p>
                   </a:txBody>
@@ -31970,7 +31970,7 @@
                           </a:solidFill>
                           <a:latin typeface="Calibri"/>
                         </a:rPr>
-                        <a:t>$329</a:t>
+                        <a:t>$245</a:t>
                       </a:r>
                     </a:p>
                   </a:txBody>
@@ -32225,7 +32225,7 @@
                           </a:solidFill>
                           <a:latin typeface="Calibri"/>
                         </a:rPr>
-                        <a:t>$310</a:t>
+                        <a:t>$185</a:t>
                       </a:r>
                     </a:p>
                   </a:txBody>
@@ -32480,7 +32480,7 @@
                           </a:solidFill>
                           <a:latin typeface="Calibri"/>
                         </a:rPr>
-                        <a:t>$411</a:t>
+                        <a:t>$385</a:t>
                       </a:r>
                     </a:p>
                   </a:txBody>
@@ -32735,7 +32735,7 @@
                           </a:solidFill>
                           <a:latin typeface="Calibri"/>
                         </a:rPr>
-                        <a:t>$1397</a:t>
+                        <a:t>$1102</a:t>
                       </a:r>
                     </a:p>
                   </a:txBody>
@@ -32783,7 +32783,7 @@
                 </a:solidFill>
                 <a:latin typeface="Calibri"/>
               </a:rPr>
-              <a:t>Today's current plan pays $1,400. Plan B WITH MIN: REAL $1,012 | SWAP $1,321 | FLIP $1,397.</a:t>
+              <a:t>Today's current plan pays $1,400. Plan B WITH MIN: REAL $214 | SWAP $825 | FLIP $1,102.</a:t>
             </a:r>
           </a:p>
         </p:txBody>
@@ -33614,7 +33614,7 @@
                           </a:solidFill>
                           <a:latin typeface="Calibri"/>
                         </a:rPr>
-                        <a:t>$252</a:t>
+                        <a:t>$60</a:t>
                       </a:r>
                     </a:p>
                   </a:txBody>
@@ -33869,7 +33869,7 @@
                           </a:solidFill>
                           <a:latin typeface="Calibri"/>
                         </a:rPr>
-                        <a:t>$237</a:t>
+                        <a:t>$27</a:t>
                       </a:r>
                     </a:p>
                   </a:txBody>
@@ -34124,7 +34124,7 @@
                           </a:solidFill>
                           <a:latin typeface="Calibri"/>
                         </a:rPr>
-                        <a:t>$721</a:t>
+                        <a:t>$496</a:t>
                       </a:r>
                     </a:p>
                   </a:txBody>
@@ -34379,7 +34379,7 @@
                           </a:solidFill>
                           <a:latin typeface="Calibri"/>
                         </a:rPr>
-                        <a:t>$237</a:t>
+                        <a:t>$25</a:t>
                       </a:r>
                     </a:p>
                   </a:txBody>
@@ -34634,7 +34634,7 @@
                           </a:solidFill>
                           <a:latin typeface="Calibri"/>
                         </a:rPr>
-                        <a:t>$1447</a:t>
+                        <a:t>$608</a:t>
                       </a:r>
                     </a:p>
                   </a:txBody>
@@ -35217,7 +35217,7 @@
                           </a:solidFill>
                           <a:latin typeface="Calibri"/>
                         </a:rPr>
-                        <a:t>$378</a:t>
+                        <a:t>$307</a:t>
                       </a:r>
                     </a:p>
                   </a:txBody>
@@ -35472,7 +35472,7 @@
                           </a:solidFill>
                           <a:latin typeface="Calibri"/>
                         </a:rPr>
-                        <a:t>$321</a:t>
+                        <a:t>$230</a:t>
                       </a:r>
                     </a:p>
                   </a:txBody>
@@ -35727,7 +35727,7 @@
                           </a:solidFill>
                           <a:latin typeface="Calibri"/>
                         </a:rPr>
-                        <a:t>$763</a:t>
+                        <a:t>$636</a:t>
                       </a:r>
                     </a:p>
                   </a:txBody>
@@ -35982,7 +35982,7 @@
                           </a:solidFill>
                           <a:latin typeface="Calibri"/>
                         </a:rPr>
-                        <a:t>$310</a:t>
+                        <a:t>$186</a:t>
                       </a:r>
                     </a:p>
                   </a:txBody>
@@ -36237,7 +36237,7 @@
                           </a:solidFill>
                           <a:latin typeface="Calibri"/>
                         </a:rPr>
-                        <a:t>$1772</a:t>
+                        <a:t>$1359</a:t>
                       </a:r>
                     </a:p>
                   </a:txBody>
@@ -36820,7 +36820,7 @@
                           </a:solidFill>
                           <a:latin typeface="Calibri"/>
                         </a:rPr>
-                        <a:t>$462</a:t>
+                        <a:t>$480</a:t>
                       </a:r>
                     </a:p>
                   </a:txBody>
@@ -37075,7 +37075,7 @@
                           </a:solidFill>
                           <a:latin typeface="Calibri"/>
                         </a:rPr>
-                        <a:t>$416</a:t>
+                        <a:t>$427</a:t>
                       </a:r>
                     </a:p>
                   </a:txBody>
@@ -37330,7 +37330,7 @@
                           </a:solidFill>
                           <a:latin typeface="Calibri"/>
                         </a:rPr>
-                        <a:t>$805</a:t>
+                        <a:t>$776</a:t>
                       </a:r>
                     </a:p>
                   </a:txBody>
@@ -37585,7 +37585,7 @@
                           </a:solidFill>
                           <a:latin typeface="Calibri"/>
                         </a:rPr>
-                        <a:t>$382</a:t>
+                        <a:t>$333</a:t>
                       </a:r>
                     </a:p>
                   </a:txBody>
@@ -37840,7 +37840,7 @@
                           </a:solidFill>
                           <a:latin typeface="Calibri"/>
                         </a:rPr>
-                        <a:t>$2064</a:t>
+                        <a:t>$2016</a:t>
                       </a:r>
                     </a:p>
                   </a:txBody>
@@ -37888,7 +37888,7 @@
                 </a:solidFill>
                 <a:latin typeface="Calibri"/>
               </a:rPr>
-              <a:t>Today's current plan pays $1,940. Plan B WITH MIN: REAL $1,447 | SWAP $1,772 | FLIP $2,064.</a:t>
+              <a:t>Today's current plan pays $1,940. Plan B WITH MIN: REAL $608 | SWAP $1,359 | FLIP $2,016.</a:t>
             </a:r>
           </a:p>
         </p:txBody>
@@ -38447,7 +38447,7 @@
                           </a:solidFill>
                           <a:latin typeface="Calibri"/>
                         </a:rPr>
-                        <a:t>$12,645</a:t>
+                        <a:t>$7,838</a:t>
                       </a:r>
                     </a:p>
                   </a:txBody>
@@ -38470,7 +38470,7 @@
                           </a:solidFill>
                           <a:latin typeface="Calibri"/>
                         </a:rPr>
-                        <a:t>$13,912</a:t>
+                        <a:t>$11,738</a:t>
                       </a:r>
                     </a:p>
                   </a:txBody>
@@ -38493,7 +38493,7 @@
                           </a:solidFill>
                           <a:latin typeface="Calibri"/>
                         </a:rPr>
-                        <a:t>$14,533</a:t>
+                        <a:t>$14,398</a:t>
                       </a:r>
                     </a:p>
                   </a:txBody>
@@ -38564,7 +38564,7 @@
                           </a:solidFill>
                           <a:latin typeface="Calibri"/>
                         </a:rPr>
-                        <a:t>$7,742</a:t>
+                        <a:t>$2,935</a:t>
                       </a:r>
                     </a:p>
                   </a:txBody>
@@ -38587,7 +38587,7 @@
                           </a:solidFill>
                           <a:latin typeface="Calibri"/>
                         </a:rPr>
-                        <a:t>$10,000</a:t>
+                        <a:t>$7,826</a:t>
                       </a:r>
                     </a:p>
                   </a:txBody>
@@ -38610,7 +38610,7 @@
                           </a:solidFill>
                           <a:latin typeface="Calibri"/>
                         </a:rPr>
-                        <a:t>$11,370</a:t>
+                        <a:t>$11,235</a:t>
                       </a:r>
                     </a:p>
                   </a:txBody>
@@ -38681,7 +38681,7 @@
                           </a:solidFill>
                           <a:latin typeface="Calibri"/>
                         </a:rPr>
-                        <a:t>$12,645</a:t>
+                        <a:t>$7,838</a:t>
                       </a:r>
                     </a:p>
                   </a:txBody>
@@ -38704,7 +38704,7 @@
                           </a:solidFill>
                           <a:latin typeface="Calibri"/>
                         </a:rPr>
-                        <a:t>$13,912</a:t>
+                        <a:t>$11,738</a:t>
                       </a:r>
                     </a:p>
                   </a:txBody>
@@ -38727,7 +38727,7 @@
                           </a:solidFill>
                           <a:latin typeface="Calibri"/>
                         </a:rPr>
-                        <a:t>$14,533</a:t>
+                        <a:t>$14,398</a:t>
                       </a:r>
                     </a:p>
                   </a:txBody>
@@ -38798,7 +38798,7 @@
                           </a:solidFill>
                           <a:latin typeface="Calibri"/>
                         </a:rPr>
-                        <a:t>$7,742</a:t>
+                        <a:t>$2,935</a:t>
                       </a:r>
                     </a:p>
                   </a:txBody>
@@ -38821,7 +38821,7 @@
                           </a:solidFill>
                           <a:latin typeface="Calibri"/>
                         </a:rPr>
-                        <a:t>$10,000</a:t>
+                        <a:t>$7,826</a:t>
                       </a:r>
                     </a:p>
                   </a:txBody>
@@ -38844,7 +38844,7 @@
                           </a:solidFill>
                           <a:latin typeface="Calibri"/>
                         </a:rPr>
-                        <a:t>$11,370</a:t>
+                        <a:t>$11,235</a:t>
                       </a:r>
                     </a:p>
                   </a:txBody>
@@ -38973,7 +38973,7 @@
                 </a:solidFill>
                 <a:latin typeface="Calibri"/>
               </a:rPr>
-              <a:t>• Plan B WITH MIN under 100% FLIP = $11,370. Compare to today's current $12,220: agents earn the SAME for doing the RIGHT behavior.</a:t>
+              <a:t>• Plan B WITH MIN under 100% FLIP = $11,235. Compare to today's current $12,220: agents earn the SAME for doing the RIGHT behavior.</a:t>
             </a:r>
           </a:p>
           <a:p>
@@ -38989,7 +38989,7 @@
                 </a:solidFill>
                 <a:latin typeface="Calibri"/>
               </a:rPr>
-              <a:t>• Plan B no-min under FLIP = $14,533, which is ABOVE today's pay. Some headroom if ownership wants to be more generous.</a:t>
+              <a:t>• Plan B no-min under FLIP = $14,398, which is ABOVE today's pay. Some headroom if ownership wants to be more generous.</a:t>
             </a:r>
           </a:p>
           <a:p>
@@ -45698,7 +45698,7 @@
                           </a:solidFill>
                           <a:latin typeface="Calibri"/>
                         </a:rPr>
-                        <a:t>% of NB premium written 6 months ago still on the books today</a:t>
+                        <a:t>Scales with the agent's RENEWABLE BOOK SIZE - bigger book = bigger bonus</a:t>
                       </a:r>
                     </a:p>
                   </a:txBody>
@@ -45721,7 +45721,7 @@
                           </a:solidFill>
                           <a:latin typeface="Calibri"/>
                         </a:rPr>
-                        <a:t>Retention Rate x $300/mo pool</a:t>
+                        <a:t>REN written premium x 0.5%</a:t>
                       </a:r>
                     </a:p>
                   </a:txBody>
@@ -45744,7 +45744,7 @@
                           </a:solidFill>
                           <a:latin typeface="Calibri"/>
                         </a:rPr>
-                        <a:t>70% retention -&gt; $210/mo | 80% -&gt; $240/mo | 90% -&gt; $270/mo | 100% -&gt; $300/mo</a:t>
+                        <a:t>$50k REN -&gt; $250/mo | $25k REN -&gt; $125/mo | $10k REN -&gt; $50/mo. Two agents at same retention rate but different book sizes earn DIFFERENT bonuses.</a:t>
                       </a:r>
                     </a:p>
                   </a:txBody>

--- a/output/Bonus_Plan_FINAL.pptx
+++ b/output/Bonus_Plan_FINAL.pptx
@@ -4054,7 +4054,7 @@
                           </a:solidFill>
                           <a:latin typeface="Calibri"/>
                         </a:rPr>
-                        <a:t>$630</a:t>
+                        <a:t>$626</a:t>
                       </a:r>
                     </a:p>
                   </a:txBody>
@@ -4194,7 +4194,7 @@
                           </a:solidFill>
                           <a:latin typeface="Calibri"/>
                         </a:rPr>
-                        <a:t>$983</a:t>
+                        <a:t>$975</a:t>
                       </a:r>
                     </a:p>
                   </a:txBody>
@@ -4334,7 +4334,7 @@
                           </a:solidFill>
                           <a:latin typeface="Calibri"/>
                         </a:rPr>
-                        <a:t>+$354 (GOOD)</a:t>
+                        <a:t>+$348 (GOOD)</a:t>
                       </a:r>
                     </a:p>
                   </a:txBody>
@@ -5030,7 +5030,7 @@
                 </a:solidFill>
                 <a:latin typeface="Calibri"/>
               </a:rPr>
-              <a:t>Per-policy BASE (tiered):</a:t>
+              <a:t>Per-policy BASE (NB &amp; RWR only):</a:t>
             </a:r>
           </a:p>
         </p:txBody>
@@ -5106,7 +5106,7 @@
                 </a:solidFill>
                 <a:latin typeface="Calibri"/>
               </a:rPr>
-              <a:t>  REN tier 'Under $1,200': 7 x $4 = $28</a:t>
+              <a:t>  RWR tier '$1,200-$1,799': 69 x $3 = $207</a:t>
             </a:r>
           </a:p>
         </p:txBody>
@@ -5138,13 +5138,13 @@
           <a:p>
             <a:pPr algn="l"/>
             <a:r>
-              <a:rPr sz="1000" b="0" i="0">
+              <a:rPr sz="1000" b="1" i="0">
                 <a:solidFill>
                   <a:srgbClr val="1F4E78"/>
                 </a:solidFill>
                 <a:latin typeface="Calibri"/>
               </a:rPr>
-              <a:t>  RWR tier '$1,200-$1,799': 69 x $3 = $207</a:t>
+              <a:t>Collected incentive (&gt;$1,200 NB &amp; RWR only):</a:t>
             </a:r>
           </a:p>
         </p:txBody>
@@ -5176,13 +5176,13 @@
           <a:p>
             <a:pPr algn="l"/>
             <a:r>
-              <a:rPr sz="1000" b="1" i="0">
+              <a:rPr sz="1000" b="0" i="0">
                 <a:solidFill>
                   <a:srgbClr val="1F4E78"/>
                 </a:solidFill>
                 <a:latin typeface="Calibri"/>
               </a:rPr>
-              <a:t>Collected incentive (&gt;$1,200 only):</a:t>
+              <a:t>  NB +$2/pol x 43% = $33</a:t>
             </a:r>
           </a:p>
         </p:txBody>
@@ -5220,7 +5220,7 @@
                 </a:solidFill>
                 <a:latin typeface="Calibri"/>
               </a:rPr>
-              <a:t>  NB +$2/pol x 43% = $33</a:t>
+              <a:t>  RWR +$2/pol x 44% = $61</a:t>
             </a:r>
           </a:p>
         </p:txBody>
@@ -5252,13 +5252,13 @@
           <a:p>
             <a:pPr algn="l"/>
             <a:r>
-              <a:rPr sz="1000" b="0" i="0">
+              <a:rPr sz="1000" b="1" i="0">
                 <a:solidFill>
                   <a:srgbClr val="1F4E78"/>
                 </a:solidFill>
                 <a:latin typeface="Calibri"/>
               </a:rPr>
-              <a:t>  REN +$5/pol x 14% = $5</a:t>
+              <a:t>Renewals paid via retention bonus only:</a:t>
             </a:r>
           </a:p>
         </p:txBody>
@@ -5296,7 +5296,7 @@
                 </a:solidFill>
                 <a:latin typeface="Calibri"/>
               </a:rPr>
-              <a:t>  RWR +$2/pol x 44% = $61</a:t>
+              <a:t>  Retention = REN $6k x 1% = $60</a:t>
             </a:r>
           </a:p>
         </p:txBody>
@@ -5334,7 +5334,7 @@
                 </a:solidFill>
                 <a:latin typeface="Calibri"/>
               </a:rPr>
-              <a:t>Retention (REN $6k x 0.5%) = $30</a:t>
+              <a:t>TARGET TOTAL = $626</a:t>
             </a:r>
           </a:p>
         </p:txBody>
@@ -5372,7 +5372,7 @@
                 </a:solidFill>
                 <a:latin typeface="Calibri"/>
               </a:rPr>
-              <a:t>TARGET TOTAL = $630</a:t>
+              <a:t>Apply gates:</a:t>
             </a:r>
           </a:p>
         </p:txBody>
@@ -5404,13 +5404,13 @@
           <a:p>
             <a:pPr algn="l"/>
             <a:r>
-              <a:rPr sz="1000" b="1" i="0">
+              <a:rPr sz="1000" b="0" i="0">
                 <a:solidFill>
-                  <a:srgbClr val="1F4E78"/>
+                  <a:srgbClr val="70AD47"/>
                 </a:solidFill>
                 <a:latin typeface="Calibri"/>
               </a:rPr>
-              <a:t>Apply gates:</a:t>
+              <a:t>  NB $52k vs $45k: PASS</a:t>
             </a:r>
           </a:p>
         </p:txBody>
@@ -5448,7 +5448,7 @@
                 </a:solidFill>
                 <a:latin typeface="Calibri"/>
               </a:rPr>
-              <a:t>  NB $52k vs $45k: PASS</a:t>
+              <a:t>  REN retention 75% vs 30%: PASS</a:t>
             </a:r>
           </a:p>
         </p:txBody>
@@ -5486,7 +5486,7 @@
                 </a:solidFill>
                 <a:latin typeface="Calibri"/>
               </a:rPr>
-              <a:t>  REN retention 75% vs 30%: PASS</a:t>
+              <a:t>  RWR (follows NB): PASS</a:t>
             </a:r>
           </a:p>
         </p:txBody>
@@ -5518,58 +5518,20 @@
           <a:p>
             <a:pPr algn="l"/>
             <a:r>
-              <a:rPr sz="1000" b="0" i="0">
+              <a:rPr sz="1000" b="1" i="0">
                 <a:solidFill>
-                  <a:srgbClr val="70AD47"/>
+                  <a:srgbClr val="1F4E78"/>
                 </a:solidFill>
                 <a:latin typeface="Calibri"/>
               </a:rPr>
-              <a:t>  RWR (both): PASS</a:t>
+              <a:t>PAID = $626</a:t>
             </a:r>
           </a:p>
         </p:txBody>
       </p:sp>
       <p:sp>
         <p:nvSpPr>
-          <p:cNvPr id="29" name="TextBox 28"/>
-          <p:cNvSpPr txBox="1"/>
-          <p:nvPr/>
-        </p:nvSpPr>
-        <p:spPr>
-          <a:xfrm>
-            <a:off x="365760" y="4956048"/>
-            <a:ext cx="3520440" cy="196596"/>
-          </a:xfrm>
-          <a:prstGeom prst="rect">
-            <a:avLst/>
-          </a:prstGeom>
-          <a:noFill/>
-          <a:ln>
-            <a:noFill/>
-          </a:ln>
-        </p:spPr>
-        <p:txBody>
-          <a:bodyPr wrap="square" lIns="73152" rIns="73152" tIns="36576" bIns="36576" anchor="t">
-            <a:spAutoFit/>
-          </a:bodyPr>
-          <a:lstStyle/>
-          <a:p>
-            <a:pPr algn="l"/>
-            <a:r>
-              <a:rPr sz="1000" b="1" i="0">
-                <a:solidFill>
-                  <a:srgbClr val="1F4E78"/>
-                </a:solidFill>
-                <a:latin typeface="Calibri"/>
-              </a:rPr>
-              <a:t>PAID = $630</a:t>
-            </a:r>
-          </a:p>
-        </p:txBody>
-      </p:sp>
-      <p:sp>
-        <p:nvSpPr>
-          <p:cNvPr id="30" name="Rectangle 29"/>
+          <p:cNvPr id="29" name="Rectangle 28"/>
           <p:cNvSpPr/>
           <p:nvPr/>
         </p:nvSpPr>
@@ -5613,7 +5575,7 @@
       </p:sp>
       <p:sp>
         <p:nvSpPr>
-          <p:cNvPr id="31" name="TextBox 30"/>
+          <p:cNvPr id="30" name="TextBox 29"/>
           <p:cNvSpPr txBox="1"/>
           <p:nvPr/>
         </p:nvSpPr>
@@ -5651,7 +5613,7 @@
       </p:sp>
       <p:sp>
         <p:nvSpPr>
-          <p:cNvPr id="32" name="Rectangle 31"/>
+          <p:cNvPr id="31" name="Rectangle 30"/>
           <p:cNvSpPr/>
           <p:nvPr/>
         </p:nvSpPr>
@@ -5695,7 +5657,7 @@
       </p:sp>
       <p:sp>
         <p:nvSpPr>
-          <p:cNvPr id="33" name="TextBox 32"/>
+          <p:cNvPr id="32" name="TextBox 31"/>
           <p:cNvSpPr txBox="1"/>
           <p:nvPr/>
         </p:nvSpPr>
@@ -5733,7 +5695,7 @@
       </p:sp>
       <p:sp>
         <p:nvSpPr>
-          <p:cNvPr id="34" name="TextBox 33"/>
+          <p:cNvPr id="33" name="TextBox 32"/>
           <p:cNvSpPr txBox="1"/>
           <p:nvPr/>
         </p:nvSpPr>
@@ -5771,7 +5733,7 @@
       </p:sp>
       <p:sp>
         <p:nvSpPr>
-          <p:cNvPr id="35" name="TextBox 34"/>
+          <p:cNvPr id="34" name="TextBox 33"/>
           <p:cNvSpPr txBox="1"/>
           <p:nvPr/>
         </p:nvSpPr>
@@ -5809,7 +5771,7 @@
       </p:sp>
       <p:sp>
         <p:nvSpPr>
-          <p:cNvPr id="36" name="TextBox 35"/>
+          <p:cNvPr id="35" name="TextBox 34"/>
           <p:cNvSpPr txBox="1"/>
           <p:nvPr/>
         </p:nvSpPr>
@@ -5847,7 +5809,7 @@
       </p:sp>
       <p:sp>
         <p:nvSpPr>
-          <p:cNvPr id="37" name="TextBox 36"/>
+          <p:cNvPr id="36" name="TextBox 35"/>
           <p:cNvSpPr txBox="1"/>
           <p:nvPr/>
         </p:nvSpPr>
@@ -5878,14 +5840,14 @@
                 </a:solidFill>
                 <a:latin typeface="Calibri"/>
               </a:rPr>
-              <a:t>Per-policy BASE (tiered):</a:t>
+              <a:t>Per-policy BASE (NB &amp; RWR only):</a:t>
             </a:r>
           </a:p>
         </p:txBody>
       </p:sp>
       <p:sp>
         <p:nvSpPr>
-          <p:cNvPr id="38" name="TextBox 37"/>
+          <p:cNvPr id="37" name="TextBox 36"/>
           <p:cNvSpPr txBox="1"/>
           <p:nvPr/>
         </p:nvSpPr>
@@ -5923,51 +5885,13 @@
       </p:sp>
       <p:sp>
         <p:nvSpPr>
-          <p:cNvPr id="39" name="TextBox 38"/>
+          <p:cNvPr id="38" name="TextBox 37"/>
           <p:cNvSpPr txBox="1"/>
           <p:nvPr/>
         </p:nvSpPr>
         <p:spPr>
           <a:xfrm>
             <a:off x="4315968" y="2596896"/>
-            <a:ext cx="3520440" cy="196596"/>
-          </a:xfrm>
-          <a:prstGeom prst="rect">
-            <a:avLst/>
-          </a:prstGeom>
-          <a:noFill/>
-          <a:ln>
-            <a:noFill/>
-          </a:ln>
-        </p:spPr>
-        <p:txBody>
-          <a:bodyPr wrap="square" lIns="73152" rIns="73152" tIns="36576" bIns="36576" anchor="t">
-            <a:spAutoFit/>
-          </a:bodyPr>
-          <a:lstStyle/>
-          <a:p>
-            <a:pPr algn="l"/>
-            <a:r>
-              <a:rPr sz="1000" b="0" i="0">
-                <a:solidFill>
-                  <a:srgbClr val="1F4E78"/>
-                </a:solidFill>
-                <a:latin typeface="Calibri"/>
-              </a:rPr>
-              <a:t>  REN tier '$1,200-$1,799': 41 x $6 = $246</a:t>
-            </a:r>
-          </a:p>
-        </p:txBody>
-      </p:sp>
-      <p:sp>
-        <p:nvSpPr>
-          <p:cNvPr id="40" name="TextBox 39"/>
-          <p:cNvSpPr txBox="1"/>
-          <p:nvPr/>
-        </p:nvSpPr>
-        <p:spPr>
-          <a:xfrm>
-            <a:off x="4315968" y="2793492"/>
             <a:ext cx="3520440" cy="196596"/>
           </a:xfrm>
           <a:prstGeom prst="rect">
@@ -5999,13 +5923,13 @@
       </p:sp>
       <p:sp>
         <p:nvSpPr>
-          <p:cNvPr id="41" name="TextBox 40"/>
+          <p:cNvPr id="39" name="TextBox 38"/>
           <p:cNvSpPr txBox="1"/>
           <p:nvPr/>
         </p:nvSpPr>
         <p:spPr>
           <a:xfrm>
-            <a:off x="4315968" y="2990088"/>
+            <a:off x="4315968" y="2793492"/>
             <a:ext cx="3520440" cy="196596"/>
           </a:xfrm>
           <a:prstGeom prst="rect">
@@ -6030,20 +5954,20 @@
                 </a:solidFill>
                 <a:latin typeface="Calibri"/>
               </a:rPr>
-              <a:t>Collected incentive (&gt;$1,200 only):</a:t>
+              <a:t>Collected incentive (&gt;$1,200 NB &amp; RWR only):</a:t>
             </a:r>
           </a:p>
         </p:txBody>
       </p:sp>
       <p:sp>
         <p:nvSpPr>
-          <p:cNvPr id="42" name="TextBox 41"/>
+          <p:cNvPr id="40" name="TextBox 39"/>
           <p:cNvSpPr txBox="1"/>
           <p:nvPr/>
         </p:nvSpPr>
         <p:spPr>
           <a:xfrm>
-            <a:off x="4315968" y="3186684"/>
+            <a:off x="4315968" y="2990088"/>
             <a:ext cx="3520440" cy="196596"/>
           </a:xfrm>
           <a:prstGeom prst="rect">
@@ -6075,51 +5999,13 @@
       </p:sp>
       <p:sp>
         <p:nvSpPr>
-          <p:cNvPr id="43" name="TextBox 42"/>
+          <p:cNvPr id="41" name="TextBox 40"/>
           <p:cNvSpPr txBox="1"/>
           <p:nvPr/>
         </p:nvSpPr>
         <p:spPr>
           <a:xfrm>
-            <a:off x="4315968" y="3383280"/>
-            <a:ext cx="3520440" cy="196596"/>
-          </a:xfrm>
-          <a:prstGeom prst="rect">
-            <a:avLst/>
-          </a:prstGeom>
-          <a:noFill/>
-          <a:ln>
-            <a:noFill/>
-          </a:ln>
-        </p:spPr>
-        <p:txBody>
-          <a:bodyPr wrap="square" lIns="73152" rIns="73152" tIns="36576" bIns="36576" anchor="t">
-            <a:spAutoFit/>
-          </a:bodyPr>
-          <a:lstStyle/>
-          <a:p>
-            <a:pPr algn="l"/>
-            <a:r>
-              <a:rPr sz="1000" b="0" i="0">
-                <a:solidFill>
-                  <a:srgbClr val="1F4E78"/>
-                </a:solidFill>
-                <a:latin typeface="Calibri"/>
-              </a:rPr>
-              <a:t>  REN +$2/pol x 40% = $33</a:t>
-            </a:r>
-          </a:p>
-        </p:txBody>
-      </p:sp>
-      <p:sp>
-        <p:nvSpPr>
-          <p:cNvPr id="44" name="TextBox 43"/>
-          <p:cNvSpPr txBox="1"/>
-          <p:nvPr/>
-        </p:nvSpPr>
-        <p:spPr>
-          <a:xfrm>
-            <a:off x="4315968" y="3579876"/>
+            <a:off x="4315968" y="3186684"/>
             <a:ext cx="3520440" cy="196596"/>
           </a:xfrm>
           <a:prstGeom prst="rect">
@@ -6151,7 +6037,83 @@
       </p:sp>
       <p:sp>
         <p:nvSpPr>
-          <p:cNvPr id="45" name="TextBox 44"/>
+          <p:cNvPr id="42" name="TextBox 41"/>
+          <p:cNvSpPr txBox="1"/>
+          <p:nvPr/>
+        </p:nvSpPr>
+        <p:spPr>
+          <a:xfrm>
+            <a:off x="4315968" y="3383280"/>
+            <a:ext cx="3520440" cy="196596"/>
+          </a:xfrm>
+          <a:prstGeom prst="rect">
+            <a:avLst/>
+          </a:prstGeom>
+          <a:noFill/>
+          <a:ln>
+            <a:noFill/>
+          </a:ln>
+        </p:spPr>
+        <p:txBody>
+          <a:bodyPr wrap="square" lIns="73152" rIns="73152" tIns="36576" bIns="36576" anchor="t">
+            <a:spAutoFit/>
+          </a:bodyPr>
+          <a:lstStyle/>
+          <a:p>
+            <a:pPr algn="l"/>
+            <a:r>
+              <a:rPr sz="1000" b="1" i="0">
+                <a:solidFill>
+                  <a:srgbClr val="2E75B6"/>
+                </a:solidFill>
+                <a:latin typeface="Calibri"/>
+              </a:rPr>
+              <a:t>Renewals paid via retention bonus only:</a:t>
+            </a:r>
+          </a:p>
+        </p:txBody>
+      </p:sp>
+      <p:sp>
+        <p:nvSpPr>
+          <p:cNvPr id="43" name="TextBox 42"/>
+          <p:cNvSpPr txBox="1"/>
+          <p:nvPr/>
+        </p:nvSpPr>
+        <p:spPr>
+          <a:xfrm>
+            <a:off x="4315968" y="3579876"/>
+            <a:ext cx="3520440" cy="196596"/>
+          </a:xfrm>
+          <a:prstGeom prst="rect">
+            <a:avLst/>
+          </a:prstGeom>
+          <a:noFill/>
+          <a:ln>
+            <a:noFill/>
+          </a:ln>
+        </p:spPr>
+        <p:txBody>
+          <a:bodyPr wrap="square" lIns="73152" rIns="73152" tIns="36576" bIns="36576" anchor="t">
+            <a:spAutoFit/>
+          </a:bodyPr>
+          <a:lstStyle/>
+          <a:p>
+            <a:pPr algn="l"/>
+            <a:r>
+              <a:rPr sz="1000" b="0" i="0">
+                <a:solidFill>
+                  <a:srgbClr val="1F4E78"/>
+                </a:solidFill>
+                <a:latin typeface="Calibri"/>
+              </a:rPr>
+              <a:t>  Retention = REN $54k x 1% = $541</a:t>
+            </a:r>
+          </a:p>
+        </p:txBody>
+      </p:sp>
+      <p:sp>
+        <p:nvSpPr>
+          <p:cNvPr id="44" name="TextBox 43"/>
           <p:cNvSpPr txBox="1"/>
           <p:nvPr/>
         </p:nvSpPr>
@@ -6178,62 +6140,24 @@
             <a:r>
               <a:rPr sz="1000" b="1" i="0">
                 <a:solidFill>
-                  <a:srgbClr val="1F4E78"/>
+                  <a:srgbClr val="2E75B6"/>
                 </a:solidFill>
                 <a:latin typeface="Calibri"/>
               </a:rPr>
-              <a:t>Retention (REN $54k x 0.5%) = $270</a:t>
+              <a:t>TARGET TOTAL = $975</a:t>
             </a:r>
           </a:p>
         </p:txBody>
       </p:sp>
       <p:sp>
         <p:nvSpPr>
-          <p:cNvPr id="46" name="TextBox 45"/>
+          <p:cNvPr id="45" name="TextBox 44"/>
           <p:cNvSpPr txBox="1"/>
           <p:nvPr/>
         </p:nvSpPr>
         <p:spPr>
           <a:xfrm>
             <a:off x="4315968" y="3973068"/>
-            <a:ext cx="3520440" cy="196596"/>
-          </a:xfrm>
-          <a:prstGeom prst="rect">
-            <a:avLst/>
-          </a:prstGeom>
-          <a:noFill/>
-          <a:ln>
-            <a:noFill/>
-          </a:ln>
-        </p:spPr>
-        <p:txBody>
-          <a:bodyPr wrap="square" lIns="73152" rIns="73152" tIns="36576" bIns="36576" anchor="t">
-            <a:spAutoFit/>
-          </a:bodyPr>
-          <a:lstStyle/>
-          <a:p>
-            <a:pPr algn="l"/>
-            <a:r>
-              <a:rPr sz="1000" b="1" i="0">
-                <a:solidFill>
-                  <a:srgbClr val="2E75B6"/>
-                </a:solidFill>
-                <a:latin typeface="Calibri"/>
-              </a:rPr>
-              <a:t>TARGET TOTAL = $983</a:t>
-            </a:r>
-          </a:p>
-        </p:txBody>
-      </p:sp>
-      <p:sp>
-        <p:nvSpPr>
-          <p:cNvPr id="47" name="TextBox 46"/>
-          <p:cNvSpPr txBox="1"/>
-          <p:nvPr/>
-        </p:nvSpPr>
-        <p:spPr>
-          <a:xfrm>
-            <a:off x="4315968" y="4169664"/>
             <a:ext cx="3520440" cy="196596"/>
           </a:xfrm>
           <a:prstGeom prst="rect">
@@ -6265,13 +6189,13 @@
       </p:sp>
       <p:sp>
         <p:nvSpPr>
-          <p:cNvPr id="48" name="TextBox 47"/>
+          <p:cNvPr id="46" name="TextBox 45"/>
           <p:cNvSpPr txBox="1"/>
           <p:nvPr/>
         </p:nvSpPr>
         <p:spPr>
           <a:xfrm>
-            <a:off x="4315968" y="4366260"/>
+            <a:off x="4315968" y="4169664"/>
             <a:ext cx="3520440" cy="196596"/>
           </a:xfrm>
           <a:prstGeom prst="rect">
@@ -6303,13 +6227,13 @@
       </p:sp>
       <p:sp>
         <p:nvSpPr>
-          <p:cNvPr id="49" name="TextBox 48"/>
+          <p:cNvPr id="47" name="TextBox 46"/>
           <p:cNvSpPr txBox="1"/>
           <p:nvPr/>
         </p:nvSpPr>
         <p:spPr>
           <a:xfrm>
-            <a:off x="4315968" y="4562856"/>
+            <a:off x="4315968" y="4366260"/>
             <a:ext cx="3520440" cy="196596"/>
           </a:xfrm>
           <a:prstGeom prst="rect">
@@ -6341,7 +6265,45 @@
       </p:sp>
       <p:sp>
         <p:nvSpPr>
-          <p:cNvPr id="50" name="TextBox 49"/>
+          <p:cNvPr id="48" name="TextBox 47"/>
+          <p:cNvSpPr txBox="1"/>
+          <p:nvPr/>
+        </p:nvSpPr>
+        <p:spPr>
+          <a:xfrm>
+            <a:off x="4315968" y="4562856"/>
+            <a:ext cx="3520440" cy="196596"/>
+          </a:xfrm>
+          <a:prstGeom prst="rect">
+            <a:avLst/>
+          </a:prstGeom>
+          <a:noFill/>
+          <a:ln>
+            <a:noFill/>
+          </a:ln>
+        </p:spPr>
+        <p:txBody>
+          <a:bodyPr wrap="square" lIns="73152" rIns="73152" tIns="36576" bIns="36576" anchor="t">
+            <a:spAutoFit/>
+          </a:bodyPr>
+          <a:lstStyle/>
+          <a:p>
+            <a:pPr algn="l"/>
+            <a:r>
+              <a:rPr sz="1000" b="0" i="0">
+                <a:solidFill>
+                  <a:srgbClr val="70AD47"/>
+                </a:solidFill>
+                <a:latin typeface="Calibri"/>
+              </a:rPr>
+              <a:t>  RWR (follows NB): PASS</a:t>
+            </a:r>
+          </a:p>
+        </p:txBody>
+      </p:sp>
+      <p:sp>
+        <p:nvSpPr>
+          <p:cNvPr id="49" name="TextBox 48"/>
           <p:cNvSpPr txBox="1"/>
           <p:nvPr/>
         </p:nvSpPr>
@@ -6366,58 +6328,20 @@
           <a:p>
             <a:pPr algn="l"/>
             <a:r>
-              <a:rPr sz="1000" b="0" i="0">
+              <a:rPr sz="1000" b="1" i="0">
                 <a:solidFill>
-                  <a:srgbClr val="70AD47"/>
+                  <a:srgbClr val="2E75B6"/>
                 </a:solidFill>
                 <a:latin typeface="Calibri"/>
               </a:rPr>
-              <a:t>  RWR (both): PASS</a:t>
+              <a:t>PAID = $975</a:t>
             </a:r>
           </a:p>
         </p:txBody>
       </p:sp>
       <p:sp>
         <p:nvSpPr>
-          <p:cNvPr id="51" name="TextBox 50"/>
-          <p:cNvSpPr txBox="1"/>
-          <p:nvPr/>
-        </p:nvSpPr>
-        <p:spPr>
-          <a:xfrm>
-            <a:off x="4315968" y="4956048"/>
-            <a:ext cx="3520440" cy="196596"/>
-          </a:xfrm>
-          <a:prstGeom prst="rect">
-            <a:avLst/>
-          </a:prstGeom>
-          <a:noFill/>
-          <a:ln>
-            <a:noFill/>
-          </a:ln>
-        </p:spPr>
-        <p:txBody>
-          <a:bodyPr wrap="square" lIns="73152" rIns="73152" tIns="36576" bIns="36576" anchor="t">
-            <a:spAutoFit/>
-          </a:bodyPr>
-          <a:lstStyle/>
-          <a:p>
-            <a:pPr algn="l"/>
-            <a:r>
-              <a:rPr sz="1000" b="1" i="0">
-                <a:solidFill>
-                  <a:srgbClr val="2E75B6"/>
-                </a:solidFill>
-                <a:latin typeface="Calibri"/>
-              </a:rPr>
-              <a:t>PAID = $983</a:t>
-            </a:r>
-          </a:p>
-        </p:txBody>
-      </p:sp>
-      <p:sp>
-        <p:nvSpPr>
-          <p:cNvPr id="52" name="Rectangle 51"/>
+          <p:cNvPr id="50" name="Rectangle 49"/>
           <p:cNvSpPr/>
           <p:nvPr/>
         </p:nvSpPr>
@@ -6461,7 +6385,7 @@
       </p:sp>
       <p:sp>
         <p:nvSpPr>
-          <p:cNvPr id="53" name="TextBox 52"/>
+          <p:cNvPr id="51" name="TextBox 50"/>
           <p:cNvSpPr txBox="1"/>
           <p:nvPr/>
         </p:nvSpPr>
@@ -6499,7 +6423,7 @@
       </p:sp>
       <p:sp>
         <p:nvSpPr>
-          <p:cNvPr id="54" name="Rectangle 53"/>
+          <p:cNvPr id="52" name="Rectangle 51"/>
           <p:cNvSpPr/>
           <p:nvPr/>
         </p:nvSpPr>
@@ -6543,7 +6467,7 @@
       </p:sp>
       <p:sp>
         <p:nvSpPr>
-          <p:cNvPr id="55" name="TextBox 54"/>
+          <p:cNvPr id="53" name="TextBox 52"/>
           <p:cNvSpPr txBox="1"/>
           <p:nvPr/>
         </p:nvSpPr>
@@ -6581,7 +6505,7 @@
       </p:sp>
       <p:sp>
         <p:nvSpPr>
-          <p:cNvPr id="56" name="TextBox 55"/>
+          <p:cNvPr id="54" name="TextBox 53"/>
           <p:cNvSpPr txBox="1"/>
           <p:nvPr/>
         </p:nvSpPr>
@@ -6619,7 +6543,7 @@
       </p:sp>
       <p:sp>
         <p:nvSpPr>
-          <p:cNvPr id="57" name="TextBox 56"/>
+          <p:cNvPr id="55" name="TextBox 54"/>
           <p:cNvSpPr txBox="1"/>
           <p:nvPr/>
         </p:nvSpPr>
@@ -6657,7 +6581,7 @@
       </p:sp>
       <p:sp>
         <p:nvSpPr>
-          <p:cNvPr id="58" name="TextBox 57"/>
+          <p:cNvPr id="56" name="TextBox 55"/>
           <p:cNvSpPr txBox="1"/>
           <p:nvPr/>
         </p:nvSpPr>
@@ -6695,7 +6619,7 @@
       </p:sp>
       <p:sp>
         <p:nvSpPr>
-          <p:cNvPr id="59" name="TextBox 58"/>
+          <p:cNvPr id="57" name="TextBox 56"/>
           <p:cNvSpPr txBox="1"/>
           <p:nvPr/>
         </p:nvSpPr>
@@ -6726,14 +6650,14 @@
                 </a:solidFill>
                 <a:latin typeface="Calibri"/>
               </a:rPr>
-              <a:t>Per-policy BASE (tiered):</a:t>
+              <a:t>Per-policy BASE (NB &amp; RWR only):</a:t>
             </a:r>
           </a:p>
         </p:txBody>
       </p:sp>
       <p:sp>
         <p:nvSpPr>
-          <p:cNvPr id="60" name="TextBox 59"/>
+          <p:cNvPr id="58" name="TextBox 57"/>
           <p:cNvSpPr txBox="1"/>
           <p:nvPr/>
         </p:nvSpPr>
@@ -6771,51 +6695,13 @@
       </p:sp>
       <p:sp>
         <p:nvSpPr>
-          <p:cNvPr id="61" name="TextBox 60"/>
+          <p:cNvPr id="59" name="TextBox 58"/>
           <p:cNvSpPr txBox="1"/>
           <p:nvPr/>
         </p:nvSpPr>
         <p:spPr>
           <a:xfrm>
             <a:off x="8266176" y="2596896"/>
-            <a:ext cx="3520440" cy="196596"/>
-          </a:xfrm>
-          <a:prstGeom prst="rect">
-            <a:avLst/>
-          </a:prstGeom>
-          <a:noFill/>
-          <a:ln>
-            <a:noFill/>
-          </a:ln>
-        </p:spPr>
-        <p:txBody>
-          <a:bodyPr wrap="square" lIns="73152" rIns="73152" tIns="36576" bIns="36576" anchor="t">
-            <a:spAutoFit/>
-          </a:bodyPr>
-          <a:lstStyle/>
-          <a:p>
-            <a:pPr algn="l"/>
-            <a:r>
-              <a:rPr sz="1000" b="0" i="0">
-                <a:solidFill>
-                  <a:srgbClr val="1F4E78"/>
-                </a:solidFill>
-                <a:latin typeface="Calibri"/>
-              </a:rPr>
-              <a:t>  REN tier '$1,200-$1,799': 69 x $6 = $414</a:t>
-            </a:r>
-          </a:p>
-        </p:txBody>
-      </p:sp>
-      <p:sp>
-        <p:nvSpPr>
-          <p:cNvPr id="62" name="TextBox 61"/>
-          <p:cNvSpPr txBox="1"/>
-          <p:nvPr/>
-        </p:nvSpPr>
-        <p:spPr>
-          <a:xfrm>
-            <a:off x="8266176" y="2793492"/>
             <a:ext cx="3520440" cy="196596"/>
           </a:xfrm>
           <a:prstGeom prst="rect">
@@ -6847,13 +6733,13 @@
       </p:sp>
       <p:sp>
         <p:nvSpPr>
-          <p:cNvPr id="63" name="TextBox 62"/>
+          <p:cNvPr id="60" name="TextBox 59"/>
           <p:cNvSpPr txBox="1"/>
           <p:nvPr/>
         </p:nvSpPr>
         <p:spPr>
           <a:xfrm>
-            <a:off x="8266176" y="2990088"/>
+            <a:off x="8266176" y="2793492"/>
             <a:ext cx="3520440" cy="196596"/>
           </a:xfrm>
           <a:prstGeom prst="rect">
@@ -6878,20 +6764,20 @@
                 </a:solidFill>
                 <a:latin typeface="Calibri"/>
               </a:rPr>
-              <a:t>Collected incentive (&gt;$1,200 only):</a:t>
+              <a:t>Collected incentive (&gt;$1,200 NB &amp; RWR only):</a:t>
             </a:r>
           </a:p>
         </p:txBody>
       </p:sp>
       <p:sp>
         <p:nvSpPr>
-          <p:cNvPr id="64" name="TextBox 63"/>
+          <p:cNvPr id="61" name="TextBox 60"/>
           <p:cNvSpPr txBox="1"/>
           <p:nvPr/>
         </p:nvSpPr>
         <p:spPr>
           <a:xfrm>
-            <a:off x="8266176" y="3186684"/>
+            <a:off x="8266176" y="2990088"/>
             <a:ext cx="3520440" cy="196596"/>
           </a:xfrm>
           <a:prstGeom prst="rect">
@@ -6923,51 +6809,13 @@
       </p:sp>
       <p:sp>
         <p:nvSpPr>
-          <p:cNvPr id="65" name="TextBox 64"/>
+          <p:cNvPr id="62" name="TextBox 61"/>
           <p:cNvSpPr txBox="1"/>
           <p:nvPr/>
         </p:nvSpPr>
         <p:spPr>
           <a:xfrm>
-            <a:off x="8266176" y="3383280"/>
-            <a:ext cx="3520440" cy="196596"/>
-          </a:xfrm>
-          <a:prstGeom prst="rect">
-            <a:avLst/>
-          </a:prstGeom>
-          <a:noFill/>
-          <a:ln>
-            <a:noFill/>
-          </a:ln>
-        </p:spPr>
-        <p:txBody>
-          <a:bodyPr wrap="square" lIns="73152" rIns="73152" tIns="36576" bIns="36576" anchor="t">
-            <a:spAutoFit/>
-          </a:bodyPr>
-          <a:lstStyle/>
-          <a:p>
-            <a:pPr algn="l"/>
-            <a:r>
-              <a:rPr sz="1000" b="0" i="0">
-                <a:solidFill>
-                  <a:srgbClr val="1F4E78"/>
-                </a:solidFill>
-                <a:latin typeface="Calibri"/>
-              </a:rPr>
-              <a:t>  REN +$2/pol x 44% = $61</a:t>
-            </a:r>
-          </a:p>
-        </p:txBody>
-      </p:sp>
-      <p:sp>
-        <p:nvSpPr>
-          <p:cNvPr id="66" name="TextBox 65"/>
-          <p:cNvSpPr txBox="1"/>
-          <p:nvPr/>
-        </p:nvSpPr>
-        <p:spPr>
-          <a:xfrm>
-            <a:off x="8266176" y="3579876"/>
+            <a:off x="8266176" y="3186684"/>
             <a:ext cx="3520440" cy="196596"/>
           </a:xfrm>
           <a:prstGeom prst="rect">
@@ -6999,7 +6847,83 @@
       </p:sp>
       <p:sp>
         <p:nvSpPr>
-          <p:cNvPr id="67" name="TextBox 66"/>
+          <p:cNvPr id="63" name="TextBox 62"/>
+          <p:cNvSpPr txBox="1"/>
+          <p:nvPr/>
+        </p:nvSpPr>
+        <p:spPr>
+          <a:xfrm>
+            <a:off x="8266176" y="3383280"/>
+            <a:ext cx="3520440" cy="196596"/>
+          </a:xfrm>
+          <a:prstGeom prst="rect">
+            <a:avLst/>
+          </a:prstGeom>
+          <a:noFill/>
+          <a:ln>
+            <a:noFill/>
+          </a:ln>
+        </p:spPr>
+        <p:txBody>
+          <a:bodyPr wrap="square" lIns="73152" rIns="73152" tIns="36576" bIns="36576" anchor="t">
+            <a:spAutoFit/>
+          </a:bodyPr>
+          <a:lstStyle/>
+          <a:p>
+            <a:pPr algn="l"/>
+            <a:r>
+              <a:rPr sz="1000" b="1" i="0">
+                <a:solidFill>
+                  <a:srgbClr val="BF9000"/>
+                </a:solidFill>
+                <a:latin typeface="Calibri"/>
+              </a:rPr>
+              <a:t>Renewals paid via retention bonus only:</a:t>
+            </a:r>
+          </a:p>
+        </p:txBody>
+      </p:sp>
+      <p:sp>
+        <p:nvSpPr>
+          <p:cNvPr id="64" name="TextBox 63"/>
+          <p:cNvSpPr txBox="1"/>
+          <p:nvPr/>
+        </p:nvSpPr>
+        <p:spPr>
+          <a:xfrm>
+            <a:off x="8266176" y="3579876"/>
+            <a:ext cx="3520440" cy="196596"/>
+          </a:xfrm>
+          <a:prstGeom prst="rect">
+            <a:avLst/>
+          </a:prstGeom>
+          <a:noFill/>
+          <a:ln>
+            <a:noFill/>
+          </a:ln>
+        </p:spPr>
+        <p:txBody>
+          <a:bodyPr wrap="square" lIns="73152" rIns="73152" tIns="36576" bIns="36576" anchor="t">
+            <a:spAutoFit/>
+          </a:bodyPr>
+          <a:lstStyle/>
+          <a:p>
+            <a:pPr algn="l"/>
+            <a:r>
+              <a:rPr sz="1000" b="0" i="0">
+                <a:solidFill>
+                  <a:srgbClr val="1F4E78"/>
+                </a:solidFill>
+                <a:latin typeface="Calibri"/>
+              </a:rPr>
+              <a:t>  Retention = REN $96k x 1% = $962</a:t>
+            </a:r>
+          </a:p>
+        </p:txBody>
+      </p:sp>
+      <p:sp>
+        <p:nvSpPr>
+          <p:cNvPr id="65" name="TextBox 64"/>
           <p:cNvSpPr txBox="1"/>
           <p:nvPr/>
         </p:nvSpPr>
@@ -7026,62 +6950,24 @@
             <a:r>
               <a:rPr sz="1000" b="1" i="0">
                 <a:solidFill>
-                  <a:srgbClr val="1F4E78"/>
+                  <a:srgbClr val="BF9000"/>
                 </a:solidFill>
                 <a:latin typeface="Calibri"/>
               </a:rPr>
-              <a:t>Retention (REN $96k x 0.5%) = $481</a:t>
+              <a:t>TARGET TOTAL = $1280</a:t>
             </a:r>
           </a:p>
         </p:txBody>
       </p:sp>
       <p:sp>
         <p:nvSpPr>
-          <p:cNvPr id="68" name="TextBox 67"/>
+          <p:cNvPr id="66" name="TextBox 65"/>
           <p:cNvSpPr txBox="1"/>
           <p:nvPr/>
         </p:nvSpPr>
         <p:spPr>
           <a:xfrm>
             <a:off x="8266176" y="3973068"/>
-            <a:ext cx="3520440" cy="196596"/>
-          </a:xfrm>
-          <a:prstGeom prst="rect">
-            <a:avLst/>
-          </a:prstGeom>
-          <a:noFill/>
-          <a:ln>
-            <a:noFill/>
-          </a:ln>
-        </p:spPr>
-        <p:txBody>
-          <a:bodyPr wrap="square" lIns="73152" rIns="73152" tIns="36576" bIns="36576" anchor="t">
-            <a:spAutoFit/>
-          </a:bodyPr>
-          <a:lstStyle/>
-          <a:p>
-            <a:pPr algn="l"/>
-            <a:r>
-              <a:rPr sz="1000" b="1" i="0">
-                <a:solidFill>
-                  <a:srgbClr val="BF9000"/>
-                </a:solidFill>
-                <a:latin typeface="Calibri"/>
-              </a:rPr>
-              <a:t>TARGET TOTAL = $1274</a:t>
-            </a:r>
-          </a:p>
-        </p:txBody>
-      </p:sp>
-      <p:sp>
-        <p:nvSpPr>
-          <p:cNvPr id="69" name="TextBox 68"/>
-          <p:cNvSpPr txBox="1"/>
-          <p:nvPr/>
-        </p:nvSpPr>
-        <p:spPr>
-          <a:xfrm>
-            <a:off x="8266176" y="4169664"/>
             <a:ext cx="3520440" cy="196596"/>
           </a:xfrm>
           <a:prstGeom prst="rect">
@@ -7113,13 +6999,13 @@
       </p:sp>
       <p:sp>
         <p:nvSpPr>
-          <p:cNvPr id="70" name="TextBox 69"/>
+          <p:cNvPr id="67" name="TextBox 66"/>
           <p:cNvSpPr txBox="1"/>
           <p:nvPr/>
         </p:nvSpPr>
         <p:spPr>
           <a:xfrm>
-            <a:off x="8266176" y="4366260"/>
+            <a:off x="8266176" y="4169664"/>
             <a:ext cx="3520440" cy="196596"/>
           </a:xfrm>
           <a:prstGeom prst="rect">
@@ -7151,13 +7037,13 @@
       </p:sp>
       <p:sp>
         <p:nvSpPr>
-          <p:cNvPr id="71" name="TextBox 70"/>
+          <p:cNvPr id="68" name="TextBox 67"/>
           <p:cNvSpPr txBox="1"/>
           <p:nvPr/>
         </p:nvSpPr>
         <p:spPr>
           <a:xfrm>
-            <a:off x="8266176" y="4562856"/>
+            <a:off x="8266176" y="4366260"/>
             <a:ext cx="3520440" cy="196596"/>
           </a:xfrm>
           <a:prstGeom prst="rect">
@@ -7189,7 +7075,45 @@
       </p:sp>
       <p:sp>
         <p:nvSpPr>
-          <p:cNvPr id="72" name="TextBox 71"/>
+          <p:cNvPr id="69" name="TextBox 68"/>
+          <p:cNvSpPr txBox="1"/>
+          <p:nvPr/>
+        </p:nvSpPr>
+        <p:spPr>
+          <a:xfrm>
+            <a:off x="8266176" y="4562856"/>
+            <a:ext cx="3520440" cy="196596"/>
+          </a:xfrm>
+          <a:prstGeom prst="rect">
+            <a:avLst/>
+          </a:prstGeom>
+          <a:noFill/>
+          <a:ln>
+            <a:noFill/>
+          </a:ln>
+        </p:spPr>
+        <p:txBody>
+          <a:bodyPr wrap="square" lIns="73152" rIns="73152" tIns="36576" bIns="36576" anchor="t">
+            <a:spAutoFit/>
+          </a:bodyPr>
+          <a:lstStyle/>
+          <a:p>
+            <a:pPr algn="l"/>
+            <a:r>
+              <a:rPr sz="1000" b="0" i="0">
+                <a:solidFill>
+                  <a:srgbClr val="70AD47"/>
+                </a:solidFill>
+                <a:latin typeface="Calibri"/>
+              </a:rPr>
+              <a:t>  RWR (follows NB): PASS</a:t>
+            </a:r>
+          </a:p>
+        </p:txBody>
+      </p:sp>
+      <p:sp>
+        <p:nvSpPr>
+          <p:cNvPr id="70" name="TextBox 69"/>
           <p:cNvSpPr txBox="1"/>
           <p:nvPr/>
         </p:nvSpPr>
@@ -7214,51 +7138,13 @@
           <a:p>
             <a:pPr algn="l"/>
             <a:r>
-              <a:rPr sz="1000" b="0" i="0">
-                <a:solidFill>
-                  <a:srgbClr val="70AD47"/>
-                </a:solidFill>
-                <a:latin typeface="Calibri"/>
-              </a:rPr>
-              <a:t>  RWR (both): PASS</a:t>
-            </a:r>
-          </a:p>
-        </p:txBody>
-      </p:sp>
-      <p:sp>
-        <p:nvSpPr>
-          <p:cNvPr id="73" name="TextBox 72"/>
-          <p:cNvSpPr txBox="1"/>
-          <p:nvPr/>
-        </p:nvSpPr>
-        <p:spPr>
-          <a:xfrm>
-            <a:off x="8266176" y="4956048"/>
-            <a:ext cx="3520440" cy="196596"/>
-          </a:xfrm>
-          <a:prstGeom prst="rect">
-            <a:avLst/>
-          </a:prstGeom>
-          <a:noFill/>
-          <a:ln>
-            <a:noFill/>
-          </a:ln>
-        </p:spPr>
-        <p:txBody>
-          <a:bodyPr wrap="square" lIns="73152" rIns="73152" tIns="36576" bIns="36576" anchor="t">
-            <a:spAutoFit/>
-          </a:bodyPr>
-          <a:lstStyle/>
-          <a:p>
-            <a:pPr algn="l"/>
-            <a:r>
               <a:rPr sz="1000" b="1" i="0">
                 <a:solidFill>
                   <a:srgbClr val="BF9000"/>
                 </a:solidFill>
                 <a:latin typeface="Calibri"/>
               </a:rPr>
-              <a:t>PAID = $1274</a:t>
+              <a:t>PAID = $1280</a:t>
             </a:r>
           </a:p>
         </p:txBody>
@@ -8344,7 +8230,7 @@
                           </a:solidFill>
                           <a:latin typeface="Calibri"/>
                         </a:rPr>
-                        <a:t>$67</a:t>
+                        <a:t>$75</a:t>
                       </a:r>
                     </a:p>
                   </a:txBody>
@@ -8599,7 +8485,7 @@
                           </a:solidFill>
                           <a:latin typeface="Calibri"/>
                         </a:rPr>
-                        <a:t>$320</a:t>
+                        <a:t>$317</a:t>
                       </a:r>
                     </a:p>
                   </a:txBody>
@@ -8854,7 +8740,7 @@
                           </a:solidFill>
                           <a:latin typeface="Calibri"/>
                         </a:rPr>
-                        <a:t>$115</a:t>
+                        <a:t>$109</a:t>
                       </a:r>
                     </a:p>
                   </a:txBody>
@@ -9109,7 +8995,7 @@
                           </a:solidFill>
                           <a:latin typeface="Calibri"/>
                         </a:rPr>
-                        <a:t>$579</a:t>
+                        <a:t>$577</a:t>
                       </a:r>
                     </a:p>
                   </a:txBody>
@@ -9692,7 +9578,7 @@
                           </a:solidFill>
                           <a:latin typeface="Calibri"/>
                         </a:rPr>
-                        <a:t>$221</a:t>
+                        <a:t>$214</a:t>
                       </a:r>
                     </a:p>
                   </a:txBody>
@@ -9947,7 +9833,7 @@
                           </a:solidFill>
                           <a:latin typeface="Calibri"/>
                         </a:rPr>
-                        <a:t>$223</a:t>
+                        <a:t>$228</a:t>
                       </a:r>
                     </a:p>
                   </a:txBody>
@@ -10202,7 +10088,7 @@
                           </a:solidFill>
                           <a:latin typeface="Calibri"/>
                         </a:rPr>
-                        <a:t>$430</a:t>
+                        <a:t>$410</a:t>
                       </a:r>
                     </a:p>
                   </a:txBody>
@@ -10457,7 +10343,7 @@
                           </a:solidFill>
                           <a:latin typeface="Calibri"/>
                         </a:rPr>
-                        <a:t>$194</a:t>
+                        <a:t>$186</a:t>
                       </a:r>
                     </a:p>
                   </a:txBody>
@@ -10712,7 +10598,7 @@
                           </a:solidFill>
                           <a:latin typeface="Calibri"/>
                         </a:rPr>
-                        <a:t>$1068</a:t>
+                        <a:t>$1038</a:t>
                       </a:r>
                     </a:p>
                   </a:txBody>
@@ -11295,7 +11181,7 @@
                           </a:solidFill>
                           <a:latin typeface="Calibri"/>
                         </a:rPr>
-                        <a:t>$259</a:t>
+                        <a:t>$275</a:t>
                       </a:r>
                     </a:p>
                   </a:txBody>
@@ -11550,7 +11436,7 @@
                           </a:solidFill>
                           <a:latin typeface="Calibri"/>
                         </a:rPr>
-                        <a:t>$267</a:t>
+                        <a:t>$306</a:t>
                       </a:r>
                     </a:p>
                   </a:txBody>
@@ -11805,7 +11691,7 @@
                           </a:solidFill>
                           <a:latin typeface="Calibri"/>
                         </a:rPr>
-                        <a:t>$467</a:t>
+                        <a:t>$475</a:t>
                       </a:r>
                     </a:p>
                   </a:txBody>
@@ -12315,7 +12201,7 @@
                           </a:solidFill>
                           <a:latin typeface="Calibri"/>
                         </a:rPr>
-                        <a:t>$1148</a:t>
+                        <a:t>$1210</a:t>
                       </a:r>
                     </a:p>
                   </a:txBody>
@@ -12363,7 +12249,7 @@
                 </a:solidFill>
                 <a:latin typeface="Calibri"/>
               </a:rPr>
-              <a:t>Today's current plan pays $1,300. Plan B WITH MIN: REAL $579 | SWAP $1,068 | FLIP $1,148.</a:t>
+              <a:t>Today's current plan pays $1,300. Plan B WITH MIN: REAL $577 | SWAP $1,038 | FLIP $1,210.</a:t>
             </a:r>
           </a:p>
         </p:txBody>
@@ -13194,7 +13080,7 @@
                           </a:solidFill>
                           <a:latin typeface="Calibri"/>
                         </a:rPr>
-                        <a:t>$123</a:t>
+                        <a:t>$125</a:t>
                       </a:r>
                     </a:p>
                   </a:txBody>
@@ -13704,7 +13590,7 @@
                           </a:solidFill>
                           <a:latin typeface="Calibri"/>
                         </a:rPr>
-                        <a:t>$630</a:t>
+                        <a:t>$626</a:t>
                       </a:r>
                     </a:p>
                   </a:txBody>
@@ -13959,7 +13845,7 @@
                           </a:solidFill>
                           <a:latin typeface="Calibri"/>
                         </a:rPr>
-                        <a:t>$604</a:t>
+                        <a:t>$680</a:t>
                       </a:r>
                     </a:p>
                   </a:txBody>
@@ -14214,7 +14100,7 @@
                           </a:solidFill>
                           <a:latin typeface="Calibri"/>
                         </a:rPr>
-                        <a:t>$1473</a:t>
+                        <a:t>$1548</a:t>
                       </a:r>
                     </a:p>
                   </a:txBody>
@@ -14797,7 +14683,7 @@
                           </a:solidFill>
                           <a:latin typeface="Calibri"/>
                         </a:rPr>
-                        <a:t>$464</a:t>
+                        <a:t>$454</a:t>
                       </a:r>
                     </a:p>
                   </a:txBody>
@@ -15052,7 +14938,7 @@
                           </a:solidFill>
                           <a:latin typeface="Calibri"/>
                         </a:rPr>
-                        <a:t>$512</a:t>
+                        <a:t>$544</a:t>
                       </a:r>
                     </a:p>
                   </a:txBody>
@@ -15307,7 +15193,7 @@
                           </a:solidFill>
                           <a:latin typeface="Calibri"/>
                         </a:rPr>
-                        <a:t>$983</a:t>
+                        <a:t>$975</a:t>
                       </a:r>
                     </a:p>
                   </a:txBody>
@@ -15562,7 +15448,7 @@
                           </a:solidFill>
                           <a:latin typeface="Calibri"/>
                         </a:rPr>
-                        <a:t>$858</a:t>
+                        <a:t>$883</a:t>
                       </a:r>
                     </a:p>
                   </a:txBody>
@@ -15817,7 +15703,7 @@
                           </a:solidFill>
                           <a:latin typeface="Calibri"/>
                         </a:rPr>
-                        <a:t>$2817</a:t>
+                        <a:t>$2855</a:t>
                       </a:r>
                     </a:p>
                   </a:txBody>
@@ -16400,7 +16286,7 @@
                           </a:solidFill>
                           <a:latin typeface="Calibri"/>
                         </a:rPr>
-                        <a:t>$637</a:t>
+                        <a:t>$657</a:t>
                       </a:r>
                     </a:p>
                   </a:txBody>
@@ -16655,7 +16541,7 @@
                           </a:solidFill>
                           <a:latin typeface="Calibri"/>
                         </a:rPr>
-                        <a:t>$793</a:t>
+                        <a:t>$855</a:t>
                       </a:r>
                     </a:p>
                   </a:txBody>
@@ -16910,7 +16796,7 @@
                           </a:solidFill>
                           <a:latin typeface="Calibri"/>
                         </a:rPr>
-                        <a:t>$1274</a:t>
+                        <a:t>$1280</a:t>
                       </a:r>
                     </a:p>
                   </a:txBody>
@@ -17165,7 +17051,7 @@
                           </a:solidFill>
                           <a:latin typeface="Calibri"/>
                         </a:rPr>
-                        <a:t>$947</a:t>
+                        <a:t>$899</a:t>
                       </a:r>
                     </a:p>
                   </a:txBody>
@@ -17420,7 +17306,7 @@
                           </a:solidFill>
                           <a:latin typeface="Calibri"/>
                         </a:rPr>
-                        <a:t>$3651</a:t>
+                        <a:t>$3692</a:t>
                       </a:r>
                     </a:p>
                   </a:txBody>
@@ -17468,7 +17354,7 @@
                 </a:solidFill>
                 <a:latin typeface="Calibri"/>
               </a:rPr>
-              <a:t>Today's current plan pays $3,140. Plan B WITH MIN: REAL $1,473 | SWAP $2,817 | FLIP $3,651.</a:t>
+              <a:t>Today's current plan pays $3,140. Plan B WITH MIN: REAL $1,548 | SWAP $2,855 | FLIP $3,692.</a:t>
             </a:r>
           </a:p>
         </p:txBody>
@@ -18554,7 +18440,7 @@
                           </a:solidFill>
                           <a:latin typeface="Calibri"/>
                         </a:rPr>
-                        <a:t>$9</a:t>
+                        <a:t>$11</a:t>
                       </a:r>
                     </a:p>
                   </a:txBody>
@@ -18809,7 +18695,7 @@
                           </a:solidFill>
                           <a:latin typeface="Calibri"/>
                         </a:rPr>
-                        <a:t>$9</a:t>
+                        <a:t>$10</a:t>
                       </a:r>
                     </a:p>
                   </a:txBody>
@@ -19319,7 +19205,7 @@
                           </a:solidFill>
                           <a:latin typeface="Calibri"/>
                         </a:rPr>
-                        <a:t>$19</a:t>
+                        <a:t>$21</a:t>
                       </a:r>
                     </a:p>
                   </a:txBody>
@@ -19902,7 +19788,7 @@
                           </a:solidFill>
                           <a:latin typeface="Calibri"/>
                         </a:rPr>
-                        <a:t>$312</a:t>
+                        <a:t>$317</a:t>
                       </a:r>
                     </a:p>
                   </a:txBody>
@@ -20157,7 +20043,7 @@
                           </a:solidFill>
                           <a:latin typeface="Calibri"/>
                         </a:rPr>
-                        <a:t>$244</a:t>
+                        <a:t>$261</a:t>
                       </a:r>
                     </a:p>
                   </a:txBody>
@@ -20412,7 +20298,7 @@
                           </a:solidFill>
                           <a:latin typeface="Calibri"/>
                         </a:rPr>
-                        <a:t>$255</a:t>
+                        <a:t>$295</a:t>
                       </a:r>
                     </a:p>
                   </a:txBody>
@@ -20667,7 +20553,7 @@
                           </a:solidFill>
                           <a:latin typeface="Calibri"/>
                         </a:rPr>
-                        <a:t>$223</a:t>
+                        <a:t>$217</a:t>
                       </a:r>
                     </a:p>
                   </a:txBody>
@@ -20922,7 +20808,7 @@
                           </a:solidFill>
                           <a:latin typeface="Calibri"/>
                         </a:rPr>
-                        <a:t>$1034</a:t>
+                        <a:t>$1089</a:t>
                       </a:r>
                     </a:p>
                   </a:txBody>
@@ -21505,7 +21391,7 @@
                           </a:solidFill>
                           <a:latin typeface="Calibri"/>
                         </a:rPr>
-                        <a:t>$624</a:t>
+                        <a:t>$634</a:t>
                       </a:r>
                     </a:p>
                   </a:txBody>
@@ -21760,7 +21646,7 @@
                           </a:solidFill>
                           <a:latin typeface="Calibri"/>
                         </a:rPr>
-                        <a:t>$472</a:t>
+                        <a:t>$500</a:t>
                       </a:r>
                     </a:p>
                   </a:txBody>
@@ -22015,7 +21901,7 @@
                           </a:solidFill>
                           <a:latin typeface="Calibri"/>
                         </a:rPr>
-                        <a:t>$492</a:t>
+                        <a:t>$569</a:t>
                       </a:r>
                     </a:p>
                   </a:txBody>
@@ -22270,7 +22156,7 @@
                           </a:solidFill>
                           <a:latin typeface="Calibri"/>
                         </a:rPr>
-                        <a:t>$377</a:t>
+                        <a:t>$434</a:t>
                       </a:r>
                     </a:p>
                   </a:txBody>
@@ -22525,7 +22411,7 @@
                           </a:solidFill>
                           <a:latin typeface="Calibri"/>
                         </a:rPr>
-                        <a:t>$1965</a:t>
+                        <a:t>$2136</a:t>
                       </a:r>
                     </a:p>
                   </a:txBody>
@@ -22573,7 +22459,7 @@
                 </a:solidFill>
                 <a:latin typeface="Calibri"/>
               </a:rPr>
-              <a:t>Today's current plan pays $2,370. Plan B WITH MIN: REAL $19 | SWAP $1,034 | FLIP $1,965.</a:t>
+              <a:t>Today's current plan pays $2,370. Plan B WITH MIN: REAL $21 | SWAP $1,089 | FLIP $2,136.</a:t>
             </a:r>
           </a:p>
         </p:txBody>
@@ -23404,7 +23290,7 @@
                           </a:solidFill>
                           <a:latin typeface="Calibri"/>
                         </a:rPr>
-                        <a:t>$14</a:t>
+                        <a:t>$15</a:t>
                       </a:r>
                     </a:p>
                   </a:txBody>
@@ -23659,7 +23545,7 @@
                           </a:solidFill>
                           <a:latin typeface="Calibri"/>
                         </a:rPr>
-                        <a:t>$19</a:t>
+                        <a:t>$21</a:t>
                       </a:r>
                     </a:p>
                   </a:txBody>
@@ -24169,7 +24055,7 @@
                           </a:solidFill>
                           <a:latin typeface="Calibri"/>
                         </a:rPr>
-                        <a:t>$10</a:t>
+                        <a:t>$9</a:t>
                       </a:r>
                     </a:p>
                   </a:txBody>
@@ -24424,7 +24310,7 @@
                           </a:solidFill>
                           <a:latin typeface="Calibri"/>
                         </a:rPr>
-                        <a:t>$43</a:t>
+                        <a:t>$44</a:t>
                       </a:r>
                     </a:p>
                   </a:txBody>
@@ -25007,7 +24893,7 @@
                           </a:solidFill>
                           <a:latin typeface="Calibri"/>
                         </a:rPr>
-                        <a:t>$193</a:t>
+                        <a:t>$212</a:t>
                       </a:r>
                     </a:p>
                   </a:txBody>
@@ -25262,7 +25148,7 @@
                           </a:solidFill>
                           <a:latin typeface="Calibri"/>
                         </a:rPr>
-                        <a:t>$240</a:t>
+                        <a:t>$239</a:t>
                       </a:r>
                     </a:p>
                   </a:txBody>
@@ -25517,7 +25403,7 @@
                           </a:solidFill>
                           <a:latin typeface="Calibri"/>
                         </a:rPr>
-                        <a:t>$124</a:t>
+                        <a:t>$118</a:t>
                       </a:r>
                     </a:p>
                   </a:txBody>
@@ -25772,7 +25658,7 @@
                           </a:solidFill>
                           <a:latin typeface="Calibri"/>
                         </a:rPr>
-                        <a:t>$166</a:t>
+                        <a:t>$163</a:t>
                       </a:r>
                     </a:p>
                   </a:txBody>
@@ -26027,7 +25913,7 @@
                           </a:solidFill>
                           <a:latin typeface="Calibri"/>
                         </a:rPr>
-                        <a:t>$724</a:t>
+                        <a:t>$733</a:t>
                       </a:r>
                     </a:p>
                   </a:txBody>
@@ -26610,7 +26496,7 @@
                           </a:solidFill>
                           <a:latin typeface="Calibri"/>
                         </a:rPr>
-                        <a:t>$358</a:t>
+                        <a:t>$396</a:t>
                       </a:r>
                     </a:p>
                   </a:txBody>
@@ -26865,7 +26751,7 @@
                           </a:solidFill>
                           <a:latin typeface="Calibri"/>
                         </a:rPr>
-                        <a:t>$438</a:t>
+                        <a:t>$437</a:t>
                       </a:r>
                     </a:p>
                   </a:txBody>
@@ -27120,7 +27006,7 @@
                           </a:solidFill>
                           <a:latin typeface="Calibri"/>
                         </a:rPr>
-                        <a:t>$246</a:t>
+                        <a:t>$235</a:t>
                       </a:r>
                     </a:p>
                   </a:txBody>
@@ -27375,7 +27261,7 @@
                           </a:solidFill>
                           <a:latin typeface="Calibri"/>
                         </a:rPr>
-                        <a:t>$312</a:t>
+                        <a:t>$308</a:t>
                       </a:r>
                     </a:p>
                   </a:txBody>
@@ -27630,7 +27516,7 @@
                           </a:solidFill>
                           <a:latin typeface="Calibri"/>
                         </a:rPr>
-                        <a:t>$1354</a:t>
+                        <a:t>$1376</a:t>
                       </a:r>
                     </a:p>
                   </a:txBody>
@@ -27678,7 +27564,7 @@
                 </a:solidFill>
                 <a:latin typeface="Calibri"/>
               </a:rPr>
-              <a:t>Today's current plan pays $2,070. Plan B WITH MIN: REAL $43 | SWAP $724 | FLIP $1,354.</a:t>
+              <a:t>Today's current plan pays $2,070. Plan B WITH MIN: REAL $44 | SWAP $733 | FLIP $1,376.</a:t>
             </a:r>
           </a:p>
         </p:txBody>
@@ -28509,7 +28395,7 @@
                           </a:solidFill>
                           <a:latin typeface="Calibri"/>
                         </a:rPr>
-                        <a:t>$35</a:t>
+                        <a:t>$37</a:t>
                       </a:r>
                     </a:p>
                   </a:txBody>
@@ -28764,7 +28650,7 @@
                           </a:solidFill>
                           <a:latin typeface="Calibri"/>
                         </a:rPr>
-                        <a:t>$80</a:t>
+                        <a:t>$74</a:t>
                       </a:r>
                     </a:p>
                   </a:txBody>
@@ -29019,7 +28905,7 @@
                           </a:solidFill>
                           <a:latin typeface="Calibri"/>
                         </a:rPr>
-                        <a:t>$58</a:t>
+                        <a:t>$56</a:t>
                       </a:r>
                     </a:p>
                   </a:txBody>
@@ -29274,7 +29160,7 @@
                           </a:solidFill>
                           <a:latin typeface="Calibri"/>
                         </a:rPr>
-                        <a:t>$41</a:t>
+                        <a:t>$36</a:t>
                       </a:r>
                     </a:p>
                   </a:txBody>
@@ -29529,7 +29415,7 @@
                           </a:solidFill>
                           <a:latin typeface="Calibri"/>
                         </a:rPr>
-                        <a:t>$214</a:t>
+                        <a:t>$204</a:t>
                       </a:r>
                     </a:p>
                   </a:txBody>
@@ -30112,7 +29998,7 @@
                           </a:solidFill>
                           <a:latin typeface="Calibri"/>
                         </a:rPr>
-                        <a:t>$178</a:t>
+                        <a:t>$202</a:t>
                       </a:r>
                     </a:p>
                   </a:txBody>
@@ -30367,7 +30253,7 @@
                           </a:solidFill>
                           <a:latin typeface="Calibri"/>
                         </a:rPr>
-                        <a:t>$242</a:t>
+                        <a:t>$216</a:t>
                       </a:r>
                     </a:p>
                   </a:txBody>
@@ -30622,7 +30508,7 @@
                           </a:solidFill>
                           <a:latin typeface="Calibri"/>
                         </a:rPr>
-                        <a:t>$148</a:t>
+                        <a:t>$156</a:t>
                       </a:r>
                     </a:p>
                   </a:txBody>
@@ -30877,7 +30763,7 @@
                           </a:solidFill>
                           <a:latin typeface="Calibri"/>
                         </a:rPr>
-                        <a:t>$257</a:t>
+                        <a:t>$235</a:t>
                       </a:r>
                     </a:p>
                   </a:txBody>
@@ -31132,7 +31018,7 @@
                           </a:solidFill>
                           <a:latin typeface="Calibri"/>
                         </a:rPr>
-                        <a:t>$825</a:t>
+                        <a:t>$809</a:t>
                       </a:r>
                     </a:p>
                   </a:txBody>
@@ -31715,7 +31601,7 @@
                           </a:solidFill>
                           <a:latin typeface="Calibri"/>
                         </a:rPr>
-                        <a:t>$286</a:t>
+                        <a:t>$331</a:t>
                       </a:r>
                     </a:p>
                   </a:txBody>
@@ -31970,7 +31856,7 @@
                           </a:solidFill>
                           <a:latin typeface="Calibri"/>
                         </a:rPr>
-                        <a:t>$245</a:t>
+                        <a:t>$283</a:t>
                       </a:r>
                     </a:p>
                   </a:txBody>
@@ -32225,7 +32111,7 @@
                           </a:solidFill>
                           <a:latin typeface="Calibri"/>
                         </a:rPr>
-                        <a:t>$185</a:t>
+                        <a:t>$198</a:t>
                       </a:r>
                     </a:p>
                   </a:txBody>
@@ -32480,7 +32366,7 @@
                           </a:solidFill>
                           <a:latin typeface="Calibri"/>
                         </a:rPr>
-                        <a:t>$385</a:t>
+                        <a:t>$398</a:t>
                       </a:r>
                     </a:p>
                   </a:txBody>
@@ -32735,7 +32621,7 @@
                           </a:solidFill>
                           <a:latin typeface="Calibri"/>
                         </a:rPr>
-                        <a:t>$1102</a:t>
+                        <a:t>$1210</a:t>
                       </a:r>
                     </a:p>
                   </a:txBody>
@@ -32783,7 +32669,7 @@
                 </a:solidFill>
                 <a:latin typeface="Calibri"/>
               </a:rPr>
-              <a:t>Today's current plan pays $1,400. Plan B WITH MIN: REAL $214 | SWAP $825 | FLIP $1,102.</a:t>
+              <a:t>Today's current plan pays $1,400. Plan B WITH MIN: REAL $204 | SWAP $809 | FLIP $1,210.</a:t>
             </a:r>
           </a:p>
         </p:txBody>
@@ -33614,7 +33500,7 @@
                           </a:solidFill>
                           <a:latin typeface="Calibri"/>
                         </a:rPr>
-                        <a:t>$60</a:t>
+                        <a:t>$65</a:t>
                       </a:r>
                     </a:p>
                   </a:txBody>
@@ -33869,7 +33755,7 @@
                           </a:solidFill>
                           <a:latin typeface="Calibri"/>
                         </a:rPr>
-                        <a:t>$27</a:t>
+                        <a:t>$31</a:t>
                       </a:r>
                     </a:p>
                   </a:txBody>
@@ -34634,7 +34520,7 @@
                           </a:solidFill>
                           <a:latin typeface="Calibri"/>
                         </a:rPr>
-                        <a:t>$608</a:t>
+                        <a:t>$617</a:t>
                       </a:r>
                     </a:p>
                   </a:txBody>
@@ -35217,7 +35103,7 @@
                           </a:solidFill>
                           <a:latin typeface="Calibri"/>
                         </a:rPr>
-                        <a:t>$307</a:t>
+                        <a:t>$308</a:t>
                       </a:r>
                     </a:p>
                   </a:txBody>
@@ -35472,7 +35358,7 @@
                           </a:solidFill>
                           <a:latin typeface="Calibri"/>
                         </a:rPr>
-                        <a:t>$230</a:t>
+                        <a:t>$267</a:t>
                       </a:r>
                     </a:p>
                   </a:txBody>
@@ -35727,7 +35613,7 @@
                           </a:solidFill>
                           <a:latin typeface="Calibri"/>
                         </a:rPr>
-                        <a:t>$636</a:t>
+                        <a:t>$650</a:t>
                       </a:r>
                     </a:p>
                   </a:txBody>
@@ -35982,7 +35868,7 @@
                           </a:solidFill>
                           <a:latin typeface="Calibri"/>
                         </a:rPr>
-                        <a:t>$186</a:t>
+                        <a:t>$202</a:t>
                       </a:r>
                     </a:p>
                   </a:txBody>
@@ -36237,7 +36123,7 @@
                           </a:solidFill>
                           <a:latin typeface="Calibri"/>
                         </a:rPr>
-                        <a:t>$1359</a:t>
+                        <a:t>$1427</a:t>
                       </a:r>
                     </a:p>
                   </a:txBody>
@@ -36820,7 +36706,7 @@
                           </a:solidFill>
                           <a:latin typeface="Calibri"/>
                         </a:rPr>
-                        <a:t>$480</a:t>
+                        <a:t>$486</a:t>
                       </a:r>
                     </a:p>
                   </a:txBody>
@@ -37075,7 +36961,7 @@
                           </a:solidFill>
                           <a:latin typeface="Calibri"/>
                         </a:rPr>
-                        <a:t>$427</a:t>
+                        <a:t>$472</a:t>
                       </a:r>
                     </a:p>
                   </a:txBody>
@@ -37330,7 +37216,7 @@
                           </a:solidFill>
                           <a:latin typeface="Calibri"/>
                         </a:rPr>
-                        <a:t>$776</a:t>
+                        <a:t>$805</a:t>
                       </a:r>
                     </a:p>
                   </a:txBody>
@@ -37585,7 +37471,7 @@
                           </a:solidFill>
                           <a:latin typeface="Calibri"/>
                         </a:rPr>
-                        <a:t>$333</a:t>
+                        <a:t>$353</a:t>
                       </a:r>
                     </a:p>
                   </a:txBody>
@@ -37840,7 +37726,7 @@
                           </a:solidFill>
                           <a:latin typeface="Calibri"/>
                         </a:rPr>
-                        <a:t>$2016</a:t>
+                        <a:t>$2116</a:t>
                       </a:r>
                     </a:p>
                   </a:txBody>
@@ -37888,7 +37774,7 @@
                 </a:solidFill>
                 <a:latin typeface="Calibri"/>
               </a:rPr>
-              <a:t>Today's current plan pays $1,940. Plan B WITH MIN: REAL $608 | SWAP $1,359 | FLIP $2,016.</a:t>
+              <a:t>Today's current plan pays $1,940. Plan B WITH MIN: REAL $617 | SWAP $1,427 | FLIP $2,116.</a:t>
             </a:r>
           </a:p>
         </p:txBody>
@@ -38447,7 +38333,7 @@
                           </a:solidFill>
                           <a:latin typeface="Calibri"/>
                         </a:rPr>
-                        <a:t>$7,838</a:t>
+                        <a:t>$7,915</a:t>
                       </a:r>
                     </a:p>
                   </a:txBody>
@@ -38470,7 +38356,7 @@
                           </a:solidFill>
                           <a:latin typeface="Calibri"/>
                         </a:rPr>
-                        <a:t>$11,738</a:t>
+                        <a:t>$11,863</a:t>
                       </a:r>
                     </a:p>
                   </a:txBody>
@@ -38493,7 +38379,7 @@
                           </a:solidFill>
                           <a:latin typeface="Calibri"/>
                         </a:rPr>
-                        <a:t>$14,398</a:t>
+                        <a:t>$14,902</a:t>
                       </a:r>
                     </a:p>
                   </a:txBody>
@@ -38564,7 +38450,7 @@
                           </a:solidFill>
                           <a:latin typeface="Calibri"/>
                         </a:rPr>
-                        <a:t>$2,935</a:t>
+                        <a:t>$3,012</a:t>
                       </a:r>
                     </a:p>
                   </a:txBody>
@@ -38587,7 +38473,7 @@
                           </a:solidFill>
                           <a:latin typeface="Calibri"/>
                         </a:rPr>
-                        <a:t>$7,826</a:t>
+                        <a:t>$7,951</a:t>
                       </a:r>
                     </a:p>
                   </a:txBody>
@@ -38610,7 +38496,7 @@
                           </a:solidFill>
                           <a:latin typeface="Calibri"/>
                         </a:rPr>
-                        <a:t>$11,235</a:t>
+                        <a:t>$11,740</a:t>
                       </a:r>
                     </a:p>
                   </a:txBody>
@@ -38681,7 +38567,7 @@
                           </a:solidFill>
                           <a:latin typeface="Calibri"/>
                         </a:rPr>
-                        <a:t>$7,838</a:t>
+                        <a:t>$7,915</a:t>
                       </a:r>
                     </a:p>
                   </a:txBody>
@@ -38704,7 +38590,7 @@
                           </a:solidFill>
                           <a:latin typeface="Calibri"/>
                         </a:rPr>
-                        <a:t>$11,738</a:t>
+                        <a:t>$11,863</a:t>
                       </a:r>
                     </a:p>
                   </a:txBody>
@@ -38727,7 +38613,7 @@
                           </a:solidFill>
                           <a:latin typeface="Calibri"/>
                         </a:rPr>
-                        <a:t>$14,398</a:t>
+                        <a:t>$14,902</a:t>
                       </a:r>
                     </a:p>
                   </a:txBody>
@@ -38798,7 +38684,7 @@
                           </a:solidFill>
                           <a:latin typeface="Calibri"/>
                         </a:rPr>
-                        <a:t>$2,935</a:t>
+                        <a:t>$3,012</a:t>
                       </a:r>
                     </a:p>
                   </a:txBody>
@@ -38821,7 +38707,7 @@
                           </a:solidFill>
                           <a:latin typeface="Calibri"/>
                         </a:rPr>
-                        <a:t>$7,826</a:t>
+                        <a:t>$7,951</a:t>
                       </a:r>
                     </a:p>
                   </a:txBody>
@@ -38844,7 +38730,7 @@
                           </a:solidFill>
                           <a:latin typeface="Calibri"/>
                         </a:rPr>
-                        <a:t>$11,235</a:t>
+                        <a:t>$11,740</a:t>
                       </a:r>
                     </a:p>
                   </a:txBody>
@@ -38973,7 +38859,7 @@
                 </a:solidFill>
                 <a:latin typeface="Calibri"/>
               </a:rPr>
-              <a:t>• Plan B WITH MIN under 100% FLIP = $11,235. Compare to today's current $12,220: agents earn the SAME for doing the RIGHT behavior.</a:t>
+              <a:t>• Plan B WITH MIN under 100% FLIP = $11,740. Compare to today's current $12,220: agents earn the SAME for doing the RIGHT behavior.</a:t>
             </a:r>
           </a:p>
           <a:p>
@@ -38989,7 +38875,7 @@
                 </a:solidFill>
                 <a:latin typeface="Calibri"/>
               </a:rPr>
-              <a:t>• Plan B no-min under FLIP = $14,398, which is ABOVE today's pay. Some headroom if ownership wants to be more generous.</a:t>
+              <a:t>• Plan B no-min under FLIP = $14,902, which is ABOVE today's pay. Some headroom if ownership wants to be more generous.</a:t>
             </a:r>
           </a:p>
           <a:p>
@@ -44603,7 +44489,7 @@
                 </a:solidFill>
                 <a:latin typeface="Calibri"/>
               </a:rPr>
-              <a:t>1. PER-POLICY BASE (TIERED by written premium)</a:t>
+              <a:t>1. PER-POLICY BASE for NB and RWR (TIERED by written premium)</a:t>
             </a:r>
           </a:p>
         </p:txBody>
@@ -44618,7 +44504,7 @@
         </p:nvGraphicFramePr>
         <p:xfrm>
           <a:off x="365760" y="1280160"/>
-          <a:ext cx="5669280" cy="1755648"/>
+          <a:ext cx="5669280" cy="2048256"/>
         </p:xfrm>
         <a:graphic>
           <a:graphicData uri="http://schemas.openxmlformats.org/drawingml/2006/table">
@@ -44627,9 +44513,8 @@
                 <a:tableStyleId>{5C22544A-7EE6-4342-B048-85BDC9FD1C3A}</a:tableStyleId>
               </a:tblPr>
               <a:tblGrid>
-                <a:gridCol w="1828800"/>
-                <a:gridCol w="1554480"/>
-                <a:gridCol w="914400"/>
+                <a:gridCol w="2286000"/>
+                <a:gridCol w="2011680"/>
                 <a:gridCol w="1371600"/>
               </a:tblGrid>
               <a:tr h="292608">
@@ -44702,29 +44587,6 @@
                     </a:solidFill>
                   </a:tcPr>
                 </a:tc>
-                <a:tc>
-                  <a:txBody>
-                    <a:bodyPr lIns="45720" rIns="45720" tIns="18288" bIns="18288" wrap="square" anchor="ctr"/>
-                    <a:lstStyle/>
-                    <a:p>
-                      <a:pPr algn="ctr"/>
-                      <a:r>
-                        <a:rPr sz="1100" b="1">
-                          <a:solidFill>
-                            <a:srgbClr val="FFFFFF"/>
-                          </a:solidFill>
-                          <a:latin typeface="Calibri"/>
-                        </a:rPr>
-                        <a:t>REN</a:t>
-                      </a:r>
-                    </a:p>
-                  </a:txBody>
-                  <a:tcPr>
-                    <a:solidFill>
-                      <a:srgbClr val="70AD47"/>
-                    </a:solidFill>
-                  </a:tcPr>
-                </a:tc>
               </a:tr>
               <a:tr h="292608">
                 <a:tc>
@@ -44796,29 +44658,6 @@
                     </a:solidFill>
                   </a:tcPr>
                 </a:tc>
-                <a:tc>
-                  <a:txBody>
-                    <a:bodyPr lIns="45720" rIns="45720" tIns="18288" bIns="18288" wrap="square" anchor="ctr"/>
-                    <a:lstStyle/>
-                    <a:p>
-                      <a:pPr algn="ctr"/>
-                      <a:r>
-                        <a:rPr sz="1100">
-                          <a:solidFill>
-                            <a:srgbClr val="101010"/>
-                          </a:solidFill>
-                          <a:latin typeface="Calibri"/>
-                        </a:rPr>
-                        <a:t>$4</a:t>
-                      </a:r>
-                    </a:p>
-                  </a:txBody>
-                  <a:tcPr>
-                    <a:solidFill>
-                      <a:srgbClr val="FFFFFF"/>
-                    </a:solidFill>
-                  </a:tcPr>
-                </a:tc>
               </a:tr>
               <a:tr h="292608">
                 <a:tc>
@@ -44890,29 +44729,6 @@
                     </a:solidFill>
                   </a:tcPr>
                 </a:tc>
-                <a:tc>
-                  <a:txBody>
-                    <a:bodyPr lIns="45720" rIns="45720" tIns="18288" bIns="18288" wrap="square" anchor="ctr"/>
-                    <a:lstStyle/>
-                    <a:p>
-                      <a:pPr algn="ctr"/>
-                      <a:r>
-                        <a:rPr sz="1100">
-                          <a:solidFill>
-                            <a:srgbClr val="101010"/>
-                          </a:solidFill>
-                          <a:latin typeface="Calibri"/>
-                        </a:rPr>
-                        <a:t>$6</a:t>
-                      </a:r>
-                    </a:p>
-                  </a:txBody>
-                  <a:tcPr>
-                    <a:solidFill>
-                      <a:srgbClr val="F2F2F2"/>
-                    </a:solidFill>
-                  </a:tcPr>
-                </a:tc>
               </a:tr>
               <a:tr h="292608">
                 <a:tc>
@@ -44984,29 +44800,6 @@
                     </a:solidFill>
                   </a:tcPr>
                 </a:tc>
-                <a:tc>
-                  <a:txBody>
-                    <a:bodyPr lIns="45720" rIns="45720" tIns="18288" bIns="18288" wrap="square" anchor="ctr"/>
-                    <a:lstStyle/>
-                    <a:p>
-                      <a:pPr algn="ctr"/>
-                      <a:r>
-                        <a:rPr sz="1100">
-                          <a:solidFill>
-                            <a:srgbClr val="101010"/>
-                          </a:solidFill>
-                          <a:latin typeface="Calibri"/>
-                        </a:rPr>
-                        <a:t>$8</a:t>
-                      </a:r>
-                    </a:p>
-                  </a:txBody>
-                  <a:tcPr>
-                    <a:solidFill>
-                      <a:srgbClr val="FFFFFF"/>
-                    </a:solidFill>
-                  </a:tcPr>
-                </a:tc>
               </a:tr>
               <a:tr h="292608">
                 <a:tc>
@@ -45078,29 +44871,6 @@
                     </a:solidFill>
                   </a:tcPr>
                 </a:tc>
-                <a:tc>
-                  <a:txBody>
-                    <a:bodyPr lIns="45720" rIns="45720" tIns="18288" bIns="18288" wrap="square" anchor="ctr"/>
-                    <a:lstStyle/>
-                    <a:p>
-                      <a:pPr algn="ctr"/>
-                      <a:r>
-                        <a:rPr sz="1100">
-                          <a:solidFill>
-                            <a:srgbClr val="101010"/>
-                          </a:solidFill>
-                          <a:latin typeface="Calibri"/>
-                        </a:rPr>
-                        <a:t>$10</a:t>
-                      </a:r>
-                    </a:p>
-                  </a:txBody>
-                  <a:tcPr>
-                    <a:solidFill>
-                      <a:srgbClr val="F2F2F2"/>
-                    </a:solidFill>
-                  </a:tcPr>
-                </a:tc>
               </a:tr>
               <a:tr h="292608">
                 <a:tc>
@@ -45172,6 +44942,8 @@
                     </a:solidFill>
                   </a:tcPr>
                 </a:tc>
+              </a:tr>
+              <a:tr h="292608">
                 <a:tc>
                   <a:txBody>
                     <a:bodyPr lIns="45720" rIns="45720" tIns="18288" bIns="18288" wrap="square" anchor="ctr"/>
@@ -45185,13 +44957,59 @@
                           </a:solidFill>
                           <a:latin typeface="Calibri"/>
                         </a:rPr>
-                        <a:t>$10</a:t>
-                      </a:r>
-                    </a:p>
-                  </a:txBody>
-                  <a:tcPr>
-                    <a:solidFill>
-                      <a:srgbClr val="FFFFFF"/>
+                        <a:t>REN (renewals)</a:t>
+                      </a:r>
+                    </a:p>
+                  </a:txBody>
+                  <a:tcPr>
+                    <a:solidFill>
+                      <a:srgbClr val="F2F2F2"/>
+                    </a:solidFill>
+                  </a:tcPr>
+                </a:tc>
+                <a:tc>
+                  <a:txBody>
+                    <a:bodyPr lIns="45720" rIns="45720" tIns="18288" bIns="18288" wrap="square" anchor="ctr"/>
+                    <a:lstStyle/>
+                    <a:p>
+                      <a:pPr algn="ctr"/>
+                      <a:r>
+                        <a:rPr sz="1100">
+                          <a:solidFill>
+                            <a:srgbClr val="101010"/>
+                          </a:solidFill>
+                          <a:latin typeface="Calibri"/>
+                        </a:rPr>
+                        <a:t>see Section 3</a:t>
+                      </a:r>
+                    </a:p>
+                  </a:txBody>
+                  <a:tcPr>
+                    <a:solidFill>
+                      <a:srgbClr val="F2F2F2"/>
+                    </a:solidFill>
+                  </a:tcPr>
+                </a:tc>
+                <a:tc>
+                  <a:txBody>
+                    <a:bodyPr lIns="45720" rIns="45720" tIns="18288" bIns="18288" wrap="square" anchor="ctr"/>
+                    <a:lstStyle/>
+                    <a:p>
+                      <a:pPr algn="ctr"/>
+                      <a:r>
+                        <a:rPr sz="1100">
+                          <a:solidFill>
+                            <a:srgbClr val="101010"/>
+                          </a:solidFill>
+                          <a:latin typeface="Calibri"/>
+                        </a:rPr>
+                        <a:t>see Section 3</a:t>
+                      </a:r>
+                    </a:p>
+                  </a:txBody>
+                  <a:tcPr>
+                    <a:solidFill>
+                      <a:srgbClr val="F2F2F2"/>
                     </a:solidFill>
                   </a:tcPr>
                 </a:tc>
@@ -45585,7 +45403,7 @@
                 </a:solidFill>
                 <a:latin typeface="Calibri"/>
               </a:rPr>
-              <a:t>3. BOOK RETENTION BONUS (paid every month, NOT gated by minimums)</a:t>
+              <a:t>3. RENEWALS = RETENTION BONUS ONLY (NO per-policy REN pay - avoids double-paying)</a:t>
             </a:r>
           </a:p>
         </p:txBody>
@@ -45698,7 +45516,7 @@
                           </a:solidFill>
                           <a:latin typeface="Calibri"/>
                         </a:rPr>
-                        <a:t>Scales with the agent's RENEWABLE BOOK SIZE - bigger book = bigger bonus</a:t>
+                        <a:t>Renewals are paid as ONE bonus scaling with the premium retained. No per-policy REN base or collected incentive.</a:t>
                       </a:r>
                     </a:p>
                   </a:txBody>
@@ -45721,7 +45539,7 @@
                           </a:solidFill>
                           <a:latin typeface="Calibri"/>
                         </a:rPr>
-                        <a:t>REN written premium x 0.5%</a:t>
+                        <a:t>REN written premium x 1%</a:t>
                       </a:r>
                     </a:p>
                   </a:txBody>
@@ -45744,7 +45562,7 @@
                           </a:solidFill>
                           <a:latin typeface="Calibri"/>
                         </a:rPr>
-                        <a:t>$50k REN -&gt; $250/mo | $25k REN -&gt; $125/mo | $10k REN -&gt; $50/mo. Two agents at same retention rate but different book sizes earn DIFFERENT bonuses.</a:t>
+                        <a:t>$50k REN -&gt; $500/mo | $25k REN -&gt; $250/mo | $10k REN -&gt; $100/mo. Bigger book + bigger premium = bigger bonus.</a:t>
                       </a:r>
                     </a:p>
                   </a:txBody>

--- a/output/Bonus_Plan_FINAL.pptx
+++ b/output/Bonus_Plan_FINAL.pptx
@@ -4054,7 +4054,7 @@
                           </a:solidFill>
                           <a:latin typeface="Calibri"/>
                         </a:rPr>
-                        <a:t>$626</a:t>
+                        <a:t>$597</a:t>
                       </a:r>
                     </a:p>
                   </a:txBody>
@@ -4194,7 +4194,7 @@
                           </a:solidFill>
                           <a:latin typeface="Calibri"/>
                         </a:rPr>
-                        <a:t>$975</a:t>
+                        <a:t>$704</a:t>
                       </a:r>
                     </a:p>
                   </a:txBody>
@@ -4334,7 +4334,7 @@
                           </a:solidFill>
                           <a:latin typeface="Calibri"/>
                         </a:rPr>
-                        <a:t>+$348 (GOOD)</a:t>
+                        <a:t>+$108 (GOOD)</a:t>
                       </a:r>
                     </a:p>
                   </a:txBody>
@@ -5296,7 +5296,7 @@
                 </a:solidFill>
                 <a:latin typeface="Calibri"/>
               </a:rPr>
-              <a:t>  Retention = REN $6k x 1% = $60</a:t>
+              <a:t>  Retention = REN $6k x 0.5% = $30</a:t>
             </a:r>
           </a:p>
         </p:txBody>
@@ -5334,7 +5334,7 @@
                 </a:solidFill>
                 <a:latin typeface="Calibri"/>
               </a:rPr>
-              <a:t>TARGET TOTAL = $626</a:t>
+              <a:t>TARGET TOTAL = $597</a:t>
             </a:r>
           </a:p>
         </p:txBody>
@@ -5524,7 +5524,7 @@
                 </a:solidFill>
                 <a:latin typeface="Calibri"/>
               </a:rPr>
-              <a:t>PAID = $626</a:t>
+              <a:t>PAID = $597</a:t>
             </a:r>
           </a:p>
         </p:txBody>
@@ -6106,7 +6106,7 @@
                 </a:solidFill>
                 <a:latin typeface="Calibri"/>
               </a:rPr>
-              <a:t>  Retention = REN $54k x 1% = $541</a:t>
+              <a:t>  Retention = REN $54k x 0.5% = $270</a:t>
             </a:r>
           </a:p>
         </p:txBody>
@@ -6144,7 +6144,7 @@
                 </a:solidFill>
                 <a:latin typeface="Calibri"/>
               </a:rPr>
-              <a:t>TARGET TOTAL = $975</a:t>
+              <a:t>TARGET TOTAL = $704</a:t>
             </a:r>
           </a:p>
         </p:txBody>
@@ -6334,7 +6334,7 @@
                 </a:solidFill>
                 <a:latin typeface="Calibri"/>
               </a:rPr>
-              <a:t>PAID = $975</a:t>
+              <a:t>PAID = $704</a:t>
             </a:r>
           </a:p>
         </p:txBody>
@@ -6916,7 +6916,7 @@
                 </a:solidFill>
                 <a:latin typeface="Calibri"/>
               </a:rPr>
-              <a:t>  Retention = REN $96k x 1% = $962</a:t>
+              <a:t>  Retention = REN $96k x 0.5% = $481</a:t>
             </a:r>
           </a:p>
         </p:txBody>
@@ -6954,7 +6954,7 @@
                 </a:solidFill>
                 <a:latin typeface="Calibri"/>
               </a:rPr>
-              <a:t>TARGET TOTAL = $1280</a:t>
+              <a:t>TARGET TOTAL = $799</a:t>
             </a:r>
           </a:p>
         </p:txBody>
@@ -7144,7 +7144,7 @@
                 </a:solidFill>
                 <a:latin typeface="Calibri"/>
               </a:rPr>
-              <a:t>PAID = $1280</a:t>
+              <a:t>PAID = $799</a:t>
             </a:r>
           </a:p>
         </p:txBody>
@@ -7975,7 +7975,7 @@
                           </a:solidFill>
                           <a:latin typeface="Calibri"/>
                         </a:rPr>
-                        <a:t>$76</a:t>
+                        <a:t>$38</a:t>
                       </a:r>
                     </a:p>
                   </a:txBody>
@@ -8230,7 +8230,7 @@
                           </a:solidFill>
                           <a:latin typeface="Calibri"/>
                         </a:rPr>
-                        <a:t>$75</a:t>
+                        <a:t>$38</a:t>
                       </a:r>
                     </a:p>
                   </a:txBody>
@@ -8485,7 +8485,7 @@
                           </a:solidFill>
                           <a:latin typeface="Calibri"/>
                         </a:rPr>
-                        <a:t>$317</a:t>
+                        <a:t>$297</a:t>
                       </a:r>
                     </a:p>
                   </a:txBody>
@@ -8740,7 +8740,7 @@
                           </a:solidFill>
                           <a:latin typeface="Calibri"/>
                         </a:rPr>
-                        <a:t>$109</a:t>
+                        <a:t>$55</a:t>
                       </a:r>
                     </a:p>
                   </a:txBody>
@@ -8995,7 +8995,7 @@
                           </a:solidFill>
                           <a:latin typeface="Calibri"/>
                         </a:rPr>
-                        <a:t>$577</a:t>
+                        <a:t>$427</a:t>
                       </a:r>
                     </a:p>
                   </a:txBody>
@@ -9578,7 +9578,7 @@
                           </a:solidFill>
                           <a:latin typeface="Calibri"/>
                         </a:rPr>
-                        <a:t>$214</a:t>
+                        <a:t>$107</a:t>
                       </a:r>
                     </a:p>
                   </a:txBody>
@@ -9833,7 +9833,7 @@
                           </a:solidFill>
                           <a:latin typeface="Calibri"/>
                         </a:rPr>
-                        <a:t>$228</a:t>
+                        <a:t>$114</a:t>
                       </a:r>
                     </a:p>
                   </a:txBody>
@@ -10088,7 +10088,7 @@
                           </a:solidFill>
                           <a:latin typeface="Calibri"/>
                         </a:rPr>
-                        <a:t>$410</a:t>
+                        <a:t>$328</a:t>
                       </a:r>
                     </a:p>
                   </a:txBody>
@@ -10343,7 +10343,7 @@
                           </a:solidFill>
                           <a:latin typeface="Calibri"/>
                         </a:rPr>
-                        <a:t>$186</a:t>
+                        <a:t>$93</a:t>
                       </a:r>
                     </a:p>
                   </a:txBody>
@@ -10598,7 +10598,7 @@
                           </a:solidFill>
                           <a:latin typeface="Calibri"/>
                         </a:rPr>
-                        <a:t>$1038</a:t>
+                        <a:t>$642</a:t>
                       </a:r>
                     </a:p>
                   </a:txBody>
@@ -11181,7 +11181,7 @@
                           </a:solidFill>
                           <a:latin typeface="Calibri"/>
                         </a:rPr>
-                        <a:t>$275</a:t>
+                        <a:t>$138</a:t>
                       </a:r>
                     </a:p>
                   </a:txBody>
@@ -11436,7 +11436,7 @@
                           </a:solidFill>
                           <a:latin typeface="Calibri"/>
                         </a:rPr>
-                        <a:t>$306</a:t>
+                        <a:t>$153</a:t>
                       </a:r>
                     </a:p>
                   </a:txBody>
@@ -11691,7 +11691,7 @@
                           </a:solidFill>
                           <a:latin typeface="Calibri"/>
                         </a:rPr>
-                        <a:t>$475</a:t>
+                        <a:t>$349</a:t>
                       </a:r>
                     </a:p>
                   </a:txBody>
@@ -11946,7 +11946,7 @@
                           </a:solidFill>
                           <a:latin typeface="Calibri"/>
                         </a:rPr>
-                        <a:t>$154</a:t>
+                        <a:t>$77</a:t>
                       </a:r>
                     </a:p>
                   </a:txBody>
@@ -12201,7 +12201,7 @@
                           </a:solidFill>
                           <a:latin typeface="Calibri"/>
                         </a:rPr>
-                        <a:t>$1210</a:t>
+                        <a:t>$716</a:t>
                       </a:r>
                     </a:p>
                   </a:txBody>
@@ -12249,7 +12249,7 @@
                 </a:solidFill>
                 <a:latin typeface="Calibri"/>
               </a:rPr>
-              <a:t>Today's current plan pays $1,300. Plan B WITH MIN: REAL $577 | SWAP $1,038 | FLIP $1,210.</a:t>
+              <a:t>Today's current plan pays $1,300. Plan B WITH MIN: REAL $427 | SWAP $642 | FLIP $716.</a:t>
             </a:r>
           </a:p>
         </p:txBody>
@@ -13080,7 +13080,7 @@
                           </a:solidFill>
                           <a:latin typeface="Calibri"/>
                         </a:rPr>
-                        <a:t>$125</a:t>
+                        <a:t>$63</a:t>
                       </a:r>
                     </a:p>
                   </a:txBody>
@@ -13335,7 +13335,7 @@
                           </a:solidFill>
                           <a:latin typeface="Calibri"/>
                         </a:rPr>
-                        <a:t>$116</a:t>
+                        <a:t>$58</a:t>
                       </a:r>
                     </a:p>
                   </a:txBody>
@@ -13590,7 +13590,7 @@
                           </a:solidFill>
                           <a:latin typeface="Calibri"/>
                         </a:rPr>
-                        <a:t>$626</a:t>
+                        <a:t>$597</a:t>
                       </a:r>
                     </a:p>
                   </a:txBody>
@@ -13845,7 +13845,7 @@
                           </a:solidFill>
                           <a:latin typeface="Calibri"/>
                         </a:rPr>
-                        <a:t>$680</a:t>
+                        <a:t>$582</a:t>
                       </a:r>
                     </a:p>
                   </a:txBody>
@@ -14100,7 +14100,7 @@
                           </a:solidFill>
                           <a:latin typeface="Calibri"/>
                         </a:rPr>
-                        <a:t>$1548</a:t>
+                        <a:t>$1300</a:t>
                       </a:r>
                     </a:p>
                   </a:txBody>
@@ -14683,7 +14683,7 @@
                           </a:solidFill>
                           <a:latin typeface="Calibri"/>
                         </a:rPr>
-                        <a:t>$454</a:t>
+                        <a:t>$227</a:t>
                       </a:r>
                     </a:p>
                   </a:txBody>
@@ -14938,7 +14938,7 @@
                           </a:solidFill>
                           <a:latin typeface="Calibri"/>
                         </a:rPr>
-                        <a:t>$544</a:t>
+                        <a:t>$272</a:t>
                       </a:r>
                     </a:p>
                   </a:txBody>
@@ -15193,7 +15193,7 @@
                           </a:solidFill>
                           <a:latin typeface="Calibri"/>
                         </a:rPr>
-                        <a:t>$975</a:t>
+                        <a:t>$704</a:t>
                       </a:r>
                     </a:p>
                   </a:txBody>
@@ -15448,7 +15448,7 @@
                           </a:solidFill>
                           <a:latin typeface="Calibri"/>
                         </a:rPr>
-                        <a:t>$883</a:t>
+                        <a:t>$624</a:t>
                       </a:r>
                     </a:p>
                   </a:txBody>
@@ -15703,7 +15703,7 @@
                           </a:solidFill>
                           <a:latin typeface="Calibri"/>
                         </a:rPr>
-                        <a:t>$2855</a:t>
+                        <a:t>$1828</a:t>
                       </a:r>
                     </a:p>
                   </a:txBody>
@@ -16286,7 +16286,7 @@
                           </a:solidFill>
                           <a:latin typeface="Calibri"/>
                         </a:rPr>
-                        <a:t>$657</a:t>
+                        <a:t>$328</a:t>
                       </a:r>
                     </a:p>
                   </a:txBody>
@@ -16541,7 +16541,7 @@
                           </a:solidFill>
                           <a:latin typeface="Calibri"/>
                         </a:rPr>
-                        <a:t>$855</a:t>
+                        <a:t>$428</a:t>
                       </a:r>
                     </a:p>
                   </a:txBody>
@@ -16796,7 +16796,7 @@
                           </a:solidFill>
                           <a:latin typeface="Calibri"/>
                         </a:rPr>
-                        <a:t>$1280</a:t>
+                        <a:t>$799</a:t>
                       </a:r>
                     </a:p>
                   </a:txBody>
@@ -17051,7 +17051,7 @@
                           </a:solidFill>
                           <a:latin typeface="Calibri"/>
                         </a:rPr>
-                        <a:t>$899</a:t>
+                        <a:t>$578</a:t>
                       </a:r>
                     </a:p>
                   </a:txBody>
@@ -17306,7 +17306,7 @@
                           </a:solidFill>
                           <a:latin typeface="Calibri"/>
                         </a:rPr>
-                        <a:t>$3692</a:t>
+                        <a:t>$2133</a:t>
                       </a:r>
                     </a:p>
                   </a:txBody>
@@ -17354,7 +17354,7 @@
                 </a:solidFill>
                 <a:latin typeface="Calibri"/>
               </a:rPr>
-              <a:t>Today's current plan pays $3,140. Plan B WITH MIN: REAL $1,548 | SWAP $2,855 | FLIP $3,692.</a:t>
+              <a:t>Today's current plan pays $3,140. Plan B WITH MIN: REAL $1,300 | SWAP $1,828 | FLIP $2,133.</a:t>
             </a:r>
           </a:p>
         </p:txBody>
@@ -18440,7 +18440,7 @@
                           </a:solidFill>
                           <a:latin typeface="Calibri"/>
                         </a:rPr>
-                        <a:t>$11</a:t>
+                        <a:t>$5</a:t>
                       </a:r>
                     </a:p>
                   </a:txBody>
@@ -18695,7 +18695,7 @@
                           </a:solidFill>
                           <a:latin typeface="Calibri"/>
                         </a:rPr>
-                        <a:t>$10</a:t>
+                        <a:t>$5</a:t>
                       </a:r>
                     </a:p>
                   </a:txBody>
@@ -19205,7 +19205,7 @@
                           </a:solidFill>
                           <a:latin typeface="Calibri"/>
                         </a:rPr>
-                        <a:t>$21</a:t>
+                        <a:t>$10</a:t>
                       </a:r>
                     </a:p>
                   </a:txBody>
@@ -19788,7 +19788,7 @@
                           </a:solidFill>
                           <a:latin typeface="Calibri"/>
                         </a:rPr>
-                        <a:t>$317</a:t>
+                        <a:t>$158</a:t>
                       </a:r>
                     </a:p>
                   </a:txBody>
@@ -20043,7 +20043,7 @@
                           </a:solidFill>
                           <a:latin typeface="Calibri"/>
                         </a:rPr>
-                        <a:t>$261</a:t>
+                        <a:t>$130</a:t>
                       </a:r>
                     </a:p>
                   </a:txBody>
@@ -20298,7 +20298,7 @@
                           </a:solidFill>
                           <a:latin typeface="Calibri"/>
                         </a:rPr>
-                        <a:t>$295</a:t>
+                        <a:t>$147</a:t>
                       </a:r>
                     </a:p>
                   </a:txBody>
@@ -20553,7 +20553,7 @@
                           </a:solidFill>
                           <a:latin typeface="Calibri"/>
                         </a:rPr>
-                        <a:t>$217</a:t>
+                        <a:t>$108</a:t>
                       </a:r>
                     </a:p>
                   </a:txBody>
@@ -20808,7 +20808,7 @@
                           </a:solidFill>
                           <a:latin typeface="Calibri"/>
                         </a:rPr>
-                        <a:t>$1089</a:t>
+                        <a:t>$545</a:t>
                       </a:r>
                     </a:p>
                   </a:txBody>
@@ -21391,7 +21391,7 @@
                           </a:solidFill>
                           <a:latin typeface="Calibri"/>
                         </a:rPr>
-                        <a:t>$634</a:t>
+                        <a:t>$317</a:t>
                       </a:r>
                     </a:p>
                   </a:txBody>
@@ -21646,7 +21646,7 @@
                           </a:solidFill>
                           <a:latin typeface="Calibri"/>
                         </a:rPr>
-                        <a:t>$500</a:t>
+                        <a:t>$250</a:t>
                       </a:r>
                     </a:p>
                   </a:txBody>
@@ -21901,7 +21901,7 @@
                           </a:solidFill>
                           <a:latin typeface="Calibri"/>
                         </a:rPr>
-                        <a:t>$569</a:t>
+                        <a:t>$284</a:t>
                       </a:r>
                     </a:p>
                   </a:txBody>
@@ -22156,7 +22156,7 @@
                           </a:solidFill>
                           <a:latin typeface="Calibri"/>
                         </a:rPr>
-                        <a:t>$434</a:t>
+                        <a:t>$217</a:t>
                       </a:r>
                     </a:p>
                   </a:txBody>
@@ -22411,7 +22411,7 @@
                           </a:solidFill>
                           <a:latin typeface="Calibri"/>
                         </a:rPr>
-                        <a:t>$2136</a:t>
+                        <a:t>$1068</a:t>
                       </a:r>
                     </a:p>
                   </a:txBody>
@@ -22459,7 +22459,7 @@
                 </a:solidFill>
                 <a:latin typeface="Calibri"/>
               </a:rPr>
-              <a:t>Today's current plan pays $2,370. Plan B WITH MIN: REAL $21 | SWAP $1,089 | FLIP $2,136.</a:t>
+              <a:t>Today's current plan pays $2,370. Plan B WITH MIN: REAL $10 | SWAP $545 | FLIP $1,068.</a:t>
             </a:r>
           </a:p>
         </p:txBody>
@@ -23290,7 +23290,7 @@
                           </a:solidFill>
                           <a:latin typeface="Calibri"/>
                         </a:rPr>
-                        <a:t>$15</a:t>
+                        <a:t>$7</a:t>
                       </a:r>
                     </a:p>
                   </a:txBody>
@@ -23545,7 +23545,7 @@
                           </a:solidFill>
                           <a:latin typeface="Calibri"/>
                         </a:rPr>
-                        <a:t>$21</a:t>
+                        <a:t>$10</a:t>
                       </a:r>
                     </a:p>
                   </a:txBody>
@@ -24055,7 +24055,7 @@
                           </a:solidFill>
                           <a:latin typeface="Calibri"/>
                         </a:rPr>
-                        <a:t>$9</a:t>
+                        <a:t>$4</a:t>
                       </a:r>
                     </a:p>
                   </a:txBody>
@@ -24310,7 +24310,7 @@
                           </a:solidFill>
                           <a:latin typeface="Calibri"/>
                         </a:rPr>
-                        <a:t>$44</a:t>
+                        <a:t>$22</a:t>
                       </a:r>
                     </a:p>
                   </a:txBody>
@@ -24893,7 +24893,7 @@
                           </a:solidFill>
                           <a:latin typeface="Calibri"/>
                         </a:rPr>
-                        <a:t>$212</a:t>
+                        <a:t>$106</a:t>
                       </a:r>
                     </a:p>
                   </a:txBody>
@@ -25148,7 +25148,7 @@
                           </a:solidFill>
                           <a:latin typeface="Calibri"/>
                         </a:rPr>
-                        <a:t>$239</a:t>
+                        <a:t>$120</a:t>
                       </a:r>
                     </a:p>
                   </a:txBody>
@@ -25403,7 +25403,7 @@
                           </a:solidFill>
                           <a:latin typeface="Calibri"/>
                         </a:rPr>
-                        <a:t>$118</a:t>
+                        <a:t>$59</a:t>
                       </a:r>
                     </a:p>
                   </a:txBody>
@@ -25658,7 +25658,7 @@
                           </a:solidFill>
                           <a:latin typeface="Calibri"/>
                         </a:rPr>
-                        <a:t>$163</a:t>
+                        <a:t>$82</a:t>
                       </a:r>
                     </a:p>
                   </a:txBody>
@@ -25913,7 +25913,7 @@
                           </a:solidFill>
                           <a:latin typeface="Calibri"/>
                         </a:rPr>
-                        <a:t>$733</a:t>
+                        <a:t>$366</a:t>
                       </a:r>
                     </a:p>
                   </a:txBody>
@@ -26496,7 +26496,7 @@
                           </a:solidFill>
                           <a:latin typeface="Calibri"/>
                         </a:rPr>
-                        <a:t>$396</a:t>
+                        <a:t>$198</a:t>
                       </a:r>
                     </a:p>
                   </a:txBody>
@@ -26751,7 +26751,7 @@
                           </a:solidFill>
                           <a:latin typeface="Calibri"/>
                         </a:rPr>
-                        <a:t>$437</a:t>
+                        <a:t>$218</a:t>
                       </a:r>
                     </a:p>
                   </a:txBody>
@@ -27006,7 +27006,7 @@
                           </a:solidFill>
                           <a:latin typeface="Calibri"/>
                         </a:rPr>
-                        <a:t>$235</a:t>
+                        <a:t>$118</a:t>
                       </a:r>
                     </a:p>
                   </a:txBody>
@@ -27261,7 +27261,7 @@
                           </a:solidFill>
                           <a:latin typeface="Calibri"/>
                         </a:rPr>
-                        <a:t>$308</a:t>
+                        <a:t>$154</a:t>
                       </a:r>
                     </a:p>
                   </a:txBody>
@@ -27516,7 +27516,7 @@
                           </a:solidFill>
                           <a:latin typeface="Calibri"/>
                         </a:rPr>
-                        <a:t>$1376</a:t>
+                        <a:t>$688</a:t>
                       </a:r>
                     </a:p>
                   </a:txBody>
@@ -27564,7 +27564,7 @@
                 </a:solidFill>
                 <a:latin typeface="Calibri"/>
               </a:rPr>
-              <a:t>Today's current plan pays $2,070. Plan B WITH MIN: REAL $44 | SWAP $733 | FLIP $1,376.</a:t>
+              <a:t>Today's current plan pays $2,070. Plan B WITH MIN: REAL $22 | SWAP $366 | FLIP $688.</a:t>
             </a:r>
           </a:p>
         </p:txBody>
@@ -28395,7 +28395,7 @@
                           </a:solidFill>
                           <a:latin typeface="Calibri"/>
                         </a:rPr>
-                        <a:t>$37</a:t>
+                        <a:t>$18</a:t>
                       </a:r>
                     </a:p>
                   </a:txBody>
@@ -28650,7 +28650,7 @@
                           </a:solidFill>
                           <a:latin typeface="Calibri"/>
                         </a:rPr>
-                        <a:t>$74</a:t>
+                        <a:t>$37</a:t>
                       </a:r>
                     </a:p>
                   </a:txBody>
@@ -28905,7 +28905,7 @@
                           </a:solidFill>
                           <a:latin typeface="Calibri"/>
                         </a:rPr>
-                        <a:t>$56</a:t>
+                        <a:t>$28</a:t>
                       </a:r>
                     </a:p>
                   </a:txBody>
@@ -29160,7 +29160,7 @@
                           </a:solidFill>
                           <a:latin typeface="Calibri"/>
                         </a:rPr>
-                        <a:t>$36</a:t>
+                        <a:t>$18</a:t>
                       </a:r>
                     </a:p>
                   </a:txBody>
@@ -29415,7 +29415,7 @@
                           </a:solidFill>
                           <a:latin typeface="Calibri"/>
                         </a:rPr>
-                        <a:t>$204</a:t>
+                        <a:t>$102</a:t>
                       </a:r>
                     </a:p>
                   </a:txBody>
@@ -29998,7 +29998,7 @@
                           </a:solidFill>
                           <a:latin typeface="Calibri"/>
                         </a:rPr>
-                        <a:t>$202</a:t>
+                        <a:t>$101</a:t>
                       </a:r>
                     </a:p>
                   </a:txBody>
@@ -30253,7 +30253,7 @@
                           </a:solidFill>
                           <a:latin typeface="Calibri"/>
                         </a:rPr>
-                        <a:t>$216</a:t>
+                        <a:t>$108</a:t>
                       </a:r>
                     </a:p>
                   </a:txBody>
@@ -30508,7 +30508,7 @@
                           </a:solidFill>
                           <a:latin typeface="Calibri"/>
                         </a:rPr>
-                        <a:t>$156</a:t>
+                        <a:t>$78</a:t>
                       </a:r>
                     </a:p>
                   </a:txBody>
@@ -30763,7 +30763,7 @@
                           </a:solidFill>
                           <a:latin typeface="Calibri"/>
                         </a:rPr>
-                        <a:t>$235</a:t>
+                        <a:t>$118</a:t>
                       </a:r>
                     </a:p>
                   </a:txBody>
@@ -31018,7 +31018,7 @@
                           </a:solidFill>
                           <a:latin typeface="Calibri"/>
                         </a:rPr>
-                        <a:t>$809</a:t>
+                        <a:t>$405</a:t>
                       </a:r>
                     </a:p>
                   </a:txBody>
@@ -31601,7 +31601,7 @@
                           </a:solidFill>
                           <a:latin typeface="Calibri"/>
                         </a:rPr>
-                        <a:t>$331</a:t>
+                        <a:t>$165</a:t>
                       </a:r>
                     </a:p>
                   </a:txBody>
@@ -31856,7 +31856,7 @@
                           </a:solidFill>
                           <a:latin typeface="Calibri"/>
                         </a:rPr>
-                        <a:t>$283</a:t>
+                        <a:t>$141</a:t>
                       </a:r>
                     </a:p>
                   </a:txBody>
@@ -32111,7 +32111,7 @@
                           </a:solidFill>
                           <a:latin typeface="Calibri"/>
                         </a:rPr>
-                        <a:t>$198</a:t>
+                        <a:t>$99</a:t>
                       </a:r>
                     </a:p>
                   </a:txBody>
@@ -32366,7 +32366,7 @@
                           </a:solidFill>
                           <a:latin typeface="Calibri"/>
                         </a:rPr>
-                        <a:t>$398</a:t>
+                        <a:t>$199</a:t>
                       </a:r>
                     </a:p>
                   </a:txBody>
@@ -32621,7 +32621,7 @@
                           </a:solidFill>
                           <a:latin typeface="Calibri"/>
                         </a:rPr>
-                        <a:t>$1210</a:t>
+                        <a:t>$605</a:t>
                       </a:r>
                     </a:p>
                   </a:txBody>
@@ -32669,7 +32669,7 @@
                 </a:solidFill>
                 <a:latin typeface="Calibri"/>
               </a:rPr>
-              <a:t>Today's current plan pays $1,400. Plan B WITH MIN: REAL $204 | SWAP $809 | FLIP $1,210.</a:t>
+              <a:t>Today's current plan pays $1,400. Plan B WITH MIN: REAL $102 | SWAP $405 | FLIP $605.</a:t>
             </a:r>
           </a:p>
         </p:txBody>
@@ -33500,7 +33500,7 @@
                           </a:solidFill>
                           <a:latin typeface="Calibri"/>
                         </a:rPr>
-                        <a:t>$65</a:t>
+                        <a:t>$33</a:t>
                       </a:r>
                     </a:p>
                   </a:txBody>
@@ -33755,7 +33755,7 @@
                           </a:solidFill>
                           <a:latin typeface="Calibri"/>
                         </a:rPr>
-                        <a:t>$31</a:t>
+                        <a:t>$15</a:t>
                       </a:r>
                     </a:p>
                   </a:txBody>
@@ -34265,7 +34265,7 @@
                           </a:solidFill>
                           <a:latin typeface="Calibri"/>
                         </a:rPr>
-                        <a:t>$25</a:t>
+                        <a:t>$13</a:t>
                       </a:r>
                     </a:p>
                   </a:txBody>
@@ -34520,7 +34520,7 @@
                           </a:solidFill>
                           <a:latin typeface="Calibri"/>
                         </a:rPr>
-                        <a:t>$617</a:t>
+                        <a:t>$557</a:t>
                       </a:r>
                     </a:p>
                   </a:txBody>
@@ -35103,7 +35103,7 @@
                           </a:solidFill>
                           <a:latin typeface="Calibri"/>
                         </a:rPr>
-                        <a:t>$308</a:t>
+                        <a:t>$154</a:t>
                       </a:r>
                     </a:p>
                   </a:txBody>
@@ -35358,7 +35358,7 @@
                           </a:solidFill>
                           <a:latin typeface="Calibri"/>
                         </a:rPr>
-                        <a:t>$267</a:t>
+                        <a:t>$134</a:t>
                       </a:r>
                     </a:p>
                   </a:txBody>
@@ -35613,7 +35613,7 @@
                           </a:solidFill>
                           <a:latin typeface="Calibri"/>
                         </a:rPr>
-                        <a:t>$650</a:t>
+                        <a:t>$552</a:t>
                       </a:r>
                     </a:p>
                   </a:txBody>
@@ -35868,7 +35868,7 @@
                           </a:solidFill>
                           <a:latin typeface="Calibri"/>
                         </a:rPr>
-                        <a:t>$202</a:t>
+                        <a:t>$101</a:t>
                       </a:r>
                     </a:p>
                   </a:txBody>
@@ -36123,7 +36123,7 @@
                           </a:solidFill>
                           <a:latin typeface="Calibri"/>
                         </a:rPr>
-                        <a:t>$1427</a:t>
+                        <a:t>$941</a:t>
                       </a:r>
                     </a:p>
                   </a:txBody>
@@ -36706,7 +36706,7 @@
                           </a:solidFill>
                           <a:latin typeface="Calibri"/>
                         </a:rPr>
-                        <a:t>$486</a:t>
+                        <a:t>$243</a:t>
                       </a:r>
                     </a:p>
                   </a:txBody>
@@ -36961,7 +36961,7 @@
                           </a:solidFill>
                           <a:latin typeface="Calibri"/>
                         </a:rPr>
-                        <a:t>$472</a:t>
+                        <a:t>$236</a:t>
                       </a:r>
                     </a:p>
                   </a:txBody>
@@ -37216,7 +37216,7 @@
                           </a:solidFill>
                           <a:latin typeface="Calibri"/>
                         </a:rPr>
-                        <a:t>$805</a:t>
+                        <a:t>$608</a:t>
                       </a:r>
                     </a:p>
                   </a:txBody>
@@ -37471,7 +37471,7 @@
                           </a:solidFill>
                           <a:latin typeface="Calibri"/>
                         </a:rPr>
-                        <a:t>$353</a:t>
+                        <a:t>$176</a:t>
                       </a:r>
                     </a:p>
                   </a:txBody>
@@ -37726,7 +37726,7 @@
                           </a:solidFill>
                           <a:latin typeface="Calibri"/>
                         </a:rPr>
-                        <a:t>$2116</a:t>
+                        <a:t>$1264</a:t>
                       </a:r>
                     </a:p>
                   </a:txBody>
@@ -37774,7 +37774,7 @@
                 </a:solidFill>
                 <a:latin typeface="Calibri"/>
               </a:rPr>
-              <a:t>Today's current plan pays $1,940. Plan B WITH MIN: REAL $617 | SWAP $1,427 | FLIP $2,116.</a:t>
+              <a:t>Today's current plan pays $1,940. Plan B WITH MIN: REAL $557 | SWAP $941 | FLIP $1,264.</a:t>
             </a:r>
           </a:p>
         </p:txBody>
@@ -38333,7 +38333,7 @@
                           </a:solidFill>
                           <a:latin typeface="Calibri"/>
                         </a:rPr>
-                        <a:t>$7,915</a:t>
+                        <a:t>$7,322</a:t>
                       </a:r>
                     </a:p>
                   </a:txBody>
@@ -38356,7 +38356,7 @@
                           </a:solidFill>
                           <a:latin typeface="Calibri"/>
                         </a:rPr>
-                        <a:t>$11,863</a:t>
+                        <a:t>$8,637</a:t>
                       </a:r>
                     </a:p>
                   </a:txBody>
@@ -38379,7 +38379,7 @@
                           </a:solidFill>
                           <a:latin typeface="Calibri"/>
                         </a:rPr>
-                        <a:t>$14,902</a:t>
+                        <a:t>$9,638</a:t>
                       </a:r>
                     </a:p>
                   </a:txBody>
@@ -38450,7 +38450,7 @@
                           </a:solidFill>
                           <a:latin typeface="Calibri"/>
                         </a:rPr>
-                        <a:t>$3,012</a:t>
+                        <a:t>$2,419</a:t>
                       </a:r>
                     </a:p>
                   </a:txBody>
@@ -38473,7 +38473,7 @@
                           </a:solidFill>
                           <a:latin typeface="Calibri"/>
                         </a:rPr>
-                        <a:t>$7,951</a:t>
+                        <a:t>$4,725</a:t>
                       </a:r>
                     </a:p>
                   </a:txBody>
@@ -38496,7 +38496,7 @@
                           </a:solidFill>
                           <a:latin typeface="Calibri"/>
                         </a:rPr>
-                        <a:t>$11,740</a:t>
+                        <a:t>$6,475</a:t>
                       </a:r>
                     </a:p>
                   </a:txBody>
@@ -38567,7 +38567,7 @@
                           </a:solidFill>
                           <a:latin typeface="Calibri"/>
                         </a:rPr>
-                        <a:t>$7,915</a:t>
+                        <a:t>$7,322</a:t>
                       </a:r>
                     </a:p>
                   </a:txBody>
@@ -38590,7 +38590,7 @@
                           </a:solidFill>
                           <a:latin typeface="Calibri"/>
                         </a:rPr>
-                        <a:t>$11,863</a:t>
+                        <a:t>$8,637</a:t>
                       </a:r>
                     </a:p>
                   </a:txBody>
@@ -38613,7 +38613,7 @@
                           </a:solidFill>
                           <a:latin typeface="Calibri"/>
                         </a:rPr>
-                        <a:t>$14,902</a:t>
+                        <a:t>$9,638</a:t>
                       </a:r>
                     </a:p>
                   </a:txBody>
@@ -38684,7 +38684,7 @@
                           </a:solidFill>
                           <a:latin typeface="Calibri"/>
                         </a:rPr>
-                        <a:t>$3,012</a:t>
+                        <a:t>$2,419</a:t>
                       </a:r>
                     </a:p>
                   </a:txBody>
@@ -38707,7 +38707,7 @@
                           </a:solidFill>
                           <a:latin typeface="Calibri"/>
                         </a:rPr>
-                        <a:t>$7,951</a:t>
+                        <a:t>$4,725</a:t>
                       </a:r>
                     </a:p>
                   </a:txBody>
@@ -38730,7 +38730,7 @@
                           </a:solidFill>
                           <a:latin typeface="Calibri"/>
                         </a:rPr>
-                        <a:t>$11,740</a:t>
+                        <a:t>$6,475</a:t>
                       </a:r>
                     </a:p>
                   </a:txBody>
@@ -38859,7 +38859,7 @@
                 </a:solidFill>
                 <a:latin typeface="Calibri"/>
               </a:rPr>
-              <a:t>• Plan B WITH MIN under 100% FLIP = $11,740. Compare to today's current $12,220: agents earn the SAME for doing the RIGHT behavior.</a:t>
+              <a:t>• Plan B WITH MIN under 100% FLIP = $6,475. Compare to today's current $12,220: agents earn the SAME for doing the RIGHT behavior.</a:t>
             </a:r>
           </a:p>
           <a:p>
@@ -38875,7 +38875,7 @@
                 </a:solidFill>
                 <a:latin typeface="Calibri"/>
               </a:rPr>
-              <a:t>• Plan B no-min under FLIP = $14,902, which is ABOVE today's pay. Some headroom if ownership wants to be more generous.</a:t>
+              <a:t>• Plan B no-min under FLIP = $9,638, which is ABOVE today's pay. Some headroom if ownership wants to be more generous.</a:t>
             </a:r>
           </a:p>
           <a:p>
@@ -45539,7 +45539,7 @@
                           </a:solidFill>
                           <a:latin typeface="Calibri"/>
                         </a:rPr>
-                        <a:t>REN written premium x 1%</a:t>
+                        <a:t>REN written premium x 0.5%</a:t>
                       </a:r>
                     </a:p>
                   </a:txBody>
@@ -45562,7 +45562,7 @@
                           </a:solidFill>
                           <a:latin typeface="Calibri"/>
                         </a:rPr>
-                        <a:t>$50k REN -&gt; $500/mo | $25k REN -&gt; $250/mo | $10k REN -&gt; $100/mo. Bigger book + bigger premium = bigger bonus.</a:t>
+                        <a:t>$50k REN -&gt; $250/mo | $25k REN -&gt; $125/mo | $10k REN -&gt; $50/mo. Bigger book + bigger premium = bigger bonus.</a:t>
                       </a:r>
                     </a:p>
                   </a:txBody>

--- a/output/Bonus_Plan_FINAL.pptx
+++ b/output/Bonus_Plan_FINAL.pptx
@@ -3520,7 +3520,7 @@
                 </a:solidFill>
                 <a:latin typeface="Calibri"/>
               </a:rPr>
-              <a:t>Renewals pay MORE than rewrites - but only under the new plans.</a:t>
+              <a:t>Renewals pay MORE than rewrites - but only under the new plan.</a:t>
             </a:r>
           </a:p>
         </p:txBody>
@@ -3716,7 +3716,7 @@
                 </a:solidFill>
                 <a:latin typeface="Calibri"/>
               </a:rPr>
-              <a:t>The CURRENT plan does NOT pay anything for renewals. It only counts NB + RWR toward the 35-policy tier. When 50% of RWR moves to REN, the NB+RWR count drops, the tier drops, the bonus drops. Renewals 'paying more' is only true under the NEW plans (REN pays $4-$6 vs RWR $2).</a:t>
+              <a:t>The CURRENT plan does NOT pay anything for renewals. It only counts NB + RWR toward the 35-policy tier. When 50% of RWR moves to REN, the NB+RWR count drops, the tier drops, the bonus drops. Renewals 'paying more' is only true under the NEW plan, where the retention bonus pays for premium retained.</a:t>
             </a:r>
           </a:p>
         </p:txBody>
@@ -3914,7 +3914,7 @@
                           </a:solidFill>
                           <a:latin typeface="Calibri"/>
                         </a:rPr>
-                        <a:t>Plan B pays</a:t>
+                        <a:t>New plan pays</a:t>
                       </a:r>
                     </a:p>
                   </a:txBody>
@@ -4424,7 +4424,7 @@
                 </a:solidFill>
                 <a:latin typeface="Calibri"/>
               </a:rPr>
-              <a:t>• Per swapped policy: Current loses ~$10 from the count tier. Plan B gains $4-$6 net ($4-$6 REN - $2 RWR).</a:t>
+              <a:t>• Per swapped policy: Current loses ~$10 from the count tier. New plan gains via the retention bonus ($5 per $1,000 retained) and RWR step-down ($2-$4 per RWR).</a:t>
             </a:r>
           </a:p>
           <a:p>
@@ -4456,7 +4456,7 @@
                 </a:solidFill>
                 <a:latin typeface="Calibri"/>
               </a:rPr>
-              <a:t>• Under Plan B, the agent gets MORE for retaining instead of rewriting - the exact incentive we want.</a:t>
+              <a:t>• Under the new plan, the agent gets MORE for retaining instead of rewriting - the exact incentive we want.</a:t>
             </a:r>
           </a:p>
         </p:txBody>
@@ -7282,7 +7282,7 @@
                 </a:solidFill>
                 <a:latin typeface="Calibri"/>
               </a:rPr>
-              <a:t>All values are Plan B WITH MIN (recommended). $W = written premium, $C = collected.</a:t>
+              <a:t>All values are NEW PLAN WITH MIN. $W = written premium, $C = collected.</a:t>
             </a:r>
           </a:p>
         </p:txBody>
@@ -7720,7 +7720,7 @@
                           </a:solidFill>
                           <a:latin typeface="Calibri"/>
                         </a:rPr>
-                        <a:t>Plan B WITH MIN</a:t>
+                        <a:t>New plan WITH MIN</a:t>
                       </a:r>
                     </a:p>
                   </a:txBody>
@@ -9323,7 +9323,7 @@
                           </a:solidFill>
                           <a:latin typeface="Calibri"/>
                         </a:rPr>
-                        <a:t>Plan B WITH MIN</a:t>
+                        <a:t>New plan WITH MIN</a:t>
                       </a:r>
                     </a:p>
                   </a:txBody>
@@ -10926,7 +10926,7 @@
                           </a:solidFill>
                           <a:latin typeface="Calibri"/>
                         </a:rPr>
-                        <a:t>Plan B WITH MIN</a:t>
+                        <a:t>New plan WITH MIN</a:t>
                       </a:r>
                     </a:p>
                   </a:txBody>
@@ -12249,7 +12249,7 @@
                 </a:solidFill>
                 <a:latin typeface="Calibri"/>
               </a:rPr>
-              <a:t>Today's current plan pays $1,300. Plan B WITH MIN: REAL $427 | SWAP $642 | FLIP $716.</a:t>
+              <a:t>Today's current plan pays $1,300. New plan WITH MIN: REAL $427 | SWAP $642 | FLIP $716.</a:t>
             </a:r>
           </a:p>
         </p:txBody>
@@ -12387,7 +12387,7 @@
                 </a:solidFill>
                 <a:latin typeface="Calibri"/>
               </a:rPr>
-              <a:t>All values are Plan B WITH MIN (recommended). $W = written premium, $C = collected.</a:t>
+              <a:t>All values are NEW PLAN WITH MIN. $W = written premium, $C = collected.</a:t>
             </a:r>
           </a:p>
         </p:txBody>
@@ -12825,7 +12825,7 @@
                           </a:solidFill>
                           <a:latin typeface="Calibri"/>
                         </a:rPr>
-                        <a:t>Plan B WITH MIN</a:t>
+                        <a:t>New plan WITH MIN</a:t>
                       </a:r>
                     </a:p>
                   </a:txBody>
@@ -14428,7 +14428,7 @@
                           </a:solidFill>
                           <a:latin typeface="Calibri"/>
                         </a:rPr>
-                        <a:t>Plan B WITH MIN</a:t>
+                        <a:t>New plan WITH MIN</a:t>
                       </a:r>
                     </a:p>
                   </a:txBody>
@@ -16031,7 +16031,7 @@
                           </a:solidFill>
                           <a:latin typeface="Calibri"/>
                         </a:rPr>
-                        <a:t>Plan B WITH MIN</a:t>
+                        <a:t>New plan WITH MIN</a:t>
                       </a:r>
                     </a:p>
                   </a:txBody>
@@ -17354,7 +17354,7 @@
                 </a:solidFill>
                 <a:latin typeface="Calibri"/>
               </a:rPr>
-              <a:t>Today's current plan pays $3,140. Plan B WITH MIN: REAL $1,300 | SWAP $1,828 | FLIP $2,133.</a:t>
+              <a:t>Today's current plan pays $3,140. New plan WITH MIN: REAL $1,300 | SWAP $1,828 | FLIP $2,133.</a:t>
             </a:r>
           </a:p>
         </p:txBody>
@@ -17492,7 +17492,7 @@
                 </a:solidFill>
                 <a:latin typeface="Calibri"/>
               </a:rPr>
-              <a:t>All values are Plan B WITH MIN (recommended). $W = written premium, $C = collected.</a:t>
+              <a:t>All values are NEW PLAN WITH MIN. $W = written premium, $C = collected.</a:t>
             </a:r>
           </a:p>
         </p:txBody>
@@ -17930,7 +17930,7 @@
                           </a:solidFill>
                           <a:latin typeface="Calibri"/>
                         </a:rPr>
-                        <a:t>Plan B WITH MIN</a:t>
+                        <a:t>New plan WITH MIN</a:t>
                       </a:r>
                     </a:p>
                   </a:txBody>
@@ -19533,7 +19533,7 @@
                           </a:solidFill>
                           <a:latin typeface="Calibri"/>
                         </a:rPr>
-                        <a:t>Plan B WITH MIN</a:t>
+                        <a:t>New plan WITH MIN</a:t>
                       </a:r>
                     </a:p>
                   </a:txBody>
@@ -21136,7 +21136,7 @@
                           </a:solidFill>
                           <a:latin typeface="Calibri"/>
                         </a:rPr>
-                        <a:t>Plan B WITH MIN</a:t>
+                        <a:t>New plan WITH MIN</a:t>
                       </a:r>
                     </a:p>
                   </a:txBody>
@@ -22459,7 +22459,7 @@
                 </a:solidFill>
                 <a:latin typeface="Calibri"/>
               </a:rPr>
-              <a:t>Today's current plan pays $2,370. Plan B WITH MIN: REAL $10 | SWAP $545 | FLIP $1,068.</a:t>
+              <a:t>Today's current plan pays $2,370. New plan WITH MIN: REAL $10 | SWAP $545 | FLIP $1,068.</a:t>
             </a:r>
           </a:p>
         </p:txBody>
@@ -22597,7 +22597,7 @@
                 </a:solidFill>
                 <a:latin typeface="Calibri"/>
               </a:rPr>
-              <a:t>All values are Plan B WITH MIN (recommended). $W = written premium, $C = collected.</a:t>
+              <a:t>All values are NEW PLAN WITH MIN. $W = written premium, $C = collected.</a:t>
             </a:r>
           </a:p>
         </p:txBody>
@@ -23035,7 +23035,7 @@
                           </a:solidFill>
                           <a:latin typeface="Calibri"/>
                         </a:rPr>
-                        <a:t>Plan B WITH MIN</a:t>
+                        <a:t>New plan WITH MIN</a:t>
                       </a:r>
                     </a:p>
                   </a:txBody>
@@ -24638,7 +24638,7 @@
                           </a:solidFill>
                           <a:latin typeface="Calibri"/>
                         </a:rPr>
-                        <a:t>Plan B WITH MIN</a:t>
+                        <a:t>New plan WITH MIN</a:t>
                       </a:r>
                     </a:p>
                   </a:txBody>
@@ -26241,7 +26241,7 @@
                           </a:solidFill>
                           <a:latin typeface="Calibri"/>
                         </a:rPr>
-                        <a:t>Plan B WITH MIN</a:t>
+                        <a:t>New plan WITH MIN</a:t>
                       </a:r>
                     </a:p>
                   </a:txBody>
@@ -27564,7 +27564,7 @@
                 </a:solidFill>
                 <a:latin typeface="Calibri"/>
               </a:rPr>
-              <a:t>Today's current plan pays $2,070. Plan B WITH MIN: REAL $22 | SWAP $366 | FLIP $688.</a:t>
+              <a:t>Today's current plan pays $2,070. New plan WITH MIN: REAL $22 | SWAP $366 | FLIP $688.</a:t>
             </a:r>
           </a:p>
         </p:txBody>
@@ -27702,7 +27702,7 @@
                 </a:solidFill>
                 <a:latin typeface="Calibri"/>
               </a:rPr>
-              <a:t>All values are Plan B WITH MIN (recommended). $W = written premium, $C = collected.</a:t>
+              <a:t>All values are NEW PLAN WITH MIN. $W = written premium, $C = collected.</a:t>
             </a:r>
           </a:p>
         </p:txBody>
@@ -28140,7 +28140,7 @@
                           </a:solidFill>
                           <a:latin typeface="Calibri"/>
                         </a:rPr>
-                        <a:t>Plan B WITH MIN</a:t>
+                        <a:t>New plan WITH MIN</a:t>
                       </a:r>
                     </a:p>
                   </a:txBody>
@@ -29743,7 +29743,7 @@
                           </a:solidFill>
                           <a:latin typeface="Calibri"/>
                         </a:rPr>
-                        <a:t>Plan B WITH MIN</a:t>
+                        <a:t>New plan WITH MIN</a:t>
                       </a:r>
                     </a:p>
                   </a:txBody>
@@ -31346,7 +31346,7 @@
                           </a:solidFill>
                           <a:latin typeface="Calibri"/>
                         </a:rPr>
-                        <a:t>Plan B WITH MIN</a:t>
+                        <a:t>New plan WITH MIN</a:t>
                       </a:r>
                     </a:p>
                   </a:txBody>
@@ -32669,7 +32669,7 @@
                 </a:solidFill>
                 <a:latin typeface="Calibri"/>
               </a:rPr>
-              <a:t>Today's current plan pays $1,400. Plan B WITH MIN: REAL $102 | SWAP $405 | FLIP $605.</a:t>
+              <a:t>Today's current plan pays $1,400. New plan WITH MIN: REAL $102 | SWAP $405 | FLIP $605.</a:t>
             </a:r>
           </a:p>
         </p:txBody>
@@ -32807,7 +32807,7 @@
                 </a:solidFill>
                 <a:latin typeface="Calibri"/>
               </a:rPr>
-              <a:t>All values are Plan B WITH MIN (recommended). $W = written premium, $C = collected.</a:t>
+              <a:t>All values are NEW PLAN WITH MIN. $W = written premium, $C = collected.</a:t>
             </a:r>
           </a:p>
         </p:txBody>
@@ -33245,7 +33245,7 @@
                           </a:solidFill>
                           <a:latin typeface="Calibri"/>
                         </a:rPr>
-                        <a:t>Plan B WITH MIN</a:t>
+                        <a:t>New plan WITH MIN</a:t>
                       </a:r>
                     </a:p>
                   </a:txBody>
@@ -34848,7 +34848,7 @@
                           </a:solidFill>
                           <a:latin typeface="Calibri"/>
                         </a:rPr>
-                        <a:t>Plan B WITH MIN</a:t>
+                        <a:t>New plan WITH MIN</a:t>
                       </a:r>
                     </a:p>
                   </a:txBody>
@@ -36451,7 +36451,7 @@
                           </a:solidFill>
                           <a:latin typeface="Calibri"/>
                         </a:rPr>
-                        <a:t>Plan B WITH MIN</a:t>
+                        <a:t>New plan WITH MIN</a:t>
                       </a:r>
                     </a:p>
                   </a:txBody>
@@ -37774,7 +37774,7 @@
                 </a:solidFill>
                 <a:latin typeface="Calibri"/>
               </a:rPr>
-              <a:t>Today's current plan pays $1,940. Plan B WITH MIN: REAL $557 | SWAP $941 | FLIP $1,264.</a:t>
+              <a:t>Today's current plan pays $1,940. New plan WITH MIN: REAL $557 | SWAP $941 | FLIP $1,264.</a:t>
             </a:r>
           </a:p>
         </p:txBody>
@@ -38047,7 +38047,7 @@
         </p:nvGraphicFramePr>
         <p:xfrm>
           <a:off x="365760" y="1097280"/>
-          <a:ext cx="11430000" cy="2743200"/>
+          <a:ext cx="11430000" cy="2011680"/>
         </p:xfrm>
         <a:graphic>
           <a:graphicData uri="http://schemas.openxmlformats.org/drawingml/2006/table">
@@ -38056,13 +38056,13 @@
                 <a:tableStyleId>{5C22544A-7EE6-4342-B048-85BDC9FD1C3A}</a:tableStyleId>
               </a:tblPr>
               <a:tblGrid>
-                <a:gridCol w="2743200"/>
+                <a:gridCol w="3108960"/>
                 <a:gridCol w="1463040"/>
                 <a:gridCol w="1463040"/>
                 <a:gridCol w="1463040"/>
-                <a:gridCol w="4297680"/>
+                <a:gridCol w="3931920"/>
               </a:tblGrid>
-              <a:tr h="457200">
+              <a:tr h="502920">
                 <a:tc>
                   <a:txBody>
                     <a:bodyPr lIns="45720" rIns="45720" tIns="18288" bIns="18288" wrap="square" anchor="ctr"/>
@@ -38179,7 +38179,7 @@
                   </a:tcPr>
                 </a:tc>
               </a:tr>
-              <a:tr h="457200">
+              <a:tr h="502920">
                 <a:tc>
                   <a:txBody>
                     <a:bodyPr lIns="45720" rIns="45720" tIns="18288" bIns="18288" wrap="square" anchor="ctr"/>
@@ -38296,7 +38296,7 @@
                   </a:tcPr>
                 </a:tc>
               </a:tr>
-              <a:tr h="457200">
+              <a:tr h="502920">
                 <a:tc>
                   <a:txBody>
                     <a:bodyPr lIns="45720" rIns="45720" tIns="18288" bIns="18288" wrap="square" anchor="ctr"/>
@@ -38310,7 +38310,7 @@
                           </a:solidFill>
                           <a:latin typeface="Calibri"/>
                         </a:rPr>
-                        <a:t>Plan A no-min</a:t>
+                        <a:t>New plan - no minimum</a:t>
                       </a:r>
                     </a:p>
                   </a:txBody>
@@ -38402,7 +38402,7 @@
                           </a:solidFill>
                           <a:latin typeface="Calibri"/>
                         </a:rPr>
-                        <a:t>Grows - new plan pays REN</a:t>
+                        <a:t>Calculated target before applying minimums</a:t>
                       </a:r>
                     </a:p>
                   </a:txBody>
@@ -38413,7 +38413,7 @@
                   </a:tcPr>
                 </a:tc>
               </a:tr>
-              <a:tr h="457200">
+              <a:tr h="502920">
                 <a:tc>
                   <a:txBody>
                     <a:bodyPr lIns="45720" rIns="45720" tIns="18288" bIns="18288" wrap="square" anchor="ctr"/>
@@ -38427,7 +38427,7 @@
                           </a:solidFill>
                           <a:latin typeface="Calibri"/>
                         </a:rPr>
-                        <a:t>Plan A WITH MIN</a:t>
+                        <a:t>New plan WITH MIN (RECOMMENDED)</a:t>
                       </a:r>
                     </a:p>
                   </a:txBody>
@@ -38519,241 +38519,7 @@
                           </a:solidFill>
                           <a:latin typeface="Calibri"/>
                         </a:rPr>
-                        <a:t>Grows as REN gate opens</a:t>
-                      </a:r>
-                    </a:p>
-                  </a:txBody>
-                  <a:tcPr>
-                    <a:solidFill>
-                      <a:srgbClr val="FFFFFF"/>
-                    </a:solidFill>
-                  </a:tcPr>
-                </a:tc>
-              </a:tr>
-              <a:tr h="457200">
-                <a:tc>
-                  <a:txBody>
-                    <a:bodyPr lIns="45720" rIns="45720" tIns="18288" bIns="18288" wrap="square" anchor="ctr"/>
-                    <a:lstStyle/>
-                    <a:p>
-                      <a:pPr algn="ctr"/>
-                      <a:r>
-                        <a:rPr sz="1300" b="1">
-                          <a:solidFill>
-                            <a:srgbClr val="101010"/>
-                          </a:solidFill>
-                          <a:latin typeface="Calibri"/>
-                        </a:rPr>
-                        <a:t>Plan B no-min</a:t>
-                      </a:r>
-                    </a:p>
-                  </a:txBody>
-                  <a:tcPr>
-                    <a:solidFill>
-                      <a:srgbClr val="F2F2F2"/>
-                    </a:solidFill>
-                  </a:tcPr>
-                </a:tc>
-                <a:tc>
-                  <a:txBody>
-                    <a:bodyPr lIns="45720" rIns="45720" tIns="18288" bIns="18288" wrap="square" anchor="ctr"/>
-                    <a:lstStyle/>
-                    <a:p>
-                      <a:pPr algn="ctr"/>
-                      <a:r>
-                        <a:rPr sz="1300">
-                          <a:solidFill>
-                            <a:srgbClr val="101010"/>
-                          </a:solidFill>
-                          <a:latin typeface="Calibri"/>
-                        </a:rPr>
-                        <a:t>$7,322</a:t>
-                      </a:r>
-                    </a:p>
-                  </a:txBody>
-                  <a:tcPr>
-                    <a:solidFill>
-                      <a:srgbClr val="F2F2F2"/>
-                    </a:solidFill>
-                  </a:tcPr>
-                </a:tc>
-                <a:tc>
-                  <a:txBody>
-                    <a:bodyPr lIns="45720" rIns="45720" tIns="18288" bIns="18288" wrap="square" anchor="ctr"/>
-                    <a:lstStyle/>
-                    <a:p>
-                      <a:pPr algn="ctr"/>
-                      <a:r>
-                        <a:rPr sz="1300">
-                          <a:solidFill>
-                            <a:srgbClr val="101010"/>
-                          </a:solidFill>
-                          <a:latin typeface="Calibri"/>
-                        </a:rPr>
-                        <a:t>$8,637</a:t>
-                      </a:r>
-                    </a:p>
-                  </a:txBody>
-                  <a:tcPr>
-                    <a:solidFill>
-                      <a:srgbClr val="F2F2F2"/>
-                    </a:solidFill>
-                  </a:tcPr>
-                </a:tc>
-                <a:tc>
-                  <a:txBody>
-                    <a:bodyPr lIns="45720" rIns="45720" tIns="18288" bIns="18288" wrap="square" anchor="ctr"/>
-                    <a:lstStyle/>
-                    <a:p>
-                      <a:pPr algn="ctr"/>
-                      <a:r>
-                        <a:rPr sz="1300">
-                          <a:solidFill>
-                            <a:srgbClr val="101010"/>
-                          </a:solidFill>
-                          <a:latin typeface="Calibri"/>
-                        </a:rPr>
-                        <a:t>$9,638</a:t>
-                      </a:r>
-                    </a:p>
-                  </a:txBody>
-                  <a:tcPr>
-                    <a:solidFill>
-                      <a:srgbClr val="F2F2F2"/>
-                    </a:solidFill>
-                  </a:tcPr>
-                </a:tc>
-                <a:tc>
-                  <a:txBody>
-                    <a:bodyPr lIns="45720" rIns="45720" tIns="18288" bIns="18288" wrap="square" anchor="ctr"/>
-                    <a:lstStyle/>
-                    <a:p>
-                      <a:pPr algn="ctr"/>
-                      <a:r>
-                        <a:rPr sz="1300">
-                          <a:solidFill>
-                            <a:srgbClr val="101010"/>
-                          </a:solidFill>
-                          <a:latin typeface="Calibri"/>
-                        </a:rPr>
-                        <a:t>Top motivator - FLIP exceeds today</a:t>
-                      </a:r>
-                    </a:p>
-                  </a:txBody>
-                  <a:tcPr>
-                    <a:solidFill>
-                      <a:srgbClr val="F2F2F2"/>
-                    </a:solidFill>
-                  </a:tcPr>
-                </a:tc>
-              </a:tr>
-              <a:tr h="457200">
-                <a:tc>
-                  <a:txBody>
-                    <a:bodyPr lIns="45720" rIns="45720" tIns="18288" bIns="18288" wrap="square" anchor="ctr"/>
-                    <a:lstStyle/>
-                    <a:p>
-                      <a:pPr algn="ctr"/>
-                      <a:r>
-                        <a:rPr sz="1300" b="1">
-                          <a:solidFill>
-                            <a:srgbClr val="101010"/>
-                          </a:solidFill>
-                          <a:latin typeface="Calibri"/>
-                        </a:rPr>
-                        <a:t>Plan B WITH MIN (RECOMMENDED)</a:t>
-                      </a:r>
-                    </a:p>
-                  </a:txBody>
-                  <a:tcPr>
-                    <a:solidFill>
-                      <a:srgbClr val="FFFFFF"/>
-                    </a:solidFill>
-                  </a:tcPr>
-                </a:tc>
-                <a:tc>
-                  <a:txBody>
-                    <a:bodyPr lIns="45720" rIns="45720" tIns="18288" bIns="18288" wrap="square" anchor="ctr"/>
-                    <a:lstStyle/>
-                    <a:p>
-                      <a:pPr algn="ctr"/>
-                      <a:r>
-                        <a:rPr sz="1300">
-                          <a:solidFill>
-                            <a:srgbClr val="101010"/>
-                          </a:solidFill>
-                          <a:latin typeface="Calibri"/>
-                        </a:rPr>
-                        <a:t>$2,419</a:t>
-                      </a:r>
-                    </a:p>
-                  </a:txBody>
-                  <a:tcPr>
-                    <a:solidFill>
-                      <a:srgbClr val="FFFFFF"/>
-                    </a:solidFill>
-                  </a:tcPr>
-                </a:tc>
-                <a:tc>
-                  <a:txBody>
-                    <a:bodyPr lIns="45720" rIns="45720" tIns="18288" bIns="18288" wrap="square" anchor="ctr"/>
-                    <a:lstStyle/>
-                    <a:p>
-                      <a:pPr algn="ctr"/>
-                      <a:r>
-                        <a:rPr sz="1300">
-                          <a:solidFill>
-                            <a:srgbClr val="101010"/>
-                          </a:solidFill>
-                          <a:latin typeface="Calibri"/>
-                        </a:rPr>
-                        <a:t>$4,725</a:t>
-                      </a:r>
-                    </a:p>
-                  </a:txBody>
-                  <a:tcPr>
-                    <a:solidFill>
-                      <a:srgbClr val="FFFFFF"/>
-                    </a:solidFill>
-                  </a:tcPr>
-                </a:tc>
-                <a:tc>
-                  <a:txBody>
-                    <a:bodyPr lIns="45720" rIns="45720" tIns="18288" bIns="18288" wrap="square" anchor="ctr"/>
-                    <a:lstStyle/>
-                    <a:p>
-                      <a:pPr algn="ctr"/>
-                      <a:r>
-                        <a:rPr sz="1300">
-                          <a:solidFill>
-                            <a:srgbClr val="101010"/>
-                          </a:solidFill>
-                          <a:latin typeface="Calibri"/>
-                        </a:rPr>
-                        <a:t>$6,475</a:t>
-                      </a:r>
-                    </a:p>
-                  </a:txBody>
-                  <a:tcPr>
-                    <a:solidFill>
-                      <a:srgbClr val="FFFFFF"/>
-                    </a:solidFill>
-                  </a:tcPr>
-                </a:tc>
-                <a:tc>
-                  <a:txBody>
-                    <a:bodyPr lIns="45720" rIns="45720" tIns="18288" bIns="18288" wrap="square" anchor="ctr"/>
-                    <a:lstStyle/>
-                    <a:p>
-                      <a:pPr algn="ctr"/>
-                      <a:r>
-                        <a:rPr sz="1300">
-                          <a:solidFill>
-                            <a:srgbClr val="101010"/>
-                          </a:solidFill>
-                          <a:latin typeface="Calibri"/>
-                        </a:rPr>
-                        <a:t>FLIP matches today's $12k pay</a:t>
+                        <a:t>Pays when NB &gt;= $45k/mo and retention &gt;= 30%</a:t>
                       </a:r>
                     </a:p>
                   </a:txBody>
@@ -38776,7 +38542,7 @@
         </p:nvSpPr>
         <p:spPr>
           <a:xfrm>
-            <a:off x="457200" y="4389120"/>
+            <a:off x="457200" y="3657600"/>
             <a:ext cx="11247120" cy="457200"/>
           </a:xfrm>
           <a:prstGeom prst="rect">
@@ -38814,8 +38580,8 @@
         </p:nvSpPr>
         <p:spPr>
           <a:xfrm>
-            <a:off x="640080" y="4846320"/>
-            <a:ext cx="10972800" cy="1737360"/>
+            <a:off x="640080" y="4114800"/>
+            <a:ext cx="10972800" cy="2377440"/>
           </a:xfrm>
           <a:prstGeom prst="rect">
             <a:avLst/>
@@ -38859,7 +38625,7 @@
                 </a:solidFill>
                 <a:latin typeface="Calibri"/>
               </a:rPr>
-              <a:t>• Plan B WITH MIN under 100% FLIP = $6,475. Compare to today's current $12,220: agents earn the SAME for doing the RIGHT behavior.</a:t>
+              <a:t>• New plan WITH MIN under 100% FLIP = $6,475 (53% of today's $12,220). The agency keeps more profit while still rewarding the right behavior.</a:t>
             </a:r>
           </a:p>
           <a:p>
@@ -38875,7 +38641,7 @@
                 </a:solidFill>
                 <a:latin typeface="Calibri"/>
               </a:rPr>
-              <a:t>• Plan B no-min under FLIP = $9,638, which is ABOVE today's pay. Some headroom if ownership wants to be more generous.</a:t>
+              <a:t>• New plan rewards what the current plan ignores: keeping the customer (retention bonus) and collecting more money upfront (kicker).</a:t>
             </a:r>
           </a:p>
           <a:p>
@@ -38891,7 +38657,7 @@
                 </a:solidFill>
                 <a:latin typeface="Calibri"/>
               </a:rPr>
-              <a:t>• The pitch to the agent: 'today you're earning $509/mo on rewrites. Under the new plan, when you renew instead, you earn the same dollars - but the customer stays put.'</a:t>
+              <a:t>• The pitch to the agent: 'today you're earning $509/mo on rewrites. Under the new plan, when you renew instead, the retention bonus pays you for the premium you kept on the books.'</a:t>
             </a:r>
           </a:p>
         </p:txBody>
@@ -41191,7 +40957,7 @@
                 </a:solidFill>
                 <a:latin typeface="Calibri"/>
               </a:rPr>
-              <a:t>THE BONUS PLAN (Plan A) - with $45,000 NB premium + 30% retention minimums</a:t>
+              <a:t>THE NEW BONUS PLAN - with $45,000 NB premium + 30% retention minimums</a:t>
             </a:r>
           </a:p>
         </p:txBody>
@@ -41229,7 +40995,7 @@
                 </a:solidFill>
                 <a:latin typeface="Calibri"/>
               </a:rPr>
-              <a:t>Best balance of agent motivation, sales-story clarity, profitability protection, and pay-near-current when behavior shifts.</a:t>
+              <a:t>Balanced for agent motivation, retention upside, profit protection, and clean payroll math.</a:t>
             </a:r>
           </a:p>
         </p:txBody>
@@ -41267,7 +41033,7 @@
                 </a:solidFill>
                 <a:latin typeface="Calibri"/>
               </a:rPr>
-              <a:t>Why Plan B over Plan A:</a:t>
+              <a:t>Why the new plan beats today's:</a:t>
             </a:r>
           </a:p>
         </p:txBody>
@@ -41309,7 +41075,7 @@
                 </a:solidFill>
                 <a:latin typeface="Calibri"/>
               </a:rPr>
-              <a:t>• Plan B has the strongest UPSELL story: 'every BI+UM bundle is worth $5'. Easy to coach, easy to defend.</a:t>
+              <a:t>• Pays for RENEWALS (today's plan pays $0 for renewals) - turns retention into a paying behavior.</a:t>
             </a:r>
           </a:p>
           <a:p>
@@ -41325,7 +41091,7 @@
                 </a:solidFill>
                 <a:latin typeface="Calibri"/>
               </a:rPr>
-              <a:t>• Plan B pays closest to today's number when behavior shifts (close to par in SWAP scenario).</a:t>
+              <a:t>• Pays MORE on bigger premium policies via NB tiers - aligns agent pay with agency commission.</a:t>
             </a:r>
           </a:p>
           <a:p>
@@ -41341,7 +41107,7 @@
                 </a:solidFill>
                 <a:latin typeface="Calibri"/>
               </a:rPr>
-              <a:t>• Plan B rewards coverage QUALITY - which carriers prefer and persistency improves.</a:t>
+              <a:t>• Pays MORE on policies with higher collected % via the kicker - rewards getting cash up front.</a:t>
             </a:r>
           </a:p>
           <a:p>
@@ -41357,7 +41123,7 @@
                 </a:solidFill>
                 <a:latin typeface="Calibri"/>
               </a:rPr>
-              <a:t>• Plan A is leaner (lower cost) - keep as fallback if Plan B is too generous.</a:t>
+              <a:t>• Costs LESS at full target than today's count-tier plan - new plan FLIP $6,475 vs current $12,220.</a:t>
             </a:r>
           </a:p>
         </p:txBody>
@@ -41433,7 +41199,7 @@
                 </a:solidFill>
                 <a:latin typeface="Calibri"/>
               </a:rPr>
-              <a:t>1) Coverage adoption (estimated 35% of NB, 30% of REN - track actual).   2) Minimum thresholds - softer ($25k/$15k) if too punishing, tighter ($45k/$25k) if too easy.   3) PIF and kicker amounts to balance pay vs profit.</a:t>
+              <a:t>1) Retention bonus rate (0.5% today - dial up if too lean, down if too rich).   2) Minimum thresholds (NB $45k / retention 30% - soften if too punishing, tighten if too easy).   3) Per-policy NB tier amounts and collected-kicker bands.</a:t>
             </a:r>
           </a:p>
         </p:txBody>
@@ -41897,7 +41663,7 @@
                 </a:solidFill>
                 <a:latin typeface="Calibri"/>
               </a:rPr>
-              <a:t>• Ownership picks Plan A or B and signs off on minimums.</a:t>
+              <a:t>• Ownership signs off on the new plan rules and minimum thresholds.</a:t>
             </a:r>
           </a:p>
           <a:p>
@@ -41929,7 +41695,7 @@
                 </a:solidFill>
                 <a:latin typeface="Calibri"/>
               </a:rPr>
-              <a:t>• Print the Agent Quick Reference (in the workbook) for each desk.</a:t>
+              <a:t>• Print the Manual Tracker (in the workbook) for each desk.</a:t>
             </a:r>
           </a:p>
         </p:txBody>
@@ -42619,7 +42385,7 @@
                 </a:solidFill>
                 <a:latin typeface="Calibri"/>
               </a:rPr>
-              <a:t>Plan B with the new minimums.</a:t>
+              <a:t>The new bonus plan with NB &amp; retention minimums.</a:t>
             </a:r>
           </a:p>
         </p:txBody>
@@ -42733,7 +42499,7 @@
                 </a:solidFill>
                 <a:latin typeface="Calibri"/>
               </a:rPr>
-              <a:t>Two options. One decision. Ready to roll out in 10 weeks.</a:t>
+              <a:t>One plan. One decision. Ready to roll out in 10 weeks.</a:t>
             </a:r>
           </a:p>
         </p:txBody>
@@ -49221,7 +48987,7 @@
         </p:nvGraphicFramePr>
         <p:xfrm>
           <a:off x="457200" y="1097280"/>
-          <a:ext cx="11247120" cy="3657600"/>
+          <a:ext cx="11247120" cy="3291840"/>
         </p:xfrm>
         <a:graphic>
           <a:graphicData uri="http://schemas.openxmlformats.org/drawingml/2006/table">
@@ -49816,7 +49582,7 @@
                           </a:solidFill>
                           <a:latin typeface="Calibri"/>
                         </a:rPr>
-                        <a:t>Plan A target (no min): $252</a:t>
+                        <a:t>New plan target (no min): $252</a:t>
                       </a:r>
                     </a:p>
                   </a:txBody>
@@ -49862,84 +49628,13 @@
                           </a:solidFill>
                           <a:latin typeface="Calibri"/>
                         </a:rPr>
-                        <a:t>32% of safe net - OK</a:t>
+                        <a:t>32% of safe net - well under threshold</a:t>
                       </a:r>
                     </a:p>
                   </a:txBody>
                   <a:tcPr>
                     <a:solidFill>
                       <a:srgbClr val="F2F2F2"/>
-                    </a:solidFill>
-                  </a:tcPr>
-                </a:tc>
-              </a:tr>
-              <a:tr h="365760">
-                <a:tc>
-                  <a:txBody>
-                    <a:bodyPr lIns="45720" rIns="45720" tIns="18288" bIns="18288" wrap="square" anchor="ctr"/>
-                    <a:lstStyle/>
-                    <a:p>
-                      <a:pPr algn="ctr"/>
-                      <a:r>
-                        <a:rPr sz="1200" b="1">
-                          <a:solidFill>
-                            <a:srgbClr val="101010"/>
-                          </a:solidFill>
-                          <a:latin typeface="Calibri"/>
-                        </a:rPr>
-                        <a:t>Plan B target (no min): $399</a:t>
-                      </a:r>
-                    </a:p>
-                  </a:txBody>
-                  <a:tcPr>
-                    <a:solidFill>
-                      <a:srgbClr val="FFFFFF"/>
-                    </a:solidFill>
-                  </a:tcPr>
-                </a:tc>
-                <a:tc>
-                  <a:txBody>
-                    <a:bodyPr lIns="45720" rIns="45720" tIns="18288" bIns="18288" wrap="square" anchor="ctr"/>
-                    <a:lstStyle/>
-                    <a:p>
-                      <a:pPr algn="ctr"/>
-                      <a:r>
-                        <a:rPr sz="1200">
-                          <a:solidFill>
-                            <a:srgbClr val="101010"/>
-                          </a:solidFill>
-                          <a:latin typeface="Calibri"/>
-                        </a:rPr>
-                        <a:t>$399.46</a:t>
-                      </a:r>
-                    </a:p>
-                  </a:txBody>
-                  <a:tcPr>
-                    <a:solidFill>
-                      <a:srgbClr val="FFFFFF"/>
-                    </a:solidFill>
-                  </a:tcPr>
-                </a:tc>
-                <a:tc>
-                  <a:txBody>
-                    <a:bodyPr lIns="45720" rIns="45720" tIns="18288" bIns="18288" wrap="square" anchor="ctr"/>
-                    <a:lstStyle/>
-                    <a:p>
-                      <a:pPr algn="ctr"/>
-                      <a:r>
-                        <a:rPr sz="1200">
-                          <a:solidFill>
-                            <a:srgbClr val="101010"/>
-                          </a:solidFill>
-                          <a:latin typeface="Calibri"/>
-                        </a:rPr>
-                        <a:t>51% of safe net - flagged for review</a:t>
-                      </a:r>
-                    </a:p>
-                  </a:txBody>
-                  <a:tcPr>
-                    <a:solidFill>
-                      <a:srgbClr val="FFFFFF"/>
                     </a:solidFill>
                   </a:tcPr>
                 </a:tc>
@@ -49956,7 +49651,7 @@
         </p:nvSpPr>
         <p:spPr>
           <a:xfrm>
-            <a:off x="457200" y="5394960"/>
+            <a:off x="457200" y="5212080"/>
             <a:ext cx="11247120" cy="457200"/>
           </a:xfrm>
           <a:prstGeom prst="rect">
@@ -49994,8 +49689,8 @@
         </p:nvSpPr>
         <p:spPr>
           <a:xfrm>
-            <a:off x="640080" y="5760720"/>
-            <a:ext cx="10972800" cy="822960"/>
+            <a:off x="640080" y="5577840"/>
+            <a:ext cx="10972800" cy="1005840"/>
           </a:xfrm>
           <a:prstGeom prst="rect">
             <a:avLst/>
@@ -50019,7 +49714,7 @@
                 </a:solidFill>
                 <a:latin typeface="Calibri"/>
               </a:rPr>
-              <a:t>$700 of safe net means Abel's January contribution can support a bonus up to ~$280 before ownership wants a second look. The actual bonus depends on the plan rules - Plan A pays $252 (under threshold), Plan B pays $399 (above threshold, flagged but not auto-cut).</a:t>
+              <a:t>$782 of safe net means Abel's January contribution can support a bonus up to ~$313 before ownership wants a second look. Under the new plan, Abel's January target is $252 - about 32% of safe net, well below the 40% review threshold.</a:t>
             </a:r>
           </a:p>
         </p:txBody>

--- a/output/Bonus_Plan_FINAL.pptx
+++ b/output/Bonus_Plan_FINAL.pptx
@@ -26,7 +26,6 @@
     <p:sldId id="274" r:id="rId25"/>
     <p:sldId id="275" r:id="rId26"/>
     <p:sldId id="276" r:id="rId27"/>
-    <p:sldId id="277" r:id="rId28"/>
   </p:sldIdLst>
   <p:sldSz cx="12188952" cy="6858000" type="screen4x3"/>
   <p:notesSz cx="6858000" cy="9144000"/>
@@ -3482,1080 +3481,6 @@
                 </a:solidFill>
                 <a:latin typeface="Calibri"/>
               </a:rPr>
-              <a:t>Why does CURRENT bonus DROP when RWR becomes REN?</a:t>
-            </a:r>
-          </a:p>
-        </p:txBody>
-      </p:sp>
-      <p:sp>
-        <p:nvSpPr>
-          <p:cNvPr id="4" name="TextBox 3"/>
-          <p:cNvSpPr txBox="1"/>
-          <p:nvPr/>
-        </p:nvSpPr>
-        <p:spPr>
-          <a:xfrm>
-            <a:off x="365760" y="530352"/>
-            <a:ext cx="11430000" cy="320040"/>
-          </a:xfrm>
-          <a:prstGeom prst="rect">
-            <a:avLst/>
-          </a:prstGeom>
-          <a:noFill/>
-          <a:ln>
-            <a:noFill/>
-          </a:ln>
-        </p:spPr>
-        <p:txBody>
-          <a:bodyPr wrap="square" lIns="73152" rIns="73152" tIns="36576" bIns="36576" anchor="ctr">
-            <a:spAutoFit/>
-          </a:bodyPr>
-          <a:lstStyle/>
-          <a:p>
-            <a:pPr algn="l"/>
-            <a:r>
-              <a:rPr sz="1200" b="0" i="1">
-                <a:solidFill>
-                  <a:srgbClr val="BDD7EE"/>
-                </a:solidFill>
-                <a:latin typeface="Calibri"/>
-              </a:rPr>
-              <a:t>Renewals pay MORE than rewrites - but only under the new plan.</a:t>
-            </a:r>
-          </a:p>
-        </p:txBody>
-      </p:sp>
-      <p:sp>
-        <p:nvSpPr>
-          <p:cNvPr id="5" name="Rectangle 4"/>
-          <p:cNvSpPr/>
-          <p:nvPr/>
-        </p:nvSpPr>
-        <p:spPr>
-          <a:xfrm>
-            <a:off x="0" y="6647688"/>
-            <a:ext cx="12188952" cy="210312"/>
-          </a:xfrm>
-          <a:prstGeom prst="rect">
-            <a:avLst/>
-          </a:prstGeom>
-          <a:solidFill>
-            <a:srgbClr val="F2F2F2"/>
-          </a:solidFill>
-          <a:ln>
-            <a:noFill/>
-          </a:ln>
-          <a:effectLst/>
-        </p:spPr>
-        <p:style>
-          <a:lnRef idx="1">
-            <a:schemeClr val="accent1"/>
-          </a:lnRef>
-          <a:fillRef idx="3">
-            <a:schemeClr val="accent1"/>
-          </a:fillRef>
-          <a:effectRef idx="2">
-            <a:schemeClr val="accent1"/>
-          </a:effectRef>
-          <a:fontRef idx="minor">
-            <a:schemeClr val="lt1"/>
-          </a:fontRef>
-        </p:style>
-        <p:txBody>
-          <a:bodyPr rtlCol="0" anchor="ctr"/>
-          <a:lstStyle/>
-          <a:p>
-            <a:pPr algn="ctr"/>
-          </a:p>
-        </p:txBody>
-      </p:sp>
-      <p:sp>
-        <p:nvSpPr>
-          <p:cNvPr id="6" name="TextBox 5"/>
-          <p:cNvSpPr txBox="1"/>
-          <p:nvPr/>
-        </p:nvSpPr>
-        <p:spPr>
-          <a:xfrm>
-            <a:off x="365760" y="6647688"/>
-            <a:ext cx="7315200" cy="210312"/>
-          </a:xfrm>
-          <a:prstGeom prst="rect">
-            <a:avLst/>
-          </a:prstGeom>
-          <a:noFill/>
-          <a:ln>
-            <a:noFill/>
-          </a:ln>
-        </p:spPr>
-        <p:txBody>
-          <a:bodyPr wrap="square" lIns="73152" rIns="73152" tIns="36576" bIns="36576" anchor="ctr">
-            <a:spAutoFit/>
-          </a:bodyPr>
-          <a:lstStyle/>
-          <a:p>
-            <a:pPr algn="l"/>
-            <a:r>
-              <a:rPr sz="1000" b="0" i="0">
-                <a:solidFill>
-                  <a:srgbClr val="404040"/>
-                </a:solidFill>
-                <a:latin typeface="Calibri"/>
-              </a:rPr>
-              <a:t>Fiesta Bonus Plan - Ownership Decision Deck</a:t>
-            </a:r>
-          </a:p>
-        </p:txBody>
-      </p:sp>
-      <p:sp>
-        <p:nvSpPr>
-          <p:cNvPr id="7" name="TextBox 6"/>
-          <p:cNvSpPr txBox="1"/>
-          <p:nvPr/>
-        </p:nvSpPr>
-        <p:spPr>
-          <a:xfrm>
-            <a:off x="11338560" y="6647688"/>
-            <a:ext cx="731520" cy="210312"/>
-          </a:xfrm>
-          <a:prstGeom prst="rect">
-            <a:avLst/>
-          </a:prstGeom>
-          <a:noFill/>
-          <a:ln>
-            <a:noFill/>
-          </a:ln>
-        </p:spPr>
-        <p:txBody>
-          <a:bodyPr wrap="square" lIns="73152" rIns="73152" tIns="36576" bIns="36576" anchor="ctr">
-            <a:spAutoFit/>
-          </a:bodyPr>
-          <a:lstStyle/>
-          <a:p>
-            <a:pPr algn="r"/>
-            <a:r>
-              <a:rPr sz="1000" b="0" i="0">
-                <a:solidFill>
-                  <a:srgbClr val="404040"/>
-                </a:solidFill>
-                <a:latin typeface="Calibri"/>
-              </a:rPr>
-              <a:t>10 / 22</a:t>
-            </a:r>
-          </a:p>
-        </p:txBody>
-      </p:sp>
-      <p:sp>
-        <p:nvSpPr>
-          <p:cNvPr id="8" name="TextBox 7"/>
-          <p:cNvSpPr txBox="1"/>
-          <p:nvPr/>
-        </p:nvSpPr>
-        <p:spPr>
-          <a:xfrm>
-            <a:off x="457200" y="1097280"/>
-            <a:ext cx="11247120" cy="457200"/>
-          </a:xfrm>
-          <a:prstGeom prst="rect">
-            <a:avLst/>
-          </a:prstGeom>
-          <a:noFill/>
-          <a:ln>
-            <a:noFill/>
-          </a:ln>
-        </p:spPr>
-        <p:txBody>
-          <a:bodyPr wrap="square" lIns="73152" rIns="73152" tIns="36576" bIns="36576" anchor="t">
-            <a:spAutoFit/>
-          </a:bodyPr>
-          <a:lstStyle/>
-          <a:p>
-            <a:pPr algn="l"/>
-            <a:r>
-              <a:rPr sz="2000" b="1" i="0">
-                <a:solidFill>
-                  <a:srgbClr val="1F4E78"/>
-                </a:solidFill>
-                <a:latin typeface="Calibri"/>
-              </a:rPr>
-              <a:t>Short answer:</a:t>
-            </a:r>
-          </a:p>
-        </p:txBody>
-      </p:sp>
-      <p:sp>
-        <p:nvSpPr>
-          <p:cNvPr id="9" name="TextBox 8"/>
-          <p:cNvSpPr txBox="1"/>
-          <p:nvPr/>
-        </p:nvSpPr>
-        <p:spPr>
-          <a:xfrm>
-            <a:off x="640080" y="1554480"/>
-            <a:ext cx="10972800" cy="914400"/>
-          </a:xfrm>
-          <a:prstGeom prst="rect">
-            <a:avLst/>
-          </a:prstGeom>
-          <a:noFill/>
-          <a:ln>
-            <a:noFill/>
-          </a:ln>
-        </p:spPr>
-        <p:txBody>
-          <a:bodyPr wrap="square" lIns="73152" rIns="73152" tIns="36576" bIns="36576" anchor="t">
-            <a:spAutoFit/>
-          </a:bodyPr>
-          <a:lstStyle/>
-          <a:p>
-            <a:pPr algn="l"/>
-            <a:r>
-              <a:rPr sz="1500" b="0" i="0">
-                <a:solidFill>
-                  <a:srgbClr val="101010"/>
-                </a:solidFill>
-                <a:latin typeface="Calibri"/>
-              </a:rPr>
-              <a:t>The CURRENT plan does NOT pay anything for renewals. It only counts NB + RWR toward the 35-policy tier. When 50% of RWR moves to REN, the NB+RWR count drops, the tier drops, the bonus drops. Renewals 'paying more' is only true under the NEW plan, where the retention bonus pays for premium retained.</a:t>
-            </a:r>
-          </a:p>
-        </p:txBody>
-      </p:sp>
-      <p:sp>
-        <p:nvSpPr>
-          <p:cNvPr id="10" name="TextBox 9"/>
-          <p:cNvSpPr txBox="1"/>
-          <p:nvPr/>
-        </p:nvSpPr>
-        <p:spPr>
-          <a:xfrm>
-            <a:off x="457200" y="2743200"/>
-            <a:ext cx="11247120" cy="457200"/>
-          </a:xfrm>
-          <a:prstGeom prst="rect">
-            <a:avLst/>
-          </a:prstGeom>
-          <a:noFill/>
-          <a:ln>
-            <a:noFill/>
-          </a:ln>
-        </p:spPr>
-        <p:txBody>
-          <a:bodyPr wrap="square" lIns="73152" rIns="73152" tIns="36576" bIns="36576" anchor="t">
-            <a:spAutoFit/>
-          </a:bodyPr>
-          <a:lstStyle/>
-          <a:p>
-            <a:pPr algn="l"/>
-            <a:r>
-              <a:rPr sz="1600" b="1" i="0">
-                <a:solidFill>
-                  <a:srgbClr val="1F4E78"/>
-                </a:solidFill>
-                <a:latin typeface="Calibri"/>
-              </a:rPr>
-              <a:t>Concrete example - Dialinerys Dieguez, March:</a:t>
-            </a:r>
-          </a:p>
-        </p:txBody>
-      </p:sp>
-      <p:graphicFrame>
-        <p:nvGraphicFramePr>
-          <p:cNvPr id="11" name="Table 10"/>
-          <p:cNvGraphicFramePr>
-            <a:graphicFrameLocks noGrp="1"/>
-          </p:cNvGraphicFramePr>
-          <p:nvPr/>
-        </p:nvGraphicFramePr>
-        <p:xfrm>
-          <a:off x="457200" y="3291840"/>
-          <a:ext cx="11247120" cy="1536192"/>
-        </p:xfrm>
-        <a:graphic>
-          <a:graphicData uri="http://schemas.openxmlformats.org/drawingml/2006/table">
-            <a:tbl>
-              <a:tblPr firstRow="1" bandRow="1">
-                <a:tableStyleId>{5C22544A-7EE6-4342-B048-85BDC9FD1C3A}</a:tableStyleId>
-              </a:tblPr>
-              <a:tblGrid>
-                <a:gridCol w="3017520"/>
-                <a:gridCol w="1097280"/>
-                <a:gridCol w="1097280"/>
-                <a:gridCol w="1097280"/>
-                <a:gridCol w="2377440"/>
-                <a:gridCol w="2560320"/>
-              </a:tblGrid>
-              <a:tr h="384048">
-                <a:tc>
-                  <a:txBody>
-                    <a:bodyPr lIns="45720" rIns="45720" tIns="18288" bIns="18288" wrap="square" anchor="ctr"/>
-                    <a:lstStyle/>
-                    <a:p>
-                      <a:pPr algn="ctr"/>
-                      <a:r>
-                        <a:rPr sz="1300" b="1">
-                          <a:solidFill>
-                            <a:srgbClr val="FFFFFF"/>
-                          </a:solidFill>
-                          <a:latin typeface="Calibri"/>
-                        </a:rPr>
-                        <a:t>Scenario</a:t>
-                      </a:r>
-                    </a:p>
-                  </a:txBody>
-                  <a:tcPr>
-                    <a:solidFill>
-                      <a:srgbClr val="1F4E78"/>
-                    </a:solidFill>
-                  </a:tcPr>
-                </a:tc>
-                <a:tc>
-                  <a:txBody>
-                    <a:bodyPr lIns="45720" rIns="45720" tIns="18288" bIns="18288" wrap="square" anchor="ctr"/>
-                    <a:lstStyle/>
-                    <a:p>
-                      <a:pPr algn="ctr"/>
-                      <a:r>
-                        <a:rPr sz="1300" b="1">
-                          <a:solidFill>
-                            <a:srgbClr val="FFFFFF"/>
-                          </a:solidFill>
-                          <a:latin typeface="Calibri"/>
-                        </a:rPr>
-                        <a:t>NB</a:t>
-                      </a:r>
-                    </a:p>
-                  </a:txBody>
-                  <a:tcPr>
-                    <a:solidFill>
-                      <a:srgbClr val="1F4E78"/>
-                    </a:solidFill>
-                  </a:tcPr>
-                </a:tc>
-                <a:tc>
-                  <a:txBody>
-                    <a:bodyPr lIns="45720" rIns="45720" tIns="18288" bIns="18288" wrap="square" anchor="ctr"/>
-                    <a:lstStyle/>
-                    <a:p>
-                      <a:pPr algn="ctr"/>
-                      <a:r>
-                        <a:rPr sz="1300" b="1">
-                          <a:solidFill>
-                            <a:srgbClr val="FFFFFF"/>
-                          </a:solidFill>
-                          <a:latin typeface="Calibri"/>
-                        </a:rPr>
-                        <a:t>RWR</a:t>
-                      </a:r>
-                    </a:p>
-                  </a:txBody>
-                  <a:tcPr>
-                    <a:solidFill>
-                      <a:srgbClr val="1F4E78"/>
-                    </a:solidFill>
-                  </a:tcPr>
-                </a:tc>
-                <a:tc>
-                  <a:txBody>
-                    <a:bodyPr lIns="45720" rIns="45720" tIns="18288" bIns="18288" wrap="square" anchor="ctr"/>
-                    <a:lstStyle/>
-                    <a:p>
-                      <a:pPr algn="ctr"/>
-                      <a:r>
-                        <a:rPr sz="1300" b="1">
-                          <a:solidFill>
-                            <a:srgbClr val="FFFFFF"/>
-                          </a:solidFill>
-                          <a:latin typeface="Calibri"/>
-                        </a:rPr>
-                        <a:t>REN</a:t>
-                      </a:r>
-                    </a:p>
-                  </a:txBody>
-                  <a:tcPr>
-                    <a:solidFill>
-                      <a:srgbClr val="1F4E78"/>
-                    </a:solidFill>
-                  </a:tcPr>
-                </a:tc>
-                <a:tc>
-                  <a:txBody>
-                    <a:bodyPr lIns="45720" rIns="45720" tIns="18288" bIns="18288" wrap="square" anchor="ctr"/>
-                    <a:lstStyle/>
-                    <a:p>
-                      <a:pPr algn="ctr"/>
-                      <a:r>
-                        <a:rPr sz="1300" b="1">
-                          <a:solidFill>
-                            <a:srgbClr val="FFFFFF"/>
-                          </a:solidFill>
-                          <a:latin typeface="Calibri"/>
-                        </a:rPr>
-                        <a:t>Current pays</a:t>
-                      </a:r>
-                    </a:p>
-                  </a:txBody>
-                  <a:tcPr>
-                    <a:solidFill>
-                      <a:srgbClr val="1F4E78"/>
-                    </a:solidFill>
-                  </a:tcPr>
-                </a:tc>
-                <a:tc>
-                  <a:txBody>
-                    <a:bodyPr lIns="45720" rIns="45720" tIns="18288" bIns="18288" wrap="square" anchor="ctr"/>
-                    <a:lstStyle/>
-                    <a:p>
-                      <a:pPr algn="ctr"/>
-                      <a:r>
-                        <a:rPr sz="1300" b="1">
-                          <a:solidFill>
-                            <a:srgbClr val="FFFFFF"/>
-                          </a:solidFill>
-                          <a:latin typeface="Calibri"/>
-                        </a:rPr>
-                        <a:t>New plan pays</a:t>
-                      </a:r>
-                    </a:p>
-                  </a:txBody>
-                  <a:tcPr>
-                    <a:solidFill>
-                      <a:srgbClr val="1F4E78"/>
-                    </a:solidFill>
-                  </a:tcPr>
-                </a:tc>
-              </a:tr>
-              <a:tr h="384048">
-                <a:tc>
-                  <a:txBody>
-                    <a:bodyPr lIns="45720" rIns="45720" tIns="18288" bIns="18288" wrap="square" anchor="ctr"/>
-                    <a:lstStyle/>
-                    <a:p>
-                      <a:pPr algn="ctr"/>
-                      <a:r>
-                        <a:rPr sz="1300">
-                          <a:solidFill>
-                            <a:srgbClr val="101010"/>
-                          </a:solidFill>
-                          <a:latin typeface="Calibri"/>
-                        </a:rPr>
-                        <a:t>REAL</a:t>
-                      </a:r>
-                    </a:p>
-                  </a:txBody>
-                  <a:tcPr>
-                    <a:solidFill>
-                      <a:srgbClr val="FFFFFF"/>
-                    </a:solidFill>
-                  </a:tcPr>
-                </a:tc>
-                <a:tc>
-                  <a:txBody>
-                    <a:bodyPr lIns="45720" rIns="45720" tIns="18288" bIns="18288" wrap="square" anchor="ctr"/>
-                    <a:lstStyle/>
-                    <a:p>
-                      <a:pPr algn="ctr"/>
-                      <a:r>
-                        <a:rPr sz="1300">
-                          <a:solidFill>
-                            <a:srgbClr val="101010"/>
-                          </a:solidFill>
-                          <a:latin typeface="Calibri"/>
-                        </a:rPr>
-                        <a:t>38</a:t>
-                      </a:r>
-                    </a:p>
-                  </a:txBody>
-                  <a:tcPr>
-                    <a:solidFill>
-                      <a:srgbClr val="FFFFFF"/>
-                    </a:solidFill>
-                  </a:tcPr>
-                </a:tc>
-                <a:tc>
-                  <a:txBody>
-                    <a:bodyPr lIns="45720" rIns="45720" tIns="18288" bIns="18288" wrap="square" anchor="ctr"/>
-                    <a:lstStyle/>
-                    <a:p>
-                      <a:pPr algn="ctr"/>
-                      <a:r>
-                        <a:rPr sz="1300">
-                          <a:solidFill>
-                            <a:srgbClr val="101010"/>
-                          </a:solidFill>
-                          <a:latin typeface="Calibri"/>
-                        </a:rPr>
-                        <a:t>69</a:t>
-                      </a:r>
-                    </a:p>
-                  </a:txBody>
-                  <a:tcPr>
-                    <a:solidFill>
-                      <a:srgbClr val="FFFFFF"/>
-                    </a:solidFill>
-                  </a:tcPr>
-                </a:tc>
-                <a:tc>
-                  <a:txBody>
-                    <a:bodyPr lIns="45720" rIns="45720" tIns="18288" bIns="18288" wrap="square" anchor="ctr"/>
-                    <a:lstStyle/>
-                    <a:p>
-                      <a:pPr algn="ctr"/>
-                      <a:r>
-                        <a:rPr sz="1300">
-                          <a:solidFill>
-                            <a:srgbClr val="101010"/>
-                          </a:solidFill>
-                          <a:latin typeface="Calibri"/>
-                        </a:rPr>
-                        <a:t>7</a:t>
-                      </a:r>
-                    </a:p>
-                  </a:txBody>
-                  <a:tcPr>
-                    <a:solidFill>
-                      <a:srgbClr val="FFFFFF"/>
-                    </a:solidFill>
-                  </a:tcPr>
-                </a:tc>
-                <a:tc>
-                  <a:txBody>
-                    <a:bodyPr lIns="45720" rIns="45720" tIns="18288" bIns="18288" wrap="square" anchor="ctr"/>
-                    <a:lstStyle/>
-                    <a:p>
-                      <a:pPr algn="ctr"/>
-                      <a:r>
-                        <a:rPr sz="1300">
-                          <a:solidFill>
-                            <a:srgbClr val="101010"/>
-                          </a:solidFill>
-                          <a:latin typeface="Calibri"/>
-                        </a:rPr>
-                        <a:t>$1020</a:t>
-                      </a:r>
-                    </a:p>
-                  </a:txBody>
-                  <a:tcPr>
-                    <a:solidFill>
-                      <a:srgbClr val="FFFFFF"/>
-                    </a:solidFill>
-                  </a:tcPr>
-                </a:tc>
-                <a:tc>
-                  <a:txBody>
-                    <a:bodyPr lIns="45720" rIns="45720" tIns="18288" bIns="18288" wrap="square" anchor="ctr"/>
-                    <a:lstStyle/>
-                    <a:p>
-                      <a:pPr algn="ctr"/>
-                      <a:r>
-                        <a:rPr sz="1300">
-                          <a:solidFill>
-                            <a:srgbClr val="101010"/>
-                          </a:solidFill>
-                          <a:latin typeface="Calibri"/>
-                        </a:rPr>
-                        <a:t>$597</a:t>
-                      </a:r>
-                    </a:p>
-                  </a:txBody>
-                  <a:tcPr>
-                    <a:solidFill>
-                      <a:srgbClr val="FFFFFF"/>
-                    </a:solidFill>
-                  </a:tcPr>
-                </a:tc>
-              </a:tr>
-              <a:tr h="384048">
-                <a:tc>
-                  <a:txBody>
-                    <a:bodyPr lIns="45720" rIns="45720" tIns="18288" bIns="18288" wrap="square" anchor="ctr"/>
-                    <a:lstStyle/>
-                    <a:p>
-                      <a:pPr algn="ctr"/>
-                      <a:r>
-                        <a:rPr sz="1300">
-                          <a:solidFill>
-                            <a:srgbClr val="101010"/>
-                          </a:solidFill>
-                          <a:latin typeface="Calibri"/>
-                        </a:rPr>
-                        <a:t>SWAP (50% RWR -&gt; REN)</a:t>
-                      </a:r>
-                    </a:p>
-                  </a:txBody>
-                  <a:tcPr>
-                    <a:solidFill>
-                      <a:srgbClr val="F2F2F2"/>
-                    </a:solidFill>
-                  </a:tcPr>
-                </a:tc>
-                <a:tc>
-                  <a:txBody>
-                    <a:bodyPr lIns="45720" rIns="45720" tIns="18288" bIns="18288" wrap="square" anchor="ctr"/>
-                    <a:lstStyle/>
-                    <a:p>
-                      <a:pPr algn="ctr"/>
-                      <a:r>
-                        <a:rPr sz="1300">
-                          <a:solidFill>
-                            <a:srgbClr val="101010"/>
-                          </a:solidFill>
-                          <a:latin typeface="Calibri"/>
-                        </a:rPr>
-                        <a:t>38</a:t>
-                      </a:r>
-                    </a:p>
-                  </a:txBody>
-                  <a:tcPr>
-                    <a:solidFill>
-                      <a:srgbClr val="F2F2F2"/>
-                    </a:solidFill>
-                  </a:tcPr>
-                </a:tc>
-                <a:tc>
-                  <a:txBody>
-                    <a:bodyPr lIns="45720" rIns="45720" tIns="18288" bIns="18288" wrap="square" anchor="ctr"/>
-                    <a:lstStyle/>
-                    <a:p>
-                      <a:pPr algn="ctr"/>
-                      <a:r>
-                        <a:rPr sz="1300">
-                          <a:solidFill>
-                            <a:srgbClr val="101010"/>
-                          </a:solidFill>
-                          <a:latin typeface="Calibri"/>
-                        </a:rPr>
-                        <a:t>35</a:t>
-                      </a:r>
-                    </a:p>
-                  </a:txBody>
-                  <a:tcPr>
-                    <a:solidFill>
-                      <a:srgbClr val="F2F2F2"/>
-                    </a:solidFill>
-                  </a:tcPr>
-                </a:tc>
-                <a:tc>
-                  <a:txBody>
-                    <a:bodyPr lIns="45720" rIns="45720" tIns="18288" bIns="18288" wrap="square" anchor="ctr"/>
-                    <a:lstStyle/>
-                    <a:p>
-                      <a:pPr algn="ctr"/>
-                      <a:r>
-                        <a:rPr sz="1300">
-                          <a:solidFill>
-                            <a:srgbClr val="101010"/>
-                          </a:solidFill>
-                          <a:latin typeface="Calibri"/>
-                        </a:rPr>
-                        <a:t>41</a:t>
-                      </a:r>
-                    </a:p>
-                  </a:txBody>
-                  <a:tcPr>
-                    <a:solidFill>
-                      <a:srgbClr val="F2F2F2"/>
-                    </a:solidFill>
-                  </a:tcPr>
-                </a:tc>
-                <a:tc>
-                  <a:txBody>
-                    <a:bodyPr lIns="45720" rIns="45720" tIns="18288" bIns="18288" wrap="square" anchor="ctr"/>
-                    <a:lstStyle/>
-                    <a:p>
-                      <a:pPr algn="ctr"/>
-                      <a:r>
-                        <a:rPr sz="1300">
-                          <a:solidFill>
-                            <a:srgbClr val="101010"/>
-                          </a:solidFill>
-                          <a:latin typeface="Calibri"/>
-                        </a:rPr>
-                        <a:t>$680</a:t>
-                      </a:r>
-                    </a:p>
-                  </a:txBody>
-                  <a:tcPr>
-                    <a:solidFill>
-                      <a:srgbClr val="F2F2F2"/>
-                    </a:solidFill>
-                  </a:tcPr>
-                </a:tc>
-                <a:tc>
-                  <a:txBody>
-                    <a:bodyPr lIns="45720" rIns="45720" tIns="18288" bIns="18288" wrap="square" anchor="ctr"/>
-                    <a:lstStyle/>
-                    <a:p>
-                      <a:pPr algn="ctr"/>
-                      <a:r>
-                        <a:rPr sz="1300">
-                          <a:solidFill>
-                            <a:srgbClr val="101010"/>
-                          </a:solidFill>
-                          <a:latin typeface="Calibri"/>
-                        </a:rPr>
-                        <a:t>$704</a:t>
-                      </a:r>
-                    </a:p>
-                  </a:txBody>
-                  <a:tcPr>
-                    <a:solidFill>
-                      <a:srgbClr val="F2F2F2"/>
-                    </a:solidFill>
-                  </a:tcPr>
-                </a:tc>
-              </a:tr>
-              <a:tr h="384048">
-                <a:tc>
-                  <a:txBody>
-                    <a:bodyPr lIns="45720" rIns="45720" tIns="18288" bIns="18288" wrap="square" anchor="ctr"/>
-                    <a:lstStyle/>
-                    <a:p>
-                      <a:pPr algn="ctr"/>
-                      <a:r>
-                        <a:rPr sz="1300">
-                          <a:solidFill>
-                            <a:srgbClr val="101010"/>
-                          </a:solidFill>
-                          <a:latin typeface="Calibri"/>
-                        </a:rPr>
-                        <a:t>CHANGE</a:t>
-                      </a:r>
-                    </a:p>
-                  </a:txBody>
-                  <a:tcPr>
-                    <a:solidFill>
-                      <a:srgbClr val="FFFFFF"/>
-                    </a:solidFill>
-                  </a:tcPr>
-                </a:tc>
-                <a:tc>
-                  <a:txBody>
-                    <a:bodyPr lIns="45720" rIns="45720" tIns="18288" bIns="18288" wrap="square" anchor="ctr"/>
-                    <a:lstStyle/>
-                    <a:p>
-                      <a:pPr algn="ctr"/>
-                      <a:r>
-                        <a:rPr sz="1300">
-                          <a:solidFill>
-                            <a:srgbClr val="101010"/>
-                          </a:solidFill>
-                          <a:latin typeface="Calibri"/>
-                        </a:rPr>
-                        <a:t>0</a:t>
-                      </a:r>
-                    </a:p>
-                  </a:txBody>
-                  <a:tcPr>
-                    <a:solidFill>
-                      <a:srgbClr val="FFFFFF"/>
-                    </a:solidFill>
-                  </a:tcPr>
-                </a:tc>
-                <a:tc>
-                  <a:txBody>
-                    <a:bodyPr lIns="45720" rIns="45720" tIns="18288" bIns="18288" wrap="square" anchor="ctr"/>
-                    <a:lstStyle/>
-                    <a:p>
-                      <a:pPr algn="ctr"/>
-                      <a:r>
-                        <a:rPr sz="1300">
-                          <a:solidFill>
-                            <a:srgbClr val="101010"/>
-                          </a:solidFill>
-                          <a:latin typeface="Calibri"/>
-                        </a:rPr>
-                        <a:t>-34</a:t>
-                      </a:r>
-                    </a:p>
-                  </a:txBody>
-                  <a:tcPr>
-                    <a:solidFill>
-                      <a:srgbClr val="FFFFFF"/>
-                    </a:solidFill>
-                  </a:tcPr>
-                </a:tc>
-                <a:tc>
-                  <a:txBody>
-                    <a:bodyPr lIns="45720" rIns="45720" tIns="18288" bIns="18288" wrap="square" anchor="ctr"/>
-                    <a:lstStyle/>
-                    <a:p>
-                      <a:pPr algn="ctr"/>
-                      <a:r>
-                        <a:rPr sz="1300">
-                          <a:solidFill>
-                            <a:srgbClr val="101010"/>
-                          </a:solidFill>
-                          <a:latin typeface="Calibri"/>
-                        </a:rPr>
-                        <a:t>+34</a:t>
-                      </a:r>
-                    </a:p>
-                  </a:txBody>
-                  <a:tcPr>
-                    <a:solidFill>
-                      <a:srgbClr val="FFFFFF"/>
-                    </a:solidFill>
-                  </a:tcPr>
-                </a:tc>
-                <a:tc>
-                  <a:txBody>
-                    <a:bodyPr lIns="45720" rIns="45720" tIns="18288" bIns="18288" wrap="square" anchor="ctr"/>
-                    <a:lstStyle/>
-                    <a:p>
-                      <a:pPr algn="ctr"/>
-                      <a:r>
-                        <a:rPr sz="1300">
-                          <a:solidFill>
-                            <a:srgbClr val="101010"/>
-                          </a:solidFill>
-                          <a:latin typeface="Calibri"/>
-                        </a:rPr>
-                        <a:t>-$340 (BAD)</a:t>
-                      </a:r>
-                    </a:p>
-                  </a:txBody>
-                  <a:tcPr>
-                    <a:solidFill>
-                      <a:srgbClr val="FFFFFF"/>
-                    </a:solidFill>
-                  </a:tcPr>
-                </a:tc>
-                <a:tc>
-                  <a:txBody>
-                    <a:bodyPr lIns="45720" rIns="45720" tIns="18288" bIns="18288" wrap="square" anchor="ctr"/>
-                    <a:lstStyle/>
-                    <a:p>
-                      <a:pPr algn="ctr"/>
-                      <a:r>
-                        <a:rPr sz="1300">
-                          <a:solidFill>
-                            <a:srgbClr val="101010"/>
-                          </a:solidFill>
-                          <a:latin typeface="Calibri"/>
-                        </a:rPr>
-                        <a:t>+$108 (GOOD)</a:t>
-                      </a:r>
-                    </a:p>
-                  </a:txBody>
-                  <a:tcPr>
-                    <a:solidFill>
-                      <a:srgbClr val="FFFFFF"/>
-                    </a:solidFill>
-                  </a:tcPr>
-                </a:tc>
-              </a:tr>
-            </a:tbl>
-          </a:graphicData>
-        </a:graphic>
-      </p:graphicFrame>
-      <p:sp>
-        <p:nvSpPr>
-          <p:cNvPr id="12" name="TextBox 11"/>
-          <p:cNvSpPr txBox="1"/>
-          <p:nvPr/>
-        </p:nvSpPr>
-        <p:spPr>
-          <a:xfrm>
-            <a:off x="457200" y="5029200"/>
-            <a:ext cx="11247120" cy="457200"/>
-          </a:xfrm>
-          <a:prstGeom prst="rect">
-            <a:avLst/>
-          </a:prstGeom>
-          <a:noFill/>
-          <a:ln>
-            <a:noFill/>
-          </a:ln>
-        </p:spPr>
-        <p:txBody>
-          <a:bodyPr wrap="square" lIns="73152" rIns="73152" tIns="36576" bIns="36576" anchor="t">
-            <a:spAutoFit/>
-          </a:bodyPr>
-          <a:lstStyle/>
-          <a:p>
-            <a:pPr algn="l"/>
-            <a:r>
-              <a:rPr sz="1600" b="1" i="0">
-                <a:solidFill>
-                  <a:srgbClr val="1F4E78"/>
-                </a:solidFill>
-                <a:latin typeface="Calibri"/>
-              </a:rPr>
-              <a:t>Bottom line:</a:t>
-            </a:r>
-          </a:p>
-        </p:txBody>
-      </p:sp>
-      <p:sp>
-        <p:nvSpPr>
-          <p:cNvPr id="13" name="TextBox 12"/>
-          <p:cNvSpPr txBox="1"/>
-          <p:nvPr/>
-        </p:nvSpPr>
-        <p:spPr>
-          <a:xfrm>
-            <a:off x="640080" y="5486400"/>
-            <a:ext cx="10972800" cy="1097280"/>
-          </a:xfrm>
-          <a:prstGeom prst="rect">
-            <a:avLst/>
-          </a:prstGeom>
-          <a:noFill/>
-          <a:ln>
-            <a:noFill/>
-          </a:ln>
-        </p:spPr>
-        <p:txBody>
-          <a:bodyPr wrap="square" tIns="91440" bIns="91440">
-            <a:spAutoFit/>
-          </a:bodyPr>
-          <a:lstStyle/>
-          <a:p>
-            <a:pPr>
-              <a:lnSpc>
-                <a:spcPct val="120000"/>
-              </a:lnSpc>
-            </a:pPr>
-            <a:r>
-              <a:rPr sz="1300">
-                <a:solidFill>
-                  <a:srgbClr val="101010"/>
-                </a:solidFill>
-                <a:latin typeface="Calibri"/>
-              </a:rPr>
-              <a:t>• Per swapped policy: Current loses ~$10 from the count tier. New plan gains via the retention bonus ($5 per $1,000 retained) and RWR step-down ($2-$4 per RWR).</a:t>
-            </a:r>
-          </a:p>
-          <a:p>
-            <a:pPr>
-              <a:lnSpc>
-                <a:spcPct val="120000"/>
-              </a:lnSpc>
-            </a:pPr>
-            <a:r>
-              <a:rPr sz="1300">
-                <a:solidFill>
-                  <a:srgbClr val="101010"/>
-                </a:solidFill>
-                <a:latin typeface="Calibri"/>
-              </a:rPr>
-              <a:t>• Under Current, the agency literally pays LESS when the agent does the right thing.</a:t>
-            </a:r>
-          </a:p>
-          <a:p>
-            <a:pPr>
-              <a:lnSpc>
-                <a:spcPct val="120000"/>
-              </a:lnSpc>
-            </a:pPr>
-            <a:r>
-              <a:rPr sz="1300">
-                <a:solidFill>
-                  <a:srgbClr val="101010"/>
-                </a:solidFill>
-                <a:latin typeface="Calibri"/>
-              </a:rPr>
-              <a:t>• Under the new plan, the agent gets MORE for retaining instead of rewriting - the exact incentive we want.</a:t>
-            </a:r>
-          </a:p>
-        </p:txBody>
-      </p:sp>
-    </p:spTree>
-  </p:cSld>
-  <p:clrMapOvr>
-    <a:masterClrMapping/>
-  </p:clrMapOvr>
-</p:sld>
-</file>
-
-<file path=ppt/slides/slide11.xml><?xml version="1.0" encoding="utf-8"?>
-<p:sld xmlns:a="http://schemas.openxmlformats.org/drawingml/2006/main" xmlns:p="http://schemas.openxmlformats.org/presentationml/2006/main" xmlns:r="http://schemas.openxmlformats.org/officeDocument/2006/relationships">
-  <p:cSld>
-    <p:spTree>
-      <p:nvGrpSpPr>
-        <p:cNvPr id="1" name=""/>
-        <p:cNvGrpSpPr/>
-        <p:nvPr/>
-      </p:nvGrpSpPr>
-      <p:grpSpPr/>
-      <p:sp>
-        <p:nvSpPr>
-          <p:cNvPr id="2" name="Rectangle 1"/>
-          <p:cNvSpPr/>
-          <p:nvPr/>
-        </p:nvSpPr>
-        <p:spPr>
-          <a:xfrm>
-            <a:off x="0" y="0"/>
-            <a:ext cx="12188952" cy="868680"/>
-          </a:xfrm>
-          <a:prstGeom prst="rect">
-            <a:avLst/>
-          </a:prstGeom>
-          <a:solidFill>
-            <a:srgbClr val="1F4E78"/>
-          </a:solidFill>
-          <a:ln>
-            <a:noFill/>
-          </a:ln>
-          <a:effectLst/>
-        </p:spPr>
-        <p:style>
-          <a:lnRef idx="1">
-            <a:schemeClr val="accent1"/>
-          </a:lnRef>
-          <a:fillRef idx="3">
-            <a:schemeClr val="accent1"/>
-          </a:fillRef>
-          <a:effectRef idx="2">
-            <a:schemeClr val="accent1"/>
-          </a:effectRef>
-          <a:fontRef idx="minor">
-            <a:schemeClr val="lt1"/>
-          </a:fontRef>
-        </p:style>
-        <p:txBody>
-          <a:bodyPr rtlCol="0" anchor="ctr"/>
-          <a:lstStyle/>
-          <a:p>
-            <a:pPr algn="ctr"/>
-          </a:p>
-        </p:txBody>
-      </p:sp>
-      <p:sp>
-        <p:nvSpPr>
-          <p:cNvPr id="3" name="TextBox 2"/>
-          <p:cNvSpPr txBox="1"/>
-          <p:nvPr/>
-        </p:nvSpPr>
-        <p:spPr>
-          <a:xfrm>
-            <a:off x="365760" y="109728"/>
-            <a:ext cx="11430000" cy="457200"/>
-          </a:xfrm>
-          <a:prstGeom prst="rect">
-            <a:avLst/>
-          </a:prstGeom>
-          <a:noFill/>
-          <a:ln>
-            <a:noFill/>
-          </a:ln>
-        </p:spPr>
-        <p:txBody>
-          <a:bodyPr wrap="square" lIns="73152" rIns="73152" tIns="36576" bIns="36576" anchor="ctr">
-            <a:spAutoFit/>
-          </a:bodyPr>
-          <a:lstStyle/>
-          <a:p>
-            <a:pPr algn="l"/>
-            <a:r>
-              <a:rPr sz="2400" b="1" i="0">
-                <a:solidFill>
-                  <a:srgbClr val="FFFFFF"/>
-                </a:solidFill>
-                <a:latin typeface="Calibri"/>
-              </a:rPr>
               <a:t>Step-By-Step: How the Bonus Is Calculated</a:t>
             </a:r>
           </a:p>
@@ -4714,7 +3639,7 @@
                 </a:solidFill>
                 <a:latin typeface="Calibri"/>
               </a:rPr>
-              <a:t>11 / 22</a:t>
+              <a:t>10 / 21</a:t>
             </a:r>
           </a:p>
         </p:txBody>
@@ -4878,7 +3803,7 @@
                 </a:solidFill>
                 <a:latin typeface="Calibri"/>
               </a:rPr>
-              <a:t>Volume:</a:t>
+              <a:t>Monthly volume:</a:t>
             </a:r>
           </a:p>
         </p:txBody>
@@ -4916,7 +3841,7 @@
                 </a:solidFill>
                 <a:latin typeface="Calibri"/>
               </a:rPr>
-              <a:t>  NB: 38, $52k W / $10.5k C (20%, avg $1,380)</a:t>
+              <a:t>  NB: 38 policies, $52k written</a:t>
             </a:r>
           </a:p>
         </p:txBody>
@@ -4954,7 +3879,7 @@
                 </a:solidFill>
                 <a:latin typeface="Calibri"/>
               </a:rPr>
-              <a:t>  RWR: 69, $96k W / $19.7k C (20%, avg $1,395)</a:t>
+              <a:t>  RWR: 69 policies, $96k written</a:t>
             </a:r>
           </a:p>
         </p:txBody>
@@ -4992,7 +3917,7 @@
                 </a:solidFill>
                 <a:latin typeface="Calibri"/>
               </a:rPr>
-              <a:t>  REN: 7, $6k W / $3.1k C (52%, avg $852)</a:t>
+              <a:t>  REN: 7 policies, $6k written</a:t>
             </a:r>
           </a:p>
         </p:txBody>
@@ -5030,7 +3955,7 @@
                 </a:solidFill>
                 <a:latin typeface="Calibri"/>
               </a:rPr>
-              <a:t>Per-policy BASE (NB &amp; RWR only):</a:t>
+              <a:t>Hit a premium tier:</a:t>
             </a:r>
           </a:p>
         </p:txBody>
@@ -5068,7 +3993,7 @@
                 </a:solidFill>
                 <a:latin typeface="Calibri"/>
               </a:rPr>
-              <a:t>  NB tier '$1,200-$1,799': 38 x $7 = $266</a:t>
+              <a:t>  NB $52k -&gt; T1 $45k = $250</a:t>
             </a:r>
           </a:p>
         </p:txBody>
@@ -5106,7 +4031,7 @@
                 </a:solidFill>
                 <a:latin typeface="Calibri"/>
               </a:rPr>
-              <a:t>  RWR tier '$1,200-$1,799': 69 x $3 = $207</a:t>
+              <a:t>  RWR $96k -&gt; T4 $85k = $362</a:t>
             </a:r>
           </a:p>
         </p:txBody>
@@ -5138,13 +4063,13 @@
           <a:p>
             <a:pPr algn="l"/>
             <a:r>
-              <a:rPr sz="1000" b="1" i="0">
+              <a:rPr sz="1000" b="0" i="0">
                 <a:solidFill>
                   <a:srgbClr val="1F4E78"/>
                 </a:solidFill>
                 <a:latin typeface="Calibri"/>
               </a:rPr>
-              <a:t>Collected incentive (&gt;$1,200 NB &amp; RWR only):</a:t>
+              <a:t>  REN $6k -&gt; Below T1 = $0</a:t>
             </a:r>
           </a:p>
         </p:txBody>
@@ -5176,13 +4101,13 @@
           <a:p>
             <a:pPr algn="l"/>
             <a:r>
-              <a:rPr sz="1000" b="0" i="0">
+              <a:rPr sz="1000" b="1" i="0">
                 <a:solidFill>
                   <a:srgbClr val="1F4E78"/>
                 </a:solidFill>
                 <a:latin typeface="Calibri"/>
               </a:rPr>
-              <a:t>  NB +$2/pol x 43% = $33</a:t>
+              <a:t>TARGET TOTAL = $612</a:t>
             </a:r>
           </a:p>
         </p:txBody>
@@ -5214,13 +4139,13 @@
           <a:p>
             <a:pPr algn="l"/>
             <a:r>
-              <a:rPr sz="1000" b="0" i="0">
+              <a:rPr sz="1000" b="1" i="0">
                 <a:solidFill>
                   <a:srgbClr val="1F4E78"/>
                 </a:solidFill>
                 <a:latin typeface="Calibri"/>
               </a:rPr>
-              <a:t>  RWR +$2/pol x 44% = $61</a:t>
+              <a:t>Apply gates:</a:t>
             </a:r>
           </a:p>
         </p:txBody>
@@ -5252,13 +4177,13 @@
           <a:p>
             <a:pPr algn="l"/>
             <a:r>
-              <a:rPr sz="1000" b="1" i="0">
+              <a:rPr sz="1000" b="0" i="0">
                 <a:solidFill>
-                  <a:srgbClr val="1F4E78"/>
+                  <a:srgbClr val="70AD47"/>
                 </a:solidFill>
                 <a:latin typeface="Calibri"/>
               </a:rPr>
-              <a:t>Renewals paid via retention bonus only:</a:t>
+              <a:t>  NB $52k vs $45k: PASS</a:t>
             </a:r>
           </a:p>
         </p:txBody>
@@ -5292,11 +4217,11 @@
             <a:r>
               <a:rPr sz="1000" b="0" i="0">
                 <a:solidFill>
-                  <a:srgbClr val="1F4E78"/>
+                  <a:srgbClr val="70AD47"/>
                 </a:solidFill>
                 <a:latin typeface="Calibri"/>
               </a:rPr>
-              <a:t>  Retention = REN $6k x 0.5% = $30</a:t>
+              <a:t>  REN retention 75% vs 30%: PASS</a:t>
             </a:r>
           </a:p>
         </p:txBody>
@@ -5328,13 +4253,13 @@
           <a:p>
             <a:pPr algn="l"/>
             <a:r>
-              <a:rPr sz="1000" b="1" i="0">
+              <a:rPr sz="1000" b="0" i="0">
                 <a:solidFill>
-                  <a:srgbClr val="1F4E78"/>
+                  <a:srgbClr val="70AD47"/>
                 </a:solidFill>
                 <a:latin typeface="Calibri"/>
               </a:rPr>
-              <a:t>TARGET TOTAL = $597</a:t>
+              <a:t>  RWR (follows NB): PASS</a:t>
             </a:r>
           </a:p>
         </p:txBody>
@@ -5372,166 +4297,14 @@
                 </a:solidFill>
                 <a:latin typeface="Calibri"/>
               </a:rPr>
-              <a:t>Apply gates:</a:t>
+              <a:t>PAID = $612</a:t>
             </a:r>
           </a:p>
         </p:txBody>
       </p:sp>
       <p:sp>
         <p:nvSpPr>
-          <p:cNvPr id="25" name="TextBox 24"/>
-          <p:cNvSpPr txBox="1"/>
-          <p:nvPr/>
-        </p:nvSpPr>
-        <p:spPr>
-          <a:xfrm>
-            <a:off x="365760" y="4169664"/>
-            <a:ext cx="3520440" cy="196596"/>
-          </a:xfrm>
-          <a:prstGeom prst="rect">
-            <a:avLst/>
-          </a:prstGeom>
-          <a:noFill/>
-          <a:ln>
-            <a:noFill/>
-          </a:ln>
-        </p:spPr>
-        <p:txBody>
-          <a:bodyPr wrap="square" lIns="73152" rIns="73152" tIns="36576" bIns="36576" anchor="t">
-            <a:spAutoFit/>
-          </a:bodyPr>
-          <a:lstStyle/>
-          <a:p>
-            <a:pPr algn="l"/>
-            <a:r>
-              <a:rPr sz="1000" b="0" i="0">
-                <a:solidFill>
-                  <a:srgbClr val="70AD47"/>
-                </a:solidFill>
-                <a:latin typeface="Calibri"/>
-              </a:rPr>
-              <a:t>  NB $52k vs $45k: PASS</a:t>
-            </a:r>
-          </a:p>
-        </p:txBody>
-      </p:sp>
-      <p:sp>
-        <p:nvSpPr>
-          <p:cNvPr id="26" name="TextBox 25"/>
-          <p:cNvSpPr txBox="1"/>
-          <p:nvPr/>
-        </p:nvSpPr>
-        <p:spPr>
-          <a:xfrm>
-            <a:off x="365760" y="4366260"/>
-            <a:ext cx="3520440" cy="196596"/>
-          </a:xfrm>
-          <a:prstGeom prst="rect">
-            <a:avLst/>
-          </a:prstGeom>
-          <a:noFill/>
-          <a:ln>
-            <a:noFill/>
-          </a:ln>
-        </p:spPr>
-        <p:txBody>
-          <a:bodyPr wrap="square" lIns="73152" rIns="73152" tIns="36576" bIns="36576" anchor="t">
-            <a:spAutoFit/>
-          </a:bodyPr>
-          <a:lstStyle/>
-          <a:p>
-            <a:pPr algn="l"/>
-            <a:r>
-              <a:rPr sz="1000" b="0" i="0">
-                <a:solidFill>
-                  <a:srgbClr val="70AD47"/>
-                </a:solidFill>
-                <a:latin typeface="Calibri"/>
-              </a:rPr>
-              <a:t>  REN retention 75% vs 30%: PASS</a:t>
-            </a:r>
-          </a:p>
-        </p:txBody>
-      </p:sp>
-      <p:sp>
-        <p:nvSpPr>
-          <p:cNvPr id="27" name="TextBox 26"/>
-          <p:cNvSpPr txBox="1"/>
-          <p:nvPr/>
-        </p:nvSpPr>
-        <p:spPr>
-          <a:xfrm>
-            <a:off x="365760" y="4562856"/>
-            <a:ext cx="3520440" cy="196596"/>
-          </a:xfrm>
-          <a:prstGeom prst="rect">
-            <a:avLst/>
-          </a:prstGeom>
-          <a:noFill/>
-          <a:ln>
-            <a:noFill/>
-          </a:ln>
-        </p:spPr>
-        <p:txBody>
-          <a:bodyPr wrap="square" lIns="73152" rIns="73152" tIns="36576" bIns="36576" anchor="t">
-            <a:spAutoFit/>
-          </a:bodyPr>
-          <a:lstStyle/>
-          <a:p>
-            <a:pPr algn="l"/>
-            <a:r>
-              <a:rPr sz="1000" b="0" i="0">
-                <a:solidFill>
-                  <a:srgbClr val="70AD47"/>
-                </a:solidFill>
-                <a:latin typeface="Calibri"/>
-              </a:rPr>
-              <a:t>  RWR (follows NB): PASS</a:t>
-            </a:r>
-          </a:p>
-        </p:txBody>
-      </p:sp>
-      <p:sp>
-        <p:nvSpPr>
-          <p:cNvPr id="28" name="TextBox 27"/>
-          <p:cNvSpPr txBox="1"/>
-          <p:nvPr/>
-        </p:nvSpPr>
-        <p:spPr>
-          <a:xfrm>
-            <a:off x="365760" y="4759452"/>
-            <a:ext cx="3520440" cy="196596"/>
-          </a:xfrm>
-          <a:prstGeom prst="rect">
-            <a:avLst/>
-          </a:prstGeom>
-          <a:noFill/>
-          <a:ln>
-            <a:noFill/>
-          </a:ln>
-        </p:spPr>
-        <p:txBody>
-          <a:bodyPr wrap="square" lIns="73152" rIns="73152" tIns="36576" bIns="36576" anchor="t">
-            <a:spAutoFit/>
-          </a:bodyPr>
-          <a:lstStyle/>
-          <a:p>
-            <a:pPr algn="l"/>
-            <a:r>
-              <a:rPr sz="1000" b="1" i="0">
-                <a:solidFill>
-                  <a:srgbClr val="1F4E78"/>
-                </a:solidFill>
-                <a:latin typeface="Calibri"/>
-              </a:rPr>
-              <a:t>PAID = $597</a:t>
-            </a:r>
-          </a:p>
-        </p:txBody>
-      </p:sp>
-      <p:sp>
-        <p:nvSpPr>
-          <p:cNvPr id="29" name="Rectangle 28"/>
+          <p:cNvPr id="25" name="Rectangle 24"/>
           <p:cNvSpPr/>
           <p:nvPr/>
         </p:nvSpPr>
@@ -5575,7 +4348,7 @@
       </p:sp>
       <p:sp>
         <p:nvSpPr>
-          <p:cNvPr id="30" name="TextBox 29"/>
+          <p:cNvPr id="26" name="TextBox 25"/>
           <p:cNvSpPr txBox="1"/>
           <p:nvPr/>
         </p:nvSpPr>
@@ -5613,7 +4386,7 @@
       </p:sp>
       <p:sp>
         <p:nvSpPr>
-          <p:cNvPr id="31" name="Rectangle 30"/>
+          <p:cNvPr id="27" name="Rectangle 26"/>
           <p:cNvSpPr/>
           <p:nvPr/>
         </p:nvSpPr>
@@ -5657,7 +4430,7 @@
       </p:sp>
       <p:sp>
         <p:nvSpPr>
-          <p:cNvPr id="32" name="TextBox 31"/>
+          <p:cNvPr id="28" name="TextBox 27"/>
           <p:cNvSpPr txBox="1"/>
           <p:nvPr/>
         </p:nvSpPr>
@@ -5688,14 +4461,14 @@
                 </a:solidFill>
                 <a:latin typeface="Calibri"/>
               </a:rPr>
-              <a:t>Volume:</a:t>
+              <a:t>Monthly volume:</a:t>
             </a:r>
           </a:p>
         </p:txBody>
       </p:sp>
       <p:sp>
         <p:nvSpPr>
-          <p:cNvPr id="33" name="TextBox 32"/>
+          <p:cNvPr id="29" name="TextBox 28"/>
           <p:cNvSpPr txBox="1"/>
           <p:nvPr/>
         </p:nvSpPr>
@@ -5726,14 +4499,14 @@
                 </a:solidFill>
                 <a:latin typeface="Calibri"/>
               </a:rPr>
-              <a:t>  NB: 38, $52k W / $10.5k C (20%, avg $1,380)</a:t>
+              <a:t>  NB: 38 policies, $52k written</a:t>
             </a:r>
           </a:p>
         </p:txBody>
       </p:sp>
       <p:sp>
         <p:nvSpPr>
-          <p:cNvPr id="34" name="TextBox 33"/>
+          <p:cNvPr id="30" name="TextBox 29"/>
           <p:cNvSpPr txBox="1"/>
           <p:nvPr/>
         </p:nvSpPr>
@@ -5764,14 +4537,14 @@
                 </a:solidFill>
                 <a:latin typeface="Calibri"/>
               </a:rPr>
-              <a:t>  RWR: 35, $48k W / $9.9k C (20%, avg $1,375)</a:t>
+              <a:t>  RWR: 35 policies, $48k written</a:t>
             </a:r>
           </a:p>
         </p:txBody>
       </p:sp>
       <p:sp>
         <p:nvSpPr>
-          <p:cNvPr id="35" name="TextBox 34"/>
+          <p:cNvPr id="31" name="TextBox 30"/>
           <p:cNvSpPr txBox="1"/>
           <p:nvPr/>
         </p:nvSpPr>
@@ -5802,14 +4575,14 @@
                 </a:solidFill>
                 <a:latin typeface="Calibri"/>
               </a:rPr>
-              <a:t>  REN: 41, $54k W / $12.9k C (24%, avg $1,319)</a:t>
+              <a:t>  REN: 41 policies, $54k written</a:t>
             </a:r>
           </a:p>
         </p:txBody>
       </p:sp>
       <p:sp>
         <p:nvSpPr>
-          <p:cNvPr id="36" name="TextBox 35"/>
+          <p:cNvPr id="32" name="TextBox 31"/>
           <p:cNvSpPr txBox="1"/>
           <p:nvPr/>
         </p:nvSpPr>
@@ -5840,14 +4613,14 @@
                 </a:solidFill>
                 <a:latin typeface="Calibri"/>
               </a:rPr>
-              <a:t>Per-policy BASE (NB &amp; RWR only):</a:t>
+              <a:t>Hit a premium tier:</a:t>
             </a:r>
           </a:p>
         </p:txBody>
       </p:sp>
       <p:sp>
         <p:nvSpPr>
-          <p:cNvPr id="37" name="TextBox 36"/>
+          <p:cNvPr id="33" name="TextBox 32"/>
           <p:cNvSpPr txBox="1"/>
           <p:nvPr/>
         </p:nvSpPr>
@@ -5878,14 +4651,14 @@
                 </a:solidFill>
                 <a:latin typeface="Calibri"/>
               </a:rPr>
-              <a:t>  NB tier '$1,200-$1,799': 38 x $7 = $266</a:t>
+              <a:t>  NB $52k -&gt; T1 $45k = $250</a:t>
             </a:r>
           </a:p>
         </p:txBody>
       </p:sp>
       <p:sp>
         <p:nvSpPr>
-          <p:cNvPr id="38" name="TextBox 37"/>
+          <p:cNvPr id="34" name="TextBox 33"/>
           <p:cNvSpPr txBox="1"/>
           <p:nvPr/>
         </p:nvSpPr>
@@ -5916,14 +4689,14 @@
                 </a:solidFill>
                 <a:latin typeface="Calibri"/>
               </a:rPr>
-              <a:t>  RWR tier '$1,200-$1,799': 35 x $3 = $105</a:t>
+              <a:t>  RWR $48k -&gt; T1 $45k = $125</a:t>
             </a:r>
           </a:p>
         </p:txBody>
       </p:sp>
       <p:sp>
         <p:nvSpPr>
-          <p:cNvPr id="39" name="TextBox 38"/>
+          <p:cNvPr id="35" name="TextBox 34"/>
           <p:cNvSpPr txBox="1"/>
           <p:nvPr/>
         </p:nvSpPr>
@@ -5948,20 +4721,20 @@
           <a:p>
             <a:pPr algn="l"/>
             <a:r>
-              <a:rPr sz="1000" b="1" i="0">
+              <a:rPr sz="1000" b="0" i="0">
                 <a:solidFill>
-                  <a:srgbClr val="2E75B6"/>
+                  <a:srgbClr val="1F4E78"/>
                 </a:solidFill>
                 <a:latin typeface="Calibri"/>
               </a:rPr>
-              <a:t>Collected incentive (&gt;$1,200 NB &amp; RWR only):</a:t>
+              <a:t>  REN $54k -&gt; T2 $45k = $300</a:t>
             </a:r>
           </a:p>
         </p:txBody>
       </p:sp>
       <p:sp>
         <p:nvSpPr>
-          <p:cNvPr id="40" name="TextBox 39"/>
+          <p:cNvPr id="36" name="TextBox 35"/>
           <p:cNvSpPr txBox="1"/>
           <p:nvPr/>
         </p:nvSpPr>
@@ -5986,178 +4759,26 @@
           <a:p>
             <a:pPr algn="l"/>
             <a:r>
-              <a:rPr sz="1000" b="0" i="0">
+              <a:rPr sz="1000" b="1" i="0">
                 <a:solidFill>
-                  <a:srgbClr val="1F4E78"/>
+                  <a:srgbClr val="2E75B6"/>
                 </a:solidFill>
                 <a:latin typeface="Calibri"/>
               </a:rPr>
-              <a:t>  NB +$2/pol x 43% = $33</a:t>
+              <a:t>TARGET TOTAL = $675</a:t>
             </a:r>
           </a:p>
         </p:txBody>
       </p:sp>
       <p:sp>
         <p:nvSpPr>
-          <p:cNvPr id="41" name="TextBox 40"/>
+          <p:cNvPr id="37" name="TextBox 36"/>
           <p:cNvSpPr txBox="1"/>
           <p:nvPr/>
         </p:nvSpPr>
         <p:spPr>
           <a:xfrm>
             <a:off x="4315968" y="3186684"/>
-            <a:ext cx="3520440" cy="196596"/>
-          </a:xfrm>
-          <a:prstGeom prst="rect">
-            <a:avLst/>
-          </a:prstGeom>
-          <a:noFill/>
-          <a:ln>
-            <a:noFill/>
-          </a:ln>
-        </p:spPr>
-        <p:txBody>
-          <a:bodyPr wrap="square" lIns="73152" rIns="73152" tIns="36576" bIns="36576" anchor="t">
-            <a:spAutoFit/>
-          </a:bodyPr>
-          <a:lstStyle/>
-          <a:p>
-            <a:pPr algn="l"/>
-            <a:r>
-              <a:rPr sz="1000" b="0" i="0">
-                <a:solidFill>
-                  <a:srgbClr val="1F4E78"/>
-                </a:solidFill>
-                <a:latin typeface="Calibri"/>
-              </a:rPr>
-              <a:t>  RWR +$2/pol x 43% = $30</a:t>
-            </a:r>
-          </a:p>
-        </p:txBody>
-      </p:sp>
-      <p:sp>
-        <p:nvSpPr>
-          <p:cNvPr id="42" name="TextBox 41"/>
-          <p:cNvSpPr txBox="1"/>
-          <p:nvPr/>
-        </p:nvSpPr>
-        <p:spPr>
-          <a:xfrm>
-            <a:off x="4315968" y="3383280"/>
-            <a:ext cx="3520440" cy="196596"/>
-          </a:xfrm>
-          <a:prstGeom prst="rect">
-            <a:avLst/>
-          </a:prstGeom>
-          <a:noFill/>
-          <a:ln>
-            <a:noFill/>
-          </a:ln>
-        </p:spPr>
-        <p:txBody>
-          <a:bodyPr wrap="square" lIns="73152" rIns="73152" tIns="36576" bIns="36576" anchor="t">
-            <a:spAutoFit/>
-          </a:bodyPr>
-          <a:lstStyle/>
-          <a:p>
-            <a:pPr algn="l"/>
-            <a:r>
-              <a:rPr sz="1000" b="1" i="0">
-                <a:solidFill>
-                  <a:srgbClr val="2E75B6"/>
-                </a:solidFill>
-                <a:latin typeface="Calibri"/>
-              </a:rPr>
-              <a:t>Renewals paid via retention bonus only:</a:t>
-            </a:r>
-          </a:p>
-        </p:txBody>
-      </p:sp>
-      <p:sp>
-        <p:nvSpPr>
-          <p:cNvPr id="43" name="TextBox 42"/>
-          <p:cNvSpPr txBox="1"/>
-          <p:nvPr/>
-        </p:nvSpPr>
-        <p:spPr>
-          <a:xfrm>
-            <a:off x="4315968" y="3579876"/>
-            <a:ext cx="3520440" cy="196596"/>
-          </a:xfrm>
-          <a:prstGeom prst="rect">
-            <a:avLst/>
-          </a:prstGeom>
-          <a:noFill/>
-          <a:ln>
-            <a:noFill/>
-          </a:ln>
-        </p:spPr>
-        <p:txBody>
-          <a:bodyPr wrap="square" lIns="73152" rIns="73152" tIns="36576" bIns="36576" anchor="t">
-            <a:spAutoFit/>
-          </a:bodyPr>
-          <a:lstStyle/>
-          <a:p>
-            <a:pPr algn="l"/>
-            <a:r>
-              <a:rPr sz="1000" b="0" i="0">
-                <a:solidFill>
-                  <a:srgbClr val="1F4E78"/>
-                </a:solidFill>
-                <a:latin typeface="Calibri"/>
-              </a:rPr>
-              <a:t>  Retention = REN $54k x 0.5% = $270</a:t>
-            </a:r>
-          </a:p>
-        </p:txBody>
-      </p:sp>
-      <p:sp>
-        <p:nvSpPr>
-          <p:cNvPr id="44" name="TextBox 43"/>
-          <p:cNvSpPr txBox="1"/>
-          <p:nvPr/>
-        </p:nvSpPr>
-        <p:spPr>
-          <a:xfrm>
-            <a:off x="4315968" y="3776472"/>
-            <a:ext cx="3520440" cy="196596"/>
-          </a:xfrm>
-          <a:prstGeom prst="rect">
-            <a:avLst/>
-          </a:prstGeom>
-          <a:noFill/>
-          <a:ln>
-            <a:noFill/>
-          </a:ln>
-        </p:spPr>
-        <p:txBody>
-          <a:bodyPr wrap="square" lIns="73152" rIns="73152" tIns="36576" bIns="36576" anchor="t">
-            <a:spAutoFit/>
-          </a:bodyPr>
-          <a:lstStyle/>
-          <a:p>
-            <a:pPr algn="l"/>
-            <a:r>
-              <a:rPr sz="1000" b="1" i="0">
-                <a:solidFill>
-                  <a:srgbClr val="2E75B6"/>
-                </a:solidFill>
-                <a:latin typeface="Calibri"/>
-              </a:rPr>
-              <a:t>TARGET TOTAL = $704</a:t>
-            </a:r>
-          </a:p>
-        </p:txBody>
-      </p:sp>
-      <p:sp>
-        <p:nvSpPr>
-          <p:cNvPr id="45" name="TextBox 44"/>
-          <p:cNvSpPr txBox="1"/>
-          <p:nvPr/>
-        </p:nvSpPr>
-        <p:spPr>
-          <a:xfrm>
-            <a:off x="4315968" y="3973068"/>
             <a:ext cx="3520440" cy="196596"/>
           </a:xfrm>
           <a:prstGeom prst="rect">
@@ -6189,13 +4810,13 @@
       </p:sp>
       <p:sp>
         <p:nvSpPr>
-          <p:cNvPr id="46" name="TextBox 45"/>
+          <p:cNvPr id="38" name="TextBox 37"/>
           <p:cNvSpPr txBox="1"/>
           <p:nvPr/>
         </p:nvSpPr>
         <p:spPr>
           <a:xfrm>
-            <a:off x="4315968" y="4169664"/>
+            <a:off x="4315968" y="3383280"/>
             <a:ext cx="3520440" cy="196596"/>
           </a:xfrm>
           <a:prstGeom prst="rect">
@@ -6227,13 +4848,13 @@
       </p:sp>
       <p:sp>
         <p:nvSpPr>
-          <p:cNvPr id="47" name="TextBox 46"/>
+          <p:cNvPr id="39" name="TextBox 38"/>
           <p:cNvSpPr txBox="1"/>
           <p:nvPr/>
         </p:nvSpPr>
         <p:spPr>
           <a:xfrm>
-            <a:off x="4315968" y="4366260"/>
+            <a:off x="4315968" y="3579876"/>
             <a:ext cx="3520440" cy="196596"/>
           </a:xfrm>
           <a:prstGeom prst="rect">
@@ -6265,13 +4886,13 @@
       </p:sp>
       <p:sp>
         <p:nvSpPr>
-          <p:cNvPr id="48" name="TextBox 47"/>
+          <p:cNvPr id="40" name="TextBox 39"/>
           <p:cNvSpPr txBox="1"/>
           <p:nvPr/>
         </p:nvSpPr>
         <p:spPr>
           <a:xfrm>
-            <a:off x="4315968" y="4562856"/>
+            <a:off x="4315968" y="3776472"/>
             <a:ext cx="3520440" cy="196596"/>
           </a:xfrm>
           <a:prstGeom prst="rect">
@@ -6303,13 +4924,13 @@
       </p:sp>
       <p:sp>
         <p:nvSpPr>
-          <p:cNvPr id="49" name="TextBox 48"/>
+          <p:cNvPr id="41" name="TextBox 40"/>
           <p:cNvSpPr txBox="1"/>
           <p:nvPr/>
         </p:nvSpPr>
         <p:spPr>
           <a:xfrm>
-            <a:off x="4315968" y="4759452"/>
+            <a:off x="4315968" y="3973068"/>
             <a:ext cx="3520440" cy="196596"/>
           </a:xfrm>
           <a:prstGeom prst="rect">
@@ -6334,14 +4955,14 @@
                 </a:solidFill>
                 <a:latin typeface="Calibri"/>
               </a:rPr>
-              <a:t>PAID = $704</a:t>
+              <a:t>PAID = $675</a:t>
             </a:r>
           </a:p>
         </p:txBody>
       </p:sp>
       <p:sp>
         <p:nvSpPr>
-          <p:cNvPr id="50" name="Rectangle 49"/>
+          <p:cNvPr id="42" name="Rectangle 41"/>
           <p:cNvSpPr/>
           <p:nvPr/>
         </p:nvSpPr>
@@ -6385,7 +5006,7 @@
       </p:sp>
       <p:sp>
         <p:nvSpPr>
-          <p:cNvPr id="51" name="TextBox 50"/>
+          <p:cNvPr id="43" name="TextBox 42"/>
           <p:cNvSpPr txBox="1"/>
           <p:nvPr/>
         </p:nvSpPr>
@@ -6423,7 +5044,7 @@
       </p:sp>
       <p:sp>
         <p:nvSpPr>
-          <p:cNvPr id="52" name="Rectangle 51"/>
+          <p:cNvPr id="44" name="Rectangle 43"/>
           <p:cNvSpPr/>
           <p:nvPr/>
         </p:nvSpPr>
@@ -6467,7 +5088,7 @@
       </p:sp>
       <p:sp>
         <p:nvSpPr>
-          <p:cNvPr id="53" name="TextBox 52"/>
+          <p:cNvPr id="45" name="TextBox 44"/>
           <p:cNvSpPr txBox="1"/>
           <p:nvPr/>
         </p:nvSpPr>
@@ -6498,14 +5119,14 @@
                 </a:solidFill>
                 <a:latin typeface="Calibri"/>
               </a:rPr>
-              <a:t>Volume:</a:t>
+              <a:t>Monthly volume:</a:t>
             </a:r>
           </a:p>
         </p:txBody>
       </p:sp>
       <p:sp>
         <p:nvSpPr>
-          <p:cNvPr id="54" name="TextBox 53"/>
+          <p:cNvPr id="46" name="TextBox 45"/>
           <p:cNvSpPr txBox="1"/>
           <p:nvPr/>
         </p:nvSpPr>
@@ -6536,14 +5157,14 @@
                 </a:solidFill>
                 <a:latin typeface="Calibri"/>
               </a:rPr>
-              <a:t>  NB: 38, $52k W / $10.5k C (20%, avg $1,380)</a:t>
+              <a:t>  NB: 38 policies, $52k written</a:t>
             </a:r>
           </a:p>
         </p:txBody>
       </p:sp>
       <p:sp>
         <p:nvSpPr>
-          <p:cNvPr id="55" name="TextBox 54"/>
+          <p:cNvPr id="47" name="TextBox 46"/>
           <p:cNvSpPr txBox="1"/>
           <p:nvPr/>
         </p:nvSpPr>
@@ -6574,14 +5195,14 @@
                 </a:solidFill>
                 <a:latin typeface="Calibri"/>
               </a:rPr>
-              <a:t>  RWR: 7, $6k W / $3.1k C (52%, avg $852)</a:t>
+              <a:t>  RWR: 7 policies, $6k written</a:t>
             </a:r>
           </a:p>
         </p:txBody>
       </p:sp>
       <p:sp>
         <p:nvSpPr>
-          <p:cNvPr id="56" name="TextBox 55"/>
+          <p:cNvPr id="48" name="TextBox 47"/>
           <p:cNvSpPr txBox="1"/>
           <p:nvPr/>
         </p:nvSpPr>
@@ -6612,14 +5233,14 @@
                 </a:solidFill>
                 <a:latin typeface="Calibri"/>
               </a:rPr>
-              <a:t>  REN: 69, $96k W / $19.7k C (20%, avg $1,395)</a:t>
+              <a:t>  REN: 69 policies, $96k written</a:t>
             </a:r>
           </a:p>
         </p:txBody>
       </p:sp>
       <p:sp>
         <p:nvSpPr>
-          <p:cNvPr id="57" name="TextBox 56"/>
+          <p:cNvPr id="49" name="TextBox 48"/>
           <p:cNvSpPr txBox="1"/>
           <p:nvPr/>
         </p:nvSpPr>
@@ -6650,14 +5271,14 @@
                 </a:solidFill>
                 <a:latin typeface="Calibri"/>
               </a:rPr>
-              <a:t>Per-policy BASE (NB &amp; RWR only):</a:t>
+              <a:t>Hit a premium tier:</a:t>
             </a:r>
           </a:p>
         </p:txBody>
       </p:sp>
       <p:sp>
         <p:nvSpPr>
-          <p:cNvPr id="58" name="TextBox 57"/>
+          <p:cNvPr id="50" name="TextBox 49"/>
           <p:cNvSpPr txBox="1"/>
           <p:nvPr/>
         </p:nvSpPr>
@@ -6688,14 +5309,14 @@
                 </a:solidFill>
                 <a:latin typeface="Calibri"/>
               </a:rPr>
-              <a:t>  NB tier '$1,200-$1,799': 38 x $7 = $266</a:t>
+              <a:t>  NB $52k -&gt; T1 $45k = $250</a:t>
             </a:r>
           </a:p>
         </p:txBody>
       </p:sp>
       <p:sp>
         <p:nvSpPr>
-          <p:cNvPr id="59" name="TextBox 58"/>
+          <p:cNvPr id="51" name="TextBox 50"/>
           <p:cNvSpPr txBox="1"/>
           <p:nvPr/>
         </p:nvSpPr>
@@ -6726,14 +5347,14 @@
                 </a:solidFill>
                 <a:latin typeface="Calibri"/>
               </a:rPr>
-              <a:t>  RWR tier 'Under $1,200': 7 x $2 = $14</a:t>
+              <a:t>  RWR $6k -&gt; Below T1 = $0</a:t>
             </a:r>
           </a:p>
         </p:txBody>
       </p:sp>
       <p:sp>
         <p:nvSpPr>
-          <p:cNvPr id="60" name="TextBox 59"/>
+          <p:cNvPr id="52" name="TextBox 51"/>
           <p:cNvSpPr txBox="1"/>
           <p:nvPr/>
         </p:nvSpPr>
@@ -6758,20 +5379,20 @@
           <a:p>
             <a:pPr algn="l"/>
             <a:r>
-              <a:rPr sz="1000" b="1" i="0">
+              <a:rPr sz="1000" b="0" i="0">
                 <a:solidFill>
-                  <a:srgbClr val="BF9000"/>
+                  <a:srgbClr val="1F4E78"/>
                 </a:solidFill>
                 <a:latin typeface="Calibri"/>
               </a:rPr>
-              <a:t>Collected incentive (&gt;$1,200 NB &amp; RWR only):</a:t>
+              <a:t>  REN $96k -&gt; T4 $85k = $580</a:t>
             </a:r>
           </a:p>
         </p:txBody>
       </p:sp>
       <p:sp>
         <p:nvSpPr>
-          <p:cNvPr id="61" name="TextBox 60"/>
+          <p:cNvPr id="53" name="TextBox 52"/>
           <p:cNvSpPr txBox="1"/>
           <p:nvPr/>
         </p:nvSpPr>
@@ -6796,178 +5417,26 @@
           <a:p>
             <a:pPr algn="l"/>
             <a:r>
-              <a:rPr sz="1000" b="0" i="0">
+              <a:rPr sz="1000" b="1" i="0">
                 <a:solidFill>
-                  <a:srgbClr val="1F4E78"/>
+                  <a:srgbClr val="BF9000"/>
                 </a:solidFill>
                 <a:latin typeface="Calibri"/>
               </a:rPr>
-              <a:t>  NB +$2/pol x 43% = $33</a:t>
+              <a:t>TARGET TOTAL = $830</a:t>
             </a:r>
           </a:p>
         </p:txBody>
       </p:sp>
       <p:sp>
         <p:nvSpPr>
-          <p:cNvPr id="62" name="TextBox 61"/>
+          <p:cNvPr id="54" name="TextBox 53"/>
           <p:cNvSpPr txBox="1"/>
           <p:nvPr/>
         </p:nvSpPr>
         <p:spPr>
           <a:xfrm>
             <a:off x="8266176" y="3186684"/>
-            <a:ext cx="3520440" cy="196596"/>
-          </a:xfrm>
-          <a:prstGeom prst="rect">
-            <a:avLst/>
-          </a:prstGeom>
-          <a:noFill/>
-          <a:ln>
-            <a:noFill/>
-          </a:ln>
-        </p:spPr>
-        <p:txBody>
-          <a:bodyPr wrap="square" lIns="73152" rIns="73152" tIns="36576" bIns="36576" anchor="t">
-            <a:spAutoFit/>
-          </a:bodyPr>
-          <a:lstStyle/>
-          <a:p>
-            <a:pPr algn="l"/>
-            <a:r>
-              <a:rPr sz="1000" b="0" i="0">
-                <a:solidFill>
-                  <a:srgbClr val="1F4E78"/>
-                </a:solidFill>
-                <a:latin typeface="Calibri"/>
-              </a:rPr>
-              <a:t>  RWR +$5/pol x 14% = $5</a:t>
-            </a:r>
-          </a:p>
-        </p:txBody>
-      </p:sp>
-      <p:sp>
-        <p:nvSpPr>
-          <p:cNvPr id="63" name="TextBox 62"/>
-          <p:cNvSpPr txBox="1"/>
-          <p:nvPr/>
-        </p:nvSpPr>
-        <p:spPr>
-          <a:xfrm>
-            <a:off x="8266176" y="3383280"/>
-            <a:ext cx="3520440" cy="196596"/>
-          </a:xfrm>
-          <a:prstGeom prst="rect">
-            <a:avLst/>
-          </a:prstGeom>
-          <a:noFill/>
-          <a:ln>
-            <a:noFill/>
-          </a:ln>
-        </p:spPr>
-        <p:txBody>
-          <a:bodyPr wrap="square" lIns="73152" rIns="73152" tIns="36576" bIns="36576" anchor="t">
-            <a:spAutoFit/>
-          </a:bodyPr>
-          <a:lstStyle/>
-          <a:p>
-            <a:pPr algn="l"/>
-            <a:r>
-              <a:rPr sz="1000" b="1" i="0">
-                <a:solidFill>
-                  <a:srgbClr val="BF9000"/>
-                </a:solidFill>
-                <a:latin typeface="Calibri"/>
-              </a:rPr>
-              <a:t>Renewals paid via retention bonus only:</a:t>
-            </a:r>
-          </a:p>
-        </p:txBody>
-      </p:sp>
-      <p:sp>
-        <p:nvSpPr>
-          <p:cNvPr id="64" name="TextBox 63"/>
-          <p:cNvSpPr txBox="1"/>
-          <p:nvPr/>
-        </p:nvSpPr>
-        <p:spPr>
-          <a:xfrm>
-            <a:off x="8266176" y="3579876"/>
-            <a:ext cx="3520440" cy="196596"/>
-          </a:xfrm>
-          <a:prstGeom prst="rect">
-            <a:avLst/>
-          </a:prstGeom>
-          <a:noFill/>
-          <a:ln>
-            <a:noFill/>
-          </a:ln>
-        </p:spPr>
-        <p:txBody>
-          <a:bodyPr wrap="square" lIns="73152" rIns="73152" tIns="36576" bIns="36576" anchor="t">
-            <a:spAutoFit/>
-          </a:bodyPr>
-          <a:lstStyle/>
-          <a:p>
-            <a:pPr algn="l"/>
-            <a:r>
-              <a:rPr sz="1000" b="0" i="0">
-                <a:solidFill>
-                  <a:srgbClr val="1F4E78"/>
-                </a:solidFill>
-                <a:latin typeface="Calibri"/>
-              </a:rPr>
-              <a:t>  Retention = REN $96k x 0.5% = $481</a:t>
-            </a:r>
-          </a:p>
-        </p:txBody>
-      </p:sp>
-      <p:sp>
-        <p:nvSpPr>
-          <p:cNvPr id="65" name="TextBox 64"/>
-          <p:cNvSpPr txBox="1"/>
-          <p:nvPr/>
-        </p:nvSpPr>
-        <p:spPr>
-          <a:xfrm>
-            <a:off x="8266176" y="3776472"/>
-            <a:ext cx="3520440" cy="196596"/>
-          </a:xfrm>
-          <a:prstGeom prst="rect">
-            <a:avLst/>
-          </a:prstGeom>
-          <a:noFill/>
-          <a:ln>
-            <a:noFill/>
-          </a:ln>
-        </p:spPr>
-        <p:txBody>
-          <a:bodyPr wrap="square" lIns="73152" rIns="73152" tIns="36576" bIns="36576" anchor="t">
-            <a:spAutoFit/>
-          </a:bodyPr>
-          <a:lstStyle/>
-          <a:p>
-            <a:pPr algn="l"/>
-            <a:r>
-              <a:rPr sz="1000" b="1" i="0">
-                <a:solidFill>
-                  <a:srgbClr val="BF9000"/>
-                </a:solidFill>
-                <a:latin typeface="Calibri"/>
-              </a:rPr>
-              <a:t>TARGET TOTAL = $799</a:t>
-            </a:r>
-          </a:p>
-        </p:txBody>
-      </p:sp>
-      <p:sp>
-        <p:nvSpPr>
-          <p:cNvPr id="66" name="TextBox 65"/>
-          <p:cNvSpPr txBox="1"/>
-          <p:nvPr/>
-        </p:nvSpPr>
-        <p:spPr>
-          <a:xfrm>
-            <a:off x="8266176" y="3973068"/>
             <a:ext cx="3520440" cy="196596"/>
           </a:xfrm>
           <a:prstGeom prst="rect">
@@ -6999,13 +5468,13 @@
       </p:sp>
       <p:sp>
         <p:nvSpPr>
-          <p:cNvPr id="67" name="TextBox 66"/>
+          <p:cNvPr id="55" name="TextBox 54"/>
           <p:cNvSpPr txBox="1"/>
           <p:nvPr/>
         </p:nvSpPr>
         <p:spPr>
           <a:xfrm>
-            <a:off x="8266176" y="4169664"/>
+            <a:off x="8266176" y="3383280"/>
             <a:ext cx="3520440" cy="196596"/>
           </a:xfrm>
           <a:prstGeom prst="rect">
@@ -7037,13 +5506,13 @@
       </p:sp>
       <p:sp>
         <p:nvSpPr>
-          <p:cNvPr id="68" name="TextBox 67"/>
+          <p:cNvPr id="56" name="TextBox 55"/>
           <p:cNvSpPr txBox="1"/>
           <p:nvPr/>
         </p:nvSpPr>
         <p:spPr>
           <a:xfrm>
-            <a:off x="8266176" y="4366260"/>
+            <a:off x="8266176" y="3579876"/>
             <a:ext cx="3520440" cy="196596"/>
           </a:xfrm>
           <a:prstGeom prst="rect">
@@ -7075,13 +5544,13 @@
       </p:sp>
       <p:sp>
         <p:nvSpPr>
-          <p:cNvPr id="69" name="TextBox 68"/>
+          <p:cNvPr id="57" name="TextBox 56"/>
           <p:cNvSpPr txBox="1"/>
           <p:nvPr/>
         </p:nvSpPr>
         <p:spPr>
           <a:xfrm>
-            <a:off x="8266176" y="4562856"/>
+            <a:off x="8266176" y="3776472"/>
             <a:ext cx="3520440" cy="196596"/>
           </a:xfrm>
           <a:prstGeom prst="rect">
@@ -7113,13 +5582,13 @@
       </p:sp>
       <p:sp>
         <p:nvSpPr>
-          <p:cNvPr id="70" name="TextBox 69"/>
+          <p:cNvPr id="58" name="TextBox 57"/>
           <p:cNvSpPr txBox="1"/>
           <p:nvPr/>
         </p:nvSpPr>
         <p:spPr>
           <a:xfrm>
-            <a:off x="8266176" y="4759452"/>
+            <a:off x="8266176" y="3973068"/>
             <a:ext cx="3520440" cy="196596"/>
           </a:xfrm>
           <a:prstGeom prst="rect">
@@ -7144,7 +5613,7 @@
                 </a:solidFill>
                 <a:latin typeface="Calibri"/>
               </a:rPr>
-              <a:t>PAID = $799</a:t>
+              <a:t>PAID = $830</a:t>
             </a:r>
           </a:p>
         </p:txBody>
@@ -7157,7 +5626,7 @@
 </p:sld>
 </file>
 
-<file path=ppt/slides/slide12.xml><?xml version="1.0" encoding="utf-8"?>
+<file path=ppt/slides/slide11.xml><?xml version="1.0" encoding="utf-8"?>
 <p:sld xmlns:a="http://schemas.openxmlformats.org/drawingml/2006/main" xmlns:p="http://schemas.openxmlformats.org/presentationml/2006/main" xmlns:r="http://schemas.openxmlformats.org/officeDocument/2006/relationships">
   <p:cSld>
     <p:spTree>
@@ -7402,7 +5871,7 @@
                 </a:solidFill>
                 <a:latin typeface="Calibri"/>
               </a:rPr>
-              <a:t>12 / 22</a:t>
+              <a:t>11 / 21</a:t>
             </a:r>
           </a:p>
         </p:txBody>
@@ -7975,7 +6444,7 @@
                           </a:solidFill>
                           <a:latin typeface="Calibri"/>
                         </a:rPr>
-                        <a:t>$38</a:t>
+                        <a:t>$0</a:t>
                       </a:r>
                     </a:p>
                   </a:txBody>
@@ -8230,7 +6699,7 @@
                           </a:solidFill>
                           <a:latin typeface="Calibri"/>
                         </a:rPr>
-                        <a:t>$38</a:t>
+                        <a:t>$0</a:t>
                       </a:r>
                     </a:p>
                   </a:txBody>
@@ -8485,7 +6954,7 @@
                           </a:solidFill>
                           <a:latin typeface="Calibri"/>
                         </a:rPr>
-                        <a:t>$297</a:t>
+                        <a:t>$250</a:t>
                       </a:r>
                     </a:p>
                   </a:txBody>
@@ -8740,7 +7209,7 @@
                           </a:solidFill>
                           <a:latin typeface="Calibri"/>
                         </a:rPr>
-                        <a:t>$55</a:t>
+                        <a:t>$0</a:t>
                       </a:r>
                     </a:p>
                   </a:txBody>
@@ -8995,7 +7464,7 @@
                           </a:solidFill>
                           <a:latin typeface="Calibri"/>
                         </a:rPr>
-                        <a:t>$427</a:t>
+                        <a:t>$250</a:t>
                       </a:r>
                     </a:p>
                   </a:txBody>
@@ -9578,7 +8047,7 @@
                           </a:solidFill>
                           <a:latin typeface="Calibri"/>
                         </a:rPr>
-                        <a:t>$107</a:t>
+                        <a:t>$0</a:t>
                       </a:r>
                     </a:p>
                   </a:txBody>
@@ -9833,7 +8302,7 @@
                           </a:solidFill>
                           <a:latin typeface="Calibri"/>
                         </a:rPr>
-                        <a:t>$114</a:t>
+                        <a:t>$0</a:t>
                       </a:r>
                     </a:p>
                   </a:txBody>
@@ -10088,7 +8557,7 @@
                           </a:solidFill>
                           <a:latin typeface="Calibri"/>
                         </a:rPr>
-                        <a:t>$328</a:t>
+                        <a:t>$250</a:t>
                       </a:r>
                     </a:p>
                   </a:txBody>
@@ -10343,7 +8812,7 @@
                           </a:solidFill>
                           <a:latin typeface="Calibri"/>
                         </a:rPr>
-                        <a:t>$93</a:t>
+                        <a:t>$0</a:t>
                       </a:r>
                     </a:p>
                   </a:txBody>
@@ -10598,7 +9067,7 @@
                           </a:solidFill>
                           <a:latin typeface="Calibri"/>
                         </a:rPr>
-                        <a:t>$642</a:t>
+                        <a:t>$250</a:t>
                       </a:r>
                     </a:p>
                   </a:txBody>
@@ -11181,7 +9650,7 @@
                           </a:solidFill>
                           <a:latin typeface="Calibri"/>
                         </a:rPr>
-                        <a:t>$138</a:t>
+                        <a:t>$200</a:t>
                       </a:r>
                     </a:p>
                   </a:txBody>
@@ -11436,7 +9905,7 @@
                           </a:solidFill>
                           <a:latin typeface="Calibri"/>
                         </a:rPr>
-                        <a:t>$153</a:t>
+                        <a:t>$200</a:t>
                       </a:r>
                     </a:p>
                   </a:txBody>
@@ -11691,7 +10160,7 @@
                           </a:solidFill>
                           <a:latin typeface="Calibri"/>
                         </a:rPr>
-                        <a:t>$349</a:t>
+                        <a:t>$450</a:t>
                       </a:r>
                     </a:p>
                   </a:txBody>
@@ -11946,7 +10415,7 @@
                           </a:solidFill>
                           <a:latin typeface="Calibri"/>
                         </a:rPr>
-                        <a:t>$77</a:t>
+                        <a:t>$0</a:t>
                       </a:r>
                     </a:p>
                   </a:txBody>
@@ -12201,7 +10670,7 @@
                           </a:solidFill>
                           <a:latin typeface="Calibri"/>
                         </a:rPr>
-                        <a:t>$716</a:t>
+                        <a:t>$850</a:t>
                       </a:r>
                     </a:p>
                   </a:txBody>
@@ -12249,7 +10718,7 @@
                 </a:solidFill>
                 <a:latin typeface="Calibri"/>
               </a:rPr>
-              <a:t>Today's current plan pays $1,300. New plan WITH MIN: REAL $427 | SWAP $642 | FLIP $716.</a:t>
+              <a:t>Today's current plan pays $1,300. New plan WITH MIN: REAL $250 | SWAP $250 | FLIP $850.</a:t>
             </a:r>
           </a:p>
         </p:txBody>
@@ -12262,7 +10731,7 @@
 </p:sld>
 </file>
 
-<file path=ppt/slides/slide13.xml><?xml version="1.0" encoding="utf-8"?>
+<file path=ppt/slides/slide12.xml><?xml version="1.0" encoding="utf-8"?>
 <p:sld xmlns:a="http://schemas.openxmlformats.org/drawingml/2006/main" xmlns:p="http://schemas.openxmlformats.org/presentationml/2006/main" xmlns:r="http://schemas.openxmlformats.org/officeDocument/2006/relationships">
   <p:cSld>
     <p:spTree>
@@ -12507,7 +10976,7 @@
                 </a:solidFill>
                 <a:latin typeface="Calibri"/>
               </a:rPr>
-              <a:t>13 / 22</a:t>
+              <a:t>12 / 21</a:t>
             </a:r>
           </a:p>
         </p:txBody>
@@ -13080,7 +11549,7 @@
                           </a:solidFill>
                           <a:latin typeface="Calibri"/>
                         </a:rPr>
-                        <a:t>$63</a:t>
+                        <a:t>$0</a:t>
                       </a:r>
                     </a:p>
                   </a:txBody>
@@ -13335,7 +11804,7 @@
                           </a:solidFill>
                           <a:latin typeface="Calibri"/>
                         </a:rPr>
-                        <a:t>$58</a:t>
+                        <a:t>$0</a:t>
                       </a:r>
                     </a:p>
                   </a:txBody>
@@ -13590,7 +12059,7 @@
                           </a:solidFill>
                           <a:latin typeface="Calibri"/>
                         </a:rPr>
-                        <a:t>$597</a:t>
+                        <a:t>$612</a:t>
                       </a:r>
                     </a:p>
                   </a:txBody>
@@ -13845,7 +12314,7 @@
                           </a:solidFill>
                           <a:latin typeface="Calibri"/>
                         </a:rPr>
-                        <a:t>$582</a:t>
+                        <a:t>$438</a:t>
                       </a:r>
                     </a:p>
                   </a:txBody>
@@ -14100,7 +12569,7 @@
                           </a:solidFill>
                           <a:latin typeface="Calibri"/>
                         </a:rPr>
-                        <a:t>$1300</a:t>
+                        <a:t>$1050</a:t>
                       </a:r>
                     </a:p>
                   </a:txBody>
@@ -14683,7 +13152,7 @@
                           </a:solidFill>
                           <a:latin typeface="Calibri"/>
                         </a:rPr>
-                        <a:t>$227</a:t>
+                        <a:t>$300</a:t>
                       </a:r>
                     </a:p>
                   </a:txBody>
@@ -14938,7 +13407,7 @@
                           </a:solidFill>
                           <a:latin typeface="Calibri"/>
                         </a:rPr>
-                        <a:t>$272</a:t>
+                        <a:t>$300</a:t>
                       </a:r>
                     </a:p>
                   </a:txBody>
@@ -15193,7 +13662,7 @@
                           </a:solidFill>
                           <a:latin typeface="Calibri"/>
                         </a:rPr>
-                        <a:t>$704</a:t>
+                        <a:t>$675</a:t>
                       </a:r>
                     </a:p>
                   </a:txBody>
@@ -15448,7 +13917,7 @@
                           </a:solidFill>
                           <a:latin typeface="Calibri"/>
                         </a:rPr>
-                        <a:t>$624</a:t>
+                        <a:t>$550</a:t>
                       </a:r>
                     </a:p>
                   </a:txBody>
@@ -15703,7 +14172,7 @@
                           </a:solidFill>
                           <a:latin typeface="Calibri"/>
                         </a:rPr>
-                        <a:t>$1828</a:t>
+                        <a:t>$1825</a:t>
                       </a:r>
                     </a:p>
                   </a:txBody>
@@ -16286,7 +14755,7 @@
                           </a:solidFill>
                           <a:latin typeface="Calibri"/>
                         </a:rPr>
-                        <a:t>$328</a:t>
+                        <a:t>$420</a:t>
                       </a:r>
                     </a:p>
                   </a:txBody>
@@ -16541,7 +15010,7 @@
                           </a:solidFill>
                           <a:latin typeface="Calibri"/>
                         </a:rPr>
-                        <a:t>$428</a:t>
+                        <a:t>$580</a:t>
                       </a:r>
                     </a:p>
                   </a:txBody>
@@ -16796,7 +15265,7 @@
                           </a:solidFill>
                           <a:latin typeface="Calibri"/>
                         </a:rPr>
-                        <a:t>$799</a:t>
+                        <a:t>$830</a:t>
                       </a:r>
                     </a:p>
                   </a:txBody>
@@ -17051,7 +15520,7 @@
                           </a:solidFill>
                           <a:latin typeface="Calibri"/>
                         </a:rPr>
-                        <a:t>$578</a:t>
+                        <a:t>$550</a:t>
                       </a:r>
                     </a:p>
                   </a:txBody>
@@ -17306,7 +15775,7 @@
                           </a:solidFill>
                           <a:latin typeface="Calibri"/>
                         </a:rPr>
-                        <a:t>$2133</a:t>
+                        <a:t>$2380</a:t>
                       </a:r>
                     </a:p>
                   </a:txBody>
@@ -17354,7 +15823,7 @@
                 </a:solidFill>
                 <a:latin typeface="Calibri"/>
               </a:rPr>
-              <a:t>Today's current plan pays $3,140. New plan WITH MIN: REAL $1,300 | SWAP $1,828 | FLIP $2,133.</a:t>
+              <a:t>Today's current plan pays $3,140. New plan WITH MIN: REAL $1,050 | SWAP $1,825 | FLIP $2,380.</a:t>
             </a:r>
           </a:p>
         </p:txBody>
@@ -17367,7 +15836,7 @@
 </p:sld>
 </file>
 
-<file path=ppt/slides/slide14.xml><?xml version="1.0" encoding="utf-8"?>
+<file path=ppt/slides/slide13.xml><?xml version="1.0" encoding="utf-8"?>
 <p:sld xmlns:a="http://schemas.openxmlformats.org/drawingml/2006/main" xmlns:p="http://schemas.openxmlformats.org/presentationml/2006/main" xmlns:r="http://schemas.openxmlformats.org/officeDocument/2006/relationships">
   <p:cSld>
     <p:spTree>
@@ -17612,7 +16081,7 @@
                 </a:solidFill>
                 <a:latin typeface="Calibri"/>
               </a:rPr>
-              <a:t>14 / 22</a:t>
+              <a:t>13 / 21</a:t>
             </a:r>
           </a:p>
         </p:txBody>
@@ -18440,7 +16909,7 @@
                           </a:solidFill>
                           <a:latin typeface="Calibri"/>
                         </a:rPr>
-                        <a:t>$5</a:t>
+                        <a:t>$0</a:t>
                       </a:r>
                     </a:p>
                   </a:txBody>
@@ -18695,7 +17164,7 @@
                           </a:solidFill>
                           <a:latin typeface="Calibri"/>
                         </a:rPr>
-                        <a:t>$5</a:t>
+                        <a:t>$0</a:t>
                       </a:r>
                     </a:p>
                   </a:txBody>
@@ -19205,7 +17674,7 @@
                           </a:solidFill>
                           <a:latin typeface="Calibri"/>
                         </a:rPr>
-                        <a:t>$10</a:t>
+                        <a:t>$0</a:t>
                       </a:r>
                     </a:p>
                   </a:txBody>
@@ -19788,7 +18257,7 @@
                           </a:solidFill>
                           <a:latin typeface="Calibri"/>
                         </a:rPr>
-                        <a:t>$158</a:t>
+                        <a:t>$200</a:t>
                       </a:r>
                     </a:p>
                   </a:txBody>
@@ -20043,7 +18512,7 @@
                           </a:solidFill>
                           <a:latin typeface="Calibri"/>
                         </a:rPr>
-                        <a:t>$130</a:t>
+                        <a:t>$200</a:t>
                       </a:r>
                     </a:p>
                   </a:txBody>
@@ -20298,7 +18767,7 @@
                           </a:solidFill>
                           <a:latin typeface="Calibri"/>
                         </a:rPr>
-                        <a:t>$147</a:t>
+                        <a:t>$200</a:t>
                       </a:r>
                     </a:p>
                   </a:txBody>
@@ -20553,7 +19022,7 @@
                           </a:solidFill>
                           <a:latin typeface="Calibri"/>
                         </a:rPr>
-                        <a:t>$108</a:t>
+                        <a:t>$0</a:t>
                       </a:r>
                     </a:p>
                   </a:txBody>
@@ -20808,7 +19277,7 @@
                           </a:solidFill>
                           <a:latin typeface="Calibri"/>
                         </a:rPr>
-                        <a:t>$545</a:t>
+                        <a:t>$600</a:t>
                       </a:r>
                     </a:p>
                   </a:txBody>
@@ -21391,7 +19860,7 @@
                           </a:solidFill>
                           <a:latin typeface="Calibri"/>
                         </a:rPr>
-                        <a:t>$317</a:t>
+                        <a:t>$300</a:t>
                       </a:r>
                     </a:p>
                   </a:txBody>
@@ -21646,7 +20115,7 @@
                           </a:solidFill>
                           <a:latin typeface="Calibri"/>
                         </a:rPr>
-                        <a:t>$250</a:t>
+                        <a:t>$300</a:t>
                       </a:r>
                     </a:p>
                   </a:txBody>
@@ -21901,7 +20370,7 @@
                           </a:solidFill>
                           <a:latin typeface="Calibri"/>
                         </a:rPr>
-                        <a:t>$284</a:t>
+                        <a:t>$300</a:t>
                       </a:r>
                     </a:p>
                   </a:txBody>
@@ -22156,7 +20625,7 @@
                           </a:solidFill>
                           <a:latin typeface="Calibri"/>
                         </a:rPr>
-                        <a:t>$217</a:t>
+                        <a:t>$200</a:t>
                       </a:r>
                     </a:p>
                   </a:txBody>
@@ -22411,7 +20880,7 @@
                           </a:solidFill>
                           <a:latin typeface="Calibri"/>
                         </a:rPr>
-                        <a:t>$1068</a:t>
+                        <a:t>$1100</a:t>
                       </a:r>
                     </a:p>
                   </a:txBody>
@@ -22459,7 +20928,7 @@
                 </a:solidFill>
                 <a:latin typeface="Calibri"/>
               </a:rPr>
-              <a:t>Today's current plan pays $2,370. New plan WITH MIN: REAL $10 | SWAP $545 | FLIP $1,068.</a:t>
+              <a:t>Today's current plan pays $2,370. New plan WITH MIN: REAL $0 | SWAP $600 | FLIP $1,100.</a:t>
             </a:r>
           </a:p>
         </p:txBody>
@@ -22472,7 +20941,7 @@
 </p:sld>
 </file>
 
-<file path=ppt/slides/slide15.xml><?xml version="1.0" encoding="utf-8"?>
+<file path=ppt/slides/slide14.xml><?xml version="1.0" encoding="utf-8"?>
 <p:sld xmlns:a="http://schemas.openxmlformats.org/drawingml/2006/main" xmlns:p="http://schemas.openxmlformats.org/presentationml/2006/main" xmlns:r="http://schemas.openxmlformats.org/officeDocument/2006/relationships">
   <p:cSld>
     <p:spTree>
@@ -22717,7 +21186,7 @@
                 </a:solidFill>
                 <a:latin typeface="Calibri"/>
               </a:rPr>
-              <a:t>15 / 22</a:t>
+              <a:t>14 / 21</a:t>
             </a:r>
           </a:p>
         </p:txBody>
@@ -23290,7 +21759,7 @@
                           </a:solidFill>
                           <a:latin typeface="Calibri"/>
                         </a:rPr>
-                        <a:t>$7</a:t>
+                        <a:t>$0</a:t>
                       </a:r>
                     </a:p>
                   </a:txBody>
@@ -23545,7 +22014,7 @@
                           </a:solidFill>
                           <a:latin typeface="Calibri"/>
                         </a:rPr>
-                        <a:t>$10</a:t>
+                        <a:t>$0</a:t>
                       </a:r>
                     </a:p>
                   </a:txBody>
@@ -24055,7 +22524,7 @@
                           </a:solidFill>
                           <a:latin typeface="Calibri"/>
                         </a:rPr>
-                        <a:t>$4</a:t>
+                        <a:t>$0</a:t>
                       </a:r>
                     </a:p>
                   </a:txBody>
@@ -24310,7 +22779,7 @@
                           </a:solidFill>
                           <a:latin typeface="Calibri"/>
                         </a:rPr>
-                        <a:t>$22</a:t>
+                        <a:t>$0</a:t>
                       </a:r>
                     </a:p>
                   </a:txBody>
@@ -24893,7 +23362,7 @@
                           </a:solidFill>
                           <a:latin typeface="Calibri"/>
                         </a:rPr>
-                        <a:t>$106</a:t>
+                        <a:t>$0</a:t>
                       </a:r>
                     </a:p>
                   </a:txBody>
@@ -25148,7 +23617,7 @@
                           </a:solidFill>
                           <a:latin typeface="Calibri"/>
                         </a:rPr>
-                        <a:t>$120</a:t>
+                        <a:t>$0</a:t>
                       </a:r>
                     </a:p>
                   </a:txBody>
@@ -25403,7 +23872,7 @@
                           </a:solidFill>
                           <a:latin typeface="Calibri"/>
                         </a:rPr>
-                        <a:t>$59</a:t>
+                        <a:t>$0</a:t>
                       </a:r>
                     </a:p>
                   </a:txBody>
@@ -25658,7 +24127,7 @@
                           </a:solidFill>
                           <a:latin typeface="Calibri"/>
                         </a:rPr>
-                        <a:t>$82</a:t>
+                        <a:t>$0</a:t>
                       </a:r>
                     </a:p>
                   </a:txBody>
@@ -25913,7 +24382,7 @@
                           </a:solidFill>
                           <a:latin typeface="Calibri"/>
                         </a:rPr>
-                        <a:t>$366</a:t>
+                        <a:t>$0</a:t>
                       </a:r>
                     </a:p>
                   </a:txBody>
@@ -26496,7 +24965,7 @@
                           </a:solidFill>
                           <a:latin typeface="Calibri"/>
                         </a:rPr>
-                        <a:t>$198</a:t>
+                        <a:t>$200</a:t>
                       </a:r>
                     </a:p>
                   </a:txBody>
@@ -26751,7 +25220,7 @@
                           </a:solidFill>
                           <a:latin typeface="Calibri"/>
                         </a:rPr>
-                        <a:t>$218</a:t>
+                        <a:t>$200</a:t>
                       </a:r>
                     </a:p>
                   </a:txBody>
@@ -27006,7 +25475,7 @@
                           </a:solidFill>
                           <a:latin typeface="Calibri"/>
                         </a:rPr>
-                        <a:t>$118</a:t>
+                        <a:t>$0</a:t>
                       </a:r>
                     </a:p>
                   </a:txBody>
@@ -27261,7 +25730,7 @@
                           </a:solidFill>
                           <a:latin typeface="Calibri"/>
                         </a:rPr>
-                        <a:t>$154</a:t>
+                        <a:t>$200</a:t>
                       </a:r>
                     </a:p>
                   </a:txBody>
@@ -27516,7 +25985,7 @@
                           </a:solidFill>
                           <a:latin typeface="Calibri"/>
                         </a:rPr>
-                        <a:t>$688</a:t>
+                        <a:t>$600</a:t>
                       </a:r>
                     </a:p>
                   </a:txBody>
@@ -27564,7 +26033,7 @@
                 </a:solidFill>
                 <a:latin typeface="Calibri"/>
               </a:rPr>
-              <a:t>Today's current plan pays $2,070. New plan WITH MIN: REAL $22 | SWAP $366 | FLIP $688.</a:t>
+              <a:t>Today's current plan pays $2,070. New plan WITH MIN: REAL $0 | SWAP $0 | FLIP $600.</a:t>
             </a:r>
           </a:p>
         </p:txBody>
@@ -27577,7 +26046,7 @@
 </p:sld>
 </file>
 
-<file path=ppt/slides/slide16.xml><?xml version="1.0" encoding="utf-8"?>
+<file path=ppt/slides/slide15.xml><?xml version="1.0" encoding="utf-8"?>
 <p:sld xmlns:a="http://schemas.openxmlformats.org/drawingml/2006/main" xmlns:p="http://schemas.openxmlformats.org/presentationml/2006/main" xmlns:r="http://schemas.openxmlformats.org/officeDocument/2006/relationships">
   <p:cSld>
     <p:spTree>
@@ -27822,7 +26291,7 @@
                 </a:solidFill>
                 <a:latin typeface="Calibri"/>
               </a:rPr>
-              <a:t>16 / 22</a:t>
+              <a:t>15 / 21</a:t>
             </a:r>
           </a:p>
         </p:txBody>
@@ -28395,7 +26864,7 @@
                           </a:solidFill>
                           <a:latin typeface="Calibri"/>
                         </a:rPr>
-                        <a:t>$18</a:t>
+                        <a:t>$0</a:t>
                       </a:r>
                     </a:p>
                   </a:txBody>
@@ -28650,7 +27119,7 @@
                           </a:solidFill>
                           <a:latin typeface="Calibri"/>
                         </a:rPr>
-                        <a:t>$37</a:t>
+                        <a:t>$0</a:t>
                       </a:r>
                     </a:p>
                   </a:txBody>
@@ -28905,7 +27374,7 @@
                           </a:solidFill>
                           <a:latin typeface="Calibri"/>
                         </a:rPr>
-                        <a:t>$28</a:t>
+                        <a:t>$0</a:t>
                       </a:r>
                     </a:p>
                   </a:txBody>
@@ -29160,7 +27629,7 @@
                           </a:solidFill>
                           <a:latin typeface="Calibri"/>
                         </a:rPr>
-                        <a:t>$18</a:t>
+                        <a:t>$0</a:t>
                       </a:r>
                     </a:p>
                   </a:txBody>
@@ -29415,7 +27884,7 @@
                           </a:solidFill>
                           <a:latin typeface="Calibri"/>
                         </a:rPr>
-                        <a:t>$102</a:t>
+                        <a:t>$0</a:t>
                       </a:r>
                     </a:p>
                   </a:txBody>
@@ -29998,7 +28467,7 @@
                           </a:solidFill>
                           <a:latin typeface="Calibri"/>
                         </a:rPr>
-                        <a:t>$101</a:t>
+                        <a:t>$0</a:t>
                       </a:r>
                     </a:p>
                   </a:txBody>
@@ -30253,7 +28722,7 @@
                           </a:solidFill>
                           <a:latin typeface="Calibri"/>
                         </a:rPr>
-                        <a:t>$108</a:t>
+                        <a:t>$0</a:t>
                       </a:r>
                     </a:p>
                   </a:txBody>
@@ -30508,7 +28977,7 @@
                           </a:solidFill>
                           <a:latin typeface="Calibri"/>
                         </a:rPr>
-                        <a:t>$78</a:t>
+                        <a:t>$0</a:t>
                       </a:r>
                     </a:p>
                   </a:txBody>
@@ -30763,7 +29232,7 @@
                           </a:solidFill>
                           <a:latin typeface="Calibri"/>
                         </a:rPr>
-                        <a:t>$118</a:t>
+                        <a:t>$0</a:t>
                       </a:r>
                     </a:p>
                   </a:txBody>
@@ -31018,7 +29487,7 @@
                           </a:solidFill>
                           <a:latin typeface="Calibri"/>
                         </a:rPr>
-                        <a:t>$405</a:t>
+                        <a:t>$0</a:t>
                       </a:r>
                     </a:p>
                   </a:txBody>
@@ -31601,7 +30070,7 @@
                           </a:solidFill>
                           <a:latin typeface="Calibri"/>
                         </a:rPr>
-                        <a:t>$165</a:t>
+                        <a:t>$200</a:t>
                       </a:r>
                     </a:p>
                   </a:txBody>
@@ -31856,7 +30325,7 @@
                           </a:solidFill>
                           <a:latin typeface="Calibri"/>
                         </a:rPr>
-                        <a:t>$141</a:t>
+                        <a:t>$200</a:t>
                       </a:r>
                     </a:p>
                   </a:txBody>
@@ -32111,7 +30580,7 @@
                           </a:solidFill>
                           <a:latin typeface="Calibri"/>
                         </a:rPr>
-                        <a:t>$99</a:t>
+                        <a:t>$0</a:t>
                       </a:r>
                     </a:p>
                   </a:txBody>
@@ -32366,7 +30835,7 @@
                           </a:solidFill>
                           <a:latin typeface="Calibri"/>
                         </a:rPr>
-                        <a:t>$199</a:t>
+                        <a:t>$200</a:t>
                       </a:r>
                     </a:p>
                   </a:txBody>
@@ -32621,7 +31090,7 @@
                           </a:solidFill>
                           <a:latin typeface="Calibri"/>
                         </a:rPr>
-                        <a:t>$605</a:t>
+                        <a:t>$600</a:t>
                       </a:r>
                     </a:p>
                   </a:txBody>
@@ -32669,7 +31138,7 @@
                 </a:solidFill>
                 <a:latin typeface="Calibri"/>
               </a:rPr>
-              <a:t>Today's current plan pays $1,400. New plan WITH MIN: REAL $102 | SWAP $405 | FLIP $605.</a:t>
+              <a:t>Today's current plan pays $1,400. New plan WITH MIN: REAL $0 | SWAP $0 | FLIP $600.</a:t>
             </a:r>
           </a:p>
         </p:txBody>
@@ -32682,7 +31151,7 @@
 </p:sld>
 </file>
 
-<file path=ppt/slides/slide17.xml><?xml version="1.0" encoding="utf-8"?>
+<file path=ppt/slides/slide16.xml><?xml version="1.0" encoding="utf-8"?>
 <p:sld xmlns:a="http://schemas.openxmlformats.org/drawingml/2006/main" xmlns:p="http://schemas.openxmlformats.org/presentationml/2006/main" xmlns:r="http://schemas.openxmlformats.org/officeDocument/2006/relationships">
   <p:cSld>
     <p:spTree>
@@ -32927,7 +31396,7 @@
                 </a:solidFill>
                 <a:latin typeface="Calibri"/>
               </a:rPr>
-              <a:t>17 / 22</a:t>
+              <a:t>16 / 21</a:t>
             </a:r>
           </a:p>
         </p:txBody>
@@ -33500,7 +31969,7 @@
                           </a:solidFill>
                           <a:latin typeface="Calibri"/>
                         </a:rPr>
-                        <a:t>$33</a:t>
+                        <a:t>$0</a:t>
                       </a:r>
                     </a:p>
                   </a:txBody>
@@ -33755,7 +32224,7 @@
                           </a:solidFill>
                           <a:latin typeface="Calibri"/>
                         </a:rPr>
-                        <a:t>$15</a:t>
+                        <a:t>$0</a:t>
                       </a:r>
                     </a:p>
                   </a:txBody>
@@ -34010,7 +32479,7 @@
                           </a:solidFill>
                           <a:latin typeface="Calibri"/>
                         </a:rPr>
-                        <a:t>$496</a:t>
+                        <a:t>$375</a:t>
                       </a:r>
                     </a:p>
                   </a:txBody>
@@ -34265,7 +32734,7 @@
                           </a:solidFill>
                           <a:latin typeface="Calibri"/>
                         </a:rPr>
-                        <a:t>$13</a:t>
+                        <a:t>$0</a:t>
                       </a:r>
                     </a:p>
                   </a:txBody>
@@ -34520,7 +32989,7 @@
                           </a:solidFill>
                           <a:latin typeface="Calibri"/>
                         </a:rPr>
-                        <a:t>$557</a:t>
+                        <a:t>$375</a:t>
                       </a:r>
                     </a:p>
                   </a:txBody>
@@ -35103,7 +33572,7 @@
                           </a:solidFill>
                           <a:latin typeface="Calibri"/>
                         </a:rPr>
-                        <a:t>$154</a:t>
+                        <a:t>$200</a:t>
                       </a:r>
                     </a:p>
                   </a:txBody>
@@ -35358,7 +33827,7 @@
                           </a:solidFill>
                           <a:latin typeface="Calibri"/>
                         </a:rPr>
-                        <a:t>$134</a:t>
+                        <a:t>$200</a:t>
                       </a:r>
                     </a:p>
                   </a:txBody>
@@ -35613,7 +34082,7 @@
                           </a:solidFill>
                           <a:latin typeface="Calibri"/>
                         </a:rPr>
-                        <a:t>$552</a:t>
+                        <a:t>$375</a:t>
                       </a:r>
                     </a:p>
                   </a:txBody>
@@ -35868,7 +34337,7 @@
                           </a:solidFill>
                           <a:latin typeface="Calibri"/>
                         </a:rPr>
-                        <a:t>$101</a:t>
+                        <a:t>$0</a:t>
                       </a:r>
                     </a:p>
                   </a:txBody>
@@ -36123,7 +34592,7 @@
                           </a:solidFill>
                           <a:latin typeface="Calibri"/>
                         </a:rPr>
-                        <a:t>$941</a:t>
+                        <a:t>$775</a:t>
                       </a:r>
                     </a:p>
                   </a:txBody>
@@ -36706,7 +35175,7 @@
                           </a:solidFill>
                           <a:latin typeface="Calibri"/>
                         </a:rPr>
-                        <a:t>$243</a:t>
+                        <a:t>$300</a:t>
                       </a:r>
                     </a:p>
                   </a:txBody>
@@ -36961,7 +35430,7 @@
                           </a:solidFill>
                           <a:latin typeface="Calibri"/>
                         </a:rPr>
-                        <a:t>$236</a:t>
+                        <a:t>$300</a:t>
                       </a:r>
                     </a:p>
                   </a:txBody>
@@ -37216,7 +35685,7 @@
                           </a:solidFill>
                           <a:latin typeface="Calibri"/>
                         </a:rPr>
-                        <a:t>$608</a:t>
+                        <a:t>$575</a:t>
                       </a:r>
                     </a:p>
                   </a:txBody>
@@ -37471,7 +35940,7 @@
                           </a:solidFill>
                           <a:latin typeface="Calibri"/>
                         </a:rPr>
-                        <a:t>$176</a:t>
+                        <a:t>$200</a:t>
                       </a:r>
                     </a:p>
                   </a:txBody>
@@ -37726,7 +36195,7 @@
                           </a:solidFill>
                           <a:latin typeface="Calibri"/>
                         </a:rPr>
-                        <a:t>$1264</a:t>
+                        <a:t>$1375</a:t>
                       </a:r>
                     </a:p>
                   </a:txBody>
@@ -37774,7 +36243,7 @@
                 </a:solidFill>
                 <a:latin typeface="Calibri"/>
               </a:rPr>
-              <a:t>Today's current plan pays $1,940. New plan WITH MIN: REAL $557 | SWAP $941 | FLIP $1,264.</a:t>
+              <a:t>Today's current plan pays $1,940. New plan WITH MIN: REAL $375 | SWAP $775 | FLIP $1,375.</a:t>
             </a:r>
           </a:p>
         </p:txBody>
@@ -37787,7 +36256,7 @@
 </p:sld>
 </file>
 
-<file path=ppt/slides/slide18.xml><?xml version="1.0" encoding="utf-8"?>
+<file path=ppt/slides/slide17.xml><?xml version="1.0" encoding="utf-8"?>
 <p:sld xmlns:a="http://schemas.openxmlformats.org/drawingml/2006/main" xmlns:p="http://schemas.openxmlformats.org/presentationml/2006/main" xmlns:r="http://schemas.openxmlformats.org/officeDocument/2006/relationships">
   <p:cSld>
     <p:spTree>
@@ -38032,7 +36501,7 @@
                 </a:solidFill>
                 <a:latin typeface="Calibri"/>
               </a:rPr>
-              <a:t>18 / 22</a:t>
+              <a:t>17 / 21</a:t>
             </a:r>
           </a:p>
         </p:txBody>
@@ -38333,7 +36802,7 @@
                           </a:solidFill>
                           <a:latin typeface="Calibri"/>
                         </a:rPr>
-                        <a:t>$7,322</a:t>
+                        <a:t>$2,975</a:t>
                       </a:r>
                     </a:p>
                   </a:txBody>
@@ -38356,7 +36825,7 @@
                           </a:solidFill>
                           <a:latin typeface="Calibri"/>
                         </a:rPr>
-                        <a:t>$8,637</a:t>
+                        <a:t>$3,450</a:t>
                       </a:r>
                     </a:p>
                   </a:txBody>
@@ -38379,7 +36848,7 @@
                           </a:solidFill>
                           <a:latin typeface="Calibri"/>
                         </a:rPr>
-                        <a:t>$9,638</a:t>
+                        <a:t>$6,905</a:t>
                       </a:r>
                     </a:p>
                   </a:txBody>
@@ -38450,7 +36919,7 @@
                           </a:solidFill>
                           <a:latin typeface="Calibri"/>
                         </a:rPr>
-                        <a:t>$2,419</a:t>
+                        <a:t>$1,675</a:t>
                       </a:r>
                     </a:p>
                   </a:txBody>
@@ -38473,7 +36942,7 @@
                           </a:solidFill>
                           <a:latin typeface="Calibri"/>
                         </a:rPr>
-                        <a:t>$4,725</a:t>
+                        <a:t>$3,450</a:t>
                       </a:r>
                     </a:p>
                   </a:txBody>
@@ -38496,7 +36965,7 @@
                           </a:solidFill>
                           <a:latin typeface="Calibri"/>
                         </a:rPr>
-                        <a:t>$6,475</a:t>
+                        <a:t>$6,905</a:t>
                       </a:r>
                     </a:p>
                   </a:txBody>
@@ -38625,7 +37094,7 @@
                 </a:solidFill>
                 <a:latin typeface="Calibri"/>
               </a:rPr>
-              <a:t>• New plan WITH MIN under 100% FLIP = $6,475 (53% of today's $12,220). The agency keeps more profit while still rewarding the right behavior.</a:t>
+              <a:t>• New plan WITH MIN under 100% FLIP = $6,905 (57% of today's $12,220). The agency keeps more profit while still rewarding the right behavior.</a:t>
             </a:r>
           </a:p>
           <a:p>
@@ -38641,7 +37110,7 @@
                 </a:solidFill>
                 <a:latin typeface="Calibri"/>
               </a:rPr>
-              <a:t>• New plan rewards what the current plan ignores: keeping the customer (retention bonus) and collecting more money upfront (kicker).</a:t>
+              <a:t>• New plan rewards what the current plan ignores: writing bigger NB books AND keeping renewals - each has its own premium tier ladder.</a:t>
             </a:r>
           </a:p>
           <a:p>
@@ -38657,7 +37126,7 @@
                 </a:solidFill>
                 <a:latin typeface="Calibri"/>
               </a:rPr>
-              <a:t>• The pitch to the agent: 'today you're earning $509/mo on rewrites. Under the new plan, when you renew instead, the retention bonus pays you for the premium you kept on the books.'</a:t>
+              <a:t>• The pitch to the agent: 'today you're earning $509/mo on rewrites. Under the new plan, when you renew instead, the REN tier kicks in - up to $800 at $100k retained.'</a:t>
             </a:r>
           </a:p>
         </p:txBody>
@@ -38670,7 +37139,7 @@
 </p:sld>
 </file>
 
-<file path=ppt/slides/slide19.xml><?xml version="1.0" encoding="utf-8"?>
+<file path=ppt/slides/slide18.xml><?xml version="1.0" encoding="utf-8"?>
 <p:sld xmlns:a="http://schemas.openxmlformats.org/drawingml/2006/main" xmlns:p="http://schemas.openxmlformats.org/presentationml/2006/main" xmlns:r="http://schemas.openxmlformats.org/officeDocument/2006/relationships">
   <p:cSld>
     <p:spTree>
@@ -38915,7 +37384,7 @@
                 </a:solidFill>
                 <a:latin typeface="Calibri"/>
               </a:rPr>
-              <a:t>19 / 22</a:t>
+              <a:t>18 / 21</a:t>
             </a:r>
           </a:p>
         </p:txBody>
@@ -39534,6 +38003,632 @@
 </p:sld>
 </file>
 
+<file path=ppt/slides/slide19.xml><?xml version="1.0" encoding="utf-8"?>
+<p:sld xmlns:a="http://schemas.openxmlformats.org/drawingml/2006/main" xmlns:p="http://schemas.openxmlformats.org/presentationml/2006/main" xmlns:r="http://schemas.openxmlformats.org/officeDocument/2006/relationships">
+  <p:cSld>
+    <p:spTree>
+      <p:nvGrpSpPr>
+        <p:cNvPr id="1" name=""/>
+        <p:cNvGrpSpPr/>
+        <p:nvPr/>
+      </p:nvGrpSpPr>
+      <p:grpSpPr/>
+      <p:sp>
+        <p:nvSpPr>
+          <p:cNvPr id="2" name="Rectangle 1"/>
+          <p:cNvSpPr/>
+          <p:nvPr/>
+        </p:nvSpPr>
+        <p:spPr>
+          <a:xfrm>
+            <a:off x="0" y="0"/>
+            <a:ext cx="12188952" cy="868680"/>
+          </a:xfrm>
+          <a:prstGeom prst="rect">
+            <a:avLst/>
+          </a:prstGeom>
+          <a:solidFill>
+            <a:srgbClr val="1F4E78"/>
+          </a:solidFill>
+          <a:ln>
+            <a:noFill/>
+          </a:ln>
+          <a:effectLst/>
+        </p:spPr>
+        <p:style>
+          <a:lnRef idx="1">
+            <a:schemeClr val="accent1"/>
+          </a:lnRef>
+          <a:fillRef idx="3">
+            <a:schemeClr val="accent1"/>
+          </a:fillRef>
+          <a:effectRef idx="2">
+            <a:schemeClr val="accent1"/>
+          </a:effectRef>
+          <a:fontRef idx="minor">
+            <a:schemeClr val="lt1"/>
+          </a:fontRef>
+        </p:style>
+        <p:txBody>
+          <a:bodyPr rtlCol="0" anchor="ctr"/>
+          <a:lstStyle/>
+          <a:p>
+            <a:pPr algn="ctr"/>
+          </a:p>
+        </p:txBody>
+      </p:sp>
+      <p:sp>
+        <p:nvSpPr>
+          <p:cNvPr id="3" name="TextBox 2"/>
+          <p:cNvSpPr txBox="1"/>
+          <p:nvPr/>
+        </p:nvSpPr>
+        <p:spPr>
+          <a:xfrm>
+            <a:off x="365760" y="109728"/>
+            <a:ext cx="11430000" cy="457200"/>
+          </a:xfrm>
+          <a:prstGeom prst="rect">
+            <a:avLst/>
+          </a:prstGeom>
+          <a:noFill/>
+          <a:ln>
+            <a:noFill/>
+          </a:ln>
+        </p:spPr>
+        <p:txBody>
+          <a:bodyPr wrap="square" lIns="73152" rIns="73152" tIns="36576" bIns="36576" anchor="ctr">
+            <a:spAutoFit/>
+          </a:bodyPr>
+          <a:lstStyle/>
+          <a:p>
+            <a:pPr algn="l"/>
+            <a:r>
+              <a:rPr sz="2400" b="1" i="0">
+                <a:solidFill>
+                  <a:srgbClr val="FFFFFF"/>
+                </a:solidFill>
+                <a:latin typeface="Calibri"/>
+              </a:rPr>
+              <a:t>Recommendation</a:t>
+            </a:r>
+          </a:p>
+        </p:txBody>
+      </p:sp>
+      <p:sp>
+        <p:nvSpPr>
+          <p:cNvPr id="4" name="TextBox 3"/>
+          <p:cNvSpPr txBox="1"/>
+          <p:nvPr/>
+        </p:nvSpPr>
+        <p:spPr>
+          <a:xfrm>
+            <a:off x="365760" y="530352"/>
+            <a:ext cx="11430000" cy="320040"/>
+          </a:xfrm>
+          <a:prstGeom prst="rect">
+            <a:avLst/>
+          </a:prstGeom>
+          <a:noFill/>
+          <a:ln>
+            <a:noFill/>
+          </a:ln>
+        </p:spPr>
+        <p:txBody>
+          <a:bodyPr wrap="square" lIns="73152" rIns="73152" tIns="36576" bIns="36576" anchor="ctr">
+            <a:spAutoFit/>
+          </a:bodyPr>
+          <a:lstStyle/>
+          <a:p>
+            <a:pPr algn="l"/>
+            <a:r>
+              <a:rPr sz="1200" b="0" i="1">
+                <a:solidFill>
+                  <a:srgbClr val="BDD7EE"/>
+                </a:solidFill>
+                <a:latin typeface="Calibri"/>
+              </a:rPr>
+              <a:t>The Bonus Plan with $45,000 NB + 30% retention minimums. Pilot 90 days, then review.</a:t>
+            </a:r>
+          </a:p>
+        </p:txBody>
+      </p:sp>
+      <p:sp>
+        <p:nvSpPr>
+          <p:cNvPr id="5" name="Rectangle 4"/>
+          <p:cNvSpPr/>
+          <p:nvPr/>
+        </p:nvSpPr>
+        <p:spPr>
+          <a:xfrm>
+            <a:off x="0" y="6647688"/>
+            <a:ext cx="12188952" cy="210312"/>
+          </a:xfrm>
+          <a:prstGeom prst="rect">
+            <a:avLst/>
+          </a:prstGeom>
+          <a:solidFill>
+            <a:srgbClr val="F2F2F2"/>
+          </a:solidFill>
+          <a:ln>
+            <a:noFill/>
+          </a:ln>
+          <a:effectLst/>
+        </p:spPr>
+        <p:style>
+          <a:lnRef idx="1">
+            <a:schemeClr val="accent1"/>
+          </a:lnRef>
+          <a:fillRef idx="3">
+            <a:schemeClr val="accent1"/>
+          </a:fillRef>
+          <a:effectRef idx="2">
+            <a:schemeClr val="accent1"/>
+          </a:effectRef>
+          <a:fontRef idx="minor">
+            <a:schemeClr val="lt1"/>
+          </a:fontRef>
+        </p:style>
+        <p:txBody>
+          <a:bodyPr rtlCol="0" anchor="ctr"/>
+          <a:lstStyle/>
+          <a:p>
+            <a:pPr algn="ctr"/>
+          </a:p>
+        </p:txBody>
+      </p:sp>
+      <p:sp>
+        <p:nvSpPr>
+          <p:cNvPr id="6" name="TextBox 5"/>
+          <p:cNvSpPr txBox="1"/>
+          <p:nvPr/>
+        </p:nvSpPr>
+        <p:spPr>
+          <a:xfrm>
+            <a:off x="365760" y="6647688"/>
+            <a:ext cx="7315200" cy="210312"/>
+          </a:xfrm>
+          <a:prstGeom prst="rect">
+            <a:avLst/>
+          </a:prstGeom>
+          <a:noFill/>
+          <a:ln>
+            <a:noFill/>
+          </a:ln>
+        </p:spPr>
+        <p:txBody>
+          <a:bodyPr wrap="square" lIns="73152" rIns="73152" tIns="36576" bIns="36576" anchor="ctr">
+            <a:spAutoFit/>
+          </a:bodyPr>
+          <a:lstStyle/>
+          <a:p>
+            <a:pPr algn="l"/>
+            <a:r>
+              <a:rPr sz="1000" b="0" i="0">
+                <a:solidFill>
+                  <a:srgbClr val="404040"/>
+                </a:solidFill>
+                <a:latin typeface="Calibri"/>
+              </a:rPr>
+              <a:t>Fiesta Bonus Plan - Ownership Decision Deck</a:t>
+            </a:r>
+          </a:p>
+        </p:txBody>
+      </p:sp>
+      <p:sp>
+        <p:nvSpPr>
+          <p:cNvPr id="7" name="TextBox 6"/>
+          <p:cNvSpPr txBox="1"/>
+          <p:nvPr/>
+        </p:nvSpPr>
+        <p:spPr>
+          <a:xfrm>
+            <a:off x="11338560" y="6647688"/>
+            <a:ext cx="731520" cy="210312"/>
+          </a:xfrm>
+          <a:prstGeom prst="rect">
+            <a:avLst/>
+          </a:prstGeom>
+          <a:noFill/>
+          <a:ln>
+            <a:noFill/>
+          </a:ln>
+        </p:spPr>
+        <p:txBody>
+          <a:bodyPr wrap="square" lIns="73152" rIns="73152" tIns="36576" bIns="36576" anchor="ctr">
+            <a:spAutoFit/>
+          </a:bodyPr>
+          <a:lstStyle/>
+          <a:p>
+            <a:pPr algn="r"/>
+            <a:r>
+              <a:rPr sz="1000" b="0" i="0">
+                <a:solidFill>
+                  <a:srgbClr val="404040"/>
+                </a:solidFill>
+                <a:latin typeface="Calibri"/>
+              </a:rPr>
+              <a:t>19 / 21</a:t>
+            </a:r>
+          </a:p>
+        </p:txBody>
+      </p:sp>
+      <p:sp>
+        <p:nvSpPr>
+          <p:cNvPr id="8" name="Rectangle 7"/>
+          <p:cNvSpPr/>
+          <p:nvPr/>
+        </p:nvSpPr>
+        <p:spPr>
+          <a:xfrm>
+            <a:off x="457200" y="1097280"/>
+            <a:ext cx="11247120" cy="1371600"/>
+          </a:xfrm>
+          <a:prstGeom prst="rect">
+            <a:avLst/>
+          </a:prstGeom>
+          <a:solidFill>
+            <a:srgbClr val="FFF2CC"/>
+          </a:solidFill>
+          <a:ln>
+            <a:noFill/>
+          </a:ln>
+          <a:effectLst/>
+        </p:spPr>
+        <p:style>
+          <a:lnRef idx="1">
+            <a:schemeClr val="accent1"/>
+          </a:lnRef>
+          <a:fillRef idx="3">
+            <a:schemeClr val="accent1"/>
+          </a:fillRef>
+          <a:effectRef idx="2">
+            <a:schemeClr val="accent1"/>
+          </a:effectRef>
+          <a:fontRef idx="minor">
+            <a:schemeClr val="lt1"/>
+          </a:fontRef>
+        </p:style>
+        <p:txBody>
+          <a:bodyPr rtlCol="0" anchor="ctr"/>
+          <a:lstStyle/>
+          <a:p>
+            <a:pPr algn="ctr"/>
+          </a:p>
+        </p:txBody>
+      </p:sp>
+      <p:sp>
+        <p:nvSpPr>
+          <p:cNvPr id="9" name="Rectangle 8"/>
+          <p:cNvSpPr/>
+          <p:nvPr/>
+        </p:nvSpPr>
+        <p:spPr>
+          <a:xfrm>
+            <a:off x="457200" y="1097280"/>
+            <a:ext cx="228600" cy="1371600"/>
+          </a:xfrm>
+          <a:prstGeom prst="rect">
+            <a:avLst/>
+          </a:prstGeom>
+          <a:solidFill>
+            <a:srgbClr val="BF9000"/>
+          </a:solidFill>
+          <a:ln>
+            <a:noFill/>
+          </a:ln>
+          <a:effectLst/>
+        </p:spPr>
+        <p:style>
+          <a:lnRef idx="1">
+            <a:schemeClr val="accent1"/>
+          </a:lnRef>
+          <a:fillRef idx="3">
+            <a:schemeClr val="accent1"/>
+          </a:fillRef>
+          <a:effectRef idx="2">
+            <a:schemeClr val="accent1"/>
+          </a:effectRef>
+          <a:fontRef idx="minor">
+            <a:schemeClr val="lt1"/>
+          </a:fontRef>
+        </p:style>
+        <p:txBody>
+          <a:bodyPr rtlCol="0" anchor="ctr"/>
+          <a:lstStyle/>
+          <a:p>
+            <a:pPr algn="ctr"/>
+          </a:p>
+        </p:txBody>
+      </p:sp>
+      <p:sp>
+        <p:nvSpPr>
+          <p:cNvPr id="10" name="TextBox 9"/>
+          <p:cNvSpPr txBox="1"/>
+          <p:nvPr/>
+        </p:nvSpPr>
+        <p:spPr>
+          <a:xfrm>
+            <a:off x="914400" y="1280160"/>
+            <a:ext cx="10332720" cy="457200"/>
+          </a:xfrm>
+          <a:prstGeom prst="rect">
+            <a:avLst/>
+          </a:prstGeom>
+          <a:noFill/>
+          <a:ln>
+            <a:noFill/>
+          </a:ln>
+        </p:spPr>
+        <p:txBody>
+          <a:bodyPr wrap="square" lIns="73152" rIns="73152" tIns="36576" bIns="36576" anchor="t">
+            <a:spAutoFit/>
+          </a:bodyPr>
+          <a:lstStyle/>
+          <a:p>
+            <a:pPr algn="l"/>
+            <a:r>
+              <a:rPr sz="2200" b="1" i="0">
+                <a:solidFill>
+                  <a:srgbClr val="1F4E78"/>
+                </a:solidFill>
+                <a:latin typeface="Calibri"/>
+              </a:rPr>
+              <a:t>THE NEW BONUS PLAN - with $45,000 NB premium + 30% retention minimums</a:t>
+            </a:r>
+          </a:p>
+        </p:txBody>
+      </p:sp>
+      <p:sp>
+        <p:nvSpPr>
+          <p:cNvPr id="11" name="TextBox 10"/>
+          <p:cNvSpPr txBox="1"/>
+          <p:nvPr/>
+        </p:nvSpPr>
+        <p:spPr>
+          <a:xfrm>
+            <a:off x="914400" y="1737360"/>
+            <a:ext cx="10332720" cy="685800"/>
+          </a:xfrm>
+          <a:prstGeom prst="rect">
+            <a:avLst/>
+          </a:prstGeom>
+          <a:noFill/>
+          <a:ln>
+            <a:noFill/>
+          </a:ln>
+        </p:spPr>
+        <p:txBody>
+          <a:bodyPr wrap="square" lIns="73152" rIns="73152" tIns="36576" bIns="36576" anchor="t">
+            <a:spAutoFit/>
+          </a:bodyPr>
+          <a:lstStyle/>
+          <a:p>
+            <a:pPr algn="l"/>
+            <a:r>
+              <a:rPr sz="1400" b="0" i="0">
+                <a:solidFill>
+                  <a:srgbClr val="101010"/>
+                </a:solidFill>
+                <a:latin typeface="Calibri"/>
+              </a:rPr>
+              <a:t>Balanced for agent motivation, retention upside, profit protection, and clean payroll math.</a:t>
+            </a:r>
+          </a:p>
+        </p:txBody>
+      </p:sp>
+      <p:sp>
+        <p:nvSpPr>
+          <p:cNvPr id="12" name="TextBox 11"/>
+          <p:cNvSpPr txBox="1"/>
+          <p:nvPr/>
+        </p:nvSpPr>
+        <p:spPr>
+          <a:xfrm>
+            <a:off x="457200" y="2743200"/>
+            <a:ext cx="11247120" cy="457200"/>
+          </a:xfrm>
+          <a:prstGeom prst="rect">
+            <a:avLst/>
+          </a:prstGeom>
+          <a:noFill/>
+          <a:ln>
+            <a:noFill/>
+          </a:ln>
+        </p:spPr>
+        <p:txBody>
+          <a:bodyPr wrap="square" lIns="73152" rIns="73152" tIns="36576" bIns="36576" anchor="t">
+            <a:spAutoFit/>
+          </a:bodyPr>
+          <a:lstStyle/>
+          <a:p>
+            <a:pPr algn="l"/>
+            <a:r>
+              <a:rPr sz="1800" b="1" i="0">
+                <a:solidFill>
+                  <a:srgbClr val="1F4E78"/>
+                </a:solidFill>
+                <a:latin typeface="Calibri"/>
+              </a:rPr>
+              <a:t>Why the new plan beats today's:</a:t>
+            </a:r>
+          </a:p>
+        </p:txBody>
+      </p:sp>
+      <p:sp>
+        <p:nvSpPr>
+          <p:cNvPr id="13" name="TextBox 12"/>
+          <p:cNvSpPr txBox="1"/>
+          <p:nvPr/>
+        </p:nvSpPr>
+        <p:spPr>
+          <a:xfrm>
+            <a:off x="640080" y="3200400"/>
+            <a:ext cx="10972800" cy="1828800"/>
+          </a:xfrm>
+          <a:prstGeom prst="rect">
+            <a:avLst/>
+          </a:prstGeom>
+          <a:noFill/>
+          <a:ln>
+            <a:noFill/>
+          </a:ln>
+        </p:spPr>
+        <p:txBody>
+          <a:bodyPr wrap="square" tIns="91440" bIns="91440">
+            <a:spAutoFit/>
+          </a:bodyPr>
+          <a:lstStyle/>
+          <a:p>
+            <a:pPr>
+              <a:lnSpc>
+                <a:spcPct val="120000"/>
+              </a:lnSpc>
+            </a:pPr>
+            <a:r>
+              <a:rPr sz="1400">
+                <a:solidFill>
+                  <a:srgbClr val="101010"/>
+                </a:solidFill>
+                <a:latin typeface="Calibri"/>
+              </a:rPr>
+              <a:t>• Same structure as today (count tiers -&gt; $X) but driven by PREMIUM written, not policy count.</a:t>
+            </a:r>
+          </a:p>
+          <a:p>
+            <a:pPr>
+              <a:lnSpc>
+                <a:spcPct val="120000"/>
+              </a:lnSpc>
+            </a:pPr>
+            <a:r>
+              <a:rPr sz="1400">
+                <a:solidFill>
+                  <a:srgbClr val="101010"/>
+                </a:solidFill>
+                <a:latin typeface="Calibri"/>
+              </a:rPr>
+              <a:t>• Pays for RENEWALS (today's plan pays $0) - REN gets its own tier ladder starting at $25k.</a:t>
+            </a:r>
+          </a:p>
+          <a:p>
+            <a:pPr>
+              <a:lnSpc>
+                <a:spcPct val="120000"/>
+              </a:lnSpc>
+            </a:pPr>
+            <a:r>
+              <a:rPr sz="1400">
+                <a:solidFill>
+                  <a:srgbClr val="101010"/>
+                </a:solidFill>
+                <a:latin typeface="Calibri"/>
+              </a:rPr>
+              <a:t>• Bigger jumps at the top tiers - $1,000 NB at $100k premium, with linear 1% upside above.</a:t>
+            </a:r>
+          </a:p>
+          <a:p>
+            <a:pPr>
+              <a:lnSpc>
+                <a:spcPct val="120000"/>
+              </a:lnSpc>
+            </a:pPr>
+            <a:r>
+              <a:rPr sz="1400">
+                <a:solidFill>
+                  <a:srgbClr val="101010"/>
+                </a:solidFill>
+                <a:latin typeface="Calibri"/>
+              </a:rPr>
+              <a:t>• Costs LESS at full target than today's count-tier plan - new plan FLIP $6,905 vs current $12,220.</a:t>
+            </a:r>
+          </a:p>
+        </p:txBody>
+      </p:sp>
+      <p:sp>
+        <p:nvSpPr>
+          <p:cNvPr id="14" name="TextBox 13"/>
+          <p:cNvSpPr txBox="1"/>
+          <p:nvPr/>
+        </p:nvSpPr>
+        <p:spPr>
+          <a:xfrm>
+            <a:off x="457200" y="5212080"/>
+            <a:ext cx="11247120" cy="457200"/>
+          </a:xfrm>
+          <a:prstGeom prst="rect">
+            <a:avLst/>
+          </a:prstGeom>
+          <a:noFill/>
+          <a:ln>
+            <a:noFill/>
+          </a:ln>
+        </p:spPr>
+        <p:txBody>
+          <a:bodyPr wrap="square" lIns="73152" rIns="73152" tIns="36576" bIns="36576" anchor="t">
+            <a:spAutoFit/>
+          </a:bodyPr>
+          <a:lstStyle/>
+          <a:p>
+            <a:pPr algn="l"/>
+            <a:r>
+              <a:rPr sz="1800" b="1" i="0">
+                <a:solidFill>
+                  <a:srgbClr val="1F4E78"/>
+                </a:solidFill>
+                <a:latin typeface="Calibri"/>
+              </a:rPr>
+              <a:t>Levers to fine-tune over time:</a:t>
+            </a:r>
+          </a:p>
+        </p:txBody>
+      </p:sp>
+      <p:sp>
+        <p:nvSpPr>
+          <p:cNvPr id="15" name="TextBox 14"/>
+          <p:cNvSpPr txBox="1"/>
+          <p:nvPr/>
+        </p:nvSpPr>
+        <p:spPr>
+          <a:xfrm>
+            <a:off x="640080" y="5669280"/>
+            <a:ext cx="10972800" cy="914400"/>
+          </a:xfrm>
+          <a:prstGeom prst="rect">
+            <a:avLst/>
+          </a:prstGeom>
+          <a:noFill/>
+          <a:ln>
+            <a:noFill/>
+          </a:ln>
+        </p:spPr>
+        <p:txBody>
+          <a:bodyPr wrap="square" lIns="73152" rIns="73152" tIns="36576" bIns="36576" anchor="t">
+            <a:spAutoFit/>
+          </a:bodyPr>
+          <a:lstStyle/>
+          <a:p>
+            <a:pPr algn="l"/>
+            <a:r>
+              <a:rPr sz="1300" b="0" i="0">
+                <a:solidFill>
+                  <a:srgbClr val="404040"/>
+                </a:solidFill>
+                <a:latin typeface="Calibri"/>
+              </a:rPr>
+              <a:t>1) Tier amounts (lower entry / higher top to motivate harder).   2) Tier breakpoints ($45k entry / $100k top - tighten or loosen the ladder).   3) Retention rate gate (30% today - dial up over time as the renewal book builds).</a:t>
+            </a:r>
+          </a:p>
+        </p:txBody>
+      </p:sp>
+    </p:spTree>
+  </p:cSld>
+  <p:clrMapOvr>
+    <a:masterClrMapping/>
+  </p:clrMapOvr>
+</p:sld>
+</file>
+
 <file path=ppt/slides/slide2.xml><?xml version="1.0" encoding="utf-8"?>
 <p:sld xmlns:a="http://schemas.openxmlformats.org/drawingml/2006/main" xmlns:p="http://schemas.openxmlformats.org/presentationml/2006/main" xmlns:r="http://schemas.openxmlformats.org/officeDocument/2006/relationships">
   <p:cSld>
@@ -39779,7 +38874,7 @@
                 </a:solidFill>
                 <a:latin typeface="Calibri"/>
               </a:rPr>
-              <a:t>2 / 22</a:t>
+              <a:t>2 / 21</a:t>
             </a:r>
           </a:p>
         </p:txBody>
@@ -40587,632 +39682,6 @@
 </file>
 
 <file path=ppt/slides/slide20.xml><?xml version="1.0" encoding="utf-8"?>
-<p:sld xmlns:a="http://schemas.openxmlformats.org/drawingml/2006/main" xmlns:p="http://schemas.openxmlformats.org/presentationml/2006/main" xmlns:r="http://schemas.openxmlformats.org/officeDocument/2006/relationships">
-  <p:cSld>
-    <p:spTree>
-      <p:nvGrpSpPr>
-        <p:cNvPr id="1" name=""/>
-        <p:cNvGrpSpPr/>
-        <p:nvPr/>
-      </p:nvGrpSpPr>
-      <p:grpSpPr/>
-      <p:sp>
-        <p:nvSpPr>
-          <p:cNvPr id="2" name="Rectangle 1"/>
-          <p:cNvSpPr/>
-          <p:nvPr/>
-        </p:nvSpPr>
-        <p:spPr>
-          <a:xfrm>
-            <a:off x="0" y="0"/>
-            <a:ext cx="12188952" cy="868680"/>
-          </a:xfrm>
-          <a:prstGeom prst="rect">
-            <a:avLst/>
-          </a:prstGeom>
-          <a:solidFill>
-            <a:srgbClr val="1F4E78"/>
-          </a:solidFill>
-          <a:ln>
-            <a:noFill/>
-          </a:ln>
-          <a:effectLst/>
-        </p:spPr>
-        <p:style>
-          <a:lnRef idx="1">
-            <a:schemeClr val="accent1"/>
-          </a:lnRef>
-          <a:fillRef idx="3">
-            <a:schemeClr val="accent1"/>
-          </a:fillRef>
-          <a:effectRef idx="2">
-            <a:schemeClr val="accent1"/>
-          </a:effectRef>
-          <a:fontRef idx="minor">
-            <a:schemeClr val="lt1"/>
-          </a:fontRef>
-        </p:style>
-        <p:txBody>
-          <a:bodyPr rtlCol="0" anchor="ctr"/>
-          <a:lstStyle/>
-          <a:p>
-            <a:pPr algn="ctr"/>
-          </a:p>
-        </p:txBody>
-      </p:sp>
-      <p:sp>
-        <p:nvSpPr>
-          <p:cNvPr id="3" name="TextBox 2"/>
-          <p:cNvSpPr txBox="1"/>
-          <p:nvPr/>
-        </p:nvSpPr>
-        <p:spPr>
-          <a:xfrm>
-            <a:off x="365760" y="109728"/>
-            <a:ext cx="11430000" cy="457200"/>
-          </a:xfrm>
-          <a:prstGeom prst="rect">
-            <a:avLst/>
-          </a:prstGeom>
-          <a:noFill/>
-          <a:ln>
-            <a:noFill/>
-          </a:ln>
-        </p:spPr>
-        <p:txBody>
-          <a:bodyPr wrap="square" lIns="73152" rIns="73152" tIns="36576" bIns="36576" anchor="ctr">
-            <a:spAutoFit/>
-          </a:bodyPr>
-          <a:lstStyle/>
-          <a:p>
-            <a:pPr algn="l"/>
-            <a:r>
-              <a:rPr sz="2400" b="1" i="0">
-                <a:solidFill>
-                  <a:srgbClr val="FFFFFF"/>
-                </a:solidFill>
-                <a:latin typeface="Calibri"/>
-              </a:rPr>
-              <a:t>Recommendation</a:t>
-            </a:r>
-          </a:p>
-        </p:txBody>
-      </p:sp>
-      <p:sp>
-        <p:nvSpPr>
-          <p:cNvPr id="4" name="TextBox 3"/>
-          <p:cNvSpPr txBox="1"/>
-          <p:nvPr/>
-        </p:nvSpPr>
-        <p:spPr>
-          <a:xfrm>
-            <a:off x="365760" y="530352"/>
-            <a:ext cx="11430000" cy="320040"/>
-          </a:xfrm>
-          <a:prstGeom prst="rect">
-            <a:avLst/>
-          </a:prstGeom>
-          <a:noFill/>
-          <a:ln>
-            <a:noFill/>
-          </a:ln>
-        </p:spPr>
-        <p:txBody>
-          <a:bodyPr wrap="square" lIns="73152" rIns="73152" tIns="36576" bIns="36576" anchor="ctr">
-            <a:spAutoFit/>
-          </a:bodyPr>
-          <a:lstStyle/>
-          <a:p>
-            <a:pPr algn="l"/>
-            <a:r>
-              <a:rPr sz="1200" b="0" i="1">
-                <a:solidFill>
-                  <a:srgbClr val="BDD7EE"/>
-                </a:solidFill>
-                <a:latin typeface="Calibri"/>
-              </a:rPr>
-              <a:t>The Bonus Plan with $45,000 NB + 30% retention minimums. Pilot 90 days, then review.</a:t>
-            </a:r>
-          </a:p>
-        </p:txBody>
-      </p:sp>
-      <p:sp>
-        <p:nvSpPr>
-          <p:cNvPr id="5" name="Rectangle 4"/>
-          <p:cNvSpPr/>
-          <p:nvPr/>
-        </p:nvSpPr>
-        <p:spPr>
-          <a:xfrm>
-            <a:off x="0" y="6647688"/>
-            <a:ext cx="12188952" cy="210312"/>
-          </a:xfrm>
-          <a:prstGeom prst="rect">
-            <a:avLst/>
-          </a:prstGeom>
-          <a:solidFill>
-            <a:srgbClr val="F2F2F2"/>
-          </a:solidFill>
-          <a:ln>
-            <a:noFill/>
-          </a:ln>
-          <a:effectLst/>
-        </p:spPr>
-        <p:style>
-          <a:lnRef idx="1">
-            <a:schemeClr val="accent1"/>
-          </a:lnRef>
-          <a:fillRef idx="3">
-            <a:schemeClr val="accent1"/>
-          </a:fillRef>
-          <a:effectRef idx="2">
-            <a:schemeClr val="accent1"/>
-          </a:effectRef>
-          <a:fontRef idx="minor">
-            <a:schemeClr val="lt1"/>
-          </a:fontRef>
-        </p:style>
-        <p:txBody>
-          <a:bodyPr rtlCol="0" anchor="ctr"/>
-          <a:lstStyle/>
-          <a:p>
-            <a:pPr algn="ctr"/>
-          </a:p>
-        </p:txBody>
-      </p:sp>
-      <p:sp>
-        <p:nvSpPr>
-          <p:cNvPr id="6" name="TextBox 5"/>
-          <p:cNvSpPr txBox="1"/>
-          <p:nvPr/>
-        </p:nvSpPr>
-        <p:spPr>
-          <a:xfrm>
-            <a:off x="365760" y="6647688"/>
-            <a:ext cx="7315200" cy="210312"/>
-          </a:xfrm>
-          <a:prstGeom prst="rect">
-            <a:avLst/>
-          </a:prstGeom>
-          <a:noFill/>
-          <a:ln>
-            <a:noFill/>
-          </a:ln>
-        </p:spPr>
-        <p:txBody>
-          <a:bodyPr wrap="square" lIns="73152" rIns="73152" tIns="36576" bIns="36576" anchor="ctr">
-            <a:spAutoFit/>
-          </a:bodyPr>
-          <a:lstStyle/>
-          <a:p>
-            <a:pPr algn="l"/>
-            <a:r>
-              <a:rPr sz="1000" b="0" i="0">
-                <a:solidFill>
-                  <a:srgbClr val="404040"/>
-                </a:solidFill>
-                <a:latin typeface="Calibri"/>
-              </a:rPr>
-              <a:t>Fiesta Bonus Plan - Ownership Decision Deck</a:t>
-            </a:r>
-          </a:p>
-        </p:txBody>
-      </p:sp>
-      <p:sp>
-        <p:nvSpPr>
-          <p:cNvPr id="7" name="TextBox 6"/>
-          <p:cNvSpPr txBox="1"/>
-          <p:nvPr/>
-        </p:nvSpPr>
-        <p:spPr>
-          <a:xfrm>
-            <a:off x="11338560" y="6647688"/>
-            <a:ext cx="731520" cy="210312"/>
-          </a:xfrm>
-          <a:prstGeom prst="rect">
-            <a:avLst/>
-          </a:prstGeom>
-          <a:noFill/>
-          <a:ln>
-            <a:noFill/>
-          </a:ln>
-        </p:spPr>
-        <p:txBody>
-          <a:bodyPr wrap="square" lIns="73152" rIns="73152" tIns="36576" bIns="36576" anchor="ctr">
-            <a:spAutoFit/>
-          </a:bodyPr>
-          <a:lstStyle/>
-          <a:p>
-            <a:pPr algn="r"/>
-            <a:r>
-              <a:rPr sz="1000" b="0" i="0">
-                <a:solidFill>
-                  <a:srgbClr val="404040"/>
-                </a:solidFill>
-                <a:latin typeface="Calibri"/>
-              </a:rPr>
-              <a:t>20 / 22</a:t>
-            </a:r>
-          </a:p>
-        </p:txBody>
-      </p:sp>
-      <p:sp>
-        <p:nvSpPr>
-          <p:cNvPr id="8" name="Rectangle 7"/>
-          <p:cNvSpPr/>
-          <p:nvPr/>
-        </p:nvSpPr>
-        <p:spPr>
-          <a:xfrm>
-            <a:off x="457200" y="1097280"/>
-            <a:ext cx="11247120" cy="1371600"/>
-          </a:xfrm>
-          <a:prstGeom prst="rect">
-            <a:avLst/>
-          </a:prstGeom>
-          <a:solidFill>
-            <a:srgbClr val="FFF2CC"/>
-          </a:solidFill>
-          <a:ln>
-            <a:noFill/>
-          </a:ln>
-          <a:effectLst/>
-        </p:spPr>
-        <p:style>
-          <a:lnRef idx="1">
-            <a:schemeClr val="accent1"/>
-          </a:lnRef>
-          <a:fillRef idx="3">
-            <a:schemeClr val="accent1"/>
-          </a:fillRef>
-          <a:effectRef idx="2">
-            <a:schemeClr val="accent1"/>
-          </a:effectRef>
-          <a:fontRef idx="minor">
-            <a:schemeClr val="lt1"/>
-          </a:fontRef>
-        </p:style>
-        <p:txBody>
-          <a:bodyPr rtlCol="0" anchor="ctr"/>
-          <a:lstStyle/>
-          <a:p>
-            <a:pPr algn="ctr"/>
-          </a:p>
-        </p:txBody>
-      </p:sp>
-      <p:sp>
-        <p:nvSpPr>
-          <p:cNvPr id="9" name="Rectangle 8"/>
-          <p:cNvSpPr/>
-          <p:nvPr/>
-        </p:nvSpPr>
-        <p:spPr>
-          <a:xfrm>
-            <a:off x="457200" y="1097280"/>
-            <a:ext cx="228600" cy="1371600"/>
-          </a:xfrm>
-          <a:prstGeom prst="rect">
-            <a:avLst/>
-          </a:prstGeom>
-          <a:solidFill>
-            <a:srgbClr val="BF9000"/>
-          </a:solidFill>
-          <a:ln>
-            <a:noFill/>
-          </a:ln>
-          <a:effectLst/>
-        </p:spPr>
-        <p:style>
-          <a:lnRef idx="1">
-            <a:schemeClr val="accent1"/>
-          </a:lnRef>
-          <a:fillRef idx="3">
-            <a:schemeClr val="accent1"/>
-          </a:fillRef>
-          <a:effectRef idx="2">
-            <a:schemeClr val="accent1"/>
-          </a:effectRef>
-          <a:fontRef idx="minor">
-            <a:schemeClr val="lt1"/>
-          </a:fontRef>
-        </p:style>
-        <p:txBody>
-          <a:bodyPr rtlCol="0" anchor="ctr"/>
-          <a:lstStyle/>
-          <a:p>
-            <a:pPr algn="ctr"/>
-          </a:p>
-        </p:txBody>
-      </p:sp>
-      <p:sp>
-        <p:nvSpPr>
-          <p:cNvPr id="10" name="TextBox 9"/>
-          <p:cNvSpPr txBox="1"/>
-          <p:nvPr/>
-        </p:nvSpPr>
-        <p:spPr>
-          <a:xfrm>
-            <a:off x="914400" y="1280160"/>
-            <a:ext cx="10332720" cy="457200"/>
-          </a:xfrm>
-          <a:prstGeom prst="rect">
-            <a:avLst/>
-          </a:prstGeom>
-          <a:noFill/>
-          <a:ln>
-            <a:noFill/>
-          </a:ln>
-        </p:spPr>
-        <p:txBody>
-          <a:bodyPr wrap="square" lIns="73152" rIns="73152" tIns="36576" bIns="36576" anchor="t">
-            <a:spAutoFit/>
-          </a:bodyPr>
-          <a:lstStyle/>
-          <a:p>
-            <a:pPr algn="l"/>
-            <a:r>
-              <a:rPr sz="2200" b="1" i="0">
-                <a:solidFill>
-                  <a:srgbClr val="1F4E78"/>
-                </a:solidFill>
-                <a:latin typeface="Calibri"/>
-              </a:rPr>
-              <a:t>THE NEW BONUS PLAN - with $45,000 NB premium + 30% retention minimums</a:t>
-            </a:r>
-          </a:p>
-        </p:txBody>
-      </p:sp>
-      <p:sp>
-        <p:nvSpPr>
-          <p:cNvPr id="11" name="TextBox 10"/>
-          <p:cNvSpPr txBox="1"/>
-          <p:nvPr/>
-        </p:nvSpPr>
-        <p:spPr>
-          <a:xfrm>
-            <a:off x="914400" y="1737360"/>
-            <a:ext cx="10332720" cy="685800"/>
-          </a:xfrm>
-          <a:prstGeom prst="rect">
-            <a:avLst/>
-          </a:prstGeom>
-          <a:noFill/>
-          <a:ln>
-            <a:noFill/>
-          </a:ln>
-        </p:spPr>
-        <p:txBody>
-          <a:bodyPr wrap="square" lIns="73152" rIns="73152" tIns="36576" bIns="36576" anchor="t">
-            <a:spAutoFit/>
-          </a:bodyPr>
-          <a:lstStyle/>
-          <a:p>
-            <a:pPr algn="l"/>
-            <a:r>
-              <a:rPr sz="1400" b="0" i="0">
-                <a:solidFill>
-                  <a:srgbClr val="101010"/>
-                </a:solidFill>
-                <a:latin typeface="Calibri"/>
-              </a:rPr>
-              <a:t>Balanced for agent motivation, retention upside, profit protection, and clean payroll math.</a:t>
-            </a:r>
-          </a:p>
-        </p:txBody>
-      </p:sp>
-      <p:sp>
-        <p:nvSpPr>
-          <p:cNvPr id="12" name="TextBox 11"/>
-          <p:cNvSpPr txBox="1"/>
-          <p:nvPr/>
-        </p:nvSpPr>
-        <p:spPr>
-          <a:xfrm>
-            <a:off x="457200" y="2743200"/>
-            <a:ext cx="11247120" cy="457200"/>
-          </a:xfrm>
-          <a:prstGeom prst="rect">
-            <a:avLst/>
-          </a:prstGeom>
-          <a:noFill/>
-          <a:ln>
-            <a:noFill/>
-          </a:ln>
-        </p:spPr>
-        <p:txBody>
-          <a:bodyPr wrap="square" lIns="73152" rIns="73152" tIns="36576" bIns="36576" anchor="t">
-            <a:spAutoFit/>
-          </a:bodyPr>
-          <a:lstStyle/>
-          <a:p>
-            <a:pPr algn="l"/>
-            <a:r>
-              <a:rPr sz="1800" b="1" i="0">
-                <a:solidFill>
-                  <a:srgbClr val="1F4E78"/>
-                </a:solidFill>
-                <a:latin typeface="Calibri"/>
-              </a:rPr>
-              <a:t>Why the new plan beats today's:</a:t>
-            </a:r>
-          </a:p>
-        </p:txBody>
-      </p:sp>
-      <p:sp>
-        <p:nvSpPr>
-          <p:cNvPr id="13" name="TextBox 12"/>
-          <p:cNvSpPr txBox="1"/>
-          <p:nvPr/>
-        </p:nvSpPr>
-        <p:spPr>
-          <a:xfrm>
-            <a:off x="640080" y="3200400"/>
-            <a:ext cx="10972800" cy="1828800"/>
-          </a:xfrm>
-          <a:prstGeom prst="rect">
-            <a:avLst/>
-          </a:prstGeom>
-          <a:noFill/>
-          <a:ln>
-            <a:noFill/>
-          </a:ln>
-        </p:spPr>
-        <p:txBody>
-          <a:bodyPr wrap="square" tIns="91440" bIns="91440">
-            <a:spAutoFit/>
-          </a:bodyPr>
-          <a:lstStyle/>
-          <a:p>
-            <a:pPr>
-              <a:lnSpc>
-                <a:spcPct val="120000"/>
-              </a:lnSpc>
-            </a:pPr>
-            <a:r>
-              <a:rPr sz="1400">
-                <a:solidFill>
-                  <a:srgbClr val="101010"/>
-                </a:solidFill>
-                <a:latin typeface="Calibri"/>
-              </a:rPr>
-              <a:t>• Pays for RENEWALS (today's plan pays $0 for renewals) - turns retention into a paying behavior.</a:t>
-            </a:r>
-          </a:p>
-          <a:p>
-            <a:pPr>
-              <a:lnSpc>
-                <a:spcPct val="120000"/>
-              </a:lnSpc>
-            </a:pPr>
-            <a:r>
-              <a:rPr sz="1400">
-                <a:solidFill>
-                  <a:srgbClr val="101010"/>
-                </a:solidFill>
-                <a:latin typeface="Calibri"/>
-              </a:rPr>
-              <a:t>• Pays MORE on bigger premium policies via NB tiers - aligns agent pay with agency commission.</a:t>
-            </a:r>
-          </a:p>
-          <a:p>
-            <a:pPr>
-              <a:lnSpc>
-                <a:spcPct val="120000"/>
-              </a:lnSpc>
-            </a:pPr>
-            <a:r>
-              <a:rPr sz="1400">
-                <a:solidFill>
-                  <a:srgbClr val="101010"/>
-                </a:solidFill>
-                <a:latin typeface="Calibri"/>
-              </a:rPr>
-              <a:t>• Pays MORE on policies with higher collected % via the kicker - rewards getting cash up front.</a:t>
-            </a:r>
-          </a:p>
-          <a:p>
-            <a:pPr>
-              <a:lnSpc>
-                <a:spcPct val="120000"/>
-              </a:lnSpc>
-            </a:pPr>
-            <a:r>
-              <a:rPr sz="1400">
-                <a:solidFill>
-                  <a:srgbClr val="101010"/>
-                </a:solidFill>
-                <a:latin typeface="Calibri"/>
-              </a:rPr>
-              <a:t>• Costs LESS at full target than today's count-tier plan - new plan FLIP $6,475 vs current $12,220.</a:t>
-            </a:r>
-          </a:p>
-        </p:txBody>
-      </p:sp>
-      <p:sp>
-        <p:nvSpPr>
-          <p:cNvPr id="14" name="TextBox 13"/>
-          <p:cNvSpPr txBox="1"/>
-          <p:nvPr/>
-        </p:nvSpPr>
-        <p:spPr>
-          <a:xfrm>
-            <a:off x="457200" y="5212080"/>
-            <a:ext cx="11247120" cy="457200"/>
-          </a:xfrm>
-          <a:prstGeom prst="rect">
-            <a:avLst/>
-          </a:prstGeom>
-          <a:noFill/>
-          <a:ln>
-            <a:noFill/>
-          </a:ln>
-        </p:spPr>
-        <p:txBody>
-          <a:bodyPr wrap="square" lIns="73152" rIns="73152" tIns="36576" bIns="36576" anchor="t">
-            <a:spAutoFit/>
-          </a:bodyPr>
-          <a:lstStyle/>
-          <a:p>
-            <a:pPr algn="l"/>
-            <a:r>
-              <a:rPr sz="1800" b="1" i="0">
-                <a:solidFill>
-                  <a:srgbClr val="1F4E78"/>
-                </a:solidFill>
-                <a:latin typeface="Calibri"/>
-              </a:rPr>
-              <a:t>Levers to fine-tune over time:</a:t>
-            </a:r>
-          </a:p>
-        </p:txBody>
-      </p:sp>
-      <p:sp>
-        <p:nvSpPr>
-          <p:cNvPr id="15" name="TextBox 14"/>
-          <p:cNvSpPr txBox="1"/>
-          <p:nvPr/>
-        </p:nvSpPr>
-        <p:spPr>
-          <a:xfrm>
-            <a:off x="640080" y="5669280"/>
-            <a:ext cx="10972800" cy="914400"/>
-          </a:xfrm>
-          <a:prstGeom prst="rect">
-            <a:avLst/>
-          </a:prstGeom>
-          <a:noFill/>
-          <a:ln>
-            <a:noFill/>
-          </a:ln>
-        </p:spPr>
-        <p:txBody>
-          <a:bodyPr wrap="square" lIns="73152" rIns="73152" tIns="36576" bIns="36576" anchor="t">
-            <a:spAutoFit/>
-          </a:bodyPr>
-          <a:lstStyle/>
-          <a:p>
-            <a:pPr algn="l"/>
-            <a:r>
-              <a:rPr sz="1300" b="0" i="0">
-                <a:solidFill>
-                  <a:srgbClr val="404040"/>
-                </a:solidFill>
-                <a:latin typeface="Calibri"/>
-              </a:rPr>
-              <a:t>1) Retention bonus rate (0.5% today - dial up if too lean, down if too rich).   2) Minimum thresholds (NB $45k / retention 30% - soften if too punishing, tighten if too easy).   3) Per-policy NB tier amounts and collected-kicker bands.</a:t>
-            </a:r>
-          </a:p>
-        </p:txBody>
-      </p:sp>
-    </p:spTree>
-  </p:cSld>
-  <p:clrMapOvr>
-    <a:masterClrMapping/>
-  </p:clrMapOvr>
-</p:sld>
-</file>
-
-<file path=ppt/slides/slide21.xml><?xml version="1.0" encoding="utf-8"?>
 <p:sld xmlns:a="http://schemas.openxmlformats.org/drawingml/2006/main" xmlns:p="http://schemas.openxmlformats.org/presentationml/2006/main" xmlns:r="http://schemas.openxmlformats.org/officeDocument/2006/relationships">
   <p:cSld>
     <p:spTree>
@@ -41457,7 +39926,7 @@
                 </a:solidFill>
                 <a:latin typeface="Calibri"/>
               </a:rPr>
-              <a:t>21 / 22</a:t>
+              <a:t>20 / 21</a:t>
             </a:r>
           </a:p>
         </p:txBody>
@@ -42216,7 +40685,7 @@
 </p:sld>
 </file>
 
-<file path=ppt/slides/slide22.xml><?xml version="1.0" encoding="utf-8"?>
+<file path=ppt/slides/slide21.xml><?xml version="1.0" encoding="utf-8"?>
 <p:sld xmlns:a="http://schemas.openxmlformats.org/drawingml/2006/main" xmlns:p="http://schemas.openxmlformats.org/presentationml/2006/main" xmlns:r="http://schemas.openxmlformats.org/officeDocument/2006/relationships">
   <p:cSld>
     <p:spTree>
@@ -42757,7 +41226,7 @@
                 </a:solidFill>
                 <a:latin typeface="Calibri"/>
               </a:rPr>
-              <a:t>3 / 22</a:t>
+              <a:t>3 / 21</a:t>
             </a:r>
           </a:p>
         </p:txBody>
@@ -43303,7 +41772,7 @@
                 </a:solidFill>
                 <a:latin typeface="Calibri"/>
               </a:rPr>
-              <a:t>4 / 22</a:t>
+              <a:t>4 / 21</a:t>
             </a:r>
           </a:p>
         </p:txBody>
@@ -44059,7 +42528,7 @@
                 </a:solidFill>
                 <a:latin typeface="Calibri"/>
               </a:rPr>
-              <a:t>THE BONUS PLAN (boss-approved framework)</a:t>
+              <a:t>THE BONUS PLAN</a:t>
             </a:r>
           </a:p>
         </p:txBody>
@@ -44097,7 +42566,7 @@
                 </a:solidFill>
                 <a:latin typeface="Calibri"/>
               </a:rPr>
-              <a:t>No tiers. Flat per-policy base. Per-policy collected incentive on policies &gt;$1,200. Plus a book retention bonus.</a:t>
+              <a:t>Same idea as today's 30/38/50 count tiers, but driven by monthly WRITTEN PREMIUM. $1,000 NB at $100k.</a:t>
             </a:r>
           </a:p>
         </p:txBody>
@@ -44217,7 +42686,7 @@
                 </a:solidFill>
                 <a:latin typeface="Calibri"/>
               </a:rPr>
-              <a:t>5 / 22</a:t>
+              <a:t>5 / 21</a:t>
             </a:r>
           </a:p>
         </p:txBody>
@@ -44255,7 +42724,7 @@
                 </a:solidFill>
                 <a:latin typeface="Calibri"/>
               </a:rPr>
-              <a:t>1. PER-POLICY BASE for NB and RWR (TIERED by written premium)</a:t>
+              <a:t>1. NEW BUSINESS - 5 tiers by monthly written premium</a:t>
             </a:r>
           </a:p>
         </p:txBody>
@@ -44279,9 +42748,9 @@
                 <a:tableStyleId>{5C22544A-7EE6-4342-B048-85BDC9FD1C3A}</a:tableStyleId>
               </a:tblPr>
               <a:tblGrid>
-                <a:gridCol w="2286000"/>
+                <a:gridCol w="1463040"/>
+                <a:gridCol w="2194560"/>
                 <a:gridCol w="2011680"/>
-                <a:gridCol w="1371600"/>
               </a:tblGrid>
               <a:tr h="292608">
                 <a:tc>
@@ -44297,7 +42766,7 @@
                           </a:solidFill>
                           <a:latin typeface="Calibri"/>
                         </a:rPr>
-                        <a:t>Premium tier</a:t>
+                        <a:t>Tier</a:t>
                       </a:r>
                     </a:p>
                   </a:txBody>
@@ -44320,7 +42789,7 @@
                           </a:solidFill>
                           <a:latin typeface="Calibri"/>
                         </a:rPr>
-                        <a:t>NB</a:t>
+                        <a:t>Monthly NB premium</a:t>
                       </a:r>
                     </a:p>
                   </a:txBody>
@@ -44343,7 +42812,7 @@
                           </a:solidFill>
                           <a:latin typeface="Calibri"/>
                         </a:rPr>
-                        <a:t>RWR</a:t>
+                        <a:t>NB pays</a:t>
                       </a:r>
                     </a:p>
                   </a:txBody>
@@ -44368,7 +42837,7 @@
                           </a:solidFill>
                           <a:latin typeface="Calibri"/>
                         </a:rPr>
-                        <a:t>Under $1,200</a:t>
+                        <a:t>T1 (min req)</a:t>
                       </a:r>
                     </a:p>
                   </a:txBody>
@@ -44391,7 +42860,7 @@
                           </a:solidFill>
                           <a:latin typeface="Calibri"/>
                         </a:rPr>
-                        <a:t>$5</a:t>
+                        <a:t>$45,000</a:t>
                       </a:r>
                     </a:p>
                   </a:txBody>
@@ -44414,7 +42883,7 @@
                           </a:solidFill>
                           <a:latin typeface="Calibri"/>
                         </a:rPr>
-                        <a:t>$2</a:t>
+                        <a:t>$250</a:t>
                       </a:r>
                     </a:p>
                   </a:txBody>
@@ -44439,7 +42908,7 @@
                           </a:solidFill>
                           <a:latin typeface="Calibri"/>
                         </a:rPr>
-                        <a:t>$1,200 - $1,799</a:t>
+                        <a:t>T2</a:t>
                       </a:r>
                     </a:p>
                   </a:txBody>
@@ -44462,7 +42931,7 @@
                           </a:solidFill>
                           <a:latin typeface="Calibri"/>
                         </a:rPr>
-                        <a:t>$7</a:t>
+                        <a:t>$55,000</a:t>
                       </a:r>
                     </a:p>
                   </a:txBody>
@@ -44485,7 +42954,7 @@
                           </a:solidFill>
                           <a:latin typeface="Calibri"/>
                         </a:rPr>
-                        <a:t>$3</a:t>
+                        <a:t>$375</a:t>
                       </a:r>
                     </a:p>
                   </a:txBody>
@@ -44510,7 +42979,7 @@
                           </a:solidFill>
                           <a:latin typeface="Calibri"/>
                         </a:rPr>
-                        <a:t>$1,800 - $2,499</a:t>
+                        <a:t>T3</a:t>
                       </a:r>
                     </a:p>
                   </a:txBody>
@@ -44533,7 +43002,7 @@
                           </a:solidFill>
                           <a:latin typeface="Calibri"/>
                         </a:rPr>
-                        <a:t>$10</a:t>
+                        <a:t>$70,000</a:t>
                       </a:r>
                     </a:p>
                   </a:txBody>
@@ -44556,7 +43025,7 @@
                           </a:solidFill>
                           <a:latin typeface="Calibri"/>
                         </a:rPr>
-                        <a:t>$4</a:t>
+                        <a:t>$525</a:t>
                       </a:r>
                     </a:p>
                   </a:txBody>
@@ -44581,7 +43050,7 @@
                           </a:solidFill>
                           <a:latin typeface="Calibri"/>
                         </a:rPr>
-                        <a:t>$2,500 - $2,999</a:t>
+                        <a:t>T4</a:t>
                       </a:r>
                     </a:p>
                   </a:txBody>
@@ -44604,7 +43073,7 @@
                           </a:solidFill>
                           <a:latin typeface="Calibri"/>
                         </a:rPr>
-                        <a:t>$13</a:t>
+                        <a:t>$85,000</a:t>
                       </a:r>
                     </a:p>
                   </a:txBody>
@@ -44627,7 +43096,7 @@
                           </a:solidFill>
                           <a:latin typeface="Calibri"/>
                         </a:rPr>
-                        <a:t>$4</a:t>
+                        <a:t>$725</a:t>
                       </a:r>
                     </a:p>
                   </a:txBody>
@@ -44652,7 +43121,7 @@
                           </a:solidFill>
                           <a:latin typeface="Calibri"/>
                         </a:rPr>
-                        <a:t>$3,000+</a:t>
+                        <a:t>T5</a:t>
                       </a:r>
                     </a:p>
                   </a:txBody>
@@ -44675,7 +43144,7 @@
                           </a:solidFill>
                           <a:latin typeface="Calibri"/>
                         </a:rPr>
-                        <a:t>$13+$2/$1k (max $25)</a:t>
+                        <a:t>$100,000</a:t>
                       </a:r>
                     </a:p>
                   </a:txBody>
@@ -44698,7 +43167,7 @@
                           </a:solidFill>
                           <a:latin typeface="Calibri"/>
                         </a:rPr>
-                        <a:t>$4</a:t>
+                        <a:t>$1,000</a:t>
                       </a:r>
                     </a:p>
                   </a:txBody>
@@ -44723,7 +43192,7 @@
                           </a:solidFill>
                           <a:latin typeface="Calibri"/>
                         </a:rPr>
-                        <a:t>REN (renewals)</a:t>
+                        <a:t>Above $100k</a:t>
                       </a:r>
                     </a:p>
                   </a:txBody>
@@ -44746,7 +43215,7 @@
                           </a:solidFill>
                           <a:latin typeface="Calibri"/>
                         </a:rPr>
-                        <a:t>see Section 3</a:t>
+                        <a:t>+$5k of premium</a:t>
                       </a:r>
                     </a:p>
                   </a:txBody>
@@ -44769,7 +43238,7 @@
                           </a:solidFill>
                           <a:latin typeface="Calibri"/>
                         </a:rPr>
-                        <a:t>see Section 3</a:t>
+                        <a:t>+$50 (1%)</a:t>
                       </a:r>
                     </a:p>
                   </a:txBody>
@@ -44817,7 +43286,7 @@
                 </a:solidFill>
                 <a:latin typeface="Calibri"/>
               </a:rPr>
-              <a:t>2. COLLECTED INCENTIVE (only on policies &gt; $1,200)</a:t>
+              <a:t>2. REWRITES - same breakpoints, pays HALF (gated by NB $45k)</a:t>
             </a:r>
           </a:p>
         </p:txBody>
@@ -44832,7 +43301,7 @@
         </p:nvGraphicFramePr>
         <p:xfrm>
           <a:off x="6263640" y="1280160"/>
-          <a:ext cx="5669280" cy="1920240"/>
+          <a:ext cx="5669280" cy="2048256"/>
         </p:xfrm>
         <a:graphic>
           <a:graphicData uri="http://schemas.openxmlformats.org/drawingml/2006/table">
@@ -44841,10 +43310,11 @@
                 <a:tableStyleId>{5C22544A-7EE6-4342-B048-85BDC9FD1C3A}</a:tableStyleId>
               </a:tblPr>
               <a:tblGrid>
-                <a:gridCol w="3200400"/>
-                <a:gridCol w="2468880"/>
+                <a:gridCol w="1280160"/>
+                <a:gridCol w="2194560"/>
+                <a:gridCol w="2194560"/>
               </a:tblGrid>
-              <a:tr h="320040">
+              <a:tr h="292608">
                 <a:tc>
                   <a:txBody>
                     <a:bodyPr lIns="45720" rIns="45720" tIns="18288" bIns="18288" wrap="square" anchor="ctr"/>
@@ -44858,7 +43328,7 @@
                           </a:solidFill>
                           <a:latin typeface="Calibri"/>
                         </a:rPr>
-                        <a:t>Collected % of premium</a:t>
+                        <a:t>Tier</a:t>
                       </a:r>
                     </a:p>
                   </a:txBody>
@@ -44881,7 +43351,7 @@
                           </a:solidFill>
                           <a:latin typeface="Calibri"/>
                         </a:rPr>
-                        <a:t>Extra per policy</a:t>
+                        <a:t>Monthly RWR premium</a:t>
                       </a:r>
                     </a:p>
                   </a:txBody>
@@ -44891,8 +43361,31 @@
                     </a:solidFill>
                   </a:tcPr>
                 </a:tc>
+                <a:tc>
+                  <a:txBody>
+                    <a:bodyPr lIns="45720" rIns="45720" tIns="18288" bIns="18288" wrap="square" anchor="ctr"/>
+                    <a:lstStyle/>
+                    <a:p>
+                      <a:pPr algn="ctr"/>
+                      <a:r>
+                        <a:rPr sz="1100" b="1">
+                          <a:solidFill>
+                            <a:srgbClr val="FFFFFF"/>
+                          </a:solidFill>
+                          <a:latin typeface="Calibri"/>
+                        </a:rPr>
+                        <a:t>RWR pays (half of NB)</a:t>
+                      </a:r>
+                    </a:p>
+                  </a:txBody>
+                  <a:tcPr>
+                    <a:solidFill>
+                      <a:srgbClr val="2E75B6"/>
+                    </a:solidFill>
+                  </a:tcPr>
+                </a:tc>
               </a:tr>
-              <a:tr h="320040">
+              <a:tr h="292608">
                 <a:tc>
                   <a:txBody>
                     <a:bodyPr lIns="45720" rIns="45720" tIns="18288" bIns="18288" wrap="square" anchor="ctr"/>
@@ -44906,7 +43399,7 @@
                           </a:solidFill>
                           <a:latin typeface="Calibri"/>
                         </a:rPr>
-                        <a:t>Below 15%</a:t>
+                        <a:t>T1</a:t>
                       </a:r>
                     </a:p>
                   </a:txBody>
@@ -44929,7 +43422,30 @@
                           </a:solidFill>
                           <a:latin typeface="Calibri"/>
                         </a:rPr>
-                        <a:t>$0 (no incentive)</a:t>
+                        <a:t>$45,000</a:t>
+                      </a:r>
+                    </a:p>
+                  </a:txBody>
+                  <a:tcPr>
+                    <a:solidFill>
+                      <a:srgbClr val="FFFFFF"/>
+                    </a:solidFill>
+                  </a:tcPr>
+                </a:tc>
+                <a:tc>
+                  <a:txBody>
+                    <a:bodyPr lIns="45720" rIns="45720" tIns="18288" bIns="18288" wrap="square" anchor="ctr"/>
+                    <a:lstStyle/>
+                    <a:p>
+                      <a:pPr algn="ctr"/>
+                      <a:r>
+                        <a:rPr sz="1100">
+                          <a:solidFill>
+                            <a:srgbClr val="101010"/>
+                          </a:solidFill>
+                          <a:latin typeface="Calibri"/>
+                        </a:rPr>
+                        <a:t>$125</a:t>
                       </a:r>
                     </a:p>
                   </a:txBody>
@@ -44940,7 +43456,7 @@
                   </a:tcPr>
                 </a:tc>
               </a:tr>
-              <a:tr h="320040">
+              <a:tr h="292608">
                 <a:tc>
                   <a:txBody>
                     <a:bodyPr lIns="45720" rIns="45720" tIns="18288" bIns="18288" wrap="square" anchor="ctr"/>
@@ -44954,7 +43470,7 @@
                           </a:solidFill>
                           <a:latin typeface="Calibri"/>
                         </a:rPr>
-                        <a:t>15% to 19%</a:t>
+                        <a:t>T2</a:t>
                       </a:r>
                     </a:p>
                   </a:txBody>
@@ -44977,7 +43493,7 @@
                           </a:solidFill>
                           <a:latin typeface="Calibri"/>
                         </a:rPr>
-                        <a:t>+$1</a:t>
+                        <a:t>$55,000</a:t>
                       </a:r>
                     </a:p>
                   </a:txBody>
@@ -44987,8 +43503,31 @@
                     </a:solidFill>
                   </a:tcPr>
                 </a:tc>
+                <a:tc>
+                  <a:txBody>
+                    <a:bodyPr lIns="45720" rIns="45720" tIns="18288" bIns="18288" wrap="square" anchor="ctr"/>
+                    <a:lstStyle/>
+                    <a:p>
+                      <a:pPr algn="ctr"/>
+                      <a:r>
+                        <a:rPr sz="1100">
+                          <a:solidFill>
+                            <a:srgbClr val="101010"/>
+                          </a:solidFill>
+                          <a:latin typeface="Calibri"/>
+                        </a:rPr>
+                        <a:t>$187.50</a:t>
+                      </a:r>
+                    </a:p>
+                  </a:txBody>
+                  <a:tcPr>
+                    <a:solidFill>
+                      <a:srgbClr val="F2F2F2"/>
+                    </a:solidFill>
+                  </a:tcPr>
+                </a:tc>
               </a:tr>
-              <a:tr h="320040">
+              <a:tr h="292608">
                 <a:tc>
                   <a:txBody>
                     <a:bodyPr lIns="45720" rIns="45720" tIns="18288" bIns="18288" wrap="square" anchor="ctr"/>
@@ -45002,7 +43541,7 @@
                           </a:solidFill>
                           <a:latin typeface="Calibri"/>
                         </a:rPr>
-                        <a:t>20% to 24%</a:t>
+                        <a:t>T3</a:t>
                       </a:r>
                     </a:p>
                   </a:txBody>
@@ -45025,7 +43564,30 @@
                           </a:solidFill>
                           <a:latin typeface="Calibri"/>
                         </a:rPr>
-                        <a:t>+$2</a:t>
+                        <a:t>$70,000</a:t>
+                      </a:r>
+                    </a:p>
+                  </a:txBody>
+                  <a:tcPr>
+                    <a:solidFill>
+                      <a:srgbClr val="FFFFFF"/>
+                    </a:solidFill>
+                  </a:tcPr>
+                </a:tc>
+                <a:tc>
+                  <a:txBody>
+                    <a:bodyPr lIns="45720" rIns="45720" tIns="18288" bIns="18288" wrap="square" anchor="ctr"/>
+                    <a:lstStyle/>
+                    <a:p>
+                      <a:pPr algn="ctr"/>
+                      <a:r>
+                        <a:rPr sz="1100">
+                          <a:solidFill>
+                            <a:srgbClr val="101010"/>
+                          </a:solidFill>
+                          <a:latin typeface="Calibri"/>
+                        </a:rPr>
+                        <a:t>$262.50</a:t>
                       </a:r>
                     </a:p>
                   </a:txBody>
@@ -45036,7 +43598,7 @@
                   </a:tcPr>
                 </a:tc>
               </a:tr>
-              <a:tr h="320040">
+              <a:tr h="292608">
                 <a:tc>
                   <a:txBody>
                     <a:bodyPr lIns="45720" rIns="45720" tIns="18288" bIns="18288" wrap="square" anchor="ctr"/>
@@ -45050,7 +43612,7 @@
                           </a:solidFill>
                           <a:latin typeface="Calibri"/>
                         </a:rPr>
-                        <a:t>25% to 99%</a:t>
+                        <a:t>T4</a:t>
                       </a:r>
                     </a:p>
                   </a:txBody>
@@ -45073,7 +43635,7 @@
                           </a:solidFill>
                           <a:latin typeface="Calibri"/>
                         </a:rPr>
-                        <a:t>+$5</a:t>
+                        <a:t>$85,000</a:t>
                       </a:r>
                     </a:p>
                   </a:txBody>
@@ -45083,8 +43645,31 @@
                     </a:solidFill>
                   </a:tcPr>
                 </a:tc>
+                <a:tc>
+                  <a:txBody>
+                    <a:bodyPr lIns="45720" rIns="45720" tIns="18288" bIns="18288" wrap="square" anchor="ctr"/>
+                    <a:lstStyle/>
+                    <a:p>
+                      <a:pPr algn="ctr"/>
+                      <a:r>
+                        <a:rPr sz="1100">
+                          <a:solidFill>
+                            <a:srgbClr val="101010"/>
+                          </a:solidFill>
+                          <a:latin typeface="Calibri"/>
+                        </a:rPr>
+                        <a:t>$362.50</a:t>
+                      </a:r>
+                    </a:p>
+                  </a:txBody>
+                  <a:tcPr>
+                    <a:solidFill>
+                      <a:srgbClr val="F2F2F2"/>
+                    </a:solidFill>
+                  </a:tcPr>
+                </a:tc>
               </a:tr>
-              <a:tr h="320040">
+              <a:tr h="292608">
                 <a:tc>
                   <a:txBody>
                     <a:bodyPr lIns="45720" rIns="45720" tIns="18288" bIns="18288" wrap="square" anchor="ctr"/>
@@ -45098,7 +43683,7 @@
                           </a:solidFill>
                           <a:latin typeface="Calibri"/>
                         </a:rPr>
-                        <a:t>100% PIF</a:t>
+                        <a:t>T5</a:t>
                       </a:r>
                     </a:p>
                   </a:txBody>
@@ -45121,13 +43706,107 @@
                           </a:solidFill>
                           <a:latin typeface="Calibri"/>
                         </a:rPr>
-                        <a:t>+$8</a:t>
-                      </a:r>
-                    </a:p>
-                  </a:txBody>
-                  <a:tcPr>
-                    <a:solidFill>
-                      <a:srgbClr val="FFFFFF"/>
+                        <a:t>$100,000</a:t>
+                      </a:r>
+                    </a:p>
+                  </a:txBody>
+                  <a:tcPr>
+                    <a:solidFill>
+                      <a:srgbClr val="FFFFFF"/>
+                    </a:solidFill>
+                  </a:tcPr>
+                </a:tc>
+                <a:tc>
+                  <a:txBody>
+                    <a:bodyPr lIns="45720" rIns="45720" tIns="18288" bIns="18288" wrap="square" anchor="ctr"/>
+                    <a:lstStyle/>
+                    <a:p>
+                      <a:pPr algn="ctr"/>
+                      <a:r>
+                        <a:rPr sz="1100">
+                          <a:solidFill>
+                            <a:srgbClr val="101010"/>
+                          </a:solidFill>
+                          <a:latin typeface="Calibri"/>
+                        </a:rPr>
+                        <a:t>$500</a:t>
+                      </a:r>
+                    </a:p>
+                  </a:txBody>
+                  <a:tcPr>
+                    <a:solidFill>
+                      <a:srgbClr val="FFFFFF"/>
+                    </a:solidFill>
+                  </a:tcPr>
+                </a:tc>
+              </a:tr>
+              <a:tr h="292608">
+                <a:tc>
+                  <a:txBody>
+                    <a:bodyPr lIns="45720" rIns="45720" tIns="18288" bIns="18288" wrap="square" anchor="ctr"/>
+                    <a:lstStyle/>
+                    <a:p>
+                      <a:pPr algn="ctr"/>
+                      <a:r>
+                        <a:rPr sz="1100">
+                          <a:solidFill>
+                            <a:srgbClr val="101010"/>
+                          </a:solidFill>
+                          <a:latin typeface="Calibri"/>
+                        </a:rPr>
+                        <a:t>Above $100k</a:t>
+                      </a:r>
+                    </a:p>
+                  </a:txBody>
+                  <a:tcPr>
+                    <a:solidFill>
+                      <a:srgbClr val="F2F2F2"/>
+                    </a:solidFill>
+                  </a:tcPr>
+                </a:tc>
+                <a:tc>
+                  <a:txBody>
+                    <a:bodyPr lIns="45720" rIns="45720" tIns="18288" bIns="18288" wrap="square" anchor="ctr"/>
+                    <a:lstStyle/>
+                    <a:p>
+                      <a:pPr algn="ctr"/>
+                      <a:r>
+                        <a:rPr sz="1100">
+                          <a:solidFill>
+                            <a:srgbClr val="101010"/>
+                          </a:solidFill>
+                          <a:latin typeface="Calibri"/>
+                        </a:rPr>
+                        <a:t>+$5k of premium</a:t>
+                      </a:r>
+                    </a:p>
+                  </a:txBody>
+                  <a:tcPr>
+                    <a:solidFill>
+                      <a:srgbClr val="F2F2F2"/>
+                    </a:solidFill>
+                  </a:tcPr>
+                </a:tc>
+                <a:tc>
+                  <a:txBody>
+                    <a:bodyPr lIns="45720" rIns="45720" tIns="18288" bIns="18288" wrap="square" anchor="ctr"/>
+                    <a:lstStyle/>
+                    <a:p>
+                      <a:pPr algn="ctr"/>
+                      <a:r>
+                        <a:rPr sz="1100">
+                          <a:solidFill>
+                            <a:srgbClr val="101010"/>
+                          </a:solidFill>
+                          <a:latin typeface="Calibri"/>
+                        </a:rPr>
+                        <a:t>+$25 (0.5%)</a:t>
+                      </a:r>
+                    </a:p>
+                  </a:txBody>
+                  <a:tcPr>
+                    <a:solidFill>
+                      <a:srgbClr val="F2F2F2"/>
                     </a:solidFill>
                   </a:tcPr>
                 </a:tc>
@@ -45144,7 +43823,7 @@
         </p:nvSpPr>
         <p:spPr>
           <a:xfrm>
-            <a:off x="365760" y="2834640"/>
+            <a:off x="365760" y="3749039"/>
             <a:ext cx="11612880" cy="274320"/>
           </a:xfrm>
           <a:prstGeom prst="rect">
@@ -45169,7 +43848,7 @@
                 </a:solidFill>
                 <a:latin typeface="Calibri"/>
               </a:rPr>
-              <a:t>3. RENEWALS = RETENTION BONUS ONLY (NO per-policy REN pay - avoids double-paying)</a:t>
+              <a:t>3. RENEWALS - own tiers starting at $25k, gated by 30% retention rate</a:t>
             </a:r>
           </a:p>
         </p:txBody>
@@ -45183,8 +43862,8 @@
           <p:nvPr/>
         </p:nvGraphicFramePr>
         <p:xfrm>
-          <a:off x="365760" y="3154680"/>
-          <a:ext cx="11612880" cy="822960"/>
+          <a:off x="365760" y="4069080"/>
+          <a:ext cx="11612880" cy="1097280"/>
         </p:xfrm>
         <a:graphic>
           <a:graphicData uri="http://schemas.openxmlformats.org/drawingml/2006/table">
@@ -45193,11 +43872,15 @@
                 <a:tableStyleId>{5C22544A-7EE6-4342-B048-85BDC9FD1C3A}</a:tableStyleId>
               </a:tblPr>
               <a:tblGrid>
-                <a:gridCol w="4114800"/>
-                <a:gridCol w="2743200"/>
-                <a:gridCol w="4754880"/>
+                <a:gridCol w="2377440"/>
+                <a:gridCol w="1371600"/>
+                <a:gridCol w="1371600"/>
+                <a:gridCol w="1371600"/>
+                <a:gridCol w="1371600"/>
+                <a:gridCol w="1463040"/>
+                <a:gridCol w="2286000"/>
               </a:tblGrid>
-              <a:tr h="411480">
+              <a:tr h="365760">
                 <a:tc>
                   <a:txBody>
                     <a:bodyPr lIns="45720" rIns="45720" tIns="18288" bIns="18288" wrap="square" anchor="ctr"/>
@@ -45211,7 +43894,7 @@
                           </a:solidFill>
                           <a:latin typeface="Calibri"/>
                         </a:rPr>
-                        <a:t>What it is</a:t>
+                        <a:t>Tier</a:t>
                       </a:r>
                     </a:p>
                   </a:txBody>
@@ -45234,7 +43917,7 @@
                           </a:solidFill>
                           <a:latin typeface="Calibri"/>
                         </a:rPr>
-                        <a:t>Formula</a:t>
+                        <a:t>T1</a:t>
                       </a:r>
                     </a:p>
                   </a:txBody>
@@ -45257,7 +43940,7 @@
                           </a:solidFill>
                           <a:latin typeface="Calibri"/>
                         </a:rPr>
-                        <a:t>Example values</a:t>
+                        <a:t>T2</a:t>
                       </a:r>
                     </a:p>
                   </a:txBody>
@@ -45267,8 +43950,123 @@
                     </a:solidFill>
                   </a:tcPr>
                 </a:tc>
+                <a:tc>
+                  <a:txBody>
+                    <a:bodyPr lIns="45720" rIns="45720" tIns="18288" bIns="18288" wrap="square" anchor="ctr"/>
+                    <a:lstStyle/>
+                    <a:p>
+                      <a:pPr algn="ctr"/>
+                      <a:r>
+                        <a:rPr sz="1100" b="1">
+                          <a:solidFill>
+                            <a:srgbClr val="FFFFFF"/>
+                          </a:solidFill>
+                          <a:latin typeface="Calibri"/>
+                        </a:rPr>
+                        <a:t>T3</a:t>
+                      </a:r>
+                    </a:p>
+                  </a:txBody>
+                  <a:tcPr>
+                    <a:solidFill>
+                      <a:srgbClr val="BF9000"/>
+                    </a:solidFill>
+                  </a:tcPr>
+                </a:tc>
+                <a:tc>
+                  <a:txBody>
+                    <a:bodyPr lIns="45720" rIns="45720" tIns="18288" bIns="18288" wrap="square" anchor="ctr"/>
+                    <a:lstStyle/>
+                    <a:p>
+                      <a:pPr algn="ctr"/>
+                      <a:r>
+                        <a:rPr sz="1100" b="1">
+                          <a:solidFill>
+                            <a:srgbClr val="FFFFFF"/>
+                          </a:solidFill>
+                          <a:latin typeface="Calibri"/>
+                        </a:rPr>
+                        <a:t>T4</a:t>
+                      </a:r>
+                    </a:p>
+                  </a:txBody>
+                  <a:tcPr>
+                    <a:solidFill>
+                      <a:srgbClr val="BF9000"/>
+                    </a:solidFill>
+                  </a:tcPr>
+                </a:tc>
+                <a:tc>
+                  <a:txBody>
+                    <a:bodyPr lIns="45720" rIns="45720" tIns="18288" bIns="18288" wrap="square" anchor="ctr"/>
+                    <a:lstStyle/>
+                    <a:p>
+                      <a:pPr algn="ctr"/>
+                      <a:r>
+                        <a:rPr sz="1100" b="1">
+                          <a:solidFill>
+                            <a:srgbClr val="FFFFFF"/>
+                          </a:solidFill>
+                          <a:latin typeface="Calibri"/>
+                        </a:rPr>
+                        <a:t>T5</a:t>
+                      </a:r>
+                    </a:p>
+                  </a:txBody>
+                  <a:tcPr>
+                    <a:solidFill>
+                      <a:srgbClr val="BF9000"/>
+                    </a:solidFill>
+                  </a:tcPr>
+                </a:tc>
+                <a:tc>
+                  <a:txBody>
+                    <a:bodyPr lIns="45720" rIns="45720" tIns="18288" bIns="18288" wrap="square" anchor="ctr"/>
+                    <a:lstStyle/>
+                    <a:p>
+                      <a:pPr algn="ctr"/>
+                      <a:r>
+                        <a:rPr sz="1100" b="1">
+                          <a:solidFill>
+                            <a:srgbClr val="FFFFFF"/>
+                          </a:solidFill>
+                          <a:latin typeface="Calibri"/>
+                        </a:rPr>
+                        <a:t>Above $100k</a:t>
+                      </a:r>
+                    </a:p>
+                  </a:txBody>
+                  <a:tcPr>
+                    <a:solidFill>
+                      <a:srgbClr val="BF9000"/>
+                    </a:solidFill>
+                  </a:tcPr>
+                </a:tc>
               </a:tr>
-              <a:tr h="411480">
+              <a:tr h="365760">
+                <a:tc>
+                  <a:txBody>
+                    <a:bodyPr lIns="45720" rIns="45720" tIns="18288" bIns="18288" wrap="square" anchor="ctr"/>
+                    <a:lstStyle/>
+                    <a:p>
+                      <a:pPr algn="ctr"/>
+                      <a:r>
+                        <a:rPr sz="1100" b="1">
+                          <a:solidFill>
+                            <a:srgbClr val="101010"/>
+                          </a:solidFill>
+                          <a:latin typeface="Calibri"/>
+                        </a:rPr>
+                        <a:t>Monthly REN premium</a:t>
+                      </a:r>
+                    </a:p>
+                  </a:txBody>
+                  <a:tcPr>
+                    <a:solidFill>
+                      <a:srgbClr val="FFFFFF"/>
+                    </a:solidFill>
+                  </a:tcPr>
+                </a:tc>
                 <a:tc>
                   <a:txBody>
                     <a:bodyPr lIns="45720" rIns="45720" tIns="18288" bIns="18288" wrap="square" anchor="ctr"/>
@@ -45282,7 +44080,7 @@
                           </a:solidFill>
                           <a:latin typeface="Calibri"/>
                         </a:rPr>
-                        <a:t>Renewals are paid as ONE bonus scaling with the premium retained. No per-policy REN base or collected incentive.</a:t>
+                        <a:t>$25,000</a:t>
                       </a:r>
                     </a:p>
                   </a:txBody>
@@ -45305,7 +44103,7 @@
                           </a:solidFill>
                           <a:latin typeface="Calibri"/>
                         </a:rPr>
-                        <a:t>REN written premium x 0.5%</a:t>
+                        <a:t>$45,000</a:t>
                       </a:r>
                     </a:p>
                   </a:txBody>
@@ -45328,13 +44126,245 @@
                           </a:solidFill>
                           <a:latin typeface="Calibri"/>
                         </a:rPr>
-                        <a:t>$50k REN -&gt; $250/mo | $25k REN -&gt; $125/mo | $10k REN -&gt; $50/mo. Bigger book + bigger premium = bigger bonus.</a:t>
-                      </a:r>
-                    </a:p>
-                  </a:txBody>
-                  <a:tcPr>
-                    <a:solidFill>
-                      <a:srgbClr val="FFFFFF"/>
+                        <a:t>$65,000</a:t>
+                      </a:r>
+                    </a:p>
+                  </a:txBody>
+                  <a:tcPr>
+                    <a:solidFill>
+                      <a:srgbClr val="FFFFFF"/>
+                    </a:solidFill>
+                  </a:tcPr>
+                </a:tc>
+                <a:tc>
+                  <a:txBody>
+                    <a:bodyPr lIns="45720" rIns="45720" tIns="18288" bIns="18288" wrap="square" anchor="ctr"/>
+                    <a:lstStyle/>
+                    <a:p>
+                      <a:pPr algn="ctr"/>
+                      <a:r>
+                        <a:rPr sz="1100">
+                          <a:solidFill>
+                            <a:srgbClr val="101010"/>
+                          </a:solidFill>
+                          <a:latin typeface="Calibri"/>
+                        </a:rPr>
+                        <a:t>$85,000</a:t>
+                      </a:r>
+                    </a:p>
+                  </a:txBody>
+                  <a:tcPr>
+                    <a:solidFill>
+                      <a:srgbClr val="FFFFFF"/>
+                    </a:solidFill>
+                  </a:tcPr>
+                </a:tc>
+                <a:tc>
+                  <a:txBody>
+                    <a:bodyPr lIns="45720" rIns="45720" tIns="18288" bIns="18288" wrap="square" anchor="ctr"/>
+                    <a:lstStyle/>
+                    <a:p>
+                      <a:pPr algn="ctr"/>
+                      <a:r>
+                        <a:rPr sz="1100">
+                          <a:solidFill>
+                            <a:srgbClr val="101010"/>
+                          </a:solidFill>
+                          <a:latin typeface="Calibri"/>
+                        </a:rPr>
+                        <a:t>$100,000</a:t>
+                      </a:r>
+                    </a:p>
+                  </a:txBody>
+                  <a:tcPr>
+                    <a:solidFill>
+                      <a:srgbClr val="FFFFFF"/>
+                    </a:solidFill>
+                  </a:tcPr>
+                </a:tc>
+                <a:tc>
+                  <a:txBody>
+                    <a:bodyPr lIns="45720" rIns="45720" tIns="18288" bIns="18288" wrap="square" anchor="ctr"/>
+                    <a:lstStyle/>
+                    <a:p>
+                      <a:pPr algn="ctr"/>
+                      <a:r>
+                        <a:rPr sz="1100">
+                          <a:solidFill>
+                            <a:srgbClr val="101010"/>
+                          </a:solidFill>
+                          <a:latin typeface="Calibri"/>
+                        </a:rPr>
+                        <a:t>+$5k of premium</a:t>
+                      </a:r>
+                    </a:p>
+                  </a:txBody>
+                  <a:tcPr>
+                    <a:solidFill>
+                      <a:srgbClr val="FFFFFF"/>
+                    </a:solidFill>
+                  </a:tcPr>
+                </a:tc>
+              </a:tr>
+              <a:tr h="365760">
+                <a:tc>
+                  <a:txBody>
+                    <a:bodyPr lIns="45720" rIns="45720" tIns="18288" bIns="18288" wrap="square" anchor="ctr"/>
+                    <a:lstStyle/>
+                    <a:p>
+                      <a:pPr algn="ctr"/>
+                      <a:r>
+                        <a:rPr sz="1100" b="1">
+                          <a:solidFill>
+                            <a:srgbClr val="101010"/>
+                          </a:solidFill>
+                          <a:latin typeface="Calibri"/>
+                        </a:rPr>
+                        <a:t>REN pays (0.80x of NB)</a:t>
+                      </a:r>
+                    </a:p>
+                  </a:txBody>
+                  <a:tcPr>
+                    <a:solidFill>
+                      <a:srgbClr val="F2F2F2"/>
+                    </a:solidFill>
+                  </a:tcPr>
+                </a:tc>
+                <a:tc>
+                  <a:txBody>
+                    <a:bodyPr lIns="45720" rIns="45720" tIns="18288" bIns="18288" wrap="square" anchor="ctr"/>
+                    <a:lstStyle/>
+                    <a:p>
+                      <a:pPr algn="ctr"/>
+                      <a:r>
+                        <a:rPr sz="1100">
+                          <a:solidFill>
+                            <a:srgbClr val="101010"/>
+                          </a:solidFill>
+                          <a:latin typeface="Calibri"/>
+                        </a:rPr>
+                        <a:t>$200</a:t>
+                      </a:r>
+                    </a:p>
+                  </a:txBody>
+                  <a:tcPr>
+                    <a:solidFill>
+                      <a:srgbClr val="F2F2F2"/>
+                    </a:solidFill>
+                  </a:tcPr>
+                </a:tc>
+                <a:tc>
+                  <a:txBody>
+                    <a:bodyPr lIns="45720" rIns="45720" tIns="18288" bIns="18288" wrap="square" anchor="ctr"/>
+                    <a:lstStyle/>
+                    <a:p>
+                      <a:pPr algn="ctr"/>
+                      <a:r>
+                        <a:rPr sz="1100">
+                          <a:solidFill>
+                            <a:srgbClr val="101010"/>
+                          </a:solidFill>
+                          <a:latin typeface="Calibri"/>
+                        </a:rPr>
+                        <a:t>$300</a:t>
+                      </a:r>
+                    </a:p>
+                  </a:txBody>
+                  <a:tcPr>
+                    <a:solidFill>
+                      <a:srgbClr val="F2F2F2"/>
+                    </a:solidFill>
+                  </a:tcPr>
+                </a:tc>
+                <a:tc>
+                  <a:txBody>
+                    <a:bodyPr lIns="45720" rIns="45720" tIns="18288" bIns="18288" wrap="square" anchor="ctr"/>
+                    <a:lstStyle/>
+                    <a:p>
+                      <a:pPr algn="ctr"/>
+                      <a:r>
+                        <a:rPr sz="1100">
+                          <a:solidFill>
+                            <a:srgbClr val="101010"/>
+                          </a:solidFill>
+                          <a:latin typeface="Calibri"/>
+                        </a:rPr>
+                        <a:t>$420</a:t>
+                      </a:r>
+                    </a:p>
+                  </a:txBody>
+                  <a:tcPr>
+                    <a:solidFill>
+                      <a:srgbClr val="F2F2F2"/>
+                    </a:solidFill>
+                  </a:tcPr>
+                </a:tc>
+                <a:tc>
+                  <a:txBody>
+                    <a:bodyPr lIns="45720" rIns="45720" tIns="18288" bIns="18288" wrap="square" anchor="ctr"/>
+                    <a:lstStyle/>
+                    <a:p>
+                      <a:pPr algn="ctr"/>
+                      <a:r>
+                        <a:rPr sz="1100">
+                          <a:solidFill>
+                            <a:srgbClr val="101010"/>
+                          </a:solidFill>
+                          <a:latin typeface="Calibri"/>
+                        </a:rPr>
+                        <a:t>$580</a:t>
+                      </a:r>
+                    </a:p>
+                  </a:txBody>
+                  <a:tcPr>
+                    <a:solidFill>
+                      <a:srgbClr val="F2F2F2"/>
+                    </a:solidFill>
+                  </a:tcPr>
+                </a:tc>
+                <a:tc>
+                  <a:txBody>
+                    <a:bodyPr lIns="45720" rIns="45720" tIns="18288" bIns="18288" wrap="square" anchor="ctr"/>
+                    <a:lstStyle/>
+                    <a:p>
+                      <a:pPr algn="ctr"/>
+                      <a:r>
+                        <a:rPr sz="1100">
+                          <a:solidFill>
+                            <a:srgbClr val="101010"/>
+                          </a:solidFill>
+                          <a:latin typeface="Calibri"/>
+                        </a:rPr>
+                        <a:t>$800</a:t>
+                      </a:r>
+                    </a:p>
+                  </a:txBody>
+                  <a:tcPr>
+                    <a:solidFill>
+                      <a:srgbClr val="F2F2F2"/>
+                    </a:solidFill>
+                  </a:tcPr>
+                </a:tc>
+                <a:tc>
+                  <a:txBody>
+                    <a:bodyPr lIns="45720" rIns="45720" tIns="18288" bIns="18288" wrap="square" anchor="ctr"/>
+                    <a:lstStyle/>
+                    <a:p>
+                      <a:pPr algn="ctr"/>
+                      <a:r>
+                        <a:rPr sz="1100">
+                          <a:solidFill>
+                            <a:srgbClr val="101010"/>
+                          </a:solidFill>
+                          <a:latin typeface="Calibri"/>
+                        </a:rPr>
+                        <a:t>+$40 (0.8%)</a:t>
+                      </a:r>
+                    </a:p>
+                  </a:txBody>
+                  <a:tcPr>
+                    <a:solidFill>
+                      <a:srgbClr val="F2F2F2"/>
                     </a:solidFill>
                   </a:tcPr>
                 </a:tc>
@@ -45351,7 +44381,7 @@
         </p:nvSpPr>
         <p:spPr>
           <a:xfrm>
-            <a:off x="365760" y="4251960"/>
+            <a:off x="365760" y="5532120"/>
             <a:ext cx="11612880" cy="274320"/>
           </a:xfrm>
           <a:prstGeom prst="rect">
@@ -45390,8 +44420,8 @@
           <p:nvPr/>
         </p:nvGraphicFramePr>
         <p:xfrm>
-          <a:off x="365760" y="4572000"/>
-          <a:ext cx="11612880" cy="1920240"/>
+          <a:off x="365760" y="5852160"/>
+          <a:ext cx="11612880" cy="950976"/>
         </p:xfrm>
         <a:graphic>
           <a:graphicData uri="http://schemas.openxmlformats.org/drawingml/2006/table">
@@ -45404,7 +44434,7 @@
                 <a:gridCol w="3108960"/>
                 <a:gridCol w="5943600"/>
               </a:tblGrid>
-              <a:tr h="274320">
+              <a:tr h="237744">
                 <a:tc>
                   <a:txBody>
                     <a:bodyPr lIns="45720" rIns="45720" tIns="18288" bIns="18288" wrap="square" anchor="ctr"/>
@@ -45475,7 +44505,7 @@
                   </a:tcPr>
                 </a:tc>
               </a:tr>
-              <a:tr h="274320">
+              <a:tr h="237744">
                 <a:tc>
                   <a:txBody>
                     <a:bodyPr lIns="45720" rIns="45720" tIns="18288" bIns="18288" wrap="square" anchor="ctr"/>
@@ -45535,7 +44565,7 @@
                           </a:solidFill>
                           <a:latin typeface="Calibri"/>
                         </a:rPr>
-                        <a:t>If NB premium &lt; $35k that month, NB pay = $0</a:t>
+                        <a:t>Equals T1 entry. NB &lt; $45k -&gt; NB pay = $0 (also blocks RWR)</a:t>
                       </a:r>
                     </a:p>
                   </a:txBody>
@@ -45546,7 +44576,7 @@
                   </a:tcPr>
                 </a:tc>
               </a:tr>
-              <a:tr h="274320">
+              <a:tr h="237744">
                 <a:tc>
                   <a:txBody>
                     <a:bodyPr lIns="45720" rIns="45720" tIns="18288" bIns="18288" wrap="square" anchor="ctr"/>
@@ -45583,7 +44613,7 @@
                           </a:solidFill>
                           <a:latin typeface="Calibri"/>
                         </a:rPr>
-                        <a:t>30% retention of book</a:t>
+                        <a:t>30% retention rate of book</a:t>
                       </a:r>
                     </a:p>
                   </a:txBody>
@@ -45606,7 +44636,7 @@
                           </a:solidFill>
                           <a:latin typeface="Calibri"/>
                         </a:rPr>
-                        <a:t>If retention &lt; 30%, REN pay = $0</a:t>
+                        <a:t>Retain &lt; 30% -&gt; REN pay = $0</a:t>
                       </a:r>
                     </a:p>
                   </a:txBody>
@@ -45617,7 +44647,7 @@
                   </a:tcPr>
                 </a:tc>
               </a:tr>
-              <a:tr h="274320">
+              <a:tr h="237744">
                 <a:tc>
                   <a:txBody>
                     <a:bodyPr lIns="45720" rIns="45720" tIns="18288" bIns="18288" wrap="square" anchor="ctr"/>
@@ -45631,7 +44661,7 @@
                           </a:solidFill>
                           <a:latin typeface="Calibri"/>
                         </a:rPr>
-                        <a:t>RWR gate</a:t>
+                        <a:t>Chargeback</a:t>
                       </a:r>
                     </a:p>
                   </a:txBody>
@@ -45654,7 +44684,7 @@
                           </a:solidFill>
                           <a:latin typeface="Calibri"/>
                         </a:rPr>
-                        <a:t>NB gate met (or both)</a:t>
+                        <a:t>3 months (90 days)</a:t>
                       </a:r>
                     </a:p>
                   </a:txBody>
@@ -45677,226 +44707,13 @@
                           </a:solidFill>
                           <a:latin typeface="Calibri"/>
                         </a:rPr>
-                        <a:t>RWR paid when NB gate met. Meeting both also works.</a:t>
-                      </a:r>
-                    </a:p>
-                  </a:txBody>
-                  <a:tcPr>
-                    <a:solidFill>
-                      <a:srgbClr val="FFFFFF"/>
-                    </a:solidFill>
-                  </a:tcPr>
-                </a:tc>
-              </a:tr>
-              <a:tr h="274320">
-                <a:tc>
-                  <a:txBody>
-                    <a:bodyPr lIns="45720" rIns="45720" tIns="18288" bIns="18288" wrap="square" anchor="ctr"/>
-                    <a:lstStyle/>
-                    <a:p>
-                      <a:pPr algn="ctr"/>
-                      <a:r>
-                        <a:rPr sz="1100">
-                          <a:solidFill>
-                            <a:srgbClr val="101010"/>
-                          </a:solidFill>
-                          <a:latin typeface="Calibri"/>
-                        </a:rPr>
-                        <a:t>Chargeback</a:t>
-                      </a:r>
-                    </a:p>
-                  </a:txBody>
-                  <a:tcPr>
-                    <a:solidFill>
-                      <a:srgbClr val="F2F2F2"/>
-                    </a:solidFill>
-                  </a:tcPr>
-                </a:tc>
-                <a:tc>
-                  <a:txBody>
-                    <a:bodyPr lIns="45720" rIns="45720" tIns="18288" bIns="18288" wrap="square" anchor="ctr"/>
-                    <a:lstStyle/>
-                    <a:p>
-                      <a:pPr algn="ctr"/>
-                      <a:r>
-                        <a:rPr sz="1100">
-                          <a:solidFill>
-                            <a:srgbClr val="101010"/>
-                          </a:solidFill>
-                          <a:latin typeface="Calibri"/>
-                        </a:rPr>
-                        <a:t>3 months (90 days)</a:t>
-                      </a:r>
-                    </a:p>
-                  </a:txBody>
-                  <a:tcPr>
-                    <a:solidFill>
-                      <a:srgbClr val="F2F2F2"/>
-                    </a:solidFill>
-                  </a:tcPr>
-                </a:tc>
-                <a:tc>
-                  <a:txBody>
-                    <a:bodyPr lIns="45720" rIns="45720" tIns="18288" bIns="18288" wrap="square" anchor="ctr"/>
-                    <a:lstStyle/>
-                    <a:p>
-                      <a:pPr algn="ctr"/>
-                      <a:r>
-                        <a:rPr sz="1100">
-                          <a:solidFill>
-                            <a:srgbClr val="101010"/>
-                          </a:solidFill>
-                          <a:latin typeface="Calibri"/>
-                        </a:rPr>
                         <a:t>100% bonus reversed if policy cancels/rewrites within 90 days</a:t>
                       </a:r>
                     </a:p>
                   </a:txBody>
                   <a:tcPr>
                     <a:solidFill>
-                      <a:srgbClr val="F2F2F2"/>
-                    </a:solidFill>
-                  </a:tcPr>
-                </a:tc>
-              </a:tr>
-              <a:tr h="274320">
-                <a:tc>
-                  <a:txBody>
-                    <a:bodyPr lIns="45720" rIns="45720" tIns="18288" bIns="18288" wrap="square" anchor="ctr"/>
-                    <a:lstStyle/>
-                    <a:p>
-                      <a:pPr algn="ctr"/>
-                      <a:r>
-                        <a:rPr sz="1100">
-                          <a:solidFill>
-                            <a:srgbClr val="101010"/>
-                          </a:solidFill>
-                          <a:latin typeface="Calibri"/>
-                        </a:rPr>
-                        <a:t>Excel tracker</a:t>
-                      </a:r>
-                    </a:p>
-                  </a:txBody>
-                  <a:tcPr>
-                    <a:solidFill>
-                      <a:srgbClr val="FFFFFF"/>
-                    </a:solidFill>
-                  </a:tcPr>
-                </a:tc>
-                <a:tc>
-                  <a:txBody>
-                    <a:bodyPr lIns="45720" rIns="45720" tIns="18288" bIns="18288" wrap="square" anchor="ctr"/>
-                    <a:lstStyle/>
-                    <a:p>
-                      <a:pPr algn="ctr"/>
-                      <a:r>
-                        <a:rPr sz="1100">
-                          <a:solidFill>
-                            <a:srgbClr val="101010"/>
-                          </a:solidFill>
-                          <a:latin typeface="Calibri"/>
-                        </a:rPr>
-                        <a:t>Required for every policy</a:t>
-                      </a:r>
-                    </a:p>
-                  </a:txBody>
-                  <a:tcPr>
-                    <a:solidFill>
-                      <a:srgbClr val="FFFFFF"/>
-                    </a:solidFill>
-                  </a:tcPr>
-                </a:tc>
-                <a:tc>
-                  <a:txBody>
-                    <a:bodyPr lIns="45720" rIns="45720" tIns="18288" bIns="18288" wrap="square" anchor="ctr"/>
-                    <a:lstStyle/>
-                    <a:p>
-                      <a:pPr algn="ctr"/>
-                      <a:r>
-                        <a:rPr sz="1100">
-                          <a:solidFill>
-                            <a:srgbClr val="101010"/>
-                          </a:solidFill>
-                          <a:latin typeface="Calibri"/>
-                        </a:rPr>
-                        <a:t>Agent enters policy info + down + premium. No entry = no bonus.</a:t>
-                      </a:r>
-                    </a:p>
-                  </a:txBody>
-                  <a:tcPr>
-                    <a:solidFill>
-                      <a:srgbClr val="FFFFFF"/>
-                    </a:solidFill>
-                  </a:tcPr>
-                </a:tc>
-              </a:tr>
-              <a:tr h="274320">
-                <a:tc>
-                  <a:txBody>
-                    <a:bodyPr lIns="45720" rIns="45720" tIns="18288" bIns="18288" wrap="square" anchor="ctr"/>
-                    <a:lstStyle/>
-                    <a:p>
-                      <a:pPr algn="ctr"/>
-                      <a:r>
-                        <a:rPr sz="1100">
-                          <a:solidFill>
-                            <a:srgbClr val="101010"/>
-                          </a:solidFill>
-                          <a:latin typeface="Calibri"/>
-                        </a:rPr>
-                        <a:t>Renewal book</a:t>
-                      </a:r>
-                    </a:p>
-                  </a:txBody>
-                  <a:tcPr>
-                    <a:solidFill>
-                      <a:srgbClr val="F2F2F2"/>
-                    </a:solidFill>
-                  </a:tcPr>
-                </a:tc>
-                <a:tc>
-                  <a:txBody>
-                    <a:bodyPr lIns="45720" rIns="45720" tIns="18288" bIns="18288" wrap="square" anchor="ctr"/>
-                    <a:lstStyle/>
-                    <a:p>
-                      <a:pPr algn="ctr"/>
-                      <a:r>
-                        <a:rPr sz="1100">
-                          <a:solidFill>
-                            <a:srgbClr val="101010"/>
-                          </a:solidFill>
-                          <a:latin typeface="Calibri"/>
-                        </a:rPr>
-                        <a:t>Assigned per agent</a:t>
-                      </a:r>
-                    </a:p>
-                  </a:txBody>
-                  <a:tcPr>
-                    <a:solidFill>
-                      <a:srgbClr val="F2F2F2"/>
-                    </a:solidFill>
-                  </a:tcPr>
-                </a:tc>
-                <a:tc>
-                  <a:txBody>
-                    <a:bodyPr lIns="45720" rIns="45720" tIns="18288" bIns="18288" wrap="square" anchor="ctr"/>
-                    <a:lstStyle/>
-                    <a:p>
-                      <a:pPr algn="ctr"/>
-                      <a:r>
-                        <a:rPr sz="1100">
-                          <a:solidFill>
-                            <a:srgbClr val="101010"/>
-                          </a:solidFill>
-                          <a:latin typeface="Calibri"/>
-                        </a:rPr>
-                        <a:t>Newer agents inherit a renewal book from former employees</a:t>
-                      </a:r>
-                    </a:p>
-                  </a:txBody>
-                  <a:tcPr>
-                    <a:solidFill>
-                      <a:srgbClr val="F2F2F2"/>
+                      <a:srgbClr val="FFFFFF"/>
                     </a:solidFill>
                   </a:tcPr>
                 </a:tc>
@@ -46158,7 +44975,7 @@
                 </a:solidFill>
                 <a:latin typeface="Calibri"/>
               </a:rPr>
-              <a:t>6 / 22</a:t>
+              <a:t>6 / 21</a:t>
             </a:r>
           </a:p>
         </p:txBody>
@@ -46794,7 +45611,7 @@
                 </a:solidFill>
                 <a:latin typeface="Calibri"/>
               </a:rPr>
-              <a:t>• At 50% collected (kicker target): ~$1,955 retained (59% of salary).</a:t>
+              <a:t>• At 50% collected (typical push target): ~$1,955 retained (59% of salary).</a:t>
             </a:r>
           </a:p>
           <a:p>
@@ -46840,984 +45657,6 @@
 </file>
 
 <file path=ppt/slides/slide7.xml><?xml version="1.0" encoding="utf-8"?>
-<p:sld xmlns:a="http://schemas.openxmlformats.org/drawingml/2006/main" xmlns:p="http://schemas.openxmlformats.org/presentationml/2006/main" xmlns:r="http://schemas.openxmlformats.org/officeDocument/2006/relationships">
-  <p:cSld>
-    <p:spTree>
-      <p:nvGrpSpPr>
-        <p:cNvPr id="1" name=""/>
-        <p:cNvGrpSpPr/>
-        <p:nvPr/>
-      </p:nvGrpSpPr>
-      <p:grpSpPr/>
-      <p:sp>
-        <p:nvSpPr>
-          <p:cNvPr id="2" name="Rectangle 1"/>
-          <p:cNvSpPr/>
-          <p:nvPr/>
-        </p:nvSpPr>
-        <p:spPr>
-          <a:xfrm>
-            <a:off x="0" y="0"/>
-            <a:ext cx="12188952" cy="868680"/>
-          </a:xfrm>
-          <a:prstGeom prst="rect">
-            <a:avLst/>
-          </a:prstGeom>
-          <a:solidFill>
-            <a:srgbClr val="1F4E78"/>
-          </a:solidFill>
-          <a:ln>
-            <a:noFill/>
-          </a:ln>
-          <a:effectLst/>
-        </p:spPr>
-        <p:style>
-          <a:lnRef idx="1">
-            <a:schemeClr val="accent1"/>
-          </a:lnRef>
-          <a:fillRef idx="3">
-            <a:schemeClr val="accent1"/>
-          </a:fillRef>
-          <a:effectRef idx="2">
-            <a:schemeClr val="accent1"/>
-          </a:effectRef>
-          <a:fontRef idx="minor">
-            <a:schemeClr val="lt1"/>
-          </a:fontRef>
-        </p:style>
-        <p:txBody>
-          <a:bodyPr rtlCol="0" anchor="ctr"/>
-          <a:lstStyle/>
-          <a:p>
-            <a:pPr algn="ctr"/>
-          </a:p>
-        </p:txBody>
-      </p:sp>
-      <p:sp>
-        <p:nvSpPr>
-          <p:cNvPr id="3" name="TextBox 2"/>
-          <p:cNvSpPr txBox="1"/>
-          <p:nvPr/>
-        </p:nvSpPr>
-        <p:spPr>
-          <a:xfrm>
-            <a:off x="365760" y="109728"/>
-            <a:ext cx="11430000" cy="457200"/>
-          </a:xfrm>
-          <a:prstGeom prst="rect">
-            <a:avLst/>
-          </a:prstGeom>
-          <a:noFill/>
-          <a:ln>
-            <a:noFill/>
-          </a:ln>
-        </p:spPr>
-        <p:txBody>
-          <a:bodyPr wrap="square" lIns="73152" rIns="73152" tIns="36576" bIns="36576" anchor="ctr">
-            <a:spAutoFit/>
-          </a:bodyPr>
-          <a:lstStyle/>
-          <a:p>
-            <a:pPr algn="l"/>
-            <a:r>
-              <a:rPr sz="2400" b="1" i="0">
-                <a:solidFill>
-                  <a:srgbClr val="FFFFFF"/>
-                </a:solidFill>
-                <a:latin typeface="Calibri"/>
-              </a:rPr>
-              <a:t>Collected % Kicker</a:t>
-            </a:r>
-          </a:p>
-        </p:txBody>
-      </p:sp>
-      <p:sp>
-        <p:nvSpPr>
-          <p:cNvPr id="4" name="TextBox 3"/>
-          <p:cNvSpPr txBox="1"/>
-          <p:nvPr/>
-        </p:nvSpPr>
-        <p:spPr>
-          <a:xfrm>
-            <a:off x="365760" y="530352"/>
-            <a:ext cx="11430000" cy="320040"/>
-          </a:xfrm>
-          <a:prstGeom prst="rect">
-            <a:avLst/>
-          </a:prstGeom>
-          <a:noFill/>
-          <a:ln>
-            <a:noFill/>
-          </a:ln>
-        </p:spPr>
-        <p:txBody>
-          <a:bodyPr wrap="square" lIns="73152" rIns="73152" tIns="36576" bIns="36576" anchor="ctr">
-            <a:spAutoFit/>
-          </a:bodyPr>
-          <a:lstStyle/>
-          <a:p>
-            <a:pPr algn="l"/>
-            <a:r>
-              <a:rPr sz="1200" b="0" i="1">
-                <a:solidFill>
-                  <a:srgbClr val="BDD7EE"/>
-                </a:solidFill>
-                <a:latin typeface="Calibri"/>
-              </a:rPr>
-              <a:t>Bigger down payments = less chargeback = bigger bonus.</a:t>
-            </a:r>
-          </a:p>
-        </p:txBody>
-      </p:sp>
-      <p:sp>
-        <p:nvSpPr>
-          <p:cNvPr id="5" name="Rectangle 4"/>
-          <p:cNvSpPr/>
-          <p:nvPr/>
-        </p:nvSpPr>
-        <p:spPr>
-          <a:xfrm>
-            <a:off x="0" y="6647688"/>
-            <a:ext cx="12188952" cy="210312"/>
-          </a:xfrm>
-          <a:prstGeom prst="rect">
-            <a:avLst/>
-          </a:prstGeom>
-          <a:solidFill>
-            <a:srgbClr val="F2F2F2"/>
-          </a:solidFill>
-          <a:ln>
-            <a:noFill/>
-          </a:ln>
-          <a:effectLst/>
-        </p:spPr>
-        <p:style>
-          <a:lnRef idx="1">
-            <a:schemeClr val="accent1"/>
-          </a:lnRef>
-          <a:fillRef idx="3">
-            <a:schemeClr val="accent1"/>
-          </a:fillRef>
-          <a:effectRef idx="2">
-            <a:schemeClr val="accent1"/>
-          </a:effectRef>
-          <a:fontRef idx="minor">
-            <a:schemeClr val="lt1"/>
-          </a:fontRef>
-        </p:style>
-        <p:txBody>
-          <a:bodyPr rtlCol="0" anchor="ctr"/>
-          <a:lstStyle/>
-          <a:p>
-            <a:pPr algn="ctr"/>
-          </a:p>
-        </p:txBody>
-      </p:sp>
-      <p:sp>
-        <p:nvSpPr>
-          <p:cNvPr id="6" name="TextBox 5"/>
-          <p:cNvSpPr txBox="1"/>
-          <p:nvPr/>
-        </p:nvSpPr>
-        <p:spPr>
-          <a:xfrm>
-            <a:off x="365760" y="6647688"/>
-            <a:ext cx="7315200" cy="210312"/>
-          </a:xfrm>
-          <a:prstGeom prst="rect">
-            <a:avLst/>
-          </a:prstGeom>
-          <a:noFill/>
-          <a:ln>
-            <a:noFill/>
-          </a:ln>
-        </p:spPr>
-        <p:txBody>
-          <a:bodyPr wrap="square" lIns="73152" rIns="73152" tIns="36576" bIns="36576" anchor="ctr">
-            <a:spAutoFit/>
-          </a:bodyPr>
-          <a:lstStyle/>
-          <a:p>
-            <a:pPr algn="l"/>
-            <a:r>
-              <a:rPr sz="1000" b="0" i="0">
-                <a:solidFill>
-                  <a:srgbClr val="404040"/>
-                </a:solidFill>
-                <a:latin typeface="Calibri"/>
-              </a:rPr>
-              <a:t>Fiesta Bonus Plan - Ownership Decision Deck</a:t>
-            </a:r>
-          </a:p>
-        </p:txBody>
-      </p:sp>
-      <p:sp>
-        <p:nvSpPr>
-          <p:cNvPr id="7" name="TextBox 6"/>
-          <p:cNvSpPr txBox="1"/>
-          <p:nvPr/>
-        </p:nvSpPr>
-        <p:spPr>
-          <a:xfrm>
-            <a:off x="11338560" y="6647688"/>
-            <a:ext cx="731520" cy="210312"/>
-          </a:xfrm>
-          <a:prstGeom prst="rect">
-            <a:avLst/>
-          </a:prstGeom>
-          <a:noFill/>
-          <a:ln>
-            <a:noFill/>
-          </a:ln>
-        </p:spPr>
-        <p:txBody>
-          <a:bodyPr wrap="square" lIns="73152" rIns="73152" tIns="36576" bIns="36576" anchor="ctr">
-            <a:spAutoFit/>
-          </a:bodyPr>
-          <a:lstStyle/>
-          <a:p>
-            <a:pPr algn="r"/>
-            <a:r>
-              <a:rPr sz="1000" b="0" i="0">
-                <a:solidFill>
-                  <a:srgbClr val="404040"/>
-                </a:solidFill>
-                <a:latin typeface="Calibri"/>
-              </a:rPr>
-              <a:t>7 / 22</a:t>
-            </a:r>
-          </a:p>
-        </p:txBody>
-      </p:sp>
-      <p:graphicFrame>
-        <p:nvGraphicFramePr>
-          <p:cNvPr id="8" name="Table 7"/>
-          <p:cNvGraphicFramePr>
-            <a:graphicFrameLocks noGrp="1"/>
-          </p:cNvGraphicFramePr>
-          <p:nvPr/>
-        </p:nvGraphicFramePr>
-        <p:xfrm>
-          <a:off x="457200" y="1188720"/>
-          <a:ext cx="11247120" cy="2194560"/>
-        </p:xfrm>
-        <a:graphic>
-          <a:graphicData uri="http://schemas.openxmlformats.org/drawingml/2006/table">
-            <a:tbl>
-              <a:tblPr firstRow="1" bandRow="1">
-                <a:tableStyleId>{5C22544A-7EE6-4342-B048-85BDC9FD1C3A}</a:tableStyleId>
-              </a:tblPr>
-              <a:tblGrid>
-                <a:gridCol w="1828800"/>
-                <a:gridCol w="2286000"/>
-                <a:gridCol w="4846320"/>
-                <a:gridCol w="2286000"/>
-              </a:tblGrid>
-              <a:tr h="365760">
-                <a:tc>
-                  <a:txBody>
-                    <a:bodyPr lIns="45720" rIns="45720" tIns="18288" bIns="18288" wrap="square" anchor="ctr"/>
-                    <a:lstStyle/>
-                    <a:p>
-                      <a:pPr algn="ctr"/>
-                      <a:r>
-                        <a:rPr sz="1300" b="1">
-                          <a:solidFill>
-                            <a:srgbClr val="FFFFFF"/>
-                          </a:solidFill>
-                          <a:latin typeface="Calibri"/>
-                        </a:rPr>
-                        <a:t>Collected %</a:t>
-                      </a:r>
-                    </a:p>
-                  </a:txBody>
-                  <a:tcPr>
-                    <a:solidFill>
-                      <a:srgbClr val="2E75B6"/>
-                    </a:solidFill>
-                  </a:tcPr>
-                </a:tc>
-                <a:tc>
-                  <a:txBody>
-                    <a:bodyPr lIns="45720" rIns="45720" tIns="18288" bIns="18288" wrap="square" anchor="ctr"/>
-                    <a:lstStyle/>
-                    <a:p>
-                      <a:pPr algn="ctr"/>
-                      <a:r>
-                        <a:rPr sz="1300" b="1">
-                          <a:solidFill>
-                            <a:srgbClr val="FFFFFF"/>
-                          </a:solidFill>
-                          <a:latin typeface="Calibri"/>
-                        </a:rPr>
-                        <a:t>Per-policy kicker</a:t>
-                      </a:r>
-                    </a:p>
-                  </a:txBody>
-                  <a:tcPr>
-                    <a:solidFill>
-                      <a:srgbClr val="2E75B6"/>
-                    </a:solidFill>
-                  </a:tcPr>
-                </a:tc>
-                <a:tc>
-                  <a:txBody>
-                    <a:bodyPr lIns="45720" rIns="45720" tIns="18288" bIns="18288" wrap="square" anchor="ctr"/>
-                    <a:lstStyle/>
-                    <a:p>
-                      <a:pPr algn="ctr"/>
-                      <a:r>
-                        <a:rPr sz="1300" b="1">
-                          <a:solidFill>
-                            <a:srgbClr val="FFFFFF"/>
-                          </a:solidFill>
-                          <a:latin typeface="Calibri"/>
-                        </a:rPr>
-                        <a:t>Plain English</a:t>
-                      </a:r>
-                    </a:p>
-                  </a:txBody>
-                  <a:tcPr>
-                    <a:solidFill>
-                      <a:srgbClr val="2E75B6"/>
-                    </a:solidFill>
-                  </a:tcPr>
-                </a:tc>
-                <a:tc>
-                  <a:txBody>
-                    <a:bodyPr lIns="45720" rIns="45720" tIns="18288" bIns="18288" wrap="square" anchor="ctr"/>
-                    <a:lstStyle/>
-                    <a:p>
-                      <a:pPr algn="ctr"/>
-                      <a:r>
-                        <a:rPr sz="1300" b="1">
-                          <a:solidFill>
-                            <a:srgbClr val="FFFFFF"/>
-                          </a:solidFill>
-                          <a:latin typeface="Calibri"/>
-                        </a:rPr>
-                        <a:t>$7 NB base -&gt; Pays</a:t>
-                      </a:r>
-                    </a:p>
-                  </a:txBody>
-                  <a:tcPr>
-                    <a:solidFill>
-                      <a:srgbClr val="2E75B6"/>
-                    </a:solidFill>
-                  </a:tcPr>
-                </a:tc>
-              </a:tr>
-              <a:tr h="365760">
-                <a:tc>
-                  <a:txBody>
-                    <a:bodyPr lIns="45720" rIns="45720" tIns="18288" bIns="18288" wrap="square" anchor="ctr"/>
-                    <a:lstStyle/>
-                    <a:p>
-                      <a:pPr algn="ctr"/>
-                      <a:r>
-                        <a:rPr sz="1300">
-                          <a:solidFill>
-                            <a:srgbClr val="101010"/>
-                          </a:solidFill>
-                          <a:latin typeface="Calibri"/>
-                        </a:rPr>
-                        <a:t>Below 15%</a:t>
-                      </a:r>
-                    </a:p>
-                  </a:txBody>
-                  <a:tcPr>
-                    <a:solidFill>
-                      <a:srgbClr val="FFFFFF"/>
-                    </a:solidFill>
-                  </a:tcPr>
-                </a:tc>
-                <a:tc>
-                  <a:txBody>
-                    <a:bodyPr lIns="45720" rIns="45720" tIns="18288" bIns="18288" wrap="square" anchor="ctr"/>
-                    <a:lstStyle/>
-                    <a:p>
-                      <a:pPr algn="ctr"/>
-                      <a:r>
-                        <a:rPr sz="1300">
-                          <a:solidFill>
-                            <a:srgbClr val="101010"/>
-                          </a:solidFill>
-                          <a:latin typeface="Calibri"/>
-                        </a:rPr>
-                        <a:t>$0 (none)</a:t>
-                      </a:r>
-                    </a:p>
-                  </a:txBody>
-                  <a:tcPr>
-                    <a:solidFill>
-                      <a:srgbClr val="FFFFFF"/>
-                    </a:solidFill>
-                  </a:tcPr>
-                </a:tc>
-                <a:tc>
-                  <a:txBody>
-                    <a:bodyPr lIns="45720" rIns="45720" tIns="18288" bIns="18288" wrap="square" anchor="ctr"/>
-                    <a:lstStyle/>
-                    <a:p>
-                      <a:pPr algn="ctr"/>
-                      <a:r>
-                        <a:rPr sz="1300">
-                          <a:solidFill>
-                            <a:srgbClr val="101010"/>
-                          </a:solidFill>
-                          <a:latin typeface="Calibri"/>
-                        </a:rPr>
-                        <a:t>Premium barely collected. No kicker.</a:t>
-                      </a:r>
-                    </a:p>
-                  </a:txBody>
-                  <a:tcPr>
-                    <a:solidFill>
-                      <a:srgbClr val="FFFFFF"/>
-                    </a:solidFill>
-                  </a:tcPr>
-                </a:tc>
-                <a:tc>
-                  <a:txBody>
-                    <a:bodyPr lIns="45720" rIns="45720" tIns="18288" bIns="18288" wrap="square" anchor="ctr"/>
-                    <a:lstStyle/>
-                    <a:p>
-                      <a:pPr algn="ctr"/>
-                      <a:r>
-                        <a:rPr sz="1300">
-                          <a:solidFill>
-                            <a:srgbClr val="101010"/>
-                          </a:solidFill>
-                          <a:latin typeface="Calibri"/>
-                        </a:rPr>
-                        <a:t>$7</a:t>
-                      </a:r>
-                    </a:p>
-                  </a:txBody>
-                  <a:tcPr>
-                    <a:solidFill>
-                      <a:srgbClr val="FFFFFF"/>
-                    </a:solidFill>
-                  </a:tcPr>
-                </a:tc>
-              </a:tr>
-              <a:tr h="365760">
-                <a:tc>
-                  <a:txBody>
-                    <a:bodyPr lIns="45720" rIns="45720" tIns="18288" bIns="18288" wrap="square" anchor="ctr"/>
-                    <a:lstStyle/>
-                    <a:p>
-                      <a:pPr algn="ctr"/>
-                      <a:r>
-                        <a:rPr sz="1300">
-                          <a:solidFill>
-                            <a:srgbClr val="101010"/>
-                          </a:solidFill>
-                          <a:latin typeface="Calibri"/>
-                        </a:rPr>
-                        <a:t>15% - 19%</a:t>
-                      </a:r>
-                    </a:p>
-                  </a:txBody>
-                  <a:tcPr>
-                    <a:solidFill>
-                      <a:srgbClr val="F2F2F2"/>
-                    </a:solidFill>
-                  </a:tcPr>
-                </a:tc>
-                <a:tc>
-                  <a:txBody>
-                    <a:bodyPr lIns="45720" rIns="45720" tIns="18288" bIns="18288" wrap="square" anchor="ctr"/>
-                    <a:lstStyle/>
-                    <a:p>
-                      <a:pPr algn="ctr"/>
-                      <a:r>
-                        <a:rPr sz="1300">
-                          <a:solidFill>
-                            <a:srgbClr val="101010"/>
-                          </a:solidFill>
-                          <a:latin typeface="Calibri"/>
-                        </a:rPr>
-                        <a:t>+$1</a:t>
-                      </a:r>
-                    </a:p>
-                  </a:txBody>
-                  <a:tcPr>
-                    <a:solidFill>
-                      <a:srgbClr val="F2F2F2"/>
-                    </a:solidFill>
-                  </a:tcPr>
-                </a:tc>
-                <a:tc>
-                  <a:txBody>
-                    <a:bodyPr lIns="45720" rIns="45720" tIns="18288" bIns="18288" wrap="square" anchor="ctr"/>
-                    <a:lstStyle/>
-                    <a:p>
-                      <a:pPr algn="ctr"/>
-                      <a:r>
-                        <a:rPr sz="1300">
-                          <a:solidFill>
-                            <a:srgbClr val="101010"/>
-                          </a:solidFill>
-                          <a:latin typeface="Calibri"/>
-                        </a:rPr>
-                        <a:t>Minimum down. Small bump.</a:t>
-                      </a:r>
-                    </a:p>
-                  </a:txBody>
-                  <a:tcPr>
-                    <a:solidFill>
-                      <a:srgbClr val="F2F2F2"/>
-                    </a:solidFill>
-                  </a:tcPr>
-                </a:tc>
-                <a:tc>
-                  <a:txBody>
-                    <a:bodyPr lIns="45720" rIns="45720" tIns="18288" bIns="18288" wrap="square" anchor="ctr"/>
-                    <a:lstStyle/>
-                    <a:p>
-                      <a:pPr algn="ctr"/>
-                      <a:r>
-                        <a:rPr sz="1300">
-                          <a:solidFill>
-                            <a:srgbClr val="101010"/>
-                          </a:solidFill>
-                          <a:latin typeface="Calibri"/>
-                        </a:rPr>
-                        <a:t>$7 + $1 = $8</a:t>
-                      </a:r>
-                    </a:p>
-                  </a:txBody>
-                  <a:tcPr>
-                    <a:solidFill>
-                      <a:srgbClr val="F2F2F2"/>
-                    </a:solidFill>
-                  </a:tcPr>
-                </a:tc>
-              </a:tr>
-              <a:tr h="365760">
-                <a:tc>
-                  <a:txBody>
-                    <a:bodyPr lIns="45720" rIns="45720" tIns="18288" bIns="18288" wrap="square" anchor="ctr"/>
-                    <a:lstStyle/>
-                    <a:p>
-                      <a:pPr algn="ctr"/>
-                      <a:r>
-                        <a:rPr sz="1300">
-                          <a:solidFill>
-                            <a:srgbClr val="101010"/>
-                          </a:solidFill>
-                          <a:latin typeface="Calibri"/>
-                        </a:rPr>
-                        <a:t>20% - 24%</a:t>
-                      </a:r>
-                    </a:p>
-                  </a:txBody>
-                  <a:tcPr>
-                    <a:solidFill>
-                      <a:srgbClr val="FFFFFF"/>
-                    </a:solidFill>
-                  </a:tcPr>
-                </a:tc>
-                <a:tc>
-                  <a:txBody>
-                    <a:bodyPr lIns="45720" rIns="45720" tIns="18288" bIns="18288" wrap="square" anchor="ctr"/>
-                    <a:lstStyle/>
-                    <a:p>
-                      <a:pPr algn="ctr"/>
-                      <a:r>
-                        <a:rPr sz="1300">
-                          <a:solidFill>
-                            <a:srgbClr val="101010"/>
-                          </a:solidFill>
-                          <a:latin typeface="Calibri"/>
-                        </a:rPr>
-                        <a:t>+$2</a:t>
-                      </a:r>
-                    </a:p>
-                  </a:txBody>
-                  <a:tcPr>
-                    <a:solidFill>
-                      <a:srgbClr val="FFFFFF"/>
-                    </a:solidFill>
-                  </a:tcPr>
-                </a:tc>
-                <a:tc>
-                  <a:txBody>
-                    <a:bodyPr lIns="45720" rIns="45720" tIns="18288" bIns="18288" wrap="square" anchor="ctr"/>
-                    <a:lstStyle/>
-                    <a:p>
-                      <a:pPr algn="ctr"/>
-                      <a:r>
-                        <a:rPr sz="1300">
-                          <a:solidFill>
-                            <a:srgbClr val="101010"/>
-                          </a:solidFill>
-                          <a:latin typeface="Calibri"/>
-                        </a:rPr>
-                        <a:t>Standard down.</a:t>
-                      </a:r>
-                    </a:p>
-                  </a:txBody>
-                  <a:tcPr>
-                    <a:solidFill>
-                      <a:srgbClr val="FFFFFF"/>
-                    </a:solidFill>
-                  </a:tcPr>
-                </a:tc>
-                <a:tc>
-                  <a:txBody>
-                    <a:bodyPr lIns="45720" rIns="45720" tIns="18288" bIns="18288" wrap="square" anchor="ctr"/>
-                    <a:lstStyle/>
-                    <a:p>
-                      <a:pPr algn="ctr"/>
-                      <a:r>
-                        <a:rPr sz="1300">
-                          <a:solidFill>
-                            <a:srgbClr val="101010"/>
-                          </a:solidFill>
-                          <a:latin typeface="Calibri"/>
-                        </a:rPr>
-                        <a:t>$7 + $2 = $9</a:t>
-                      </a:r>
-                    </a:p>
-                  </a:txBody>
-                  <a:tcPr>
-                    <a:solidFill>
-                      <a:srgbClr val="FFFFFF"/>
-                    </a:solidFill>
-                  </a:tcPr>
-                </a:tc>
-              </a:tr>
-              <a:tr h="365760">
-                <a:tc>
-                  <a:txBody>
-                    <a:bodyPr lIns="45720" rIns="45720" tIns="18288" bIns="18288" wrap="square" anchor="ctr"/>
-                    <a:lstStyle/>
-                    <a:p>
-                      <a:pPr algn="ctr"/>
-                      <a:r>
-                        <a:rPr sz="1300">
-                          <a:solidFill>
-                            <a:srgbClr val="101010"/>
-                          </a:solidFill>
-                          <a:latin typeface="Calibri"/>
-                        </a:rPr>
-                        <a:t>25% - 99%</a:t>
-                      </a:r>
-                    </a:p>
-                  </a:txBody>
-                  <a:tcPr>
-                    <a:solidFill>
-                      <a:srgbClr val="F2F2F2"/>
-                    </a:solidFill>
-                  </a:tcPr>
-                </a:tc>
-                <a:tc>
-                  <a:txBody>
-                    <a:bodyPr lIns="45720" rIns="45720" tIns="18288" bIns="18288" wrap="square" anchor="ctr"/>
-                    <a:lstStyle/>
-                    <a:p>
-                      <a:pPr algn="ctr"/>
-                      <a:r>
-                        <a:rPr sz="1300">
-                          <a:solidFill>
-                            <a:srgbClr val="101010"/>
-                          </a:solidFill>
-                          <a:latin typeface="Calibri"/>
-                        </a:rPr>
-                        <a:t>+$5</a:t>
-                      </a:r>
-                    </a:p>
-                  </a:txBody>
-                  <a:tcPr>
-                    <a:solidFill>
-                      <a:srgbClr val="F2F2F2"/>
-                    </a:solidFill>
-                  </a:tcPr>
-                </a:tc>
-                <a:tc>
-                  <a:txBody>
-                    <a:bodyPr lIns="45720" rIns="45720" tIns="18288" bIns="18288" wrap="square" anchor="ctr"/>
-                    <a:lstStyle/>
-                    <a:p>
-                      <a:pPr algn="ctr"/>
-                      <a:r>
-                        <a:rPr sz="1300">
-                          <a:solidFill>
-                            <a:srgbClr val="101010"/>
-                          </a:solidFill>
-                          <a:latin typeface="Calibri"/>
-                        </a:rPr>
-                        <a:t>High collection. Big bump.</a:t>
-                      </a:r>
-                    </a:p>
-                  </a:txBody>
-                  <a:tcPr>
-                    <a:solidFill>
-                      <a:srgbClr val="F2F2F2"/>
-                    </a:solidFill>
-                  </a:tcPr>
-                </a:tc>
-                <a:tc>
-                  <a:txBody>
-                    <a:bodyPr lIns="45720" rIns="45720" tIns="18288" bIns="18288" wrap="square" anchor="ctr"/>
-                    <a:lstStyle/>
-                    <a:p>
-                      <a:pPr algn="ctr"/>
-                      <a:r>
-                        <a:rPr sz="1300">
-                          <a:solidFill>
-                            <a:srgbClr val="101010"/>
-                          </a:solidFill>
-                          <a:latin typeface="Calibri"/>
-                        </a:rPr>
-                        <a:t>$7 + $5 = $12</a:t>
-                      </a:r>
-                    </a:p>
-                  </a:txBody>
-                  <a:tcPr>
-                    <a:solidFill>
-                      <a:srgbClr val="F2F2F2"/>
-                    </a:solidFill>
-                  </a:tcPr>
-                </a:tc>
-              </a:tr>
-              <a:tr h="365760">
-                <a:tc>
-                  <a:txBody>
-                    <a:bodyPr lIns="45720" rIns="45720" tIns="18288" bIns="18288" wrap="square" anchor="ctr"/>
-                    <a:lstStyle/>
-                    <a:p>
-                      <a:pPr algn="ctr"/>
-                      <a:r>
-                        <a:rPr sz="1300">
-                          <a:solidFill>
-                            <a:srgbClr val="101010"/>
-                          </a:solidFill>
-                          <a:latin typeface="Calibri"/>
-                        </a:rPr>
-                        <a:t>100% PIF</a:t>
-                      </a:r>
-                    </a:p>
-                  </a:txBody>
-                  <a:tcPr>
-                    <a:solidFill>
-                      <a:srgbClr val="FFFFFF"/>
-                    </a:solidFill>
-                  </a:tcPr>
-                </a:tc>
-                <a:tc>
-                  <a:txBody>
-                    <a:bodyPr lIns="45720" rIns="45720" tIns="18288" bIns="18288" wrap="square" anchor="ctr"/>
-                    <a:lstStyle/>
-                    <a:p>
-                      <a:pPr algn="ctr"/>
-                      <a:r>
-                        <a:rPr sz="1300">
-                          <a:solidFill>
-                            <a:srgbClr val="101010"/>
-                          </a:solidFill>
-                          <a:latin typeface="Calibri"/>
-                        </a:rPr>
-                        <a:t>+$8</a:t>
-                      </a:r>
-                    </a:p>
-                  </a:txBody>
-                  <a:tcPr>
-                    <a:solidFill>
-                      <a:srgbClr val="FFFFFF"/>
-                    </a:solidFill>
-                  </a:tcPr>
-                </a:tc>
-                <a:tc>
-                  <a:txBody>
-                    <a:bodyPr lIns="45720" rIns="45720" tIns="18288" bIns="18288" wrap="square" anchor="ctr"/>
-                    <a:lstStyle/>
-                    <a:p>
-                      <a:pPr algn="ctr"/>
-                      <a:r>
-                        <a:rPr sz="1300">
-                          <a:solidFill>
-                            <a:srgbClr val="101010"/>
-                          </a:solidFill>
-                          <a:latin typeface="Calibri"/>
-                        </a:rPr>
-                        <a:t>Paid in full. Top - zero chargeback risk.</a:t>
-                      </a:r>
-                    </a:p>
-                  </a:txBody>
-                  <a:tcPr>
-                    <a:solidFill>
-                      <a:srgbClr val="FFFFFF"/>
-                    </a:solidFill>
-                  </a:tcPr>
-                </a:tc>
-                <a:tc>
-                  <a:txBody>
-                    <a:bodyPr lIns="45720" rIns="45720" tIns="18288" bIns="18288" wrap="square" anchor="ctr"/>
-                    <a:lstStyle/>
-                    <a:p>
-                      <a:pPr algn="ctr"/>
-                      <a:r>
-                        <a:rPr sz="1300">
-                          <a:solidFill>
-                            <a:srgbClr val="101010"/>
-                          </a:solidFill>
-                          <a:latin typeface="Calibri"/>
-                        </a:rPr>
-                        <a:t>$7 + $8 = $15</a:t>
-                      </a:r>
-                    </a:p>
-                  </a:txBody>
-                  <a:tcPr>
-                    <a:solidFill>
-                      <a:srgbClr val="FFFFFF"/>
-                    </a:solidFill>
-                  </a:tcPr>
-                </a:tc>
-              </a:tr>
-            </a:tbl>
-          </a:graphicData>
-        </a:graphic>
-      </p:graphicFrame>
-      <p:sp>
-        <p:nvSpPr>
-          <p:cNvPr id="9" name="TextBox 8"/>
-          <p:cNvSpPr txBox="1"/>
-          <p:nvPr/>
-        </p:nvSpPr>
-        <p:spPr>
-          <a:xfrm>
-            <a:off x="457200" y="3931920"/>
-            <a:ext cx="11247120" cy="365760"/>
-          </a:xfrm>
-          <a:prstGeom prst="rect">
-            <a:avLst/>
-          </a:prstGeom>
-          <a:noFill/>
-          <a:ln>
-            <a:noFill/>
-          </a:ln>
-        </p:spPr>
-        <p:txBody>
-          <a:bodyPr wrap="square" lIns="73152" rIns="73152" tIns="36576" bIns="36576" anchor="t">
-            <a:spAutoFit/>
-          </a:bodyPr>
-          <a:lstStyle/>
-          <a:p>
-            <a:pPr algn="l"/>
-            <a:r>
-              <a:rPr sz="1800" b="1" i="0">
-                <a:solidFill>
-                  <a:srgbClr val="1F4E78"/>
-                </a:solidFill>
-                <a:latin typeface="Calibri"/>
-              </a:rPr>
-              <a:t>Why we incentivize collected % (not just written premium):</a:t>
-            </a:r>
-          </a:p>
-        </p:txBody>
-      </p:sp>
-      <p:sp>
-        <p:nvSpPr>
-          <p:cNvPr id="10" name="TextBox 9"/>
-          <p:cNvSpPr txBox="1"/>
-          <p:nvPr/>
-        </p:nvSpPr>
-        <p:spPr>
-          <a:xfrm>
-            <a:off x="640080" y="4389120"/>
-            <a:ext cx="10972800" cy="2103120"/>
-          </a:xfrm>
-          <a:prstGeom prst="rect">
-            <a:avLst/>
-          </a:prstGeom>
-          <a:noFill/>
-          <a:ln>
-            <a:noFill/>
-          </a:ln>
-        </p:spPr>
-        <p:txBody>
-          <a:bodyPr wrap="square" tIns="91440" bIns="91440">
-            <a:spAutoFit/>
-          </a:bodyPr>
-          <a:lstStyle/>
-          <a:p>
-            <a:pPr>
-              <a:lnSpc>
-                <a:spcPct val="120000"/>
-              </a:lnSpc>
-            </a:pPr>
-            <a:r>
-              <a:rPr sz="1400">
-                <a:solidFill>
-                  <a:srgbClr val="101010"/>
-                </a:solidFill>
-                <a:latin typeface="Calibri"/>
-              </a:rPr>
-              <a:t>• Down payment + PIF money is the ONLY money we are SURE we will keep. Everything else can be charged back.</a:t>
-            </a:r>
-          </a:p>
-          <a:p>
-            <a:pPr>
-              <a:lnSpc>
-                <a:spcPct val="120000"/>
-              </a:lnSpc>
-            </a:pPr>
-            <a:r>
-              <a:rPr sz="1400">
-                <a:solidFill>
-                  <a:srgbClr val="101010"/>
-                </a:solidFill>
-                <a:latin typeface="Calibri"/>
-              </a:rPr>
-              <a:t>• Bigger down -&gt; smaller monthly bills -&gt; customer is less likely to cancel -&gt; we keep more commission.</a:t>
-            </a:r>
-          </a:p>
-          <a:p>
-            <a:pPr>
-              <a:lnSpc>
-                <a:spcPct val="120000"/>
-              </a:lnSpc>
-            </a:pPr>
-            <a:r>
-              <a:rPr sz="1400">
-                <a:solidFill>
-                  <a:srgbClr val="101010"/>
-                </a:solidFill>
-                <a:latin typeface="Calibri"/>
-              </a:rPr>
-              <a:t>• PIF (paid in full) = no chargeback risk at all. PIF earns the biggest kicker AND a PIF dollar add-on.</a:t>
-            </a:r>
-          </a:p>
-          <a:p>
-            <a:pPr>
-              <a:lnSpc>
-                <a:spcPct val="120000"/>
-              </a:lnSpc>
-            </a:pPr>
-            <a:r>
-              <a:rPr sz="1400">
-                <a:solidFill>
-                  <a:srgbClr val="101010"/>
-                </a:solidFill>
-                <a:latin typeface="Calibri"/>
-              </a:rPr>
-              <a:t>• Some carriers pay commission as advance on written premium (chargeback if customer cancels). Some pay as-earned on collected. Either way - net commission ~= collected x rate. The kicker rewards retention through collection.</a:t>
-            </a:r>
-          </a:p>
-        </p:txBody>
-      </p:sp>
-    </p:spTree>
-  </p:cSld>
-  <p:clrMapOvr>
-    <a:masterClrMapping/>
-  </p:clrMapOvr>
-</p:sld>
-</file>
-
-<file path=ppt/slides/slide8.xml><?xml version="1.0" encoding="utf-8"?>
 <p:sld xmlns:a="http://schemas.openxmlformats.org/drawingml/2006/main" xmlns:p="http://schemas.openxmlformats.org/presentationml/2006/main" xmlns:r="http://schemas.openxmlformats.org/officeDocument/2006/relationships">
   <p:cSld>
     <p:spTree>
@@ -48062,7 +45901,7 @@
                 </a:solidFill>
                 <a:latin typeface="Calibri"/>
               </a:rPr>
-              <a:t>8 / 22</a:t>
+              <a:t>7 / 21</a:t>
             </a:r>
           </a:p>
         </p:txBody>
@@ -48727,7 +46566,7 @@
 </p:sld>
 </file>
 
-<file path=ppt/slides/slide9.xml><?xml version="1.0" encoding="utf-8"?>
+<file path=ppt/slides/slide8.xml><?xml version="1.0" encoding="utf-8"?>
 <p:sld xmlns:a="http://schemas.openxmlformats.org/drawingml/2006/main" xmlns:p="http://schemas.openxmlformats.org/presentationml/2006/main" xmlns:r="http://schemas.openxmlformats.org/officeDocument/2006/relationships">
   <p:cSld>
     <p:spTree>
@@ -48972,7 +46811,7 @@
                 </a:solidFill>
                 <a:latin typeface="Calibri"/>
               </a:rPr>
-              <a:t>9 / 22</a:t>
+              <a:t>8 / 21</a:t>
             </a:r>
           </a:p>
         </p:txBody>
@@ -49715,6 +47554,1080 @@
                 <a:latin typeface="Calibri"/>
               </a:rPr>
               <a:t>$782 of safe net means Abel's January contribution can support a bonus up to ~$313 before ownership wants a second look. Under the new plan, Abel's January target is $252 - about 32% of safe net, well below the 40% review threshold.</a:t>
+            </a:r>
+          </a:p>
+        </p:txBody>
+      </p:sp>
+    </p:spTree>
+  </p:cSld>
+  <p:clrMapOvr>
+    <a:masterClrMapping/>
+  </p:clrMapOvr>
+</p:sld>
+</file>
+
+<file path=ppt/slides/slide9.xml><?xml version="1.0" encoding="utf-8"?>
+<p:sld xmlns:a="http://schemas.openxmlformats.org/drawingml/2006/main" xmlns:p="http://schemas.openxmlformats.org/presentationml/2006/main" xmlns:r="http://schemas.openxmlformats.org/officeDocument/2006/relationships">
+  <p:cSld>
+    <p:spTree>
+      <p:nvGrpSpPr>
+        <p:cNvPr id="1" name=""/>
+        <p:cNvGrpSpPr/>
+        <p:nvPr/>
+      </p:nvGrpSpPr>
+      <p:grpSpPr/>
+      <p:sp>
+        <p:nvSpPr>
+          <p:cNvPr id="2" name="Rectangle 1"/>
+          <p:cNvSpPr/>
+          <p:nvPr/>
+        </p:nvSpPr>
+        <p:spPr>
+          <a:xfrm>
+            <a:off x="0" y="0"/>
+            <a:ext cx="12188952" cy="868680"/>
+          </a:xfrm>
+          <a:prstGeom prst="rect">
+            <a:avLst/>
+          </a:prstGeom>
+          <a:solidFill>
+            <a:srgbClr val="1F4E78"/>
+          </a:solidFill>
+          <a:ln>
+            <a:noFill/>
+          </a:ln>
+          <a:effectLst/>
+        </p:spPr>
+        <p:style>
+          <a:lnRef idx="1">
+            <a:schemeClr val="accent1"/>
+          </a:lnRef>
+          <a:fillRef idx="3">
+            <a:schemeClr val="accent1"/>
+          </a:fillRef>
+          <a:effectRef idx="2">
+            <a:schemeClr val="accent1"/>
+          </a:effectRef>
+          <a:fontRef idx="minor">
+            <a:schemeClr val="lt1"/>
+          </a:fontRef>
+        </p:style>
+        <p:txBody>
+          <a:bodyPr rtlCol="0" anchor="ctr"/>
+          <a:lstStyle/>
+          <a:p>
+            <a:pPr algn="ctr"/>
+          </a:p>
+        </p:txBody>
+      </p:sp>
+      <p:sp>
+        <p:nvSpPr>
+          <p:cNvPr id="3" name="TextBox 2"/>
+          <p:cNvSpPr txBox="1"/>
+          <p:nvPr/>
+        </p:nvSpPr>
+        <p:spPr>
+          <a:xfrm>
+            <a:off x="365760" y="109728"/>
+            <a:ext cx="11430000" cy="457200"/>
+          </a:xfrm>
+          <a:prstGeom prst="rect">
+            <a:avLst/>
+          </a:prstGeom>
+          <a:noFill/>
+          <a:ln>
+            <a:noFill/>
+          </a:ln>
+        </p:spPr>
+        <p:txBody>
+          <a:bodyPr wrap="square" lIns="73152" rIns="73152" tIns="36576" bIns="36576" anchor="ctr">
+            <a:spAutoFit/>
+          </a:bodyPr>
+          <a:lstStyle/>
+          <a:p>
+            <a:pPr algn="l"/>
+            <a:r>
+              <a:rPr sz="2400" b="1" i="0">
+                <a:solidFill>
+                  <a:srgbClr val="FFFFFF"/>
+                </a:solidFill>
+                <a:latin typeface="Calibri"/>
+              </a:rPr>
+              <a:t>Why does CURRENT bonus DROP when RWR becomes REN?</a:t>
+            </a:r>
+          </a:p>
+        </p:txBody>
+      </p:sp>
+      <p:sp>
+        <p:nvSpPr>
+          <p:cNvPr id="4" name="TextBox 3"/>
+          <p:cNvSpPr txBox="1"/>
+          <p:nvPr/>
+        </p:nvSpPr>
+        <p:spPr>
+          <a:xfrm>
+            <a:off x="365760" y="530352"/>
+            <a:ext cx="11430000" cy="320040"/>
+          </a:xfrm>
+          <a:prstGeom prst="rect">
+            <a:avLst/>
+          </a:prstGeom>
+          <a:noFill/>
+          <a:ln>
+            <a:noFill/>
+          </a:ln>
+        </p:spPr>
+        <p:txBody>
+          <a:bodyPr wrap="square" lIns="73152" rIns="73152" tIns="36576" bIns="36576" anchor="ctr">
+            <a:spAutoFit/>
+          </a:bodyPr>
+          <a:lstStyle/>
+          <a:p>
+            <a:pPr algn="l"/>
+            <a:r>
+              <a:rPr sz="1200" b="0" i="1">
+                <a:solidFill>
+                  <a:srgbClr val="BDD7EE"/>
+                </a:solidFill>
+                <a:latin typeface="Calibri"/>
+              </a:rPr>
+              <a:t>Renewals pay MORE than rewrites - but only under the new plan.</a:t>
+            </a:r>
+          </a:p>
+        </p:txBody>
+      </p:sp>
+      <p:sp>
+        <p:nvSpPr>
+          <p:cNvPr id="5" name="Rectangle 4"/>
+          <p:cNvSpPr/>
+          <p:nvPr/>
+        </p:nvSpPr>
+        <p:spPr>
+          <a:xfrm>
+            <a:off x="0" y="6647688"/>
+            <a:ext cx="12188952" cy="210312"/>
+          </a:xfrm>
+          <a:prstGeom prst="rect">
+            <a:avLst/>
+          </a:prstGeom>
+          <a:solidFill>
+            <a:srgbClr val="F2F2F2"/>
+          </a:solidFill>
+          <a:ln>
+            <a:noFill/>
+          </a:ln>
+          <a:effectLst/>
+        </p:spPr>
+        <p:style>
+          <a:lnRef idx="1">
+            <a:schemeClr val="accent1"/>
+          </a:lnRef>
+          <a:fillRef idx="3">
+            <a:schemeClr val="accent1"/>
+          </a:fillRef>
+          <a:effectRef idx="2">
+            <a:schemeClr val="accent1"/>
+          </a:effectRef>
+          <a:fontRef idx="minor">
+            <a:schemeClr val="lt1"/>
+          </a:fontRef>
+        </p:style>
+        <p:txBody>
+          <a:bodyPr rtlCol="0" anchor="ctr"/>
+          <a:lstStyle/>
+          <a:p>
+            <a:pPr algn="ctr"/>
+          </a:p>
+        </p:txBody>
+      </p:sp>
+      <p:sp>
+        <p:nvSpPr>
+          <p:cNvPr id="6" name="TextBox 5"/>
+          <p:cNvSpPr txBox="1"/>
+          <p:nvPr/>
+        </p:nvSpPr>
+        <p:spPr>
+          <a:xfrm>
+            <a:off x="365760" y="6647688"/>
+            <a:ext cx="7315200" cy="210312"/>
+          </a:xfrm>
+          <a:prstGeom prst="rect">
+            <a:avLst/>
+          </a:prstGeom>
+          <a:noFill/>
+          <a:ln>
+            <a:noFill/>
+          </a:ln>
+        </p:spPr>
+        <p:txBody>
+          <a:bodyPr wrap="square" lIns="73152" rIns="73152" tIns="36576" bIns="36576" anchor="ctr">
+            <a:spAutoFit/>
+          </a:bodyPr>
+          <a:lstStyle/>
+          <a:p>
+            <a:pPr algn="l"/>
+            <a:r>
+              <a:rPr sz="1000" b="0" i="0">
+                <a:solidFill>
+                  <a:srgbClr val="404040"/>
+                </a:solidFill>
+                <a:latin typeface="Calibri"/>
+              </a:rPr>
+              <a:t>Fiesta Bonus Plan - Ownership Decision Deck</a:t>
+            </a:r>
+          </a:p>
+        </p:txBody>
+      </p:sp>
+      <p:sp>
+        <p:nvSpPr>
+          <p:cNvPr id="7" name="TextBox 6"/>
+          <p:cNvSpPr txBox="1"/>
+          <p:nvPr/>
+        </p:nvSpPr>
+        <p:spPr>
+          <a:xfrm>
+            <a:off x="11338560" y="6647688"/>
+            <a:ext cx="731520" cy="210312"/>
+          </a:xfrm>
+          <a:prstGeom prst="rect">
+            <a:avLst/>
+          </a:prstGeom>
+          <a:noFill/>
+          <a:ln>
+            <a:noFill/>
+          </a:ln>
+        </p:spPr>
+        <p:txBody>
+          <a:bodyPr wrap="square" lIns="73152" rIns="73152" tIns="36576" bIns="36576" anchor="ctr">
+            <a:spAutoFit/>
+          </a:bodyPr>
+          <a:lstStyle/>
+          <a:p>
+            <a:pPr algn="r"/>
+            <a:r>
+              <a:rPr sz="1000" b="0" i="0">
+                <a:solidFill>
+                  <a:srgbClr val="404040"/>
+                </a:solidFill>
+                <a:latin typeface="Calibri"/>
+              </a:rPr>
+              <a:t>9 / 21</a:t>
+            </a:r>
+          </a:p>
+        </p:txBody>
+      </p:sp>
+      <p:sp>
+        <p:nvSpPr>
+          <p:cNvPr id="8" name="TextBox 7"/>
+          <p:cNvSpPr txBox="1"/>
+          <p:nvPr/>
+        </p:nvSpPr>
+        <p:spPr>
+          <a:xfrm>
+            <a:off x="457200" y="1097280"/>
+            <a:ext cx="11247120" cy="457200"/>
+          </a:xfrm>
+          <a:prstGeom prst="rect">
+            <a:avLst/>
+          </a:prstGeom>
+          <a:noFill/>
+          <a:ln>
+            <a:noFill/>
+          </a:ln>
+        </p:spPr>
+        <p:txBody>
+          <a:bodyPr wrap="square" lIns="73152" rIns="73152" tIns="36576" bIns="36576" anchor="t">
+            <a:spAutoFit/>
+          </a:bodyPr>
+          <a:lstStyle/>
+          <a:p>
+            <a:pPr algn="l"/>
+            <a:r>
+              <a:rPr sz="2000" b="1" i="0">
+                <a:solidFill>
+                  <a:srgbClr val="1F4E78"/>
+                </a:solidFill>
+                <a:latin typeface="Calibri"/>
+              </a:rPr>
+              <a:t>Short answer:</a:t>
+            </a:r>
+          </a:p>
+        </p:txBody>
+      </p:sp>
+      <p:sp>
+        <p:nvSpPr>
+          <p:cNvPr id="9" name="TextBox 8"/>
+          <p:cNvSpPr txBox="1"/>
+          <p:nvPr/>
+        </p:nvSpPr>
+        <p:spPr>
+          <a:xfrm>
+            <a:off x="640080" y="1554480"/>
+            <a:ext cx="10972800" cy="914400"/>
+          </a:xfrm>
+          <a:prstGeom prst="rect">
+            <a:avLst/>
+          </a:prstGeom>
+          <a:noFill/>
+          <a:ln>
+            <a:noFill/>
+          </a:ln>
+        </p:spPr>
+        <p:txBody>
+          <a:bodyPr wrap="square" lIns="73152" rIns="73152" tIns="36576" bIns="36576" anchor="t">
+            <a:spAutoFit/>
+          </a:bodyPr>
+          <a:lstStyle/>
+          <a:p>
+            <a:pPr algn="l"/>
+            <a:r>
+              <a:rPr sz="1500" b="0" i="0">
+                <a:solidFill>
+                  <a:srgbClr val="101010"/>
+                </a:solidFill>
+                <a:latin typeface="Calibri"/>
+              </a:rPr>
+              <a:t>The CURRENT plan does NOT pay anything for renewals. It only counts NB + RWR toward the 35-policy tier. When 50% of RWR moves to REN, the NB+RWR count drops, the tier drops, the bonus drops. Renewals 'paying more' is only true under the NEW plan, where the REN tier pays a separate bonus once retention rate hits 30%.</a:t>
+            </a:r>
+          </a:p>
+        </p:txBody>
+      </p:sp>
+      <p:sp>
+        <p:nvSpPr>
+          <p:cNvPr id="10" name="TextBox 9"/>
+          <p:cNvSpPr txBox="1"/>
+          <p:nvPr/>
+        </p:nvSpPr>
+        <p:spPr>
+          <a:xfrm>
+            <a:off x="457200" y="2743200"/>
+            <a:ext cx="11247120" cy="457200"/>
+          </a:xfrm>
+          <a:prstGeom prst="rect">
+            <a:avLst/>
+          </a:prstGeom>
+          <a:noFill/>
+          <a:ln>
+            <a:noFill/>
+          </a:ln>
+        </p:spPr>
+        <p:txBody>
+          <a:bodyPr wrap="square" lIns="73152" rIns="73152" tIns="36576" bIns="36576" anchor="t">
+            <a:spAutoFit/>
+          </a:bodyPr>
+          <a:lstStyle/>
+          <a:p>
+            <a:pPr algn="l"/>
+            <a:r>
+              <a:rPr sz="1600" b="1" i="0">
+                <a:solidFill>
+                  <a:srgbClr val="1F4E78"/>
+                </a:solidFill>
+                <a:latin typeface="Calibri"/>
+              </a:rPr>
+              <a:t>Concrete example - Dialinerys Dieguez, March:</a:t>
+            </a:r>
+          </a:p>
+        </p:txBody>
+      </p:sp>
+      <p:graphicFrame>
+        <p:nvGraphicFramePr>
+          <p:cNvPr id="11" name="Table 10"/>
+          <p:cNvGraphicFramePr>
+            <a:graphicFrameLocks noGrp="1"/>
+          </p:cNvGraphicFramePr>
+          <p:nvPr/>
+        </p:nvGraphicFramePr>
+        <p:xfrm>
+          <a:off x="457200" y="3291840"/>
+          <a:ext cx="11247120" cy="1536192"/>
+        </p:xfrm>
+        <a:graphic>
+          <a:graphicData uri="http://schemas.openxmlformats.org/drawingml/2006/table">
+            <a:tbl>
+              <a:tblPr firstRow="1" bandRow="1">
+                <a:tableStyleId>{5C22544A-7EE6-4342-B048-85BDC9FD1C3A}</a:tableStyleId>
+              </a:tblPr>
+              <a:tblGrid>
+                <a:gridCol w="3017520"/>
+                <a:gridCol w="1097280"/>
+                <a:gridCol w="1097280"/>
+                <a:gridCol w="1097280"/>
+                <a:gridCol w="2377440"/>
+                <a:gridCol w="2560320"/>
+              </a:tblGrid>
+              <a:tr h="384048">
+                <a:tc>
+                  <a:txBody>
+                    <a:bodyPr lIns="45720" rIns="45720" tIns="18288" bIns="18288" wrap="square" anchor="ctr"/>
+                    <a:lstStyle/>
+                    <a:p>
+                      <a:pPr algn="ctr"/>
+                      <a:r>
+                        <a:rPr sz="1300" b="1">
+                          <a:solidFill>
+                            <a:srgbClr val="FFFFFF"/>
+                          </a:solidFill>
+                          <a:latin typeface="Calibri"/>
+                        </a:rPr>
+                        <a:t>Scenario</a:t>
+                      </a:r>
+                    </a:p>
+                  </a:txBody>
+                  <a:tcPr>
+                    <a:solidFill>
+                      <a:srgbClr val="1F4E78"/>
+                    </a:solidFill>
+                  </a:tcPr>
+                </a:tc>
+                <a:tc>
+                  <a:txBody>
+                    <a:bodyPr lIns="45720" rIns="45720" tIns="18288" bIns="18288" wrap="square" anchor="ctr"/>
+                    <a:lstStyle/>
+                    <a:p>
+                      <a:pPr algn="ctr"/>
+                      <a:r>
+                        <a:rPr sz="1300" b="1">
+                          <a:solidFill>
+                            <a:srgbClr val="FFFFFF"/>
+                          </a:solidFill>
+                          <a:latin typeface="Calibri"/>
+                        </a:rPr>
+                        <a:t>NB</a:t>
+                      </a:r>
+                    </a:p>
+                  </a:txBody>
+                  <a:tcPr>
+                    <a:solidFill>
+                      <a:srgbClr val="1F4E78"/>
+                    </a:solidFill>
+                  </a:tcPr>
+                </a:tc>
+                <a:tc>
+                  <a:txBody>
+                    <a:bodyPr lIns="45720" rIns="45720" tIns="18288" bIns="18288" wrap="square" anchor="ctr"/>
+                    <a:lstStyle/>
+                    <a:p>
+                      <a:pPr algn="ctr"/>
+                      <a:r>
+                        <a:rPr sz="1300" b="1">
+                          <a:solidFill>
+                            <a:srgbClr val="FFFFFF"/>
+                          </a:solidFill>
+                          <a:latin typeface="Calibri"/>
+                        </a:rPr>
+                        <a:t>RWR</a:t>
+                      </a:r>
+                    </a:p>
+                  </a:txBody>
+                  <a:tcPr>
+                    <a:solidFill>
+                      <a:srgbClr val="1F4E78"/>
+                    </a:solidFill>
+                  </a:tcPr>
+                </a:tc>
+                <a:tc>
+                  <a:txBody>
+                    <a:bodyPr lIns="45720" rIns="45720" tIns="18288" bIns="18288" wrap="square" anchor="ctr"/>
+                    <a:lstStyle/>
+                    <a:p>
+                      <a:pPr algn="ctr"/>
+                      <a:r>
+                        <a:rPr sz="1300" b="1">
+                          <a:solidFill>
+                            <a:srgbClr val="FFFFFF"/>
+                          </a:solidFill>
+                          <a:latin typeface="Calibri"/>
+                        </a:rPr>
+                        <a:t>REN</a:t>
+                      </a:r>
+                    </a:p>
+                  </a:txBody>
+                  <a:tcPr>
+                    <a:solidFill>
+                      <a:srgbClr val="1F4E78"/>
+                    </a:solidFill>
+                  </a:tcPr>
+                </a:tc>
+                <a:tc>
+                  <a:txBody>
+                    <a:bodyPr lIns="45720" rIns="45720" tIns="18288" bIns="18288" wrap="square" anchor="ctr"/>
+                    <a:lstStyle/>
+                    <a:p>
+                      <a:pPr algn="ctr"/>
+                      <a:r>
+                        <a:rPr sz="1300" b="1">
+                          <a:solidFill>
+                            <a:srgbClr val="FFFFFF"/>
+                          </a:solidFill>
+                          <a:latin typeface="Calibri"/>
+                        </a:rPr>
+                        <a:t>Current pays</a:t>
+                      </a:r>
+                    </a:p>
+                  </a:txBody>
+                  <a:tcPr>
+                    <a:solidFill>
+                      <a:srgbClr val="1F4E78"/>
+                    </a:solidFill>
+                  </a:tcPr>
+                </a:tc>
+                <a:tc>
+                  <a:txBody>
+                    <a:bodyPr lIns="45720" rIns="45720" tIns="18288" bIns="18288" wrap="square" anchor="ctr"/>
+                    <a:lstStyle/>
+                    <a:p>
+                      <a:pPr algn="ctr"/>
+                      <a:r>
+                        <a:rPr sz="1300" b="1">
+                          <a:solidFill>
+                            <a:srgbClr val="FFFFFF"/>
+                          </a:solidFill>
+                          <a:latin typeface="Calibri"/>
+                        </a:rPr>
+                        <a:t>New plan pays</a:t>
+                      </a:r>
+                    </a:p>
+                  </a:txBody>
+                  <a:tcPr>
+                    <a:solidFill>
+                      <a:srgbClr val="1F4E78"/>
+                    </a:solidFill>
+                  </a:tcPr>
+                </a:tc>
+              </a:tr>
+              <a:tr h="384048">
+                <a:tc>
+                  <a:txBody>
+                    <a:bodyPr lIns="45720" rIns="45720" tIns="18288" bIns="18288" wrap="square" anchor="ctr"/>
+                    <a:lstStyle/>
+                    <a:p>
+                      <a:pPr algn="ctr"/>
+                      <a:r>
+                        <a:rPr sz="1300">
+                          <a:solidFill>
+                            <a:srgbClr val="101010"/>
+                          </a:solidFill>
+                          <a:latin typeface="Calibri"/>
+                        </a:rPr>
+                        <a:t>REAL</a:t>
+                      </a:r>
+                    </a:p>
+                  </a:txBody>
+                  <a:tcPr>
+                    <a:solidFill>
+                      <a:srgbClr val="FFFFFF"/>
+                    </a:solidFill>
+                  </a:tcPr>
+                </a:tc>
+                <a:tc>
+                  <a:txBody>
+                    <a:bodyPr lIns="45720" rIns="45720" tIns="18288" bIns="18288" wrap="square" anchor="ctr"/>
+                    <a:lstStyle/>
+                    <a:p>
+                      <a:pPr algn="ctr"/>
+                      <a:r>
+                        <a:rPr sz="1300">
+                          <a:solidFill>
+                            <a:srgbClr val="101010"/>
+                          </a:solidFill>
+                          <a:latin typeface="Calibri"/>
+                        </a:rPr>
+                        <a:t>38</a:t>
+                      </a:r>
+                    </a:p>
+                  </a:txBody>
+                  <a:tcPr>
+                    <a:solidFill>
+                      <a:srgbClr val="FFFFFF"/>
+                    </a:solidFill>
+                  </a:tcPr>
+                </a:tc>
+                <a:tc>
+                  <a:txBody>
+                    <a:bodyPr lIns="45720" rIns="45720" tIns="18288" bIns="18288" wrap="square" anchor="ctr"/>
+                    <a:lstStyle/>
+                    <a:p>
+                      <a:pPr algn="ctr"/>
+                      <a:r>
+                        <a:rPr sz="1300">
+                          <a:solidFill>
+                            <a:srgbClr val="101010"/>
+                          </a:solidFill>
+                          <a:latin typeface="Calibri"/>
+                        </a:rPr>
+                        <a:t>69</a:t>
+                      </a:r>
+                    </a:p>
+                  </a:txBody>
+                  <a:tcPr>
+                    <a:solidFill>
+                      <a:srgbClr val="FFFFFF"/>
+                    </a:solidFill>
+                  </a:tcPr>
+                </a:tc>
+                <a:tc>
+                  <a:txBody>
+                    <a:bodyPr lIns="45720" rIns="45720" tIns="18288" bIns="18288" wrap="square" anchor="ctr"/>
+                    <a:lstStyle/>
+                    <a:p>
+                      <a:pPr algn="ctr"/>
+                      <a:r>
+                        <a:rPr sz="1300">
+                          <a:solidFill>
+                            <a:srgbClr val="101010"/>
+                          </a:solidFill>
+                          <a:latin typeface="Calibri"/>
+                        </a:rPr>
+                        <a:t>7</a:t>
+                      </a:r>
+                    </a:p>
+                  </a:txBody>
+                  <a:tcPr>
+                    <a:solidFill>
+                      <a:srgbClr val="FFFFFF"/>
+                    </a:solidFill>
+                  </a:tcPr>
+                </a:tc>
+                <a:tc>
+                  <a:txBody>
+                    <a:bodyPr lIns="45720" rIns="45720" tIns="18288" bIns="18288" wrap="square" anchor="ctr"/>
+                    <a:lstStyle/>
+                    <a:p>
+                      <a:pPr algn="ctr"/>
+                      <a:r>
+                        <a:rPr sz="1300">
+                          <a:solidFill>
+                            <a:srgbClr val="101010"/>
+                          </a:solidFill>
+                          <a:latin typeface="Calibri"/>
+                        </a:rPr>
+                        <a:t>$1020</a:t>
+                      </a:r>
+                    </a:p>
+                  </a:txBody>
+                  <a:tcPr>
+                    <a:solidFill>
+                      <a:srgbClr val="FFFFFF"/>
+                    </a:solidFill>
+                  </a:tcPr>
+                </a:tc>
+                <a:tc>
+                  <a:txBody>
+                    <a:bodyPr lIns="45720" rIns="45720" tIns="18288" bIns="18288" wrap="square" anchor="ctr"/>
+                    <a:lstStyle/>
+                    <a:p>
+                      <a:pPr algn="ctr"/>
+                      <a:r>
+                        <a:rPr sz="1300">
+                          <a:solidFill>
+                            <a:srgbClr val="101010"/>
+                          </a:solidFill>
+                          <a:latin typeface="Calibri"/>
+                        </a:rPr>
+                        <a:t>$612</a:t>
+                      </a:r>
+                    </a:p>
+                  </a:txBody>
+                  <a:tcPr>
+                    <a:solidFill>
+                      <a:srgbClr val="FFFFFF"/>
+                    </a:solidFill>
+                  </a:tcPr>
+                </a:tc>
+              </a:tr>
+              <a:tr h="384048">
+                <a:tc>
+                  <a:txBody>
+                    <a:bodyPr lIns="45720" rIns="45720" tIns="18288" bIns="18288" wrap="square" anchor="ctr"/>
+                    <a:lstStyle/>
+                    <a:p>
+                      <a:pPr algn="ctr"/>
+                      <a:r>
+                        <a:rPr sz="1300">
+                          <a:solidFill>
+                            <a:srgbClr val="101010"/>
+                          </a:solidFill>
+                          <a:latin typeface="Calibri"/>
+                        </a:rPr>
+                        <a:t>SWAP (50% RWR -&gt; REN)</a:t>
+                      </a:r>
+                    </a:p>
+                  </a:txBody>
+                  <a:tcPr>
+                    <a:solidFill>
+                      <a:srgbClr val="F2F2F2"/>
+                    </a:solidFill>
+                  </a:tcPr>
+                </a:tc>
+                <a:tc>
+                  <a:txBody>
+                    <a:bodyPr lIns="45720" rIns="45720" tIns="18288" bIns="18288" wrap="square" anchor="ctr"/>
+                    <a:lstStyle/>
+                    <a:p>
+                      <a:pPr algn="ctr"/>
+                      <a:r>
+                        <a:rPr sz="1300">
+                          <a:solidFill>
+                            <a:srgbClr val="101010"/>
+                          </a:solidFill>
+                          <a:latin typeface="Calibri"/>
+                        </a:rPr>
+                        <a:t>38</a:t>
+                      </a:r>
+                    </a:p>
+                  </a:txBody>
+                  <a:tcPr>
+                    <a:solidFill>
+                      <a:srgbClr val="F2F2F2"/>
+                    </a:solidFill>
+                  </a:tcPr>
+                </a:tc>
+                <a:tc>
+                  <a:txBody>
+                    <a:bodyPr lIns="45720" rIns="45720" tIns="18288" bIns="18288" wrap="square" anchor="ctr"/>
+                    <a:lstStyle/>
+                    <a:p>
+                      <a:pPr algn="ctr"/>
+                      <a:r>
+                        <a:rPr sz="1300">
+                          <a:solidFill>
+                            <a:srgbClr val="101010"/>
+                          </a:solidFill>
+                          <a:latin typeface="Calibri"/>
+                        </a:rPr>
+                        <a:t>35</a:t>
+                      </a:r>
+                    </a:p>
+                  </a:txBody>
+                  <a:tcPr>
+                    <a:solidFill>
+                      <a:srgbClr val="F2F2F2"/>
+                    </a:solidFill>
+                  </a:tcPr>
+                </a:tc>
+                <a:tc>
+                  <a:txBody>
+                    <a:bodyPr lIns="45720" rIns="45720" tIns="18288" bIns="18288" wrap="square" anchor="ctr"/>
+                    <a:lstStyle/>
+                    <a:p>
+                      <a:pPr algn="ctr"/>
+                      <a:r>
+                        <a:rPr sz="1300">
+                          <a:solidFill>
+                            <a:srgbClr val="101010"/>
+                          </a:solidFill>
+                          <a:latin typeface="Calibri"/>
+                        </a:rPr>
+                        <a:t>41</a:t>
+                      </a:r>
+                    </a:p>
+                  </a:txBody>
+                  <a:tcPr>
+                    <a:solidFill>
+                      <a:srgbClr val="F2F2F2"/>
+                    </a:solidFill>
+                  </a:tcPr>
+                </a:tc>
+                <a:tc>
+                  <a:txBody>
+                    <a:bodyPr lIns="45720" rIns="45720" tIns="18288" bIns="18288" wrap="square" anchor="ctr"/>
+                    <a:lstStyle/>
+                    <a:p>
+                      <a:pPr algn="ctr"/>
+                      <a:r>
+                        <a:rPr sz="1300">
+                          <a:solidFill>
+                            <a:srgbClr val="101010"/>
+                          </a:solidFill>
+                          <a:latin typeface="Calibri"/>
+                        </a:rPr>
+                        <a:t>$680</a:t>
+                      </a:r>
+                    </a:p>
+                  </a:txBody>
+                  <a:tcPr>
+                    <a:solidFill>
+                      <a:srgbClr val="F2F2F2"/>
+                    </a:solidFill>
+                  </a:tcPr>
+                </a:tc>
+                <a:tc>
+                  <a:txBody>
+                    <a:bodyPr lIns="45720" rIns="45720" tIns="18288" bIns="18288" wrap="square" anchor="ctr"/>
+                    <a:lstStyle/>
+                    <a:p>
+                      <a:pPr algn="ctr"/>
+                      <a:r>
+                        <a:rPr sz="1300">
+                          <a:solidFill>
+                            <a:srgbClr val="101010"/>
+                          </a:solidFill>
+                          <a:latin typeface="Calibri"/>
+                        </a:rPr>
+                        <a:t>$675</a:t>
+                      </a:r>
+                    </a:p>
+                  </a:txBody>
+                  <a:tcPr>
+                    <a:solidFill>
+                      <a:srgbClr val="F2F2F2"/>
+                    </a:solidFill>
+                  </a:tcPr>
+                </a:tc>
+              </a:tr>
+              <a:tr h="384048">
+                <a:tc>
+                  <a:txBody>
+                    <a:bodyPr lIns="45720" rIns="45720" tIns="18288" bIns="18288" wrap="square" anchor="ctr"/>
+                    <a:lstStyle/>
+                    <a:p>
+                      <a:pPr algn="ctr"/>
+                      <a:r>
+                        <a:rPr sz="1300">
+                          <a:solidFill>
+                            <a:srgbClr val="101010"/>
+                          </a:solidFill>
+                          <a:latin typeface="Calibri"/>
+                        </a:rPr>
+                        <a:t>CHANGE</a:t>
+                      </a:r>
+                    </a:p>
+                  </a:txBody>
+                  <a:tcPr>
+                    <a:solidFill>
+                      <a:srgbClr val="FFFFFF"/>
+                    </a:solidFill>
+                  </a:tcPr>
+                </a:tc>
+                <a:tc>
+                  <a:txBody>
+                    <a:bodyPr lIns="45720" rIns="45720" tIns="18288" bIns="18288" wrap="square" anchor="ctr"/>
+                    <a:lstStyle/>
+                    <a:p>
+                      <a:pPr algn="ctr"/>
+                      <a:r>
+                        <a:rPr sz="1300">
+                          <a:solidFill>
+                            <a:srgbClr val="101010"/>
+                          </a:solidFill>
+                          <a:latin typeface="Calibri"/>
+                        </a:rPr>
+                        <a:t>0</a:t>
+                      </a:r>
+                    </a:p>
+                  </a:txBody>
+                  <a:tcPr>
+                    <a:solidFill>
+                      <a:srgbClr val="FFFFFF"/>
+                    </a:solidFill>
+                  </a:tcPr>
+                </a:tc>
+                <a:tc>
+                  <a:txBody>
+                    <a:bodyPr lIns="45720" rIns="45720" tIns="18288" bIns="18288" wrap="square" anchor="ctr"/>
+                    <a:lstStyle/>
+                    <a:p>
+                      <a:pPr algn="ctr"/>
+                      <a:r>
+                        <a:rPr sz="1300">
+                          <a:solidFill>
+                            <a:srgbClr val="101010"/>
+                          </a:solidFill>
+                          <a:latin typeface="Calibri"/>
+                        </a:rPr>
+                        <a:t>-34</a:t>
+                      </a:r>
+                    </a:p>
+                  </a:txBody>
+                  <a:tcPr>
+                    <a:solidFill>
+                      <a:srgbClr val="FFFFFF"/>
+                    </a:solidFill>
+                  </a:tcPr>
+                </a:tc>
+                <a:tc>
+                  <a:txBody>
+                    <a:bodyPr lIns="45720" rIns="45720" tIns="18288" bIns="18288" wrap="square" anchor="ctr"/>
+                    <a:lstStyle/>
+                    <a:p>
+                      <a:pPr algn="ctr"/>
+                      <a:r>
+                        <a:rPr sz="1300">
+                          <a:solidFill>
+                            <a:srgbClr val="101010"/>
+                          </a:solidFill>
+                          <a:latin typeface="Calibri"/>
+                        </a:rPr>
+                        <a:t>+34</a:t>
+                      </a:r>
+                    </a:p>
+                  </a:txBody>
+                  <a:tcPr>
+                    <a:solidFill>
+                      <a:srgbClr val="FFFFFF"/>
+                    </a:solidFill>
+                  </a:tcPr>
+                </a:tc>
+                <a:tc>
+                  <a:txBody>
+                    <a:bodyPr lIns="45720" rIns="45720" tIns="18288" bIns="18288" wrap="square" anchor="ctr"/>
+                    <a:lstStyle/>
+                    <a:p>
+                      <a:pPr algn="ctr"/>
+                      <a:r>
+                        <a:rPr sz="1300">
+                          <a:solidFill>
+                            <a:srgbClr val="101010"/>
+                          </a:solidFill>
+                          <a:latin typeface="Calibri"/>
+                        </a:rPr>
+                        <a:t>-$340 (BAD)</a:t>
+                      </a:r>
+                    </a:p>
+                  </a:txBody>
+                  <a:tcPr>
+                    <a:solidFill>
+                      <a:srgbClr val="FFFFFF"/>
+                    </a:solidFill>
+                  </a:tcPr>
+                </a:tc>
+                <a:tc>
+                  <a:txBody>
+                    <a:bodyPr lIns="45720" rIns="45720" tIns="18288" bIns="18288" wrap="square" anchor="ctr"/>
+                    <a:lstStyle/>
+                    <a:p>
+                      <a:pPr algn="ctr"/>
+                      <a:r>
+                        <a:rPr sz="1300">
+                          <a:solidFill>
+                            <a:srgbClr val="101010"/>
+                          </a:solidFill>
+                          <a:latin typeface="Calibri"/>
+                        </a:rPr>
+                        <a:t>+$62 (GOOD)</a:t>
+                      </a:r>
+                    </a:p>
+                  </a:txBody>
+                  <a:tcPr>
+                    <a:solidFill>
+                      <a:srgbClr val="FFFFFF"/>
+                    </a:solidFill>
+                  </a:tcPr>
+                </a:tc>
+              </a:tr>
+            </a:tbl>
+          </a:graphicData>
+        </a:graphic>
+      </p:graphicFrame>
+      <p:sp>
+        <p:nvSpPr>
+          <p:cNvPr id="12" name="TextBox 11"/>
+          <p:cNvSpPr txBox="1"/>
+          <p:nvPr/>
+        </p:nvSpPr>
+        <p:spPr>
+          <a:xfrm>
+            <a:off x="457200" y="5029200"/>
+            <a:ext cx="11247120" cy="457200"/>
+          </a:xfrm>
+          <a:prstGeom prst="rect">
+            <a:avLst/>
+          </a:prstGeom>
+          <a:noFill/>
+          <a:ln>
+            <a:noFill/>
+          </a:ln>
+        </p:spPr>
+        <p:txBody>
+          <a:bodyPr wrap="square" lIns="73152" rIns="73152" tIns="36576" bIns="36576" anchor="t">
+            <a:spAutoFit/>
+          </a:bodyPr>
+          <a:lstStyle/>
+          <a:p>
+            <a:pPr algn="l"/>
+            <a:r>
+              <a:rPr sz="1600" b="1" i="0">
+                <a:solidFill>
+                  <a:srgbClr val="1F4E78"/>
+                </a:solidFill>
+                <a:latin typeface="Calibri"/>
+              </a:rPr>
+              <a:t>Bottom line:</a:t>
+            </a:r>
+          </a:p>
+        </p:txBody>
+      </p:sp>
+      <p:sp>
+        <p:nvSpPr>
+          <p:cNvPr id="13" name="TextBox 12"/>
+          <p:cNvSpPr txBox="1"/>
+          <p:nvPr/>
+        </p:nvSpPr>
+        <p:spPr>
+          <a:xfrm>
+            <a:off x="640080" y="5486400"/>
+            <a:ext cx="10972800" cy="1097280"/>
+          </a:xfrm>
+          <a:prstGeom prst="rect">
+            <a:avLst/>
+          </a:prstGeom>
+          <a:noFill/>
+          <a:ln>
+            <a:noFill/>
+          </a:ln>
+        </p:spPr>
+        <p:txBody>
+          <a:bodyPr wrap="square" tIns="91440" bIns="91440">
+            <a:spAutoFit/>
+          </a:bodyPr>
+          <a:lstStyle/>
+          <a:p>
+            <a:pPr>
+              <a:lnSpc>
+                <a:spcPct val="120000"/>
+              </a:lnSpc>
+            </a:pPr>
+            <a:r>
+              <a:rPr sz="1300">
+                <a:solidFill>
+                  <a:srgbClr val="101010"/>
+                </a:solidFill>
+                <a:latin typeface="Calibri"/>
+              </a:rPr>
+              <a:t>• Per swapped policy: Current loses ~$10 from the count tier. New plan gains by climbing the REN premium tiers as the renewal book grows.</a:t>
+            </a:r>
+          </a:p>
+          <a:p>
+            <a:pPr>
+              <a:lnSpc>
+                <a:spcPct val="120000"/>
+              </a:lnSpc>
+            </a:pPr>
+            <a:r>
+              <a:rPr sz="1300">
+                <a:solidFill>
+                  <a:srgbClr val="101010"/>
+                </a:solidFill>
+                <a:latin typeface="Calibri"/>
+              </a:rPr>
+              <a:t>• Under Current, the agency literally pays LESS when the agent does the right thing.</a:t>
+            </a:r>
+          </a:p>
+          <a:p>
+            <a:pPr>
+              <a:lnSpc>
+                <a:spcPct val="120000"/>
+              </a:lnSpc>
+            </a:pPr>
+            <a:r>
+              <a:rPr sz="1300">
+                <a:solidFill>
+                  <a:srgbClr val="101010"/>
+                </a:solidFill>
+                <a:latin typeface="Calibri"/>
+              </a:rPr>
+              <a:t>• Under the new plan, the agent gets MORE for retaining instead of rewriting - the exact incentive we want.</a:t>
             </a:r>
           </a:p>
         </p:txBody>

--- a/output/Bonus_Plan_FINAL.pptx
+++ b/output/Bonus_Plan_FINAL.pptx
@@ -4031,7 +4031,7 @@
                 </a:solidFill>
                 <a:latin typeface="Calibri"/>
               </a:rPr>
-              <a:t>  RWR $96k -&gt; T4 $85k = $362</a:t>
+              <a:t>  RWR $96k -&gt; T4 $85k = $350</a:t>
             </a:r>
           </a:p>
         </p:txBody>
@@ -4107,7 +4107,7 @@
                 </a:solidFill>
                 <a:latin typeface="Calibri"/>
               </a:rPr>
-              <a:t>TARGET TOTAL = $612</a:t>
+              <a:t>TARGET TOTAL = $600</a:t>
             </a:r>
           </a:p>
         </p:txBody>
@@ -4297,7 +4297,7 @@
                 </a:solidFill>
                 <a:latin typeface="Calibri"/>
               </a:rPr>
-              <a:t>PAID = $612</a:t>
+              <a:t>PAID = $600</a:t>
             </a:r>
           </a:p>
         </p:txBody>
@@ -4689,7 +4689,7 @@
                 </a:solidFill>
                 <a:latin typeface="Calibri"/>
               </a:rPr>
-              <a:t>  RWR $48k -&gt; T1 $45k = $125</a:t>
+              <a:t>  RWR $48k -&gt; T1 $45k = $100</a:t>
             </a:r>
           </a:p>
         </p:txBody>
@@ -4727,7 +4727,7 @@
                 </a:solidFill>
                 <a:latin typeface="Calibri"/>
               </a:rPr>
-              <a:t>  REN $54k -&gt; T2 $45k = $300</a:t>
+              <a:t>  REN $54k -&gt; T2 $40k = $350</a:t>
             </a:r>
           </a:p>
         </p:txBody>
@@ -4765,7 +4765,7 @@
                 </a:solidFill>
                 <a:latin typeface="Calibri"/>
               </a:rPr>
-              <a:t>TARGET TOTAL = $675</a:t>
+              <a:t>TARGET TOTAL = $700</a:t>
             </a:r>
           </a:p>
         </p:txBody>
@@ -4955,7 +4955,7 @@
                 </a:solidFill>
                 <a:latin typeface="Calibri"/>
               </a:rPr>
-              <a:t>PAID = $675</a:t>
+              <a:t>PAID = $700</a:t>
             </a:r>
           </a:p>
         </p:txBody>
@@ -5385,7 +5385,7 @@
                 </a:solidFill>
                 <a:latin typeface="Calibri"/>
               </a:rPr>
-              <a:t>  REN $96k -&gt; T4 $85k = $580</a:t>
+              <a:t>  REN $96k -&gt; T4 $80k = $550</a:t>
             </a:r>
           </a:p>
         </p:txBody>
@@ -5423,7 +5423,7 @@
                 </a:solidFill>
                 <a:latin typeface="Calibri"/>
               </a:rPr>
-              <a:t>TARGET TOTAL = $830</a:t>
+              <a:t>TARGET TOTAL = $800</a:t>
             </a:r>
           </a:p>
         </p:txBody>
@@ -5613,7 +5613,7 @@
                 </a:solidFill>
                 <a:latin typeface="Calibri"/>
               </a:rPr>
-              <a:t>PAID = $830</a:t>
+              <a:t>PAID = $800</a:t>
             </a:r>
           </a:p>
         </p:txBody>
@@ -9650,7 +9650,7 @@
                           </a:solidFill>
                           <a:latin typeface="Calibri"/>
                         </a:rPr>
-                        <a:t>$200</a:t>
+                        <a:t>$250</a:t>
                       </a:r>
                     </a:p>
                   </a:txBody>
@@ -9905,7 +9905,7 @@
                           </a:solidFill>
                           <a:latin typeface="Calibri"/>
                         </a:rPr>
-                        <a:t>$200</a:t>
+                        <a:t>$250</a:t>
                       </a:r>
                     </a:p>
                   </a:txBody>
@@ -10160,7 +10160,7 @@
                           </a:solidFill>
                           <a:latin typeface="Calibri"/>
                         </a:rPr>
-                        <a:t>$450</a:t>
+                        <a:t>$500</a:t>
                       </a:r>
                     </a:p>
                   </a:txBody>
@@ -10670,7 +10670,7 @@
                           </a:solidFill>
                           <a:latin typeface="Calibri"/>
                         </a:rPr>
-                        <a:t>$850</a:t>
+                        <a:t>$1000</a:t>
                       </a:r>
                     </a:p>
                   </a:txBody>
@@ -10718,7 +10718,7 @@
                 </a:solidFill>
                 <a:latin typeface="Calibri"/>
               </a:rPr>
-              <a:t>Today's current plan pays $1,300. New plan WITH MIN: REAL $250 | SWAP $250 | FLIP $850.</a:t>
+              <a:t>Today's current plan pays $1,300. New plan WITH MIN: REAL $250 | SWAP $250 | FLIP $1,000.</a:t>
             </a:r>
           </a:p>
         </p:txBody>
@@ -12059,7 +12059,7 @@
                           </a:solidFill>
                           <a:latin typeface="Calibri"/>
                         </a:rPr>
-                        <a:t>$612</a:t>
+                        <a:t>$600</a:t>
                       </a:r>
                     </a:p>
                   </a:txBody>
@@ -12314,7 +12314,7 @@
                           </a:solidFill>
                           <a:latin typeface="Calibri"/>
                         </a:rPr>
-                        <a:t>$438</a:t>
+                        <a:t>$450</a:t>
                       </a:r>
                     </a:p>
                   </a:txBody>
@@ -13152,7 +13152,7 @@
                           </a:solidFill>
                           <a:latin typeface="Calibri"/>
                         </a:rPr>
-                        <a:t>$300</a:t>
+                        <a:t>$350</a:t>
                       </a:r>
                     </a:p>
                   </a:txBody>
@@ -13407,7 +13407,7 @@
                           </a:solidFill>
                           <a:latin typeface="Calibri"/>
                         </a:rPr>
-                        <a:t>$300</a:t>
+                        <a:t>$350</a:t>
                       </a:r>
                     </a:p>
                   </a:txBody>
@@ -13662,7 +13662,7 @@
                           </a:solidFill>
                           <a:latin typeface="Calibri"/>
                         </a:rPr>
-                        <a:t>$675</a:t>
+                        <a:t>$700</a:t>
                       </a:r>
                     </a:p>
                   </a:txBody>
@@ -13917,7 +13917,7 @@
                           </a:solidFill>
                           <a:latin typeface="Calibri"/>
                         </a:rPr>
-                        <a:t>$550</a:t>
+                        <a:t>$600</a:t>
                       </a:r>
                     </a:p>
                   </a:txBody>
@@ -14172,7 +14172,7 @@
                           </a:solidFill>
                           <a:latin typeface="Calibri"/>
                         </a:rPr>
-                        <a:t>$1825</a:t>
+                        <a:t>$2000</a:t>
                       </a:r>
                     </a:p>
                   </a:txBody>
@@ -14755,7 +14755,7 @@
                           </a:solidFill>
                           <a:latin typeface="Calibri"/>
                         </a:rPr>
-                        <a:t>$420</a:t>
+                        <a:t>$450</a:t>
                       </a:r>
                     </a:p>
                   </a:txBody>
@@ -15010,7 +15010,7 @@
                           </a:solidFill>
                           <a:latin typeface="Calibri"/>
                         </a:rPr>
-                        <a:t>$580</a:t>
+                        <a:t>$550</a:t>
                       </a:r>
                     </a:p>
                   </a:txBody>
@@ -15265,7 +15265,7 @@
                           </a:solidFill>
                           <a:latin typeface="Calibri"/>
                         </a:rPr>
-                        <a:t>$830</a:t>
+                        <a:t>$800</a:t>
                       </a:r>
                     </a:p>
                   </a:txBody>
@@ -15520,7 +15520,7 @@
                           </a:solidFill>
                           <a:latin typeface="Calibri"/>
                         </a:rPr>
-                        <a:t>$550</a:t>
+                        <a:t>$600</a:t>
                       </a:r>
                     </a:p>
                   </a:txBody>
@@ -15775,7 +15775,7 @@
                           </a:solidFill>
                           <a:latin typeface="Calibri"/>
                         </a:rPr>
-                        <a:t>$2380</a:t>
+                        <a:t>$2400</a:t>
                       </a:r>
                     </a:p>
                   </a:txBody>
@@ -15823,7 +15823,7 @@
                 </a:solidFill>
                 <a:latin typeface="Calibri"/>
               </a:rPr>
-              <a:t>Today's current plan pays $3,140. New plan WITH MIN: REAL $1,050 | SWAP $1,825 | FLIP $2,380.</a:t>
+              <a:t>Today's current plan pays $3,140. New plan WITH MIN: REAL $1,050 | SWAP $2,000 | FLIP $2,400.</a:t>
             </a:r>
           </a:p>
         </p:txBody>
@@ -18257,7 +18257,7 @@
                           </a:solidFill>
                           <a:latin typeface="Calibri"/>
                         </a:rPr>
-                        <a:t>$200</a:t>
+                        <a:t>$250</a:t>
                       </a:r>
                     </a:p>
                   </a:txBody>
@@ -18512,7 +18512,7 @@
                           </a:solidFill>
                           <a:latin typeface="Calibri"/>
                         </a:rPr>
-                        <a:t>$200</a:t>
+                        <a:t>$250</a:t>
                       </a:r>
                     </a:p>
                   </a:txBody>
@@ -18767,7 +18767,7 @@
                           </a:solidFill>
                           <a:latin typeface="Calibri"/>
                         </a:rPr>
-                        <a:t>$200</a:t>
+                        <a:t>$250</a:t>
                       </a:r>
                     </a:p>
                   </a:txBody>
@@ -19277,7 +19277,7 @@
                           </a:solidFill>
                           <a:latin typeface="Calibri"/>
                         </a:rPr>
-                        <a:t>$600</a:t>
+                        <a:t>$750</a:t>
                       </a:r>
                     </a:p>
                   </a:txBody>
@@ -19860,7 +19860,7 @@
                           </a:solidFill>
                           <a:latin typeface="Calibri"/>
                         </a:rPr>
-                        <a:t>$300</a:t>
+                        <a:t>$350</a:t>
                       </a:r>
                     </a:p>
                   </a:txBody>
@@ -20115,7 +20115,7 @@
                           </a:solidFill>
                           <a:latin typeface="Calibri"/>
                         </a:rPr>
-                        <a:t>$300</a:t>
+                        <a:t>$350</a:t>
                       </a:r>
                     </a:p>
                   </a:txBody>
@@ -20370,7 +20370,7 @@
                           </a:solidFill>
                           <a:latin typeface="Calibri"/>
                         </a:rPr>
-                        <a:t>$300</a:t>
+                        <a:t>$350</a:t>
                       </a:r>
                     </a:p>
                   </a:txBody>
@@ -20625,7 +20625,7 @@
                           </a:solidFill>
                           <a:latin typeface="Calibri"/>
                         </a:rPr>
-                        <a:t>$200</a:t>
+                        <a:t>$350</a:t>
                       </a:r>
                     </a:p>
                   </a:txBody>
@@ -20880,7 +20880,7 @@
                           </a:solidFill>
                           <a:latin typeface="Calibri"/>
                         </a:rPr>
-                        <a:t>$1100</a:t>
+                        <a:t>$1400</a:t>
                       </a:r>
                     </a:p>
                   </a:txBody>
@@ -20928,7 +20928,7 @@
                 </a:solidFill>
                 <a:latin typeface="Calibri"/>
               </a:rPr>
-              <a:t>Today's current plan pays $2,370. New plan WITH MIN: REAL $0 | SWAP $600 | FLIP $1,100.</a:t>
+              <a:t>Today's current plan pays $2,370. New plan WITH MIN: REAL $0 | SWAP $750 | FLIP $1,400.</a:t>
             </a:r>
           </a:p>
         </p:txBody>
@@ -24965,7 +24965,7 @@
                           </a:solidFill>
                           <a:latin typeface="Calibri"/>
                         </a:rPr>
-                        <a:t>$200</a:t>
+                        <a:t>$250</a:t>
                       </a:r>
                     </a:p>
                   </a:txBody>
@@ -25220,7 +25220,7 @@
                           </a:solidFill>
                           <a:latin typeface="Calibri"/>
                         </a:rPr>
-                        <a:t>$200</a:t>
+                        <a:t>$350</a:t>
                       </a:r>
                     </a:p>
                   </a:txBody>
@@ -25730,7 +25730,7 @@
                           </a:solidFill>
                           <a:latin typeface="Calibri"/>
                         </a:rPr>
-                        <a:t>$200</a:t>
+                        <a:t>$250</a:t>
                       </a:r>
                     </a:p>
                   </a:txBody>
@@ -25985,7 +25985,7 @@
                           </a:solidFill>
                           <a:latin typeface="Calibri"/>
                         </a:rPr>
-                        <a:t>$600</a:t>
+                        <a:t>$850</a:t>
                       </a:r>
                     </a:p>
                   </a:txBody>
@@ -26033,7 +26033,7 @@
                 </a:solidFill>
                 <a:latin typeface="Calibri"/>
               </a:rPr>
-              <a:t>Today's current plan pays $2,070. New plan WITH MIN: REAL $0 | SWAP $0 | FLIP $600.</a:t>
+              <a:t>Today's current plan pays $2,070. New plan WITH MIN: REAL $0 | SWAP $0 | FLIP $850.</a:t>
             </a:r>
           </a:p>
         </p:txBody>
@@ -30070,7 +30070,7 @@
                           </a:solidFill>
                           <a:latin typeface="Calibri"/>
                         </a:rPr>
-                        <a:t>$200</a:t>
+                        <a:t>$250</a:t>
                       </a:r>
                     </a:p>
                   </a:txBody>
@@ -30325,7 +30325,7 @@
                           </a:solidFill>
                           <a:latin typeface="Calibri"/>
                         </a:rPr>
-                        <a:t>$200</a:t>
+                        <a:t>$250</a:t>
                       </a:r>
                     </a:p>
                   </a:txBody>
@@ -30835,7 +30835,7 @@
                           </a:solidFill>
                           <a:latin typeface="Calibri"/>
                         </a:rPr>
-                        <a:t>$200</a:t>
+                        <a:t>$250</a:t>
                       </a:r>
                     </a:p>
                   </a:txBody>
@@ -31090,7 +31090,7 @@
                           </a:solidFill>
                           <a:latin typeface="Calibri"/>
                         </a:rPr>
-                        <a:t>$600</a:t>
+                        <a:t>$750</a:t>
                       </a:r>
                     </a:p>
                   </a:txBody>
@@ -31138,7 +31138,7 @@
                 </a:solidFill>
                 <a:latin typeface="Calibri"/>
               </a:rPr>
-              <a:t>Today's current plan pays $1,400. New plan WITH MIN: REAL $0 | SWAP $0 | FLIP $600.</a:t>
+              <a:t>Today's current plan pays $1,400. New plan WITH MIN: REAL $0 | SWAP $0 | FLIP $750.</a:t>
             </a:r>
           </a:p>
         </p:txBody>
@@ -33572,7 +33572,7 @@
                           </a:solidFill>
                           <a:latin typeface="Calibri"/>
                         </a:rPr>
-                        <a:t>$200</a:t>
+                        <a:t>$250</a:t>
                       </a:r>
                     </a:p>
                   </a:txBody>
@@ -33827,7 +33827,7 @@
                           </a:solidFill>
                           <a:latin typeface="Calibri"/>
                         </a:rPr>
-                        <a:t>$200</a:t>
+                        <a:t>$250</a:t>
                       </a:r>
                     </a:p>
                   </a:txBody>
@@ -34592,7 +34592,7 @@
                           </a:solidFill>
                           <a:latin typeface="Calibri"/>
                         </a:rPr>
-                        <a:t>$775</a:t>
+                        <a:t>$875</a:t>
                       </a:r>
                     </a:p>
                   </a:txBody>
@@ -35175,7 +35175,7 @@
                           </a:solidFill>
                           <a:latin typeface="Calibri"/>
                         </a:rPr>
-                        <a:t>$300</a:t>
+                        <a:t>$350</a:t>
                       </a:r>
                     </a:p>
                   </a:txBody>
@@ -35430,7 +35430,7 @@
                           </a:solidFill>
                           <a:latin typeface="Calibri"/>
                         </a:rPr>
-                        <a:t>$300</a:t>
+                        <a:t>$350</a:t>
                       </a:r>
                     </a:p>
                   </a:txBody>
@@ -35685,7 +35685,7 @@
                           </a:solidFill>
                           <a:latin typeface="Calibri"/>
                         </a:rPr>
-                        <a:t>$575</a:t>
+                        <a:t>$625</a:t>
                       </a:r>
                     </a:p>
                   </a:txBody>
@@ -35940,7 +35940,7 @@
                           </a:solidFill>
                           <a:latin typeface="Calibri"/>
                         </a:rPr>
-                        <a:t>$200</a:t>
+                        <a:t>$250</a:t>
                       </a:r>
                     </a:p>
                   </a:txBody>
@@ -36195,7 +36195,7 @@
                           </a:solidFill>
                           <a:latin typeface="Calibri"/>
                         </a:rPr>
-                        <a:t>$1375</a:t>
+                        <a:t>$1575</a:t>
                       </a:r>
                     </a:p>
                   </a:txBody>
@@ -36243,7 +36243,7 @@
                 </a:solidFill>
                 <a:latin typeface="Calibri"/>
               </a:rPr>
-              <a:t>Today's current plan pays $1,940. New plan WITH MIN: REAL $375 | SWAP $775 | FLIP $1,375.</a:t>
+              <a:t>Today's current plan pays $1,940. New plan WITH MIN: REAL $375 | SWAP $875 | FLIP $1,575.</a:t>
             </a:r>
           </a:p>
         </p:txBody>
@@ -36802,7 +36802,7 @@
                           </a:solidFill>
                           <a:latin typeface="Calibri"/>
                         </a:rPr>
-                        <a:t>$2,975</a:t>
+                        <a:t>$2,925</a:t>
                       </a:r>
                     </a:p>
                   </a:txBody>
@@ -36825,7 +36825,7 @@
                           </a:solidFill>
                           <a:latin typeface="Calibri"/>
                         </a:rPr>
-                        <a:t>$3,450</a:t>
+                        <a:t>$3,875</a:t>
                       </a:r>
                     </a:p>
                   </a:txBody>
@@ -36848,7 +36848,7 @@
                           </a:solidFill>
                           <a:latin typeface="Calibri"/>
                         </a:rPr>
-                        <a:t>$6,905</a:t>
+                        <a:t>$7,975</a:t>
                       </a:r>
                     </a:p>
                   </a:txBody>
@@ -36942,7 +36942,7 @@
                           </a:solidFill>
                           <a:latin typeface="Calibri"/>
                         </a:rPr>
-                        <a:t>$3,450</a:t>
+                        <a:t>$3,875</a:t>
                       </a:r>
                     </a:p>
                   </a:txBody>
@@ -36965,7 +36965,7 @@
                           </a:solidFill>
                           <a:latin typeface="Calibri"/>
                         </a:rPr>
-                        <a:t>$6,905</a:t>
+                        <a:t>$7,975</a:t>
                       </a:r>
                     </a:p>
                   </a:txBody>
@@ -37094,7 +37094,7 @@
                 </a:solidFill>
                 <a:latin typeface="Calibri"/>
               </a:rPr>
-              <a:t>• New plan WITH MIN under 100% FLIP = $6,905 (57% of today's $12,220). The agency keeps more profit while still rewarding the right behavior.</a:t>
+              <a:t>• New plan WITH MIN under 100% FLIP = $7,975 (65% of today's $12,220). The agency keeps more profit while still rewarding the right behavior.</a:t>
             </a:r>
           </a:p>
           <a:p>
@@ -38540,7 +38540,7 @@
                 </a:solidFill>
                 <a:latin typeface="Calibri"/>
               </a:rPr>
-              <a:t>• Costs LESS at full target than today's count-tier plan - new plan FLIP $6,905 vs current $12,220.</a:t>
+              <a:t>• Costs LESS at full target than today's count-tier plan - new plan FLIP $7,975 vs current $12,220.</a:t>
             </a:r>
           </a:p>
         </p:txBody>
@@ -43286,7 +43286,7 @@
                 </a:solidFill>
                 <a:latin typeface="Calibri"/>
               </a:rPr>
-              <a:t>2. REWRITES - same breakpoints, pays HALF (gated by NB $45k)</a:t>
+              <a:t>2. REWRITES - same breakpoints, pays ~HALF (gated by NB $45k)</a:t>
             </a:r>
           </a:p>
         </p:txBody>
@@ -43374,7 +43374,7 @@
                           </a:solidFill>
                           <a:latin typeface="Calibri"/>
                         </a:rPr>
-                        <a:t>RWR pays (half of NB)</a:t>
+                        <a:t>RWR pays (~half of NB)</a:t>
                       </a:r>
                     </a:p>
                   </a:txBody>
@@ -43445,7 +43445,7 @@
                           </a:solidFill>
                           <a:latin typeface="Calibri"/>
                         </a:rPr>
-                        <a:t>$125</a:t>
+                        <a:t>$100</a:t>
                       </a:r>
                     </a:p>
                   </a:txBody>
@@ -43516,7 +43516,7 @@
                           </a:solidFill>
                           <a:latin typeface="Calibri"/>
                         </a:rPr>
-                        <a:t>$187.50</a:t>
+                        <a:t>$200</a:t>
                       </a:r>
                     </a:p>
                   </a:txBody>
@@ -43587,7 +43587,7 @@
                           </a:solidFill>
                           <a:latin typeface="Calibri"/>
                         </a:rPr>
-                        <a:t>$262.50</a:t>
+                        <a:t>$275</a:t>
                       </a:r>
                     </a:p>
                   </a:txBody>
@@ -43658,7 +43658,7 @@
                           </a:solidFill>
                           <a:latin typeface="Calibri"/>
                         </a:rPr>
-                        <a:t>$362.50</a:t>
+                        <a:t>$350</a:t>
                       </a:r>
                     </a:p>
                   </a:txBody>
@@ -44103,7 +44103,7 @@
                           </a:solidFill>
                           <a:latin typeface="Calibri"/>
                         </a:rPr>
-                        <a:t>$45,000</a:t>
+                        <a:t>$40,000</a:t>
                       </a:r>
                     </a:p>
                   </a:txBody>
@@ -44149,7 +44149,7 @@
                           </a:solidFill>
                           <a:latin typeface="Calibri"/>
                         </a:rPr>
-                        <a:t>$85,000</a:t>
+                        <a:t>$80,000</a:t>
                       </a:r>
                     </a:p>
                   </a:txBody>
@@ -44220,7 +44220,7 @@
                           </a:solidFill>
                           <a:latin typeface="Calibri"/>
                         </a:rPr>
-                        <a:t>REN pays (0.80x of NB)</a:t>
+                        <a:t>REN pays</a:t>
                       </a:r>
                     </a:p>
                   </a:txBody>
@@ -44243,7 +44243,7 @@
                           </a:solidFill>
                           <a:latin typeface="Calibri"/>
                         </a:rPr>
-                        <a:t>$200</a:t>
+                        <a:t>$250</a:t>
                       </a:r>
                     </a:p>
                   </a:txBody>
@@ -44266,7 +44266,7 @@
                           </a:solidFill>
                           <a:latin typeface="Calibri"/>
                         </a:rPr>
-                        <a:t>$300</a:t>
+                        <a:t>$350</a:t>
                       </a:r>
                     </a:p>
                   </a:txBody>
@@ -44289,7 +44289,7 @@
                           </a:solidFill>
                           <a:latin typeface="Calibri"/>
                         </a:rPr>
-                        <a:t>$420</a:t>
+                        <a:t>$450</a:t>
                       </a:r>
                     </a:p>
                   </a:txBody>
@@ -44312,7 +44312,7 @@
                           </a:solidFill>
                           <a:latin typeface="Calibri"/>
                         </a:rPr>
-                        <a:t>$580</a:t>
+                        <a:t>$550</a:t>
                       </a:r>
                     </a:p>
                   </a:txBody>
@@ -48225,7 +48225,7 @@
                           </a:solidFill>
                           <a:latin typeface="Calibri"/>
                         </a:rPr>
-                        <a:t>$612</a:t>
+                        <a:t>$600</a:t>
                       </a:r>
                     </a:p>
                   </a:txBody>
@@ -48365,7 +48365,7 @@
                           </a:solidFill>
                           <a:latin typeface="Calibri"/>
                         </a:rPr>
-                        <a:t>$675</a:t>
+                        <a:t>$700</a:t>
                       </a:r>
                     </a:p>
                   </a:txBody>
@@ -48505,7 +48505,7 @@
                           </a:solidFill>
                           <a:latin typeface="Calibri"/>
                         </a:rPr>
-                        <a:t>+$62 (GOOD)</a:t>
+                        <a:t>+$100 (GOOD)</a:t>
                       </a:r>
                     </a:p>
                   </a:txBody>
